--- a/lecons/F3/30_FORM4_LESSON26_Impact_of_Wave_Action_on_Coastal_Development.pptx
+++ b/lecons/F3/30_FORM4_LESSON26_Impact_of_Wave_Action_on_Coastal_Development.pptx
@@ -51,9 +51,17 @@
     <p:sldId id="299" r:id="rId45"/>
     <p:sldId id="300" r:id="rId46"/>
     <p:sldId id="301" r:id="rId47"/>
+    <p:sldId id="302" r:id="rId48"/>
+    <p:sldId id="303" r:id="rId49"/>
+    <p:sldId id="304" r:id="rId50"/>
+    <p:sldId id="305" r:id="rId51"/>
+    <p:sldId id="306" r:id="rId52"/>
+    <p:sldId id="307" r:id="rId53"/>
+    <p:sldId id="308" r:id="rId54"/>
+    <p:sldId id="309" r:id="rId55"/>
   </p:sldIdLst>
   <p:notesMasterIdLst>
-    <p:notesMasterId r:id="rId48"/>
+    <p:notesMasterId r:id="rId56"/>
   </p:notesMasterIdLst>
   <p:sldSz cx="12192000" cy="6858000"/>
   <p:notesSz cx="6858000" cy="12192000"/>
@@ -723,7 +731,7 @@
           <a:p>
             <a:r>
               <a:rPr lang="en-US" dirty="0"/>
-              <a:t>Good. Idrissa wants to know how goods from abroad reach Garoua.</a:t>
+              <a:t>Good. Idrissa does not know whether the coast is more useful or more dangerous, and how it can be protected.</a:t>
             </a:r>
             <a:endParaRPr lang="en-US" dirty="0"/>
           </a:p>
@@ -811,7 +819,7 @@
           <a:p>
             <a:r>
               <a:rPr lang="en-US" dirty="0"/>
-              <a:t>Question 2: Where do the ships arrive? Think for a moment, then raise your hand to answer.</a:t>
+              <a:t>Question 2: How did the goods reach Cameroon? Think for a moment, then raise your hand to answer.</a:t>
             </a:r>
             <a:endParaRPr lang="en-US" dirty="0"/>
           </a:p>
@@ -899,7 +907,7 @@
           <a:p>
             <a:r>
               <a:rPr lang="en-US" dirty="0"/>
-              <a:t>Good. At the ports of Douala and Kribi.</a:t>
+              <a:t>Good. By ship, through the ports of Douala or Kribi.</a:t>
             </a:r>
             <a:endParaRPr lang="en-US" dirty="0"/>
           </a:p>
@@ -987,7 +995,7 @@
           <a:p>
             <a:r>
               <a:rPr lang="en-US" dirty="0"/>
-              <a:t>Question 3: Why is the coast important for Garoua? Think for a moment, then raise your hand to answer.</a:t>
+              <a:t>Question 3: Give one danger of the sea. Think for a moment, then raise your hand to answer.</a:t>
             </a:r>
             <a:endParaRPr lang="en-US" dirty="0"/>
           </a:p>
@@ -1075,7 +1083,7 @@
           <a:p>
             <a:r>
               <a:rPr lang="en-US" dirty="0"/>
-              <a:t>Good. Goods arrive at the coast and then go north by road.</a:t>
+              <a:t>Good. Strong waves destroy beaches and houses.</a:t>
             </a:r>
             <a:endParaRPr lang="en-US" dirty="0"/>
           </a:p>
@@ -1339,7 +1347,7 @@
           <a:p>
             <a:r>
               <a:rPr lang="en-US" dirty="0"/>
-              <a:t>Activity 1. Look carefully at this picture: a port with a container ship. Observe every detail before I ask the question.</a:t>
+              <a:t>Activity 1. Look carefully at this picture: a container ship in a port. Observe every detail before I ask the question.</a:t>
             </a:r>
             <a:endParaRPr lang="en-US" dirty="0"/>
           </a:p>
@@ -1603,7 +1611,7 @@
           <a:p>
             <a:r>
               <a:rPr lang="en-US" dirty="0"/>
-              <a:t>Let us check the answer together. Ships bring and take goods: trade.</a:t>
+              <a:t>Let us check the answer together. Ships bring in and take out goods: they carry most of the country's trade.</a:t>
             </a:r>
             <a:endParaRPr lang="en-US" dirty="0"/>
           </a:p>
@@ -1691,7 +1699,7 @@
           <a:p>
             <a:r>
               <a:rPr lang="en-US" dirty="0"/>
-              <a:t>Activity 2. Look carefully at this picture: old sea defences broken by the waves (England). Observe every detail before I ask the question.</a:t>
+              <a:t>Activity 2. Look carefully at this picture: high waves on a beach. Observe every detail before I ask the question.</a:t>
             </a:r>
             <a:endParaRPr lang="en-US" dirty="0"/>
           </a:p>
@@ -1779,7 +1787,7 @@
           <a:p>
             <a:r>
               <a:rPr lang="en-US" dirty="0"/>
-              <a:t>Here is the question for Activity 2: What are the waves doing to this coast? Take one minute to think and write your answer in your rough notebook.</a:t>
+              <a:t>Here is the question for Activity 2: What can such waves do to houses built near the beach? Take one minute to think and write your answer in your rough notebook.</a:t>
             </a:r>
             <a:endParaRPr lang="en-US" dirty="0"/>
           </a:p>
@@ -1867,7 +1875,7 @@
           <a:p>
             <a:r>
               <a:rPr lang="en-US" dirty="0"/>
-              <a:t>Let us check the answer together. Coastal erosion: waves wear away the beach and houses.</a:t>
+              <a:t>Let us check the answer together. They erode the beach and can destroy the houses.</a:t>
             </a:r>
             <a:endParaRPr lang="en-US" dirty="0"/>
           </a:p>
@@ -1955,7 +1963,7 @@
           <a:p>
             <a:r>
               <a:rPr lang="en-US" dirty="0"/>
-              <a:t>Activity 3. Look carefully at this picture: low walls built across a beach. Observe every detail before I ask the question.</a:t>
+              <a:t>Activity 3. Look carefully at this picture: low walls across a beach. Observe every detail before I ask the question.</a:t>
             </a:r>
             <a:endParaRPr lang="en-US" dirty="0"/>
           </a:p>
@@ -2131,7 +2139,7 @@
           <a:p>
             <a:r>
               <a:rPr lang="en-US" dirty="0"/>
-              <a:t>Let us check the answer together. They stop the sand from moving away.</a:t>
+              <a:t>Let us check the answer together. They trap the sand and stop longshore drift from carrying it away.</a:t>
             </a:r>
             <a:endParaRPr lang="en-US" dirty="0"/>
           </a:p>
@@ -2307,7 +2315,7 @@
           <a:p>
             <a:r>
               <a:rPr lang="en-US" dirty="0"/>
-              <a:t>Let us copy Importance of Coasts. Coasts provide the following resources. On this slide we have Ports and Fishing. Write each point on a new line, with the key term first, and explain it in your own words when we revise. When you finish, we go to the next slide.</a:t>
+              <a:t>Let us copy the definitions. The key terms of this lesson are defined as follows. On this slide we have Resource and Coastal hazard. Write each point on a new line, with the key term first, and explain it in your own words when we revise. When you finish, we go to the next slide.</a:t>
             </a:r>
             <a:endParaRPr lang="en-US" dirty="0"/>
           </a:p>
@@ -2395,7 +2403,7 @@
           <a:p>
             <a:r>
               <a:rPr lang="en-US" dirty="0"/>
-              <a:t>We continue with Importance of Coasts. On this slide we have Tourism and Oil and gas. Write each point on a new line, with the key term first, and explain it in your own words when we revise.</a:t>
+              <a:t>We continue with the definitions. On this slide we have Coastal management. Write each point on a new line, with the key term first, and explain it in your own words when we revise.</a:t>
             </a:r>
             <a:endParaRPr lang="en-US" dirty="0"/>
           </a:p>
@@ -2571,7 +2579,7 @@
           <a:p>
             <a:r>
               <a:rPr lang="en-US" dirty="0"/>
-              <a:t>Let us copy Coastal Hazards. People on the coast face the following hazards. On this slide we have Coastal erosion and Floods. Write each point on a new line, with the key term first, and explain it in your own words when we revise. When you finish, we go to the next slide.</a:t>
+              <a:t>Let us copy Importance of Coasts (Resources). Coasts provide the following resources. Copy the point on Ports and trade on the left, then draw the diagram on the right: a port. Give it a title and label it clearly.</a:t>
             </a:r>
             <a:endParaRPr lang="en-US" dirty="0"/>
           </a:p>
@@ -2659,7 +2667,7 @@
           <a:p>
             <a:r>
               <a:rPr lang="en-US" dirty="0"/>
-              <a:t>We continue with Coastal Hazards. On this slide we have Sea-level rise. Write each point on a new line, with the key term first, and explain it in your own words when we revise.</a:t>
+              <a:t>We continue with Importance of Coasts (Resources). On this slide we have Fishing. Write each point on a new line, with the key term first, and explain it in your own words when we revise.</a:t>
             </a:r>
             <a:endParaRPr lang="en-US" dirty="0"/>
           </a:p>
@@ -2747,7 +2755,7 @@
           <a:p>
             <a:r>
               <a:rPr lang="en-US" dirty="0"/>
-              <a:t>Let us copy Coastal Management Strategies. Coasts are protected with the following strategies. On this slide we have Sea walls and Groynes. Write each point on a new line, with the key term first, and explain it in your own words when we revise. When you finish, we go to the next slide.</a:t>
+              <a:t>Copy the point on Tourism on the left, then draw the diagram on the right: the coast at Limbe. Give it a title and label it clearly.</a:t>
             </a:r>
             <a:endParaRPr lang="en-US" dirty="0"/>
           </a:p>
@@ -2835,7 +2843,7 @@
           <a:p>
             <a:r>
               <a:rPr lang="en-US" dirty="0"/>
-              <a:t>We continue with Coastal Management Strategies. On this slide we have Mangroves. Write each point on a new line, with the key term first, and explain it in your own words when we revise.</a:t>
+              <a:t>We continue with Importance of Coasts (Resources). On this slide we have Oil and gas and Industry and settlement. Write each point on a new line, with the key term first, and explain it in your own words when we revise.</a:t>
             </a:r>
             <a:endParaRPr lang="en-US" dirty="0"/>
           </a:p>
@@ -2923,7 +2931,7 @@
           <a:p>
             <a:r>
               <a:rPr lang="en-US" dirty="0"/>
-              <a:t>Now draw this illustration in your notebook: coastal defences. Give it a title and label it clearly.</a:t>
+              <a:t>Let us copy Coastal Hazards. People on the coast face the following hazards. Copy the point on Coastal erosion on the left, then draw the diagram on the right: high waves. Give it a title and label it clearly.</a:t>
             </a:r>
             <a:endParaRPr lang="en-US" dirty="0"/>
           </a:p>
@@ -3011,7 +3019,7 @@
           <a:p>
             <a:r>
               <a:rPr lang="en-US" dirty="0"/>
-              <a:t>Now let us check what you have understood. Question 1: Name two ports of Cameroon. Answer in your exercise book.</a:t>
+              <a:t>We continue with Coastal Hazards. On this slide we have Floods, Salt-water incursion and Sea-level rise. Write each point on a new line, with the key term first, and explain it in your own words when we revise. When you finish, we go to the next slide.</a:t>
             </a:r>
             <a:endParaRPr lang="en-US" dirty="0"/>
           </a:p>
@@ -3099,7 +3107,7 @@
           <a:p>
             <a:r>
               <a:rPr lang="en-US" dirty="0"/>
-              <a:t>The expected answer is: douala and Kribi. If you got it right, well done.</a:t>
+              <a:t>We continue with Coastal Hazards. On this slide we have Pollution. Write each point on a new line, with the key term first, and explain it in your own words when we revise.</a:t>
             </a:r>
             <a:endParaRPr lang="en-US" dirty="0"/>
           </a:p>
@@ -3187,7 +3195,7 @@
           <a:p>
             <a:r>
               <a:rPr lang="en-US" dirty="0"/>
-              <a:t>Now let us check what you have understood. Question 2: Give two ways to protect the coast. Answer in your exercise book.</a:t>
+              <a:t>Let us copy Coastal Management Strategies. Coasts are protected with the following strategies. Copy the point on Sea walls on the left, then draw the diagram on the right: a sea wall and groynes. Give it a title and label it clearly.</a:t>
             </a:r>
             <a:endParaRPr lang="en-US" dirty="0"/>
           </a:p>
@@ -3275,7 +3283,7 @@
           <a:p>
             <a:r>
               <a:rPr lang="en-US" dirty="0"/>
-              <a:t>The expected answer is: sea walls and groynes (also mangroves). If you got it right, well done.</a:t>
+              <a:t>Copy the point on Groynes on the left, then draw the diagram on the right: groynes. Give it a title and label it clearly.</a:t>
             </a:r>
             <a:endParaRPr lang="en-US" dirty="0"/>
           </a:p>
@@ -3363,7 +3371,7 @@
           <a:p>
             <a:r>
               <a:rPr lang="en-US" dirty="0"/>
-              <a:t>For those who need more practice, fill in the blanks in your exercise book. The answers are: number 1, port; number 2, groyne; number 3, erosion.</a:t>
+              <a:t>We continue with Coastal Management Strategies. On this slide we have Rock armour and sandbanks. Write each point on a new line, with the key term first, and explain it in your own words when we revise.</a:t>
             </a:r>
             <a:endParaRPr lang="en-US" dirty="0"/>
           </a:p>
@@ -3539,7 +3547,7 @@
           <a:p>
             <a:r>
               <a:rPr lang="en-US" dirty="0"/>
-              <a:t>For your homework: On a map of Africa in your atlas, find the Sahara, the Sahel and the Kalahari. Write in which part of Africa each one is located. We shall correct it at the beginning of our next lesson.</a:t>
+              <a:t>Copy the point on Mangroves and trees on the left, then draw the diagram on the right: mangroves. Give it a title and label it clearly.</a:t>
             </a:r>
             <a:endParaRPr lang="en-US" dirty="0"/>
           </a:p>
@@ -3627,7 +3635,7 @@
           <a:p>
             <a:r>
               <a:rPr lang="en-US" dirty="0"/>
-              <a:t>Our next lesson will be on Lesson 27: Semi-Arid and Desert Landscapes. Thank you for your attention, and see you next time.</a:t>
+              <a:t>We continue with Coastal Management Strategies. On this slide we have Regulations. Write each point on a new line, with the key term first, and explain it in your own words when we revise.</a:t>
             </a:r>
             <a:endParaRPr lang="en-US" dirty="0"/>
           </a:p>
@@ -3715,7 +3723,7 @@
           <a:p>
             <a:r>
               <a:rPr lang="en-US" dirty="0"/>
-              <a:t>Let us play the bilingual game. I say a word in English, and you give me the French word. Then we do the reverse.</a:t>
+              <a:t>Now let us check what you have understood. Question 1: Name two ports of Cameroon. Answer in your exercise book.</a:t>
             </a:r>
             <a:endParaRPr lang="en-US" dirty="0"/>
           </a:p>
@@ -3803,7 +3811,7 @@
           <a:p>
             <a:r>
               <a:rPr lang="en-US" dirty="0"/>
-              <a:t>I record this information in the official logbook of the class after the lesson.</a:t>
+              <a:t>The expected answer is: douala and Kribi. If you got it right, well done.</a:t>
             </a:r>
             <a:endParaRPr lang="en-US" dirty="0"/>
           </a:p>
@@ -3891,7 +3899,7 @@
           <a:p>
             <a:r>
               <a:rPr lang="en-US" dirty="0"/>
-              <a:t>I complete the second page of the logbook: the matter taught, the evaluation, the homework and the attendance.</a:t>
+              <a:t>Now let us check what you have understood. Question 2: Give two ways to protect the coast. Answer in your exercise book.</a:t>
             </a:r>
             <a:endParaRPr lang="en-US" dirty="0"/>
           </a:p>
@@ -3979,7 +3987,7 @@
           <a:p>
             <a:r>
               <a:rPr lang="en-US" dirty="0"/>
-              <a:t>This slide is for me, the teacher: it gives the timing of the lesson and what to do if the projector is not available.</a:t>
+              <a:t>The expected answer is: sea walls and groynes (also mangroves). If you got it right, well done.</a:t>
             </a:r>
             <a:endParaRPr lang="en-US" dirty="0"/>
           </a:p>
@@ -4067,7 +4075,7 @@
           <a:p>
             <a:r>
               <a:rPr lang="en-US" dirty="0"/>
-              <a:t>These are the references and picture credits used to prepare this lesson.</a:t>
+              <a:t>For those who need more practice, fill in the blanks in your exercise book. The answers are: number 1, port; number 2, groyne; number 3, erosion.</a:t>
             </a:r>
             <a:endParaRPr lang="en-US" dirty="0"/>
           </a:p>
@@ -4091,6 +4099,270 @@
             <a:fld id="{F7021451-1387-4CA6-816F-3879F97B5CBC}" type="slidenum">
               <a:rPr lang="en-US"/>
               <a:t>46</a:t>
+            </a:fld>
+            <a:endParaRPr lang="en-US"/>
+          </a:p>
+        </p:txBody>
+      </p:sp>
+    </p:spTree>
+    <p:extLst>
+      <p:ext uri="{BB962C8B-B14F-4D97-AF65-F5344CB8AC3E}">
+        <p14:creationId xmlns:p14="http://schemas.microsoft.com/office/powerpoint/2010/main" val="1024086991"/>
+      </p:ext>
+    </p:extLst>
+  </p:cSld>
+  <p:clrMapOvr>
+    <a:masterClrMapping/>
+  </p:clrMapOvr>
+</p:notes>
+</file>
+
+<file path=ppt/notesSlides/notesSlide47.xml><?xml version="1.0" encoding="utf-8"?>
+<p:notes xmlns:a="http://schemas.openxmlformats.org/drawingml/2006/main" xmlns:r="http://schemas.openxmlformats.org/officeDocument/2006/relationships" xmlns:p="http://schemas.openxmlformats.org/presentationml/2006/main">
+  <p:cSld>
+    <p:spTree>
+      <p:nvGrpSpPr>
+        <p:cNvPr id="1" name=""/>
+        <p:cNvGrpSpPr/>
+        <p:nvPr/>
+      </p:nvGrpSpPr>
+      <p:grpSpPr>
+        <a:xfrm>
+          <a:off x="0" y="0"/>
+          <a:ext cx="0" cy="0"/>
+          <a:chOff x="0" y="0"/>
+          <a:chExt cx="0" cy="0"/>
+        </a:xfrm>
+      </p:grpSpPr>
+      <p:sp>
+        <p:nvSpPr>
+          <p:cNvPr id="2" name="Slide Image Placeholder 1"/>
+          <p:cNvSpPr>
+            <a:spLocks noGrp="1" noRot="1" noChangeAspect="1"/>
+          </p:cNvSpPr>
+          <p:nvPr>
+            <p:ph type="sldImg"/>
+          </p:nvPr>
+        </p:nvSpPr>
+        <p:spPr/>
+      </p:sp>
+      <p:sp>
+        <p:nvSpPr>
+          <p:cNvPr id="3" name="Notes Placeholder 2"/>
+          <p:cNvSpPr>
+            <a:spLocks noGrp="1"/>
+          </p:cNvSpPr>
+          <p:nvPr>
+            <p:ph type="body" idx="1"/>
+          </p:nvPr>
+        </p:nvSpPr>
+        <p:spPr/>
+        <p:txBody>
+          <a:bodyPr/>
+          <a:lstStyle/>
+          <a:p>
+            <a:r>
+              <a:rPr lang="en-US" dirty="0"/>
+              <a:t>For your homework: On a map of Africa in your atlas, find the Sahara, the Sahel and the Kalahari. Write in which part of Africa each one is located. We shall correct it at the beginning of our next lesson.</a:t>
+            </a:r>
+            <a:endParaRPr lang="en-US" dirty="0"/>
+          </a:p>
+        </p:txBody>
+      </p:sp>
+      <p:sp>
+        <p:nvSpPr>
+          <p:cNvPr id="4" name="Slide Number Placeholder 3"/>
+          <p:cNvSpPr>
+            <a:spLocks noGrp="1"/>
+          </p:cNvSpPr>
+          <p:nvPr>
+            <p:ph type="sldNum" sz="quarter" idx="10"/>
+          </p:nvPr>
+        </p:nvSpPr>
+        <p:spPr/>
+        <p:txBody>
+          <a:bodyPr/>
+          <a:lstStyle/>
+          <a:p>
+            <a:fld id="{F7021451-1387-4CA6-816F-3879F97B5CBC}" type="slidenum">
+              <a:rPr lang="en-US"/>
+              <a:t>47</a:t>
+            </a:fld>
+            <a:endParaRPr lang="en-US"/>
+          </a:p>
+        </p:txBody>
+      </p:sp>
+    </p:spTree>
+    <p:extLst>
+      <p:ext uri="{BB962C8B-B14F-4D97-AF65-F5344CB8AC3E}">
+        <p14:creationId xmlns:p14="http://schemas.microsoft.com/office/powerpoint/2010/main" val="1024086991"/>
+      </p:ext>
+    </p:extLst>
+  </p:cSld>
+  <p:clrMapOvr>
+    <a:masterClrMapping/>
+  </p:clrMapOvr>
+</p:notes>
+</file>
+
+<file path=ppt/notesSlides/notesSlide48.xml><?xml version="1.0" encoding="utf-8"?>
+<p:notes xmlns:a="http://schemas.openxmlformats.org/drawingml/2006/main" xmlns:r="http://schemas.openxmlformats.org/officeDocument/2006/relationships" xmlns:p="http://schemas.openxmlformats.org/presentationml/2006/main">
+  <p:cSld>
+    <p:spTree>
+      <p:nvGrpSpPr>
+        <p:cNvPr id="1" name=""/>
+        <p:cNvGrpSpPr/>
+        <p:nvPr/>
+      </p:nvGrpSpPr>
+      <p:grpSpPr>
+        <a:xfrm>
+          <a:off x="0" y="0"/>
+          <a:ext cx="0" cy="0"/>
+          <a:chOff x="0" y="0"/>
+          <a:chExt cx="0" cy="0"/>
+        </a:xfrm>
+      </p:grpSpPr>
+      <p:sp>
+        <p:nvSpPr>
+          <p:cNvPr id="2" name="Slide Image Placeholder 1"/>
+          <p:cNvSpPr>
+            <a:spLocks noGrp="1" noRot="1" noChangeAspect="1"/>
+          </p:cNvSpPr>
+          <p:nvPr>
+            <p:ph type="sldImg"/>
+          </p:nvPr>
+        </p:nvSpPr>
+        <p:spPr/>
+      </p:sp>
+      <p:sp>
+        <p:nvSpPr>
+          <p:cNvPr id="3" name="Notes Placeholder 2"/>
+          <p:cNvSpPr>
+            <a:spLocks noGrp="1"/>
+          </p:cNvSpPr>
+          <p:nvPr>
+            <p:ph type="body" idx="1"/>
+          </p:nvPr>
+        </p:nvSpPr>
+        <p:spPr/>
+        <p:txBody>
+          <a:bodyPr/>
+          <a:lstStyle/>
+          <a:p>
+            <a:r>
+              <a:rPr lang="en-US" dirty="0"/>
+              <a:t>Our next lesson will be on Lesson 27: Semi-Arid and Desert Landscapes. Thank you for your attention, and see you next time.</a:t>
+            </a:r>
+            <a:endParaRPr lang="en-US" dirty="0"/>
+          </a:p>
+        </p:txBody>
+      </p:sp>
+      <p:sp>
+        <p:nvSpPr>
+          <p:cNvPr id="4" name="Slide Number Placeholder 3"/>
+          <p:cNvSpPr>
+            <a:spLocks noGrp="1"/>
+          </p:cNvSpPr>
+          <p:nvPr>
+            <p:ph type="sldNum" sz="quarter" idx="10"/>
+          </p:nvPr>
+        </p:nvSpPr>
+        <p:spPr/>
+        <p:txBody>
+          <a:bodyPr/>
+          <a:lstStyle/>
+          <a:p>
+            <a:fld id="{F7021451-1387-4CA6-816F-3879F97B5CBC}" type="slidenum">
+              <a:rPr lang="en-US"/>
+              <a:t>48</a:t>
+            </a:fld>
+            <a:endParaRPr lang="en-US"/>
+          </a:p>
+        </p:txBody>
+      </p:sp>
+    </p:spTree>
+    <p:extLst>
+      <p:ext uri="{BB962C8B-B14F-4D97-AF65-F5344CB8AC3E}">
+        <p14:creationId xmlns:p14="http://schemas.microsoft.com/office/powerpoint/2010/main" val="1024086991"/>
+      </p:ext>
+    </p:extLst>
+  </p:cSld>
+  <p:clrMapOvr>
+    <a:masterClrMapping/>
+  </p:clrMapOvr>
+</p:notes>
+</file>
+
+<file path=ppt/notesSlides/notesSlide49.xml><?xml version="1.0" encoding="utf-8"?>
+<p:notes xmlns:a="http://schemas.openxmlformats.org/drawingml/2006/main" xmlns:r="http://schemas.openxmlformats.org/officeDocument/2006/relationships" xmlns:p="http://schemas.openxmlformats.org/presentationml/2006/main">
+  <p:cSld>
+    <p:spTree>
+      <p:nvGrpSpPr>
+        <p:cNvPr id="1" name=""/>
+        <p:cNvGrpSpPr/>
+        <p:nvPr/>
+      </p:nvGrpSpPr>
+      <p:grpSpPr>
+        <a:xfrm>
+          <a:off x="0" y="0"/>
+          <a:ext cx="0" cy="0"/>
+          <a:chOff x="0" y="0"/>
+          <a:chExt cx="0" cy="0"/>
+        </a:xfrm>
+      </p:grpSpPr>
+      <p:sp>
+        <p:nvSpPr>
+          <p:cNvPr id="2" name="Slide Image Placeholder 1"/>
+          <p:cNvSpPr>
+            <a:spLocks noGrp="1" noRot="1" noChangeAspect="1"/>
+          </p:cNvSpPr>
+          <p:nvPr>
+            <p:ph type="sldImg"/>
+          </p:nvPr>
+        </p:nvSpPr>
+        <p:spPr/>
+      </p:sp>
+      <p:sp>
+        <p:nvSpPr>
+          <p:cNvPr id="3" name="Notes Placeholder 2"/>
+          <p:cNvSpPr>
+            <a:spLocks noGrp="1"/>
+          </p:cNvSpPr>
+          <p:nvPr>
+            <p:ph type="body" idx="1"/>
+          </p:nvPr>
+        </p:nvSpPr>
+        <p:spPr/>
+        <p:txBody>
+          <a:bodyPr/>
+          <a:lstStyle/>
+          <a:p>
+            <a:r>
+              <a:rPr lang="en-US" dirty="0"/>
+              <a:t>Let us play the bilingual game. I say a word in English, and you give me the French word. Then we do the reverse.</a:t>
+            </a:r>
+            <a:endParaRPr lang="en-US" dirty="0"/>
+          </a:p>
+        </p:txBody>
+      </p:sp>
+      <p:sp>
+        <p:nvSpPr>
+          <p:cNvPr id="4" name="Slide Number Placeholder 3"/>
+          <p:cNvSpPr>
+            <a:spLocks noGrp="1"/>
+          </p:cNvSpPr>
+          <p:nvPr>
+            <p:ph type="sldNum" sz="quarter" idx="10"/>
+          </p:nvPr>
+        </p:nvSpPr>
+        <p:spPr/>
+        <p:txBody>
+          <a:bodyPr/>
+          <a:lstStyle/>
+          <a:p>
+            <a:fld id="{F7021451-1387-4CA6-816F-3879F97B5CBC}" type="slidenum">
+              <a:rPr lang="en-US"/>
+              <a:t>49</a:t>
             </a:fld>
             <a:endParaRPr lang="en-US"/>
           </a:p>
@@ -4197,6 +4469,446 @@
 </p:notes>
 </file>
 
+<file path=ppt/notesSlides/notesSlide50.xml><?xml version="1.0" encoding="utf-8"?>
+<p:notes xmlns:a="http://schemas.openxmlformats.org/drawingml/2006/main" xmlns:r="http://schemas.openxmlformats.org/officeDocument/2006/relationships" xmlns:p="http://schemas.openxmlformats.org/presentationml/2006/main">
+  <p:cSld>
+    <p:spTree>
+      <p:nvGrpSpPr>
+        <p:cNvPr id="1" name=""/>
+        <p:cNvGrpSpPr/>
+        <p:nvPr/>
+      </p:nvGrpSpPr>
+      <p:grpSpPr>
+        <a:xfrm>
+          <a:off x="0" y="0"/>
+          <a:ext cx="0" cy="0"/>
+          <a:chOff x="0" y="0"/>
+          <a:chExt cx="0" cy="0"/>
+        </a:xfrm>
+      </p:grpSpPr>
+      <p:sp>
+        <p:nvSpPr>
+          <p:cNvPr id="2" name="Slide Image Placeholder 1"/>
+          <p:cNvSpPr>
+            <a:spLocks noGrp="1" noRot="1" noChangeAspect="1"/>
+          </p:cNvSpPr>
+          <p:nvPr>
+            <p:ph type="sldImg"/>
+          </p:nvPr>
+        </p:nvSpPr>
+        <p:spPr/>
+      </p:sp>
+      <p:sp>
+        <p:nvSpPr>
+          <p:cNvPr id="3" name="Notes Placeholder 2"/>
+          <p:cNvSpPr>
+            <a:spLocks noGrp="1"/>
+          </p:cNvSpPr>
+          <p:nvPr>
+            <p:ph type="body" idx="1"/>
+          </p:nvPr>
+        </p:nvSpPr>
+        <p:spPr/>
+        <p:txBody>
+          <a:bodyPr/>
+          <a:lstStyle/>
+          <a:p>
+            <a:r>
+              <a:rPr lang="en-US" dirty="0"/>
+              <a:t>I record this information in the official logbook of the class after the lesson.</a:t>
+            </a:r>
+            <a:endParaRPr lang="en-US" dirty="0"/>
+          </a:p>
+        </p:txBody>
+      </p:sp>
+      <p:sp>
+        <p:nvSpPr>
+          <p:cNvPr id="4" name="Slide Number Placeholder 3"/>
+          <p:cNvSpPr>
+            <a:spLocks noGrp="1"/>
+          </p:cNvSpPr>
+          <p:nvPr>
+            <p:ph type="sldNum" sz="quarter" idx="10"/>
+          </p:nvPr>
+        </p:nvSpPr>
+        <p:spPr/>
+        <p:txBody>
+          <a:bodyPr/>
+          <a:lstStyle/>
+          <a:p>
+            <a:fld id="{F7021451-1387-4CA6-816F-3879F97B5CBC}" type="slidenum">
+              <a:rPr lang="en-US"/>
+              <a:t>50</a:t>
+            </a:fld>
+            <a:endParaRPr lang="en-US"/>
+          </a:p>
+        </p:txBody>
+      </p:sp>
+    </p:spTree>
+    <p:extLst>
+      <p:ext uri="{BB962C8B-B14F-4D97-AF65-F5344CB8AC3E}">
+        <p14:creationId xmlns:p14="http://schemas.microsoft.com/office/powerpoint/2010/main" val="1024086991"/>
+      </p:ext>
+    </p:extLst>
+  </p:cSld>
+  <p:clrMapOvr>
+    <a:masterClrMapping/>
+  </p:clrMapOvr>
+</p:notes>
+</file>
+
+<file path=ppt/notesSlides/notesSlide51.xml><?xml version="1.0" encoding="utf-8"?>
+<p:notes xmlns:a="http://schemas.openxmlformats.org/drawingml/2006/main" xmlns:r="http://schemas.openxmlformats.org/officeDocument/2006/relationships" xmlns:p="http://schemas.openxmlformats.org/presentationml/2006/main">
+  <p:cSld>
+    <p:spTree>
+      <p:nvGrpSpPr>
+        <p:cNvPr id="1" name=""/>
+        <p:cNvGrpSpPr/>
+        <p:nvPr/>
+      </p:nvGrpSpPr>
+      <p:grpSpPr>
+        <a:xfrm>
+          <a:off x="0" y="0"/>
+          <a:ext cx="0" cy="0"/>
+          <a:chOff x="0" y="0"/>
+          <a:chExt cx="0" cy="0"/>
+        </a:xfrm>
+      </p:grpSpPr>
+      <p:sp>
+        <p:nvSpPr>
+          <p:cNvPr id="2" name="Slide Image Placeholder 1"/>
+          <p:cNvSpPr>
+            <a:spLocks noGrp="1" noRot="1" noChangeAspect="1"/>
+          </p:cNvSpPr>
+          <p:nvPr>
+            <p:ph type="sldImg"/>
+          </p:nvPr>
+        </p:nvSpPr>
+        <p:spPr/>
+      </p:sp>
+      <p:sp>
+        <p:nvSpPr>
+          <p:cNvPr id="3" name="Notes Placeholder 2"/>
+          <p:cNvSpPr>
+            <a:spLocks noGrp="1"/>
+          </p:cNvSpPr>
+          <p:nvPr>
+            <p:ph type="body" idx="1"/>
+          </p:nvPr>
+        </p:nvSpPr>
+        <p:spPr/>
+        <p:txBody>
+          <a:bodyPr/>
+          <a:lstStyle/>
+          <a:p>
+            <a:r>
+              <a:rPr lang="en-US" dirty="0"/>
+              <a:t>I complete the second page of the logbook: the matter taught, the evaluation, the homework and the attendance.</a:t>
+            </a:r>
+            <a:endParaRPr lang="en-US" dirty="0"/>
+          </a:p>
+        </p:txBody>
+      </p:sp>
+      <p:sp>
+        <p:nvSpPr>
+          <p:cNvPr id="4" name="Slide Number Placeholder 3"/>
+          <p:cNvSpPr>
+            <a:spLocks noGrp="1"/>
+          </p:cNvSpPr>
+          <p:nvPr>
+            <p:ph type="sldNum" sz="quarter" idx="10"/>
+          </p:nvPr>
+        </p:nvSpPr>
+        <p:spPr/>
+        <p:txBody>
+          <a:bodyPr/>
+          <a:lstStyle/>
+          <a:p>
+            <a:fld id="{F7021451-1387-4CA6-816F-3879F97B5CBC}" type="slidenum">
+              <a:rPr lang="en-US"/>
+              <a:t>51</a:t>
+            </a:fld>
+            <a:endParaRPr lang="en-US"/>
+          </a:p>
+        </p:txBody>
+      </p:sp>
+    </p:spTree>
+    <p:extLst>
+      <p:ext uri="{BB962C8B-B14F-4D97-AF65-F5344CB8AC3E}">
+        <p14:creationId xmlns:p14="http://schemas.microsoft.com/office/powerpoint/2010/main" val="1024086991"/>
+      </p:ext>
+    </p:extLst>
+  </p:cSld>
+  <p:clrMapOvr>
+    <a:masterClrMapping/>
+  </p:clrMapOvr>
+</p:notes>
+</file>
+
+<file path=ppt/notesSlides/notesSlide52.xml><?xml version="1.0" encoding="utf-8"?>
+<p:notes xmlns:a="http://schemas.openxmlformats.org/drawingml/2006/main" xmlns:r="http://schemas.openxmlformats.org/officeDocument/2006/relationships" xmlns:p="http://schemas.openxmlformats.org/presentationml/2006/main">
+  <p:cSld>
+    <p:spTree>
+      <p:nvGrpSpPr>
+        <p:cNvPr id="1" name=""/>
+        <p:cNvGrpSpPr/>
+        <p:nvPr/>
+      </p:nvGrpSpPr>
+      <p:grpSpPr>
+        <a:xfrm>
+          <a:off x="0" y="0"/>
+          <a:ext cx="0" cy="0"/>
+          <a:chOff x="0" y="0"/>
+          <a:chExt cx="0" cy="0"/>
+        </a:xfrm>
+      </p:grpSpPr>
+      <p:sp>
+        <p:nvSpPr>
+          <p:cNvPr id="2" name="Slide Image Placeholder 1"/>
+          <p:cNvSpPr>
+            <a:spLocks noGrp="1" noRot="1" noChangeAspect="1"/>
+          </p:cNvSpPr>
+          <p:nvPr>
+            <p:ph type="sldImg"/>
+          </p:nvPr>
+        </p:nvSpPr>
+        <p:spPr/>
+      </p:sp>
+      <p:sp>
+        <p:nvSpPr>
+          <p:cNvPr id="3" name="Notes Placeholder 2"/>
+          <p:cNvSpPr>
+            <a:spLocks noGrp="1"/>
+          </p:cNvSpPr>
+          <p:nvPr>
+            <p:ph type="body" idx="1"/>
+          </p:nvPr>
+        </p:nvSpPr>
+        <p:spPr/>
+        <p:txBody>
+          <a:bodyPr/>
+          <a:lstStyle/>
+          <a:p>
+            <a:r>
+              <a:rPr lang="en-US" dirty="0"/>
+              <a:t>This slide is for me, the teacher: it gives the timing of the lesson and what to do if the projector is not available.</a:t>
+            </a:r>
+            <a:endParaRPr lang="en-US" dirty="0"/>
+          </a:p>
+        </p:txBody>
+      </p:sp>
+      <p:sp>
+        <p:nvSpPr>
+          <p:cNvPr id="4" name="Slide Number Placeholder 3"/>
+          <p:cNvSpPr>
+            <a:spLocks noGrp="1"/>
+          </p:cNvSpPr>
+          <p:nvPr>
+            <p:ph type="sldNum" sz="quarter" idx="10"/>
+          </p:nvPr>
+        </p:nvSpPr>
+        <p:spPr/>
+        <p:txBody>
+          <a:bodyPr/>
+          <a:lstStyle/>
+          <a:p>
+            <a:fld id="{F7021451-1387-4CA6-816F-3879F97B5CBC}" type="slidenum">
+              <a:rPr lang="en-US"/>
+              <a:t>52</a:t>
+            </a:fld>
+            <a:endParaRPr lang="en-US"/>
+          </a:p>
+        </p:txBody>
+      </p:sp>
+    </p:spTree>
+    <p:extLst>
+      <p:ext uri="{BB962C8B-B14F-4D97-AF65-F5344CB8AC3E}">
+        <p14:creationId xmlns:p14="http://schemas.microsoft.com/office/powerpoint/2010/main" val="1024086991"/>
+      </p:ext>
+    </p:extLst>
+  </p:cSld>
+  <p:clrMapOvr>
+    <a:masterClrMapping/>
+  </p:clrMapOvr>
+</p:notes>
+</file>
+
+<file path=ppt/notesSlides/notesSlide53.xml><?xml version="1.0" encoding="utf-8"?>
+<p:notes xmlns:a="http://schemas.openxmlformats.org/drawingml/2006/main" xmlns:r="http://schemas.openxmlformats.org/officeDocument/2006/relationships" xmlns:p="http://schemas.openxmlformats.org/presentationml/2006/main">
+  <p:cSld>
+    <p:spTree>
+      <p:nvGrpSpPr>
+        <p:cNvPr id="1" name=""/>
+        <p:cNvGrpSpPr/>
+        <p:nvPr/>
+      </p:nvGrpSpPr>
+      <p:grpSpPr>
+        <a:xfrm>
+          <a:off x="0" y="0"/>
+          <a:ext cx="0" cy="0"/>
+          <a:chOff x="0" y="0"/>
+          <a:chExt cx="0" cy="0"/>
+        </a:xfrm>
+      </p:grpSpPr>
+      <p:sp>
+        <p:nvSpPr>
+          <p:cNvPr id="2" name="Slide Image Placeholder 1"/>
+          <p:cNvSpPr>
+            <a:spLocks noGrp="1" noRot="1" noChangeAspect="1"/>
+          </p:cNvSpPr>
+          <p:nvPr>
+            <p:ph type="sldImg"/>
+          </p:nvPr>
+        </p:nvSpPr>
+        <p:spPr/>
+      </p:sp>
+      <p:sp>
+        <p:nvSpPr>
+          <p:cNvPr id="3" name="Notes Placeholder 2"/>
+          <p:cNvSpPr>
+            <a:spLocks noGrp="1"/>
+          </p:cNvSpPr>
+          <p:nvPr>
+            <p:ph type="body" idx="1"/>
+          </p:nvPr>
+        </p:nvSpPr>
+        <p:spPr/>
+        <p:txBody>
+          <a:bodyPr/>
+          <a:lstStyle/>
+          <a:p>
+            <a:r>
+              <a:rPr lang="en-US" dirty="0"/>
+              <a:t>Take your time to copy this part; we will continue together.</a:t>
+            </a:r>
+            <a:endParaRPr lang="en-US" dirty="0"/>
+          </a:p>
+        </p:txBody>
+      </p:sp>
+      <p:sp>
+        <p:nvSpPr>
+          <p:cNvPr id="4" name="Slide Number Placeholder 3"/>
+          <p:cNvSpPr>
+            <a:spLocks noGrp="1"/>
+          </p:cNvSpPr>
+          <p:nvPr>
+            <p:ph type="sldNum" sz="quarter" idx="10"/>
+          </p:nvPr>
+        </p:nvSpPr>
+        <p:spPr/>
+        <p:txBody>
+          <a:bodyPr/>
+          <a:lstStyle/>
+          <a:p>
+            <a:fld id="{F7021451-1387-4CA6-816F-3879F97B5CBC}" type="slidenum">
+              <a:rPr lang="en-US"/>
+              <a:t>53</a:t>
+            </a:fld>
+            <a:endParaRPr lang="en-US"/>
+          </a:p>
+        </p:txBody>
+      </p:sp>
+    </p:spTree>
+    <p:extLst>
+      <p:ext uri="{BB962C8B-B14F-4D97-AF65-F5344CB8AC3E}">
+        <p14:creationId xmlns:p14="http://schemas.microsoft.com/office/powerpoint/2010/main" val="1024086991"/>
+      </p:ext>
+    </p:extLst>
+  </p:cSld>
+  <p:clrMapOvr>
+    <a:masterClrMapping/>
+  </p:clrMapOvr>
+</p:notes>
+</file>
+
+<file path=ppt/notesSlides/notesSlide54.xml><?xml version="1.0" encoding="utf-8"?>
+<p:notes xmlns:a="http://schemas.openxmlformats.org/drawingml/2006/main" xmlns:r="http://schemas.openxmlformats.org/officeDocument/2006/relationships" xmlns:p="http://schemas.openxmlformats.org/presentationml/2006/main">
+  <p:cSld>
+    <p:spTree>
+      <p:nvGrpSpPr>
+        <p:cNvPr id="1" name=""/>
+        <p:cNvGrpSpPr/>
+        <p:nvPr/>
+      </p:nvGrpSpPr>
+      <p:grpSpPr>
+        <a:xfrm>
+          <a:off x="0" y="0"/>
+          <a:ext cx="0" cy="0"/>
+          <a:chOff x="0" y="0"/>
+          <a:chExt cx="0" cy="0"/>
+        </a:xfrm>
+      </p:grpSpPr>
+      <p:sp>
+        <p:nvSpPr>
+          <p:cNvPr id="2" name="Slide Image Placeholder 1"/>
+          <p:cNvSpPr>
+            <a:spLocks noGrp="1" noRot="1" noChangeAspect="1"/>
+          </p:cNvSpPr>
+          <p:nvPr>
+            <p:ph type="sldImg"/>
+          </p:nvPr>
+        </p:nvSpPr>
+        <p:spPr/>
+      </p:sp>
+      <p:sp>
+        <p:nvSpPr>
+          <p:cNvPr id="3" name="Notes Placeholder 2"/>
+          <p:cNvSpPr>
+            <a:spLocks noGrp="1"/>
+          </p:cNvSpPr>
+          <p:nvPr>
+            <p:ph type="body" idx="1"/>
+          </p:nvPr>
+        </p:nvSpPr>
+        <p:spPr/>
+        <p:txBody>
+          <a:bodyPr/>
+          <a:lstStyle/>
+          <a:p>
+            <a:r>
+              <a:rPr lang="en-US" dirty="0"/>
+              <a:t>These are the references and picture credits used to prepare this lesson.</a:t>
+            </a:r>
+            <a:endParaRPr lang="en-US" dirty="0"/>
+          </a:p>
+        </p:txBody>
+      </p:sp>
+      <p:sp>
+        <p:nvSpPr>
+          <p:cNvPr id="4" name="Slide Number Placeholder 3"/>
+          <p:cNvSpPr>
+            <a:spLocks noGrp="1"/>
+          </p:cNvSpPr>
+          <p:nvPr>
+            <p:ph type="sldNum" sz="quarter" idx="10"/>
+          </p:nvPr>
+        </p:nvSpPr>
+        <p:spPr/>
+        <p:txBody>
+          <a:bodyPr/>
+          <a:lstStyle/>
+          <a:p>
+            <a:fld id="{F7021451-1387-4CA6-816F-3879F97B5CBC}" type="slidenum">
+              <a:rPr lang="en-US"/>
+              <a:t>54</a:t>
+            </a:fld>
+            <a:endParaRPr lang="en-US"/>
+          </a:p>
+        </p:txBody>
+      </p:sp>
+    </p:spTree>
+    <p:extLst>
+      <p:ext uri="{BB962C8B-B14F-4D97-AF65-F5344CB8AC3E}">
+        <p14:creationId xmlns:p14="http://schemas.microsoft.com/office/powerpoint/2010/main" val="1024086991"/>
+      </p:ext>
+    </p:extLst>
+  </p:cSld>
+  <p:clrMapOvr>
+    <a:masterClrMapping/>
+  </p:clrMapOvr>
+</p:notes>
+</file>
+
 <file path=ppt/notesSlides/notesSlide6.xml><?xml version="1.0" encoding="utf-8"?>
 <p:notes xmlns:a="http://schemas.openxmlformats.org/drawingml/2006/main" xmlns:r="http://schemas.openxmlformats.org/officeDocument/2006/relationships" xmlns:p="http://schemas.openxmlformats.org/presentationml/2006/main">
   <p:cSld>
@@ -4507,7 +5219,7 @@
           <a:p>
             <a:r>
               <a:rPr lang="en-US" dirty="0"/>
-              <a:t>Listen carefully to this situation from real life. In the market of Garoua, Idrissa sees phones, cloth and rice from abroad. Most of them came by ship to the ports of Douala or Kribi, then by road to Garoua. Think about it, because I am going to ask you some questions.</a:t>
+              <a:t>Listen carefully to this situation from real life. In the market of Garoua, Idrissa sees phones, cloth and rice that came by ship to Douala or Kribi. His uncle in Douala says that the sea brings trade and fish, but that strong waves also destroy beaches and houses. Idrissa asks: "Is the coast a blessing or a danger, and how can it be protected?" Think about it, because I am going to ask you some questions.</a:t>
             </a:r>
             <a:endParaRPr lang="en-US" dirty="0"/>
           </a:p>
@@ -6190,7 +6902,7 @@
                 <a:ea typeface="Times New Roman" pitchFamily="34" charset="-122"/>
                 <a:cs typeface="Times New Roman" pitchFamily="34" charset="-120"/>
               </a:rPr>
-              <a:t>Idrissa wants to know how goods from abroad reach Garoua.</a:t>
+              <a:t>Idrissa does not know whether the coast is more useful or more dangerous, and how it can be protected.</a:t>
             </a:r>
             <a:endParaRPr lang="en-US" sz="4000" dirty="0"/>
           </a:p>
@@ -6409,7 +7121,7 @@
                 <a:ea typeface="Times New Roman" pitchFamily="34" charset="-122"/>
                 <a:cs typeface="Times New Roman" pitchFamily="34" charset="-120"/>
               </a:rPr>
-              <a:t>Where do the ships arrive?</a:t>
+              <a:t>How did the goods reach Cameroon?</a:t>
             </a:r>
             <a:endParaRPr lang="en-US" sz="4000" dirty="0"/>
           </a:p>
@@ -6628,7 +7340,7 @@
                 <a:ea typeface="Times New Roman" pitchFamily="34" charset="-122"/>
                 <a:cs typeface="Times New Roman" pitchFamily="34" charset="-120"/>
               </a:rPr>
-              <a:t>At the ports of Douala and Kribi.</a:t>
+              <a:t>By ship, through the ports of Douala or Kribi.</a:t>
             </a:r>
             <a:endParaRPr lang="en-US" sz="4000" dirty="0"/>
           </a:p>
@@ -6847,7 +7559,7 @@
                 <a:ea typeface="Times New Roman" pitchFamily="34" charset="-122"/>
                 <a:cs typeface="Times New Roman" pitchFamily="34" charset="-120"/>
               </a:rPr>
-              <a:t>Why is the coast important for Garoua?</a:t>
+              <a:t>Give one danger of the sea.</a:t>
             </a:r>
             <a:endParaRPr lang="en-US" sz="4000" dirty="0"/>
           </a:p>
@@ -7066,7 +7778,7 @@
                 <a:ea typeface="Times New Roman" pitchFamily="34" charset="-122"/>
                 <a:cs typeface="Times New Roman" pitchFamily="34" charset="-120"/>
               </a:rPr>
-              <a:t>Goods arrive at the coast and then go north by road.</a:t>
+              <a:t>Strong waves destroy beaches and houses.</a:t>
             </a:r>
             <a:endParaRPr lang="en-US" sz="4000" dirty="0"/>
           </a:p>
@@ -7718,7 +8430,7 @@
                 <a:ea typeface="Times New Roman" pitchFamily="34" charset="-122"/>
                 <a:cs typeface="Times New Roman" pitchFamily="34" charset="-120"/>
               </a:rPr>
-              <a:t>A port with a container ship.</a:t>
+              <a:t>A container ship in a port.</a:t>
             </a:r>
             <a:endParaRPr lang="en-US" sz="1800" dirty="0"/>
           </a:p>
@@ -8751,7 +9463,7 @@
                 <a:ea typeface="Times New Roman" pitchFamily="34" charset="-122"/>
                 <a:cs typeface="Times New Roman" pitchFamily="34" charset="-120"/>
               </a:rPr>
-              <a:t>Ships bring and take goods: trade.</a:t>
+              <a:t>Ships bring in and take out goods: they carry most of the country's trade.</a:t>
             </a:r>
             <a:endParaRPr lang="en-US" sz="4000" dirty="0"/>
           </a:p>
@@ -8910,7 +9622,7 @@
       </p:sp>
       <p:pic>
         <p:nvPicPr>
-          <p:cNvPr id="4" name="Image 0" descr="/home/claude/f4/img/v2/f4_spit.jpg">    </p:cNvPr>
+          <p:cNvPr id="4" name="Image 0" descr="/home/claude/f4/img/v2/f4_bigwaves.jpg">    </p:cNvPr>
           <p:cNvPicPr>
             <a:picLocks noChangeAspect="1"/>
           </p:cNvPicPr>
@@ -8965,7 +9677,7 @@
                 <a:ea typeface="Times New Roman" pitchFamily="34" charset="-122"/>
                 <a:cs typeface="Times New Roman" pitchFamily="34" charset="-120"/>
               </a:rPr>
-              <a:t>Old sea defences broken by the waves (England).</a:t>
+              <a:t>High waves on a beach.</a:t>
             </a:r>
             <a:endParaRPr lang="en-US" sz="1800" dirty="0"/>
           </a:p>
@@ -9184,7 +9896,7 @@
                 <a:ea typeface="Times New Roman" pitchFamily="34" charset="-122"/>
                 <a:cs typeface="Times New Roman" pitchFamily="34" charset="-120"/>
               </a:rPr>
-              <a:t>What are the waves doing to this coast?</a:t>
+              <a:t>What can such waves do to houses built near the beach?</a:t>
             </a:r>
             <a:endParaRPr lang="en-US" sz="4000" dirty="0"/>
           </a:p>
@@ -9403,7 +10115,7 @@
                 <a:ea typeface="Times New Roman" pitchFamily="34" charset="-122"/>
                 <a:cs typeface="Times New Roman" pitchFamily="34" charset="-120"/>
               </a:rPr>
-              <a:t>Coastal erosion: waves wear away the beach and houses.</a:t>
+              <a:t>They erode the beach and can destroy the houses.</a:t>
             </a:r>
             <a:endParaRPr lang="en-US" sz="4000" dirty="0"/>
           </a:p>
@@ -9617,7 +10329,7 @@
                 <a:ea typeface="Times New Roman" pitchFamily="34" charset="-122"/>
                 <a:cs typeface="Times New Roman" pitchFamily="34" charset="-120"/>
               </a:rPr>
-              <a:t>Low walls built across a beach.</a:t>
+              <a:t>Low walls across a beach.</a:t>
             </a:r>
             <a:endParaRPr lang="en-US" sz="1800" dirty="0"/>
           </a:p>
@@ -10055,7 +10767,7 @@
                 <a:ea typeface="Times New Roman" pitchFamily="34" charset="-122"/>
                 <a:cs typeface="Times New Roman" pitchFamily="34" charset="-120"/>
               </a:rPr>
-              <a:t>They stop the sand from moving away.</a:t>
+              <a:t>They trap the sand and stop longshore drift from carrying it away.</a:t>
             </a:r>
             <a:endParaRPr lang="en-US" sz="4000" dirty="0"/>
           </a:p>
@@ -10266,7 +10978,7 @@
               <a:buNone/>
             </a:pPr>
             <a:r>
-              <a:rPr lang="en-US" sz="4000" b="1" dirty="0">
+              <a:rPr lang="en-US" sz="3200" b="1" dirty="0">
                 <a:solidFill>
                   <a:srgbClr val="111111"/>
                 </a:solidFill>
@@ -10276,7 +10988,7 @@
               </a:rPr>
               <a:t>Topic: Denudation Processes, Landforms and Impacts on Man</a:t>
             </a:r>
-            <a:endParaRPr lang="en-US" sz="4000" dirty="0"/>
+            <a:endParaRPr lang="en-US" sz="3200" dirty="0"/>
           </a:p>
           <a:p>
             <a:pPr algn="l" indent="0" marL="0">
@@ -10286,7 +10998,7 @@
               <a:buNone/>
             </a:pPr>
             <a:r>
-              <a:rPr lang="en-US" sz="4000" b="1" dirty="0">
+              <a:rPr lang="en-US" sz="3200" b="1" dirty="0">
                 <a:solidFill>
                   <a:srgbClr val="111111"/>
                 </a:solidFill>
@@ -10296,7 +11008,7 @@
               </a:rPr>
               <a:t>Sub-topic: Wave Action along the Coast and Impacts on Man</a:t>
             </a:r>
-            <a:endParaRPr lang="en-US" sz="4000" dirty="0"/>
+            <a:endParaRPr lang="en-US" sz="3200" dirty="0"/>
           </a:p>
           <a:p>
             <a:pPr algn="l" indent="0" marL="0">
@@ -10306,7 +11018,7 @@
               <a:buNone/>
             </a:pPr>
             <a:r>
-              <a:rPr lang="en-US" sz="4000" b="1" dirty="0">
+              <a:rPr lang="en-US" sz="3200" b="1" dirty="0">
                 <a:solidFill>
                   <a:srgbClr val="990011"/>
                 </a:solidFill>
@@ -10316,7 +11028,7 @@
               </a:rPr>
               <a:t>Lesson 26: Impact of Wave Action on Human Development along Coastal Areas</a:t>
             </a:r>
-            <a:endParaRPr lang="en-US" sz="4000" dirty="0"/>
+            <a:endParaRPr lang="en-US" sz="3200" dirty="0"/>
           </a:p>
         </p:txBody>
       </p:sp>
@@ -10491,7 +11203,7 @@
                 <a:ea typeface="Times New Roman" pitchFamily="34" charset="-122"/>
                 <a:cs typeface="Times New Roman" pitchFamily="34" charset="-120"/>
               </a:rPr>
-              <a:t>1. Importance of Coasts</a:t>
+              <a:t>DEFINITIONS</a:t>
             </a:r>
             <a:endParaRPr lang="en-US" sz="3600" dirty="0"/>
           </a:p>
@@ -10533,7 +11245,7 @@
                 <a:ea typeface="Times New Roman" pitchFamily="34" charset="-122"/>
                 <a:cs typeface="Times New Roman" pitchFamily="34" charset="-120"/>
               </a:rPr>
-              <a:t>Coasts provide the following resources:</a:t>
+              <a:t>The key terms of this lesson are defined as follows:</a:t>
             </a:r>
             <a:endParaRPr lang="en-US" sz="4000" dirty="0"/>
           </a:p>
@@ -10553,7 +11265,7 @@
                 <a:ea typeface="Times New Roman" pitchFamily="34" charset="-122"/>
                 <a:cs typeface="Times New Roman" pitchFamily="34" charset="-120"/>
               </a:rPr>
-              <a:t>Ports: </a:t>
+              <a:t>Resource: </a:t>
             </a:r>
             <a:pPr algn="l" indent="0" marL="0">
               <a:spcAft>
@@ -10570,7 +11282,7 @@
                 <a:ea typeface="Times New Roman" pitchFamily="34" charset="-122"/>
                 <a:cs typeface="Times New Roman" pitchFamily="34" charset="-120"/>
               </a:rPr>
-              <a:t>Ports such as Douala and Kribi handle the trade of Cameroon and its neighbours.</a:t>
+              <a:t>It is anything in nature that people can use.</a:t>
             </a:r>
             <a:endParaRPr lang="en-US" sz="4000" dirty="0"/>
           </a:p>
@@ -10590,7 +11302,7 @@
                 <a:ea typeface="Times New Roman" pitchFamily="34" charset="-122"/>
                 <a:cs typeface="Times New Roman" pitchFamily="34" charset="-120"/>
               </a:rPr>
-              <a:t>Fishing: </a:t>
+              <a:t>Coastal hazard: </a:t>
             </a:r>
             <a:pPr algn="l" indent="0" marL="0">
               <a:spcAft>
@@ -10607,7 +11319,7 @@
                 <a:ea typeface="Times New Roman" pitchFamily="34" charset="-122"/>
                 <a:cs typeface="Times New Roman" pitchFamily="34" charset="-120"/>
               </a:rPr>
-              <a:t>Coastal waters provide fish and shrimps.</a:t>
+              <a:t>It is a danger that threatens people and property along the coast.</a:t>
             </a:r>
             <a:endParaRPr lang="en-US" sz="4000" dirty="0"/>
           </a:p>
@@ -10784,7 +11496,7 @@
                 <a:ea typeface="Times New Roman" pitchFamily="34" charset="-122"/>
                 <a:cs typeface="Times New Roman" pitchFamily="34" charset="-120"/>
               </a:rPr>
-              <a:t>1. Importance of Coasts (continued)</a:t>
+              <a:t>DEFINITIONS (continued)</a:t>
             </a:r>
             <a:endParaRPr lang="en-US" sz="3600" dirty="0"/>
           </a:p>
@@ -10826,7 +11538,7 @@
                 <a:ea typeface="Times New Roman" pitchFamily="34" charset="-122"/>
                 <a:cs typeface="Times New Roman" pitchFamily="34" charset="-120"/>
               </a:rPr>
-              <a:t>Tourism: </a:t>
+              <a:t>Coastal management: </a:t>
             </a:r>
             <a:pPr algn="l" indent="0" marL="0">
               <a:spcAft>
@@ -10843,44 +11555,7 @@
                 <a:ea typeface="Times New Roman" pitchFamily="34" charset="-122"/>
                 <a:cs typeface="Times New Roman" pitchFamily="34" charset="-120"/>
               </a:rPr>
-              <a:t>The beaches of Kribi and Limbe attract tourists.</a:t>
-            </a:r>
-            <a:endParaRPr lang="en-US" sz="4000" dirty="0"/>
-          </a:p>
-          <a:p>
-            <a:pPr algn="l" indent="0" marL="0">
-              <a:spcAft>
-                <a:spcPts val="800"/>
-              </a:spcAft>
-              <a:buNone/>
-            </a:pPr>
-            <a:r>
-              <a:rPr lang="en-US" sz="4000" b="1" dirty="0">
-                <a:solidFill>
-                  <a:srgbClr val="111111"/>
-                </a:solidFill>
-                <a:latin typeface="Times New Roman" pitchFamily="34" charset="0"/>
-                <a:ea typeface="Times New Roman" pitchFamily="34" charset="-122"/>
-                <a:cs typeface="Times New Roman" pitchFamily="34" charset="-120"/>
-              </a:rPr>
-              <a:t>Oil and gas: </a:t>
-            </a:r>
-            <a:pPr algn="l" indent="0" marL="0">
-              <a:spcAft>
-                <a:spcPts val="800"/>
-              </a:spcAft>
-              <a:buNone/>
-            </a:pPr>
-            <a:r>
-              <a:rPr lang="en-US" sz="4000" dirty="0">
-                <a:solidFill>
-                  <a:srgbClr val="111111"/>
-                </a:solidFill>
-                <a:latin typeface="Times New Roman" pitchFamily="34" charset="0"/>
-                <a:ea typeface="Times New Roman" pitchFamily="34" charset="-122"/>
-                <a:cs typeface="Times New Roman" pitchFamily="34" charset="-120"/>
-              </a:rPr>
-              <a:t>Oil and gas are extracted under the sea near the coast.</a:t>
+              <a:t>It is the set of measures used to protect the coast and use it wisely.</a:t>
             </a:r>
             <a:endParaRPr lang="en-US" sz="4000" dirty="0"/>
           </a:p>
@@ -12007,9 +12682,129 @@
           </a:p>
         </p:txBody>
       </p:sp>
+      <p:sp>
+        <p:nvSpPr>
+          <p:cNvPr id="3" name="Text 1"/>
+          <p:cNvSpPr/>
+          <p:nvPr/>
+        </p:nvSpPr>
+        <p:spPr>
+          <a:xfrm>
+            <a:off x="365760" y="1005840"/>
+            <a:ext cx="11460175" cy="731520"/>
+          </a:xfrm>
+          <a:prstGeom prst="rect">
+            <a:avLst/>
+          </a:prstGeom>
+          <a:noFill/>
+          <a:ln/>
+        </p:spPr>
+        <p:txBody>
+          <a:bodyPr wrap="square" lIns="0" tIns="0" rIns="0" bIns="0" rtlCol="0" anchor="ctr">
+            <a:normAutofit/>
+          </a:bodyPr>
+          <a:lstStyle/>
+          <a:p>
+            <a:pPr algn="ctr" indent="0" marL="0">
+              <a:buNone/>
+            </a:pPr>
+            <a:r>
+              <a:rPr lang="en-US" sz="3600" b="1" dirty="0">
+                <a:solidFill>
+                  <a:srgbClr val="990011"/>
+                </a:solidFill>
+                <a:latin typeface="Times New Roman" pitchFamily="34" charset="0"/>
+                <a:ea typeface="Times New Roman" pitchFamily="34" charset="-122"/>
+                <a:cs typeface="Times New Roman" pitchFamily="34" charset="-120"/>
+              </a:rPr>
+              <a:t>1. Importance of Coasts (Resources)</a:t>
+            </a:r>
+            <a:endParaRPr lang="en-US" sz="3600" dirty="0"/>
+          </a:p>
+        </p:txBody>
+      </p:sp>
+      <p:sp>
+        <p:nvSpPr>
+          <p:cNvPr id="4" name="Text 2"/>
+          <p:cNvSpPr/>
+          <p:nvPr/>
+        </p:nvSpPr>
+        <p:spPr>
+          <a:xfrm>
+            <a:off x="365760" y="1783080"/>
+            <a:ext cx="4846320" cy="4617720"/>
+          </a:xfrm>
+          <a:prstGeom prst="rect">
+            <a:avLst/>
+          </a:prstGeom>
+          <a:noFill/>
+          <a:ln/>
+        </p:spPr>
+        <p:txBody>
+          <a:bodyPr wrap="square" lIns="0" tIns="0" rIns="0" bIns="0" rtlCol="0" anchor="t"/>
+          <a:lstStyle/>
+          <a:p>
+            <a:pPr algn="l" indent="0" marL="0">
+              <a:spcAft>
+                <a:spcPts val="800"/>
+              </a:spcAft>
+              <a:buNone/>
+            </a:pPr>
+            <a:r>
+              <a:rPr lang="en-US" sz="3600" i="1" dirty="0">
+                <a:solidFill>
+                  <a:srgbClr val="111111"/>
+                </a:solidFill>
+                <a:latin typeface="Times New Roman" pitchFamily="34" charset="0"/>
+                <a:ea typeface="Times New Roman" pitchFamily="34" charset="-122"/>
+                <a:cs typeface="Times New Roman" pitchFamily="34" charset="-120"/>
+              </a:rPr>
+              <a:t>Coasts provide the following resources:</a:t>
+            </a:r>
+            <a:endParaRPr lang="en-US" sz="3600" dirty="0"/>
+          </a:p>
+          <a:p>
+            <a:pPr algn="l" indent="0" marL="0">
+              <a:spcAft>
+                <a:spcPts val="800"/>
+              </a:spcAft>
+              <a:buNone/>
+            </a:pPr>
+            <a:r>
+              <a:rPr lang="en-US" sz="3600" b="1" dirty="0">
+                <a:solidFill>
+                  <a:srgbClr val="111111"/>
+                </a:solidFill>
+                <a:latin typeface="Times New Roman" pitchFamily="34" charset="0"/>
+                <a:ea typeface="Times New Roman" pitchFamily="34" charset="-122"/>
+                <a:cs typeface="Times New Roman" pitchFamily="34" charset="-120"/>
+              </a:rPr>
+              <a:t>Ports and trade: </a:t>
+            </a:r>
+            <a:pPr algn="l" indent="0" marL="0">
+              <a:spcAft>
+                <a:spcPts val="800"/>
+              </a:spcAft>
+              <a:buNone/>
+            </a:pPr>
+            <a:r>
+              <a:rPr lang="en-US" sz="3600" dirty="0">
+                <a:solidFill>
+                  <a:srgbClr val="111111"/>
+                </a:solidFill>
+                <a:latin typeface="Times New Roman" pitchFamily="34" charset="0"/>
+                <a:ea typeface="Times New Roman" pitchFamily="34" charset="-122"/>
+                <a:cs typeface="Times New Roman" pitchFamily="34" charset="-120"/>
+              </a:rPr>
+              <a:t>Ports such as Douala and Kribi handle the trade of Cameroon, Chad and the Central African Republic.</a:t>
+            </a:r>
+            <a:endParaRPr lang="en-US" sz="3600" dirty="0"/>
+          </a:p>
+        </p:txBody>
+      </p:sp>
       <p:pic>
         <p:nvPicPr>
-          <p:cNvPr id="3" name="Image 0" descr="/home/claude/f4/img/minesec_sheet.png">    </p:cNvPr>
+          <p:cNvPr id="5" name="Image 0" descr="/home/claude/f4/img/v2/f4_port.jpg">    </p:cNvPr>
           <p:cNvPicPr>
             <a:picLocks noChangeAspect="1"/>
           </p:cNvPicPr>
@@ -12023,8 +12818,8 @@
         </p:blipFill>
         <p:spPr>
           <a:xfrm>
-            <a:off x="0" y="658368"/>
-            <a:ext cx="3840480" cy="5833872"/>
+            <a:off x="5349240" y="2071212"/>
+            <a:ext cx="6659575" cy="3693983"/>
           </a:xfrm>
           <a:prstGeom prst="rect">
             <a:avLst/>
@@ -12033,14 +12828,14 @@
       </p:pic>
       <p:sp>
         <p:nvSpPr>
-          <p:cNvPr id="4" name="Text 1"/>
+          <p:cNvPr id="6" name="Text 3"/>
           <p:cNvSpPr/>
           <p:nvPr/>
         </p:nvSpPr>
         <p:spPr>
           <a:xfrm>
-            <a:off x="4069080" y="1005840"/>
-            <a:ext cx="7802575" cy="731520"/>
+            <a:off x="5349240" y="6089904"/>
+            <a:ext cx="6659575" cy="347472"/>
           </a:xfrm>
           <a:prstGeom prst="rect">
             <a:avLst/>
@@ -12049,142 +12844,24 @@
           <a:ln/>
         </p:spPr>
         <p:txBody>
-          <a:bodyPr wrap="square" lIns="0" tIns="0" rIns="0" bIns="0" rtlCol="0" anchor="ctr">
-            <a:normAutofit/>
-          </a:bodyPr>
+          <a:bodyPr wrap="square" lIns="0" tIns="0" rIns="0" bIns="0" rtlCol="0" anchor="ctr"/>
           <a:lstStyle/>
           <a:p>
             <a:pPr algn="ctr" indent="0" marL="0">
               <a:buNone/>
             </a:pPr>
             <a:r>
-              <a:rPr lang="en-US" sz="3600" b="1" dirty="0">
-                <a:solidFill>
-                  <a:srgbClr val="990011"/>
+              <a:rPr lang="en-US" sz="1600" i="1" dirty="0">
+                <a:solidFill>
+                  <a:srgbClr val="555555"/>
                 </a:solidFill>
                 <a:latin typeface="Times New Roman" pitchFamily="34" charset="0"/>
                 <a:ea typeface="Times New Roman" pitchFamily="34" charset="-122"/>
                 <a:cs typeface="Times New Roman" pitchFamily="34" charset="-120"/>
               </a:rPr>
-              <a:t>2. Coastal Hazards</a:t>
-            </a:r>
-            <a:endParaRPr lang="en-US" sz="3600" dirty="0"/>
-          </a:p>
-        </p:txBody>
-      </p:sp>
-      <p:sp>
-        <p:nvSpPr>
-          <p:cNvPr id="5" name="Text 2"/>
-          <p:cNvSpPr/>
-          <p:nvPr/>
-        </p:nvSpPr>
-        <p:spPr>
-          <a:xfrm>
-            <a:off x="4069080" y="1783080"/>
-            <a:ext cx="7802575" cy="4663440"/>
-          </a:xfrm>
-          <a:prstGeom prst="rect">
-            <a:avLst/>
-          </a:prstGeom>
-          <a:noFill/>
-          <a:ln/>
-        </p:spPr>
-        <p:txBody>
-          <a:bodyPr wrap="square" lIns="0" tIns="0" rIns="0" bIns="0" rtlCol="0" anchor="t"/>
-          <a:lstStyle/>
-          <a:p>
-            <a:pPr algn="l" indent="0" marL="0">
-              <a:spcAft>
-                <a:spcPts val="800"/>
-              </a:spcAft>
-              <a:buNone/>
-            </a:pPr>
-            <a:r>
-              <a:rPr lang="en-US" sz="4000" i="1" dirty="0">
-                <a:solidFill>
-                  <a:srgbClr val="111111"/>
-                </a:solidFill>
-                <a:latin typeface="Times New Roman" pitchFamily="34" charset="0"/>
-                <a:ea typeface="Times New Roman" pitchFamily="34" charset="-122"/>
-                <a:cs typeface="Times New Roman" pitchFamily="34" charset="-120"/>
-              </a:rPr>
-              <a:t>People on the coast face the following hazards:</a:t>
-            </a:r>
-            <a:endParaRPr lang="en-US" sz="4000" dirty="0"/>
-          </a:p>
-          <a:p>
-            <a:pPr algn="l" indent="0" marL="0">
-              <a:spcAft>
-                <a:spcPts val="800"/>
-              </a:spcAft>
-              <a:buNone/>
-            </a:pPr>
-            <a:r>
-              <a:rPr lang="en-US" sz="4000" b="1" dirty="0">
-                <a:solidFill>
-                  <a:srgbClr val="111111"/>
-                </a:solidFill>
-                <a:latin typeface="Times New Roman" pitchFamily="34" charset="0"/>
-                <a:ea typeface="Times New Roman" pitchFamily="34" charset="-122"/>
-                <a:cs typeface="Times New Roman" pitchFamily="34" charset="-120"/>
-              </a:rPr>
-              <a:t>Coastal erosion: </a:t>
-            </a:r>
-            <a:pPr algn="l" indent="0" marL="0">
-              <a:spcAft>
-                <a:spcPts val="800"/>
-              </a:spcAft>
-              <a:buNone/>
-            </a:pPr>
-            <a:r>
-              <a:rPr lang="en-US" sz="4000" dirty="0">
-                <a:solidFill>
-                  <a:srgbClr val="111111"/>
-                </a:solidFill>
-                <a:latin typeface="Times New Roman" pitchFamily="34" charset="0"/>
-                <a:ea typeface="Times New Roman" pitchFamily="34" charset="-122"/>
-                <a:cs typeface="Times New Roman" pitchFamily="34" charset="-120"/>
-              </a:rPr>
-              <a:t>Waves destroy beaches, roads and houses.</a:t>
-            </a:r>
-            <a:endParaRPr lang="en-US" sz="4000" dirty="0"/>
-          </a:p>
-          <a:p>
-            <a:pPr algn="l" indent="0" marL="0">
-              <a:spcAft>
-                <a:spcPts val="800"/>
-              </a:spcAft>
-              <a:buNone/>
-            </a:pPr>
-            <a:r>
-              <a:rPr lang="en-US" sz="4000" b="1" dirty="0">
-                <a:solidFill>
-                  <a:srgbClr val="111111"/>
-                </a:solidFill>
-                <a:latin typeface="Times New Roman" pitchFamily="34" charset="0"/>
-                <a:ea typeface="Times New Roman" pitchFamily="34" charset="-122"/>
-                <a:cs typeface="Times New Roman" pitchFamily="34" charset="-120"/>
-              </a:rPr>
-              <a:t>Floods: </a:t>
-            </a:r>
-            <a:pPr algn="l" indent="0" marL="0">
-              <a:spcAft>
-                <a:spcPts val="800"/>
-              </a:spcAft>
-              <a:buNone/>
-            </a:pPr>
-            <a:r>
-              <a:rPr lang="en-US" sz="4000" dirty="0">
-                <a:solidFill>
-                  <a:srgbClr val="111111"/>
-                </a:solidFill>
-                <a:latin typeface="Times New Roman" pitchFamily="34" charset="0"/>
-                <a:ea typeface="Times New Roman" pitchFamily="34" charset="-122"/>
-                <a:cs typeface="Times New Roman" pitchFamily="34" charset="-120"/>
-              </a:rPr>
-              <a:t>The sea covers low-lying land during storms and high tides.</a:t>
-            </a:r>
-            <a:endParaRPr lang="en-US" sz="4000" dirty="0"/>
+              <a:t>Illustration: a port</a:t>
+            </a:r>
+            <a:endParaRPr lang="en-US" sz="1600" dirty="0"/>
           </a:p>
         </p:txBody>
       </p:sp>
@@ -12359,7 +13036,7 @@
                 <a:ea typeface="Times New Roman" pitchFamily="34" charset="-122"/>
                 <a:cs typeface="Times New Roman" pitchFamily="34" charset="-120"/>
               </a:rPr>
-              <a:t>2. Coastal Hazards (continued)</a:t>
+              <a:t>1. Importance of Coasts (Resources)</a:t>
             </a:r>
             <a:endParaRPr lang="en-US" sz="3600" dirty="0"/>
           </a:p>
@@ -12401,7 +13078,7 @@
                 <a:ea typeface="Times New Roman" pitchFamily="34" charset="-122"/>
                 <a:cs typeface="Times New Roman" pitchFamily="34" charset="-120"/>
               </a:rPr>
-              <a:t>Sea-level rise: </a:t>
+              <a:t>Fishing: </a:t>
             </a:r>
             <a:pPr algn="l" indent="0" marL="0">
               <a:spcAft>
@@ -12418,7 +13095,7 @@
                 <a:ea typeface="Times New Roman" pitchFamily="34" charset="-122"/>
                 <a:cs typeface="Times New Roman" pitchFamily="34" charset="-120"/>
               </a:rPr>
-              <a:t>Rising sea levels threaten low coastal towns such as Douala.</a:t>
+              <a:t>Coastal waters and mangroves provide fish, shrimps and crabs.</a:t>
             </a:r>
             <a:endParaRPr lang="en-US" sz="4000" dirty="0"/>
           </a:p>
@@ -12536,9 +13213,109 @@
           </a:p>
         </p:txBody>
       </p:sp>
+      <p:sp>
+        <p:nvSpPr>
+          <p:cNvPr id="3" name="Text 1"/>
+          <p:cNvSpPr/>
+          <p:nvPr/>
+        </p:nvSpPr>
+        <p:spPr>
+          <a:xfrm>
+            <a:off x="365760" y="1005840"/>
+            <a:ext cx="11460175" cy="731520"/>
+          </a:xfrm>
+          <a:prstGeom prst="rect">
+            <a:avLst/>
+          </a:prstGeom>
+          <a:noFill/>
+          <a:ln/>
+        </p:spPr>
+        <p:txBody>
+          <a:bodyPr wrap="square" lIns="0" tIns="0" rIns="0" bIns="0" rtlCol="0" anchor="ctr">
+            <a:normAutofit/>
+          </a:bodyPr>
+          <a:lstStyle/>
+          <a:p>
+            <a:pPr algn="ctr" indent="0" marL="0">
+              <a:buNone/>
+            </a:pPr>
+            <a:r>
+              <a:rPr lang="en-US" sz="3600" b="1" dirty="0">
+                <a:solidFill>
+                  <a:srgbClr val="990011"/>
+                </a:solidFill>
+                <a:latin typeface="Times New Roman" pitchFamily="34" charset="0"/>
+                <a:ea typeface="Times New Roman" pitchFamily="34" charset="-122"/>
+                <a:cs typeface="Times New Roman" pitchFamily="34" charset="-120"/>
+              </a:rPr>
+              <a:t>1. Importance of Coasts (Resources)</a:t>
+            </a:r>
+            <a:endParaRPr lang="en-US" sz="3600" dirty="0"/>
+          </a:p>
+        </p:txBody>
+      </p:sp>
+      <p:sp>
+        <p:nvSpPr>
+          <p:cNvPr id="4" name="Text 2"/>
+          <p:cNvSpPr/>
+          <p:nvPr/>
+        </p:nvSpPr>
+        <p:spPr>
+          <a:xfrm>
+            <a:off x="365760" y="1783080"/>
+            <a:ext cx="4846320" cy="4617720"/>
+          </a:xfrm>
+          <a:prstGeom prst="rect">
+            <a:avLst/>
+          </a:prstGeom>
+          <a:noFill/>
+          <a:ln/>
+        </p:spPr>
+        <p:txBody>
+          <a:bodyPr wrap="square" lIns="0" tIns="0" rIns="0" bIns="0" rtlCol="0" anchor="t"/>
+          <a:lstStyle/>
+          <a:p>
+            <a:pPr algn="l" indent="0" marL="0">
+              <a:spcAft>
+                <a:spcPts val="800"/>
+              </a:spcAft>
+              <a:buNone/>
+            </a:pPr>
+            <a:r>
+              <a:rPr lang="en-US" sz="3600" b="1" dirty="0">
+                <a:solidFill>
+                  <a:srgbClr val="111111"/>
+                </a:solidFill>
+                <a:latin typeface="Times New Roman" pitchFamily="34" charset="0"/>
+                <a:ea typeface="Times New Roman" pitchFamily="34" charset="-122"/>
+                <a:cs typeface="Times New Roman" pitchFamily="34" charset="-120"/>
+              </a:rPr>
+              <a:t>Tourism: </a:t>
+            </a:r>
+            <a:pPr algn="l" indent="0" marL="0">
+              <a:spcAft>
+                <a:spcPts val="800"/>
+              </a:spcAft>
+              <a:buNone/>
+            </a:pPr>
+            <a:r>
+              <a:rPr lang="en-US" sz="3600" dirty="0">
+                <a:solidFill>
+                  <a:srgbClr val="111111"/>
+                </a:solidFill>
+                <a:latin typeface="Times New Roman" pitchFamily="34" charset="0"/>
+                <a:ea typeface="Times New Roman" pitchFamily="34" charset="-122"/>
+                <a:cs typeface="Times New Roman" pitchFamily="34" charset="-120"/>
+              </a:rPr>
+              <a:t>The beaches of Kribi and Limbe attract tourists.</a:t>
+            </a:r>
+            <a:endParaRPr lang="en-US" sz="3600" dirty="0"/>
+          </a:p>
+        </p:txBody>
+      </p:sp>
       <p:pic>
         <p:nvPicPr>
-          <p:cNvPr id="3" name="Image 0" descr="/home/claude/f4/img/minesec_sheet.png">    </p:cNvPr>
+          <p:cNvPr id="5" name="Image 0" descr="/home/claude/f4/img/v2/usa_limbe.jpg">    </p:cNvPr>
           <p:cNvPicPr>
             <a:picLocks noChangeAspect="1"/>
           </p:cNvPicPr>
@@ -12552,8 +13329,8 @@
         </p:blipFill>
         <p:spPr>
           <a:xfrm>
-            <a:off x="0" y="658368"/>
-            <a:ext cx="3840480" cy="5833872"/>
+            <a:off x="5349240" y="2071212"/>
+            <a:ext cx="6659575" cy="3693983"/>
           </a:xfrm>
           <a:prstGeom prst="rect">
             <a:avLst/>
@@ -12562,14 +13339,14 @@
       </p:pic>
       <p:sp>
         <p:nvSpPr>
-          <p:cNvPr id="4" name="Text 1"/>
+          <p:cNvPr id="6" name="Text 3"/>
           <p:cNvSpPr/>
           <p:nvPr/>
         </p:nvSpPr>
         <p:spPr>
           <a:xfrm>
-            <a:off x="4069080" y="1005840"/>
-            <a:ext cx="7802575" cy="731520"/>
+            <a:off x="5349240" y="6089904"/>
+            <a:ext cx="6659575" cy="347472"/>
           </a:xfrm>
           <a:prstGeom prst="rect">
             <a:avLst/>
@@ -12578,142 +13355,24 @@
           <a:ln/>
         </p:spPr>
         <p:txBody>
-          <a:bodyPr wrap="square" lIns="0" tIns="0" rIns="0" bIns="0" rtlCol="0" anchor="ctr">
-            <a:normAutofit/>
-          </a:bodyPr>
+          <a:bodyPr wrap="square" lIns="0" tIns="0" rIns="0" bIns="0" rtlCol="0" anchor="ctr"/>
           <a:lstStyle/>
           <a:p>
             <a:pPr algn="ctr" indent="0" marL="0">
               <a:buNone/>
             </a:pPr>
             <a:r>
-              <a:rPr lang="en-US" sz="3600" b="1" dirty="0">
-                <a:solidFill>
-                  <a:srgbClr val="990011"/>
+              <a:rPr lang="en-US" sz="1600" i="1" dirty="0">
+                <a:solidFill>
+                  <a:srgbClr val="555555"/>
                 </a:solidFill>
                 <a:latin typeface="Times New Roman" pitchFamily="34" charset="0"/>
                 <a:ea typeface="Times New Roman" pitchFamily="34" charset="-122"/>
                 <a:cs typeface="Times New Roman" pitchFamily="34" charset="-120"/>
               </a:rPr>
-              <a:t>3. Coastal Management Strategies</a:t>
-            </a:r>
-            <a:endParaRPr lang="en-US" sz="3600" dirty="0"/>
-          </a:p>
-        </p:txBody>
-      </p:sp>
-      <p:sp>
-        <p:nvSpPr>
-          <p:cNvPr id="5" name="Text 2"/>
-          <p:cNvSpPr/>
-          <p:nvPr/>
-        </p:nvSpPr>
-        <p:spPr>
-          <a:xfrm>
-            <a:off x="4069080" y="1783080"/>
-            <a:ext cx="7802575" cy="4663440"/>
-          </a:xfrm>
-          <a:prstGeom prst="rect">
-            <a:avLst/>
-          </a:prstGeom>
-          <a:noFill/>
-          <a:ln/>
-        </p:spPr>
-        <p:txBody>
-          <a:bodyPr wrap="square" lIns="0" tIns="0" rIns="0" bIns="0" rtlCol="0" anchor="t"/>
-          <a:lstStyle/>
-          <a:p>
-            <a:pPr algn="l" indent="0" marL="0">
-              <a:spcAft>
-                <a:spcPts val="800"/>
-              </a:spcAft>
-              <a:buNone/>
-            </a:pPr>
-            <a:r>
-              <a:rPr lang="en-US" sz="4000" i="1" dirty="0">
-                <a:solidFill>
-                  <a:srgbClr val="111111"/>
-                </a:solidFill>
-                <a:latin typeface="Times New Roman" pitchFamily="34" charset="0"/>
-                <a:ea typeface="Times New Roman" pitchFamily="34" charset="-122"/>
-                <a:cs typeface="Times New Roman" pitchFamily="34" charset="-120"/>
-              </a:rPr>
-              <a:t>Coasts are protected with the following strategies:</a:t>
-            </a:r>
-            <a:endParaRPr lang="en-US" sz="4000" dirty="0"/>
-          </a:p>
-          <a:p>
-            <a:pPr algn="l" indent="0" marL="0">
-              <a:spcAft>
-                <a:spcPts val="800"/>
-              </a:spcAft>
-              <a:buNone/>
-            </a:pPr>
-            <a:r>
-              <a:rPr lang="en-US" sz="4000" b="1" dirty="0">
-                <a:solidFill>
-                  <a:srgbClr val="111111"/>
-                </a:solidFill>
-                <a:latin typeface="Times New Roman" pitchFamily="34" charset="0"/>
-                <a:ea typeface="Times New Roman" pitchFamily="34" charset="-122"/>
-                <a:cs typeface="Times New Roman" pitchFamily="34" charset="-120"/>
-              </a:rPr>
-              <a:t>Sea walls: </a:t>
-            </a:r>
-            <a:pPr algn="l" indent="0" marL="0">
-              <a:spcAft>
-                <a:spcPts val="800"/>
-              </a:spcAft>
-              <a:buNone/>
-            </a:pPr>
-            <a:r>
-              <a:rPr lang="en-US" sz="4000" dirty="0">
-                <a:solidFill>
-                  <a:srgbClr val="111111"/>
-                </a:solidFill>
-                <a:latin typeface="Times New Roman" pitchFamily="34" charset="0"/>
-                <a:ea typeface="Times New Roman" pitchFamily="34" charset="-122"/>
-                <a:cs typeface="Times New Roman" pitchFamily="34" charset="-120"/>
-              </a:rPr>
-              <a:t>They are strong walls that stop waves from reaching the land.</a:t>
-            </a:r>
-            <a:endParaRPr lang="en-US" sz="4000" dirty="0"/>
-          </a:p>
-          <a:p>
-            <a:pPr algn="l" indent="0" marL="0">
-              <a:spcAft>
-                <a:spcPts val="800"/>
-              </a:spcAft>
-              <a:buNone/>
-            </a:pPr>
-            <a:r>
-              <a:rPr lang="en-US" sz="4000" b="1" dirty="0">
-                <a:solidFill>
-                  <a:srgbClr val="111111"/>
-                </a:solidFill>
-                <a:latin typeface="Times New Roman" pitchFamily="34" charset="0"/>
-                <a:ea typeface="Times New Roman" pitchFamily="34" charset="-122"/>
-                <a:cs typeface="Times New Roman" pitchFamily="34" charset="-120"/>
-              </a:rPr>
-              <a:t>Groynes: </a:t>
-            </a:r>
-            <a:pPr algn="l" indent="0" marL="0">
-              <a:spcAft>
-                <a:spcPts val="800"/>
-              </a:spcAft>
-              <a:buNone/>
-            </a:pPr>
-            <a:r>
-              <a:rPr lang="en-US" sz="4000" dirty="0">
-                <a:solidFill>
-                  <a:srgbClr val="111111"/>
-                </a:solidFill>
-                <a:latin typeface="Times New Roman" pitchFamily="34" charset="0"/>
-                <a:ea typeface="Times New Roman" pitchFamily="34" charset="-122"/>
-                <a:cs typeface="Times New Roman" pitchFamily="34" charset="-120"/>
-              </a:rPr>
-              <a:t>They are low walls built across a beach to trap sand.</a:t>
-            </a:r>
-            <a:endParaRPr lang="en-US" sz="4000" dirty="0"/>
+              <a:t>Illustration: the coast at Limbe</a:t>
+            </a:r>
+            <a:endParaRPr lang="en-US" sz="1600" dirty="0"/>
           </a:p>
         </p:txBody>
       </p:sp>
@@ -12888,7 +13547,7 @@
                 <a:ea typeface="Times New Roman" pitchFamily="34" charset="-122"/>
                 <a:cs typeface="Times New Roman" pitchFamily="34" charset="-120"/>
               </a:rPr>
-              <a:t>3. Coastal Management Strategies (continued)</a:t>
+              <a:t>1. Importance of Coasts (Resources)</a:t>
             </a:r>
             <a:endParaRPr lang="en-US" sz="3600" dirty="0"/>
           </a:p>
@@ -12930,7 +13589,7 @@
                 <a:ea typeface="Times New Roman" pitchFamily="34" charset="-122"/>
                 <a:cs typeface="Times New Roman" pitchFamily="34" charset="-120"/>
               </a:rPr>
-              <a:t>Mangroves: </a:t>
+              <a:t>Oil and gas: </a:t>
             </a:r>
             <a:pPr algn="l" indent="0" marL="0">
               <a:spcAft>
@@ -12947,7 +13606,44 @@
                 <a:ea typeface="Times New Roman" pitchFamily="34" charset="-122"/>
                 <a:cs typeface="Times New Roman" pitchFamily="34" charset="-120"/>
               </a:rPr>
-              <a:t>These trees protect the coast by reducing the force of waves.</a:t>
+              <a:t>Oil and gas are extracted under the sea near Limbe and Kribi.</a:t>
+            </a:r>
+            <a:endParaRPr lang="en-US" sz="4000" dirty="0"/>
+          </a:p>
+          <a:p>
+            <a:pPr algn="l" indent="0" marL="0">
+              <a:spcAft>
+                <a:spcPts val="800"/>
+              </a:spcAft>
+              <a:buNone/>
+            </a:pPr>
+            <a:r>
+              <a:rPr lang="en-US" sz="4000" b="1" dirty="0">
+                <a:solidFill>
+                  <a:srgbClr val="111111"/>
+                </a:solidFill>
+                <a:latin typeface="Times New Roman" pitchFamily="34" charset="0"/>
+                <a:ea typeface="Times New Roman" pitchFamily="34" charset="-122"/>
+                <a:cs typeface="Times New Roman" pitchFamily="34" charset="-120"/>
+              </a:rPr>
+              <a:t>Industry and settlement: </a:t>
+            </a:r>
+            <a:pPr algn="l" indent="0" marL="0">
+              <a:spcAft>
+                <a:spcPts val="800"/>
+              </a:spcAft>
+              <a:buNone/>
+            </a:pPr>
+            <a:r>
+              <a:rPr lang="en-US" sz="4000" dirty="0">
+                <a:solidFill>
+                  <a:srgbClr val="111111"/>
+                </a:solidFill>
+                <a:latin typeface="Times New Roman" pitchFamily="34" charset="0"/>
+                <a:ea typeface="Times New Roman" pitchFamily="34" charset="-122"/>
+                <a:cs typeface="Times New Roman" pitchFamily="34" charset="-120"/>
+              </a:rPr>
+              <a:t>Flat coastal land attracts towns, factories and plantations.</a:t>
             </a:r>
             <a:endParaRPr lang="en-US" sz="4000" dirty="0"/>
           </a:p>
@@ -13073,8 +13769,8 @@
         </p:nvSpPr>
         <p:spPr>
           <a:xfrm>
-            <a:off x="457200" y="1005840"/>
-            <a:ext cx="11277295" cy="731520"/>
+            <a:off x="365760" y="1005840"/>
+            <a:ext cx="11460175" cy="731520"/>
           </a:xfrm>
           <a:prstGeom prst="rect">
             <a:avLst/>
@@ -13083,7 +13779,9 @@
           <a:ln/>
         </p:spPr>
         <p:txBody>
-          <a:bodyPr wrap="square" lIns="0" tIns="0" rIns="0" bIns="0" rtlCol="0" anchor="ctr"/>
+          <a:bodyPr wrap="square" lIns="0" tIns="0" rIns="0" bIns="0" rtlCol="0" anchor="ctr">
+            <a:normAutofit/>
+          </a:bodyPr>
           <a:lstStyle/>
           <a:p>
             <a:pPr algn="ctr" indent="0" marL="0">
@@ -13098,7 +13796,86 @@
                 <a:ea typeface="Times New Roman" pitchFamily="34" charset="-122"/>
                 <a:cs typeface="Times New Roman" pitchFamily="34" charset="-120"/>
               </a:rPr>
-              <a:t>3. Coastal Management Strategies</a:t>
+              <a:t>2. Coastal Hazards</a:t>
+            </a:r>
+            <a:endParaRPr lang="en-US" sz="3600" dirty="0"/>
+          </a:p>
+        </p:txBody>
+      </p:sp>
+      <p:sp>
+        <p:nvSpPr>
+          <p:cNvPr id="4" name="Text 2"/>
+          <p:cNvSpPr/>
+          <p:nvPr/>
+        </p:nvSpPr>
+        <p:spPr>
+          <a:xfrm>
+            <a:off x="365760" y="1783080"/>
+            <a:ext cx="4846320" cy="4617720"/>
+          </a:xfrm>
+          <a:prstGeom prst="rect">
+            <a:avLst/>
+          </a:prstGeom>
+          <a:noFill/>
+          <a:ln/>
+        </p:spPr>
+        <p:txBody>
+          <a:bodyPr wrap="square" lIns="0" tIns="0" rIns="0" bIns="0" rtlCol="0" anchor="t"/>
+          <a:lstStyle/>
+          <a:p>
+            <a:pPr algn="l" indent="0" marL="0">
+              <a:spcAft>
+                <a:spcPts val="800"/>
+              </a:spcAft>
+              <a:buNone/>
+            </a:pPr>
+            <a:r>
+              <a:rPr lang="en-US" sz="3600" i="1" dirty="0">
+                <a:solidFill>
+                  <a:srgbClr val="111111"/>
+                </a:solidFill>
+                <a:latin typeface="Times New Roman" pitchFamily="34" charset="0"/>
+                <a:ea typeface="Times New Roman" pitchFamily="34" charset="-122"/>
+                <a:cs typeface="Times New Roman" pitchFamily="34" charset="-120"/>
+              </a:rPr>
+              <a:t>People on the coast face the following hazards:</a:t>
+            </a:r>
+            <a:endParaRPr lang="en-US" sz="3600" dirty="0"/>
+          </a:p>
+          <a:p>
+            <a:pPr algn="l" indent="0" marL="0">
+              <a:spcAft>
+                <a:spcPts val="800"/>
+              </a:spcAft>
+              <a:buNone/>
+            </a:pPr>
+            <a:r>
+              <a:rPr lang="en-US" sz="3600" b="1" dirty="0">
+                <a:solidFill>
+                  <a:srgbClr val="111111"/>
+                </a:solidFill>
+                <a:latin typeface="Times New Roman" pitchFamily="34" charset="0"/>
+                <a:ea typeface="Times New Roman" pitchFamily="34" charset="-122"/>
+                <a:cs typeface="Times New Roman" pitchFamily="34" charset="-120"/>
+              </a:rPr>
+              <a:t>Coastal erosion: </a:t>
+            </a:r>
+            <a:pPr algn="l" indent="0" marL="0">
+              <a:spcAft>
+                <a:spcPts val="800"/>
+              </a:spcAft>
+              <a:buNone/>
+            </a:pPr>
+            <a:r>
+              <a:rPr lang="en-US" sz="3600" dirty="0">
+                <a:solidFill>
+                  <a:srgbClr val="111111"/>
+                </a:solidFill>
+                <a:latin typeface="Times New Roman" pitchFamily="34" charset="0"/>
+                <a:ea typeface="Times New Roman" pitchFamily="34" charset="-122"/>
+                <a:cs typeface="Times New Roman" pitchFamily="34" charset="-120"/>
+              </a:rPr>
+              <a:t>Destructive waves wear away beaches and destroy roads and houses.</a:t>
             </a:r>
             <a:endParaRPr lang="en-US" sz="3600" dirty="0"/>
           </a:p>
@@ -13106,7 +13883,7 @@
       </p:sp>
       <p:pic>
         <p:nvPicPr>
-          <p:cNvPr id="4" name="Image 0" descr="/home/claude/f4/img/v2/coastal_defence_big.png">    </p:cNvPr>
+          <p:cNvPr id="5" name="Image 0" descr="/home/claude/f4/img/v2/f4_bigwaves.jpg">    </p:cNvPr>
           <p:cNvPicPr>
             <a:picLocks noChangeAspect="1"/>
           </p:cNvPicPr>
@@ -13120,8 +13897,8 @@
         </p:blipFill>
         <p:spPr>
           <a:xfrm>
-            <a:off x="629930" y="1783080"/>
-            <a:ext cx="10931835" cy="4270248"/>
+            <a:off x="5349240" y="2071212"/>
+            <a:ext cx="6659575" cy="3693983"/>
           </a:xfrm>
           <a:prstGeom prst="rect">
             <a:avLst/>
@@ -13130,14 +13907,14 @@
       </p:pic>
       <p:sp>
         <p:nvSpPr>
-          <p:cNvPr id="5" name="Text 2"/>
+          <p:cNvPr id="6" name="Text 3"/>
           <p:cNvSpPr/>
           <p:nvPr/>
         </p:nvSpPr>
         <p:spPr>
           <a:xfrm>
-            <a:off x="457200" y="6089904"/>
-            <a:ext cx="11277295" cy="347472"/>
+            <a:off x="5349240" y="6089904"/>
+            <a:ext cx="6659575" cy="347472"/>
           </a:xfrm>
           <a:prstGeom prst="rect">
             <a:avLst/>
@@ -13153,7 +13930,7 @@
               <a:buNone/>
             </a:pPr>
             <a:r>
-              <a:rPr lang="en-US" sz="1800" i="1" dirty="0">
+              <a:rPr lang="en-US" sz="1600" i="1" dirty="0">
                 <a:solidFill>
                   <a:srgbClr val="555555"/>
                 </a:solidFill>
@@ -13161,9 +13938,9 @@
                 <a:ea typeface="Times New Roman" pitchFamily="34" charset="-122"/>
                 <a:cs typeface="Times New Roman" pitchFamily="34" charset="-120"/>
               </a:rPr>
-              <a:t>Illustration: coastal defences</a:t>
-            </a:r>
-            <a:endParaRPr lang="en-US" sz="1800" dirty="0"/>
+              <a:t>Illustration: high waves</a:t>
+            </a:r>
+            <a:endParaRPr lang="en-US" sz="1600" dirty="0"/>
           </a:p>
         </p:txBody>
       </p:sp>
@@ -13273,7 +14050,7 @@
                 <a:ea typeface="Calibri" pitchFamily="34" charset="-122"/>
                 <a:cs typeface="Calibri" pitchFamily="34" charset="-120"/>
               </a:rPr>
-              <a:t>FORMATIVE EVALUATION</a:t>
+              <a:t>BOARD SUMMARY</a:t>
             </a:r>
             <a:endParaRPr lang="en-US" sz="1400" dirty="0"/>
           </a:p>
@@ -13296,7 +14073,7 @@
         <p:spPr>
           <a:xfrm>
             <a:off x="0" y="658368"/>
-            <a:ext cx="5120640" cy="5833872"/>
+            <a:ext cx="1463040" cy="5833872"/>
           </a:xfrm>
           <a:prstGeom prst="rect">
             <a:avLst/>
@@ -13311,8 +14088,8 @@
         </p:nvSpPr>
         <p:spPr>
           <a:xfrm>
-            <a:off x="5349240" y="1005840"/>
-            <a:ext cx="6522415" cy="731520"/>
+            <a:off x="1691640" y="1005840"/>
+            <a:ext cx="10180015" cy="731520"/>
           </a:xfrm>
           <a:prstGeom prst="rect">
             <a:avLst/>
@@ -13338,7 +14115,7 @@
                 <a:ea typeface="Times New Roman" pitchFamily="34" charset="-122"/>
                 <a:cs typeface="Times New Roman" pitchFamily="34" charset="-120"/>
               </a:rPr>
-              <a:t>Evaluation 1</a:t>
+              <a:t>2. Coastal Hazards</a:t>
             </a:r>
             <a:endParaRPr lang="en-US" sz="3600" dirty="0"/>
           </a:p>
@@ -13352,8 +14129,8 @@
         </p:nvSpPr>
         <p:spPr>
           <a:xfrm>
-            <a:off x="5349240" y="1783080"/>
-            <a:ext cx="6522415" cy="4663440"/>
+            <a:off x="1691640" y="1783080"/>
+            <a:ext cx="10180015" cy="4663440"/>
           </a:xfrm>
           <a:prstGeom prst="rect">
             <a:avLst/>
@@ -13372,7 +14149,7 @@
               <a:buNone/>
             </a:pPr>
             <a:r>
-              <a:rPr lang="en-US" sz="4000" dirty="0">
+              <a:rPr lang="en-US" sz="4000" b="1" dirty="0">
                 <a:solidFill>
                   <a:srgbClr val="111111"/>
                 </a:solidFill>
@@ -13380,7 +14157,98 @@
                 <a:ea typeface="Times New Roman" pitchFamily="34" charset="-122"/>
                 <a:cs typeface="Times New Roman" pitchFamily="34" charset="-120"/>
               </a:rPr>
-              <a:t>Name two ports of Cameroon.</a:t>
+              <a:t>Floods: </a:t>
+            </a:r>
+            <a:pPr algn="l" indent="0" marL="0">
+              <a:spcAft>
+                <a:spcPts val="800"/>
+              </a:spcAft>
+              <a:buNone/>
+            </a:pPr>
+            <a:r>
+              <a:rPr lang="en-US" sz="4000" dirty="0">
+                <a:solidFill>
+                  <a:srgbClr val="111111"/>
+                </a:solidFill>
+                <a:latin typeface="Times New Roman" pitchFamily="34" charset="0"/>
+                <a:ea typeface="Times New Roman" pitchFamily="34" charset="-122"/>
+                <a:cs typeface="Times New Roman" pitchFamily="34" charset="-120"/>
+              </a:rPr>
+              <a:t>The sea covers low-lying land during storms and high tides.</a:t>
+            </a:r>
+            <a:endParaRPr lang="en-US" sz="4000" dirty="0"/>
+          </a:p>
+          <a:p>
+            <a:pPr algn="l" indent="0" marL="0">
+              <a:spcAft>
+                <a:spcPts val="800"/>
+              </a:spcAft>
+              <a:buNone/>
+            </a:pPr>
+            <a:r>
+              <a:rPr lang="en-US" sz="4000" b="1" dirty="0">
+                <a:solidFill>
+                  <a:srgbClr val="111111"/>
+                </a:solidFill>
+                <a:latin typeface="Times New Roman" pitchFamily="34" charset="0"/>
+                <a:ea typeface="Times New Roman" pitchFamily="34" charset="-122"/>
+                <a:cs typeface="Times New Roman" pitchFamily="34" charset="-120"/>
+              </a:rPr>
+              <a:t>Salt-water incursion: </a:t>
+            </a:r>
+            <a:pPr algn="l" indent="0" marL="0">
+              <a:spcAft>
+                <a:spcPts val="800"/>
+              </a:spcAft>
+              <a:buNone/>
+            </a:pPr>
+            <a:r>
+              <a:rPr lang="en-US" sz="4000" dirty="0">
+                <a:solidFill>
+                  <a:srgbClr val="111111"/>
+                </a:solidFill>
+                <a:latin typeface="Times New Roman" pitchFamily="34" charset="0"/>
+                <a:ea typeface="Times New Roman" pitchFamily="34" charset="-122"/>
+                <a:cs typeface="Times New Roman" pitchFamily="34" charset="-120"/>
+              </a:rPr>
+              <a:t>Sea water enters wells and rivers and makes the water salty.</a:t>
+            </a:r>
+            <a:endParaRPr lang="en-US" sz="4000" dirty="0"/>
+          </a:p>
+          <a:p>
+            <a:pPr algn="l" indent="0" marL="0">
+              <a:spcAft>
+                <a:spcPts val="800"/>
+              </a:spcAft>
+              <a:buNone/>
+            </a:pPr>
+            <a:r>
+              <a:rPr lang="en-US" sz="4000" b="1" dirty="0">
+                <a:solidFill>
+                  <a:srgbClr val="111111"/>
+                </a:solidFill>
+                <a:latin typeface="Times New Roman" pitchFamily="34" charset="0"/>
+                <a:ea typeface="Times New Roman" pitchFamily="34" charset="-122"/>
+                <a:cs typeface="Times New Roman" pitchFamily="34" charset="-120"/>
+              </a:rPr>
+              <a:t>Sea-level rise: </a:t>
+            </a:r>
+            <a:pPr algn="l" indent="0" marL="0">
+              <a:spcAft>
+                <a:spcPts val="800"/>
+              </a:spcAft>
+              <a:buNone/>
+            </a:pPr>
+            <a:r>
+              <a:rPr lang="en-US" sz="4000" dirty="0">
+                <a:solidFill>
+                  <a:srgbClr val="111111"/>
+                </a:solidFill>
+                <a:latin typeface="Times New Roman" pitchFamily="34" charset="0"/>
+                <a:ea typeface="Times New Roman" pitchFamily="34" charset="-122"/>
+                <a:cs typeface="Times New Roman" pitchFamily="34" charset="-120"/>
+              </a:rPr>
+              <a:t>Rising sea levels threaten low coastal towns such as Douala.</a:t>
             </a:r>
             <a:endParaRPr lang="en-US" sz="4000" dirty="0"/>
           </a:p>
@@ -13492,7 +14360,7 @@
                 <a:ea typeface="Calibri" pitchFamily="34" charset="-122"/>
                 <a:cs typeface="Calibri" pitchFamily="34" charset="-120"/>
               </a:rPr>
-              <a:t>FORMATIVE EVALUATION</a:t>
+              <a:t>BOARD SUMMARY</a:t>
             </a:r>
             <a:endParaRPr lang="en-US" sz="1400" dirty="0"/>
           </a:p>
@@ -13557,7 +14425,7 @@
                 <a:ea typeface="Times New Roman" pitchFamily="34" charset="-122"/>
                 <a:cs typeface="Times New Roman" pitchFamily="34" charset="-120"/>
               </a:rPr>
-              <a:t>Expected Answer</a:t>
+              <a:t>2. Coastal Hazards (continued)</a:t>
             </a:r>
             <a:endParaRPr lang="en-US" sz="3600" dirty="0"/>
           </a:p>
@@ -13591,7 +14459,7 @@
               <a:buNone/>
             </a:pPr>
             <a:r>
-              <a:rPr lang="en-US" sz="4000" dirty="0">
+              <a:rPr lang="en-US" sz="4000" b="1" dirty="0">
                 <a:solidFill>
                   <a:srgbClr val="111111"/>
                 </a:solidFill>
@@ -13599,7 +14467,24 @@
                 <a:ea typeface="Times New Roman" pitchFamily="34" charset="-122"/>
                 <a:cs typeface="Times New Roman" pitchFamily="34" charset="-120"/>
               </a:rPr>
-              <a:t>Douala and Kribi.</a:t>
+              <a:t>Pollution: </a:t>
+            </a:r>
+            <a:pPr algn="l" indent="0" marL="0">
+              <a:spcAft>
+                <a:spcPts val="800"/>
+              </a:spcAft>
+              <a:buNone/>
+            </a:pPr>
+            <a:r>
+              <a:rPr lang="en-US" sz="4000" dirty="0">
+                <a:solidFill>
+                  <a:srgbClr val="111111"/>
+                </a:solidFill>
+                <a:latin typeface="Times New Roman" pitchFamily="34" charset="0"/>
+                <a:ea typeface="Times New Roman" pitchFamily="34" charset="-122"/>
+                <a:cs typeface="Times New Roman" pitchFamily="34" charset="-120"/>
+              </a:rPr>
+              <a:t>Oil spills and rubbish pollute beaches and kill fish.</a:t>
             </a:r>
             <a:endParaRPr lang="en-US" sz="4000" dirty="0"/>
           </a:p>
@@ -13711,15 +14596,135 @@
                 <a:ea typeface="Calibri" pitchFamily="34" charset="-122"/>
                 <a:cs typeface="Calibri" pitchFamily="34" charset="-120"/>
               </a:rPr>
-              <a:t>FORMATIVE EVALUATION</a:t>
+              <a:t>BOARD SUMMARY</a:t>
             </a:r>
             <a:endParaRPr lang="en-US" sz="1400" dirty="0"/>
+          </a:p>
+        </p:txBody>
+      </p:sp>
+      <p:sp>
+        <p:nvSpPr>
+          <p:cNvPr id="3" name="Text 1"/>
+          <p:cNvSpPr/>
+          <p:nvPr/>
+        </p:nvSpPr>
+        <p:spPr>
+          <a:xfrm>
+            <a:off x="365760" y="1005840"/>
+            <a:ext cx="11460175" cy="731520"/>
+          </a:xfrm>
+          <a:prstGeom prst="rect">
+            <a:avLst/>
+          </a:prstGeom>
+          <a:noFill/>
+          <a:ln/>
+        </p:spPr>
+        <p:txBody>
+          <a:bodyPr wrap="square" lIns="0" tIns="0" rIns="0" bIns="0" rtlCol="0" anchor="ctr">
+            <a:normAutofit/>
+          </a:bodyPr>
+          <a:lstStyle/>
+          <a:p>
+            <a:pPr algn="ctr" indent="0" marL="0">
+              <a:buNone/>
+            </a:pPr>
+            <a:r>
+              <a:rPr lang="en-US" sz="3600" b="1" dirty="0">
+                <a:solidFill>
+                  <a:srgbClr val="990011"/>
+                </a:solidFill>
+                <a:latin typeface="Times New Roman" pitchFamily="34" charset="0"/>
+                <a:ea typeface="Times New Roman" pitchFamily="34" charset="-122"/>
+                <a:cs typeface="Times New Roman" pitchFamily="34" charset="-120"/>
+              </a:rPr>
+              <a:t>3. Coastal Management Strategies</a:t>
+            </a:r>
+            <a:endParaRPr lang="en-US" sz="3600" dirty="0"/>
+          </a:p>
+        </p:txBody>
+      </p:sp>
+      <p:sp>
+        <p:nvSpPr>
+          <p:cNvPr id="4" name="Text 2"/>
+          <p:cNvSpPr/>
+          <p:nvPr/>
+        </p:nvSpPr>
+        <p:spPr>
+          <a:xfrm>
+            <a:off x="365760" y="1783080"/>
+            <a:ext cx="4846320" cy="4617720"/>
+          </a:xfrm>
+          <a:prstGeom prst="rect">
+            <a:avLst/>
+          </a:prstGeom>
+          <a:noFill/>
+          <a:ln/>
+        </p:spPr>
+        <p:txBody>
+          <a:bodyPr wrap="square" lIns="0" tIns="0" rIns="0" bIns="0" rtlCol="0" anchor="t"/>
+          <a:lstStyle/>
+          <a:p>
+            <a:pPr algn="l" indent="0" marL="0">
+              <a:spcAft>
+                <a:spcPts val="800"/>
+              </a:spcAft>
+              <a:buNone/>
+            </a:pPr>
+            <a:r>
+              <a:rPr lang="en-US" sz="3600" i="1" dirty="0">
+                <a:solidFill>
+                  <a:srgbClr val="111111"/>
+                </a:solidFill>
+                <a:latin typeface="Times New Roman" pitchFamily="34" charset="0"/>
+                <a:ea typeface="Times New Roman" pitchFamily="34" charset="-122"/>
+                <a:cs typeface="Times New Roman" pitchFamily="34" charset="-120"/>
+              </a:rPr>
+              <a:t>Coasts are protected with the following strategies:</a:t>
+            </a:r>
+            <a:endParaRPr lang="en-US" sz="3600" dirty="0"/>
+          </a:p>
+          <a:p>
+            <a:pPr algn="l" indent="0" marL="0">
+              <a:spcAft>
+                <a:spcPts val="800"/>
+              </a:spcAft>
+              <a:buNone/>
+            </a:pPr>
+            <a:r>
+              <a:rPr lang="en-US" sz="3600" b="1" dirty="0">
+                <a:solidFill>
+                  <a:srgbClr val="111111"/>
+                </a:solidFill>
+                <a:latin typeface="Times New Roman" pitchFamily="34" charset="0"/>
+                <a:ea typeface="Times New Roman" pitchFamily="34" charset="-122"/>
+                <a:cs typeface="Times New Roman" pitchFamily="34" charset="-120"/>
+              </a:rPr>
+              <a:t>Sea walls: </a:t>
+            </a:r>
+            <a:pPr algn="l" indent="0" marL="0">
+              <a:spcAft>
+                <a:spcPts val="800"/>
+              </a:spcAft>
+              <a:buNone/>
+            </a:pPr>
+            <a:r>
+              <a:rPr lang="en-US" sz="3600" dirty="0">
+                <a:solidFill>
+                  <a:srgbClr val="111111"/>
+                </a:solidFill>
+                <a:latin typeface="Times New Roman" pitchFamily="34" charset="0"/>
+                <a:ea typeface="Times New Roman" pitchFamily="34" charset="-122"/>
+                <a:cs typeface="Times New Roman" pitchFamily="34" charset="-120"/>
+              </a:rPr>
+              <a:t>They are strong walls that stop waves from reaching the land.</a:t>
+            </a:r>
+            <a:endParaRPr lang="en-US" sz="3600" dirty="0"/>
           </a:p>
         </p:txBody>
       </p:sp>
       <p:pic>
         <p:nvPicPr>
-          <p:cNvPr id="3" name="Image 0" descr="/home/claude/f4/img/minesec_sheet.png">    </p:cNvPr>
+          <p:cNvPr id="5" name="Image 0" descr="/home/claude/f4/img/v2/coastal_defence_big.png">    </p:cNvPr>
           <p:cNvPicPr>
             <a:picLocks noChangeAspect="1"/>
           </p:cNvPicPr>
@@ -13733,8 +14738,8 @@
         </p:blipFill>
         <p:spPr>
           <a:xfrm>
-            <a:off x="0" y="658368"/>
-            <a:ext cx="5120640" cy="5833872"/>
+            <a:off x="5349240" y="2617506"/>
+            <a:ext cx="6659575" cy="2601397"/>
           </a:xfrm>
           <a:prstGeom prst="rect">
             <a:avLst/>
@@ -13743,14 +14748,14 @@
       </p:pic>
       <p:sp>
         <p:nvSpPr>
-          <p:cNvPr id="4" name="Text 1"/>
+          <p:cNvPr id="6" name="Text 3"/>
           <p:cNvSpPr/>
           <p:nvPr/>
         </p:nvSpPr>
         <p:spPr>
           <a:xfrm>
-            <a:off x="5349240" y="1005840"/>
-            <a:ext cx="6522415" cy="731520"/>
+            <a:off x="5349240" y="6089904"/>
+            <a:ext cx="6659575" cy="347472"/>
           </a:xfrm>
           <a:prstGeom prst="rect">
             <a:avLst/>
@@ -13759,68 +14764,24 @@
           <a:ln/>
         </p:spPr>
         <p:txBody>
-          <a:bodyPr wrap="square" lIns="0" tIns="0" rIns="0" bIns="0" rtlCol="0" anchor="ctr">
-            <a:normAutofit/>
-          </a:bodyPr>
+          <a:bodyPr wrap="square" lIns="0" tIns="0" rIns="0" bIns="0" rtlCol="0" anchor="ctr"/>
           <a:lstStyle/>
           <a:p>
             <a:pPr algn="ctr" indent="0" marL="0">
               <a:buNone/>
             </a:pPr>
             <a:r>
-              <a:rPr lang="en-US" sz="3600" b="1" dirty="0">
-                <a:solidFill>
-                  <a:srgbClr val="990011"/>
+              <a:rPr lang="en-US" sz="1600" i="1" dirty="0">
+                <a:solidFill>
+                  <a:srgbClr val="555555"/>
                 </a:solidFill>
                 <a:latin typeface="Times New Roman" pitchFamily="34" charset="0"/>
                 <a:ea typeface="Times New Roman" pitchFamily="34" charset="-122"/>
                 <a:cs typeface="Times New Roman" pitchFamily="34" charset="-120"/>
               </a:rPr>
-              <a:t>Evaluation 2</a:t>
-            </a:r>
-            <a:endParaRPr lang="en-US" sz="3600" dirty="0"/>
-          </a:p>
-        </p:txBody>
-      </p:sp>
-      <p:sp>
-        <p:nvSpPr>
-          <p:cNvPr id="5" name="Text 2"/>
-          <p:cNvSpPr/>
-          <p:nvPr/>
-        </p:nvSpPr>
-        <p:spPr>
-          <a:xfrm>
-            <a:off x="5349240" y="1783080"/>
-            <a:ext cx="6522415" cy="4663440"/>
-          </a:xfrm>
-          <a:prstGeom prst="rect">
-            <a:avLst/>
-          </a:prstGeom>
-          <a:noFill/>
-          <a:ln/>
-        </p:spPr>
-        <p:txBody>
-          <a:bodyPr wrap="square" lIns="0" tIns="0" rIns="0" bIns="0" rtlCol="0" anchor="t"/>
-          <a:lstStyle/>
-          <a:p>
-            <a:pPr algn="l" indent="0" marL="0">
-              <a:spcAft>
-                <a:spcPts val="800"/>
-              </a:spcAft>
-              <a:buNone/>
-            </a:pPr>
-            <a:r>
-              <a:rPr lang="en-US" sz="4000" dirty="0">
-                <a:solidFill>
-                  <a:srgbClr val="111111"/>
-                </a:solidFill>
-                <a:latin typeface="Times New Roman" pitchFamily="34" charset="0"/>
-                <a:ea typeface="Times New Roman" pitchFamily="34" charset="-122"/>
-                <a:cs typeface="Times New Roman" pitchFamily="34" charset="-120"/>
-              </a:rPr>
-              <a:t>Give two ways to protect the coast.</a:t>
-            </a:r>
-            <a:endParaRPr lang="en-US" sz="4000" dirty="0"/>
+              <a:t>Illustration: a sea wall and groynes</a:t>
+            </a:r>
+            <a:endParaRPr lang="en-US" sz="1600" dirty="0"/>
           </a:p>
         </p:txBody>
       </p:sp>
@@ -13930,15 +14891,115 @@
                 <a:ea typeface="Calibri" pitchFamily="34" charset="-122"/>
                 <a:cs typeface="Calibri" pitchFamily="34" charset="-120"/>
               </a:rPr>
-              <a:t>FORMATIVE EVALUATION</a:t>
+              <a:t>BOARD SUMMARY</a:t>
             </a:r>
             <a:endParaRPr lang="en-US" sz="1400" dirty="0"/>
+          </a:p>
+        </p:txBody>
+      </p:sp>
+      <p:sp>
+        <p:nvSpPr>
+          <p:cNvPr id="3" name="Text 1"/>
+          <p:cNvSpPr/>
+          <p:nvPr/>
+        </p:nvSpPr>
+        <p:spPr>
+          <a:xfrm>
+            <a:off x="365760" y="1005840"/>
+            <a:ext cx="11460175" cy="731520"/>
+          </a:xfrm>
+          <a:prstGeom prst="rect">
+            <a:avLst/>
+          </a:prstGeom>
+          <a:noFill/>
+          <a:ln/>
+        </p:spPr>
+        <p:txBody>
+          <a:bodyPr wrap="square" lIns="0" tIns="0" rIns="0" bIns="0" rtlCol="0" anchor="ctr">
+            <a:normAutofit/>
+          </a:bodyPr>
+          <a:lstStyle/>
+          <a:p>
+            <a:pPr algn="ctr" indent="0" marL="0">
+              <a:buNone/>
+            </a:pPr>
+            <a:r>
+              <a:rPr lang="en-US" sz="3600" b="1" dirty="0">
+                <a:solidFill>
+                  <a:srgbClr val="990011"/>
+                </a:solidFill>
+                <a:latin typeface="Times New Roman" pitchFamily="34" charset="0"/>
+                <a:ea typeface="Times New Roman" pitchFamily="34" charset="-122"/>
+                <a:cs typeface="Times New Roman" pitchFamily="34" charset="-120"/>
+              </a:rPr>
+              <a:t>3. Coastal Management Strategies</a:t>
+            </a:r>
+            <a:endParaRPr lang="en-US" sz="3600" dirty="0"/>
+          </a:p>
+        </p:txBody>
+      </p:sp>
+      <p:sp>
+        <p:nvSpPr>
+          <p:cNvPr id="4" name="Text 2"/>
+          <p:cNvSpPr/>
+          <p:nvPr/>
+        </p:nvSpPr>
+        <p:spPr>
+          <a:xfrm>
+            <a:off x="365760" y="1783080"/>
+            <a:ext cx="4846320" cy="4617720"/>
+          </a:xfrm>
+          <a:prstGeom prst="rect">
+            <a:avLst/>
+          </a:prstGeom>
+          <a:noFill/>
+          <a:ln/>
+        </p:spPr>
+        <p:txBody>
+          <a:bodyPr wrap="square" lIns="0" tIns="0" rIns="0" bIns="0" rtlCol="0" anchor="t"/>
+          <a:lstStyle/>
+          <a:p>
+            <a:pPr algn="l" indent="0" marL="0">
+              <a:spcAft>
+                <a:spcPts val="800"/>
+              </a:spcAft>
+              <a:buNone/>
+            </a:pPr>
+            <a:r>
+              <a:rPr lang="en-US" sz="3600" b="1" dirty="0">
+                <a:solidFill>
+                  <a:srgbClr val="111111"/>
+                </a:solidFill>
+                <a:latin typeface="Times New Roman" pitchFamily="34" charset="0"/>
+                <a:ea typeface="Times New Roman" pitchFamily="34" charset="-122"/>
+                <a:cs typeface="Times New Roman" pitchFamily="34" charset="-120"/>
+              </a:rPr>
+              <a:t>Groynes: </a:t>
+            </a:r>
+            <a:pPr algn="l" indent="0" marL="0">
+              <a:spcAft>
+                <a:spcPts val="800"/>
+              </a:spcAft>
+              <a:buNone/>
+            </a:pPr>
+            <a:r>
+              <a:rPr lang="en-US" sz="3600" dirty="0">
+                <a:solidFill>
+                  <a:srgbClr val="111111"/>
+                </a:solidFill>
+                <a:latin typeface="Times New Roman" pitchFamily="34" charset="0"/>
+                <a:ea typeface="Times New Roman" pitchFamily="34" charset="-122"/>
+                <a:cs typeface="Times New Roman" pitchFamily="34" charset="-120"/>
+              </a:rPr>
+              <a:t>They are low walls built across a beach to trap the sand moved by longshore drift.</a:t>
+            </a:r>
+            <a:endParaRPr lang="en-US" sz="3600" dirty="0"/>
           </a:p>
         </p:txBody>
       </p:sp>
       <p:pic>
         <p:nvPicPr>
-          <p:cNvPr id="3" name="Image 0" descr="/home/claude/f4/img/minesec_sheet.png">    </p:cNvPr>
+          <p:cNvPr id="5" name="Image 0" descr="/home/claude/f4/img/v2/f4_groynes.jpg">    </p:cNvPr>
           <p:cNvPicPr>
             <a:picLocks noChangeAspect="1"/>
           </p:cNvPicPr>
@@ -13952,8 +15013,8 @@
         </p:blipFill>
         <p:spPr>
           <a:xfrm>
-            <a:off x="0" y="658368"/>
-            <a:ext cx="5120640" cy="5833872"/>
+            <a:off x="5349240" y="2071212"/>
+            <a:ext cx="6659575" cy="3693983"/>
           </a:xfrm>
           <a:prstGeom prst="rect">
             <a:avLst/>
@@ -13962,14 +15023,14 @@
       </p:pic>
       <p:sp>
         <p:nvSpPr>
-          <p:cNvPr id="4" name="Text 1"/>
+          <p:cNvPr id="6" name="Text 3"/>
           <p:cNvSpPr/>
           <p:nvPr/>
         </p:nvSpPr>
         <p:spPr>
           <a:xfrm>
-            <a:off x="5349240" y="1005840"/>
-            <a:ext cx="6522415" cy="731520"/>
+            <a:off x="5349240" y="6089904"/>
+            <a:ext cx="6659575" cy="347472"/>
           </a:xfrm>
           <a:prstGeom prst="rect">
             <a:avLst/>
@@ -13978,68 +15039,24 @@
           <a:ln/>
         </p:spPr>
         <p:txBody>
-          <a:bodyPr wrap="square" lIns="0" tIns="0" rIns="0" bIns="0" rtlCol="0" anchor="ctr">
-            <a:normAutofit/>
-          </a:bodyPr>
+          <a:bodyPr wrap="square" lIns="0" tIns="0" rIns="0" bIns="0" rtlCol="0" anchor="ctr"/>
           <a:lstStyle/>
           <a:p>
             <a:pPr algn="ctr" indent="0" marL="0">
               <a:buNone/>
             </a:pPr>
             <a:r>
-              <a:rPr lang="en-US" sz="3600" b="1" dirty="0">
-                <a:solidFill>
-                  <a:srgbClr val="990011"/>
+              <a:rPr lang="en-US" sz="1600" i="1" dirty="0">
+                <a:solidFill>
+                  <a:srgbClr val="555555"/>
                 </a:solidFill>
                 <a:latin typeface="Times New Roman" pitchFamily="34" charset="0"/>
                 <a:ea typeface="Times New Roman" pitchFamily="34" charset="-122"/>
                 <a:cs typeface="Times New Roman" pitchFamily="34" charset="-120"/>
               </a:rPr>
-              <a:t>Expected Answer</a:t>
-            </a:r>
-            <a:endParaRPr lang="en-US" sz="3600" dirty="0"/>
-          </a:p>
-        </p:txBody>
-      </p:sp>
-      <p:sp>
-        <p:nvSpPr>
-          <p:cNvPr id="5" name="Text 2"/>
-          <p:cNvSpPr/>
-          <p:nvPr/>
-        </p:nvSpPr>
-        <p:spPr>
-          <a:xfrm>
-            <a:off x="5349240" y="1783080"/>
-            <a:ext cx="6522415" cy="4663440"/>
-          </a:xfrm>
-          <a:prstGeom prst="rect">
-            <a:avLst/>
-          </a:prstGeom>
-          <a:noFill/>
-          <a:ln/>
-        </p:spPr>
-        <p:txBody>
-          <a:bodyPr wrap="square" lIns="0" tIns="0" rIns="0" bIns="0" rtlCol="0" anchor="t"/>
-          <a:lstStyle/>
-          <a:p>
-            <a:pPr algn="l" indent="0" marL="0">
-              <a:spcAft>
-                <a:spcPts val="800"/>
-              </a:spcAft>
-              <a:buNone/>
-            </a:pPr>
-            <a:r>
-              <a:rPr lang="en-US" sz="4000" dirty="0">
-                <a:solidFill>
-                  <a:srgbClr val="111111"/>
-                </a:solidFill>
-                <a:latin typeface="Times New Roman" pitchFamily="34" charset="0"/>
-                <a:ea typeface="Times New Roman" pitchFamily="34" charset="-122"/>
-                <a:cs typeface="Times New Roman" pitchFamily="34" charset="-120"/>
-              </a:rPr>
-              <a:t>Sea walls and groynes (also mangroves).</a:t>
-            </a:r>
-            <a:endParaRPr lang="en-US" sz="4000" dirty="0"/>
+              <a:t>Illustration: groynes</a:t>
+            </a:r>
+            <a:endParaRPr lang="en-US" sz="1600" dirty="0"/>
           </a:p>
         </p:txBody>
       </p:sp>
@@ -14149,7 +15166,7 @@
                 <a:ea typeface="Calibri" pitchFamily="34" charset="-122"/>
                 <a:cs typeface="Calibri" pitchFamily="34" charset="-120"/>
               </a:rPr>
-              <a:t>REMEDIATION</a:t>
+              <a:t>BOARD SUMMARY</a:t>
             </a:r>
             <a:endParaRPr lang="en-US" sz="1400" dirty="0"/>
           </a:p>
@@ -14172,7 +15189,7 @@
         <p:spPr>
           <a:xfrm>
             <a:off x="0" y="658368"/>
-            <a:ext cx="2468880" cy="5833872"/>
+            <a:ext cx="5120640" cy="5833872"/>
           </a:xfrm>
           <a:prstGeom prst="rect">
             <a:avLst/>
@@ -14187,8 +15204,8 @@
         </p:nvSpPr>
         <p:spPr>
           <a:xfrm>
-            <a:off x="2697480" y="1005840"/>
-            <a:ext cx="9174175" cy="731520"/>
+            <a:off x="5349240" y="1005840"/>
+            <a:ext cx="6522415" cy="731520"/>
           </a:xfrm>
           <a:prstGeom prst="rect">
             <a:avLst/>
@@ -14214,7 +15231,7 @@
                 <a:ea typeface="Times New Roman" pitchFamily="34" charset="-122"/>
                 <a:cs typeface="Times New Roman" pitchFamily="34" charset="-120"/>
               </a:rPr>
-              <a:t>Remediation</a:t>
+              <a:t>3. Coastal Management Strategies</a:t>
             </a:r>
             <a:endParaRPr lang="en-US" sz="3600" dirty="0"/>
           </a:p>
@@ -14228,8 +15245,8 @@
         </p:nvSpPr>
         <p:spPr>
           <a:xfrm>
-            <a:off x="2697480" y="1783080"/>
-            <a:ext cx="9174175" cy="4663440"/>
+            <a:off x="5349240" y="1783080"/>
+            <a:ext cx="6522415" cy="4663440"/>
           </a:xfrm>
           <a:prstGeom prst="rect">
             <a:avLst/>
@@ -14256,18 +15273,13 @@
                 <a:ea typeface="Times New Roman" pitchFamily="34" charset="-122"/>
                 <a:cs typeface="Times New Roman" pitchFamily="34" charset="-120"/>
               </a:rPr>
-              <a:t>Fill in the blanks:</a:t>
-            </a:r>
-            <a:endParaRPr lang="en-US" sz="4000" dirty="0"/>
-          </a:p>
-          <a:p>
-            <a:pPr algn="l" marL="342900" indent="-342900">
+              <a:t>Rock armour and sandbanks: </a:t>
+            </a:r>
+            <a:pPr algn="l" indent="0" marL="0">
               <a:spcAft>
                 <a:spcPts val="800"/>
               </a:spcAft>
-              <a:buSzPct val="100000"/>
-              <a:buFont typeface="+mj-lt"/>
-              <a:buAutoNum type="arabicPeriod" startAt="1"/>
+              <a:buNone/>
             </a:pPr>
             <a:r>
               <a:rPr lang="en-US" sz="4000" dirty="0">
@@ -14278,51 +15290,7 @@
                 <a:ea typeface="Times New Roman" pitchFamily="34" charset="-122"/>
                 <a:cs typeface="Times New Roman" pitchFamily="34" charset="-120"/>
               </a:rPr>
-              <a:t>A place where ships load goods is a ______.</a:t>
-            </a:r>
-            <a:endParaRPr lang="en-US" sz="4000" dirty="0"/>
-          </a:p>
-          <a:p>
-            <a:pPr algn="l" marL="342900" indent="-342900">
-              <a:spcAft>
-                <a:spcPts val="800"/>
-              </a:spcAft>
-              <a:buSzPct val="100000"/>
-              <a:buFont typeface="+mj-lt"/>
-              <a:buAutoNum type="arabicPeriod" startAt="1"/>
-            </a:pPr>
-            <a:r>
-              <a:rPr lang="en-US" sz="4000" dirty="0">
-                <a:solidFill>
-                  <a:srgbClr val="111111"/>
-                </a:solidFill>
-                <a:latin typeface="Times New Roman" pitchFamily="34" charset="0"/>
-                <a:ea typeface="Times New Roman" pitchFamily="34" charset="-122"/>
-                <a:cs typeface="Times New Roman" pitchFamily="34" charset="-120"/>
-              </a:rPr>
-              <a:t>A low wall across a beach is a ______.</a:t>
-            </a:r>
-            <a:endParaRPr lang="en-US" sz="4000" dirty="0"/>
-          </a:p>
-          <a:p>
-            <a:pPr algn="l" marL="342900" indent="-342900">
-              <a:spcAft>
-                <a:spcPts val="800"/>
-              </a:spcAft>
-              <a:buSzPct val="100000"/>
-              <a:buFont typeface="+mj-lt"/>
-              <a:buAutoNum type="arabicPeriod" startAt="1"/>
-            </a:pPr>
-            <a:r>
-              <a:rPr lang="en-US" sz="4000" dirty="0">
-                <a:solidFill>
-                  <a:srgbClr val="111111"/>
-                </a:solidFill>
-                <a:latin typeface="Times New Roman" pitchFamily="34" charset="0"/>
-                <a:ea typeface="Times New Roman" pitchFamily="34" charset="-122"/>
-                <a:cs typeface="Times New Roman" pitchFamily="34" charset="-120"/>
-              </a:rPr>
-              <a:t>The wearing away of the coast is coastal ______.</a:t>
+              <a:t>Large rocks and banks of sand are placed in front of the coast to break the waves.</a:t>
             </a:r>
             <a:endParaRPr lang="en-US" sz="4000" dirty="0"/>
           </a:p>
@@ -14673,15 +15641,115 @@
                 <a:ea typeface="Calibri" pitchFamily="34" charset="-122"/>
                 <a:cs typeface="Calibri" pitchFamily="34" charset="-120"/>
               </a:rPr>
-              <a:t>HOMEWORK</a:t>
+              <a:t>BOARD SUMMARY</a:t>
             </a:r>
             <a:endParaRPr lang="en-US" sz="1400" dirty="0"/>
+          </a:p>
+        </p:txBody>
+      </p:sp>
+      <p:sp>
+        <p:nvSpPr>
+          <p:cNvPr id="3" name="Text 1"/>
+          <p:cNvSpPr/>
+          <p:nvPr/>
+        </p:nvSpPr>
+        <p:spPr>
+          <a:xfrm>
+            <a:off x="365760" y="1005840"/>
+            <a:ext cx="11460175" cy="731520"/>
+          </a:xfrm>
+          <a:prstGeom prst="rect">
+            <a:avLst/>
+          </a:prstGeom>
+          <a:noFill/>
+          <a:ln/>
+        </p:spPr>
+        <p:txBody>
+          <a:bodyPr wrap="square" lIns="0" tIns="0" rIns="0" bIns="0" rtlCol="0" anchor="ctr">
+            <a:normAutofit/>
+          </a:bodyPr>
+          <a:lstStyle/>
+          <a:p>
+            <a:pPr algn="ctr" indent="0" marL="0">
+              <a:buNone/>
+            </a:pPr>
+            <a:r>
+              <a:rPr lang="en-US" sz="3600" b="1" dirty="0">
+                <a:solidFill>
+                  <a:srgbClr val="990011"/>
+                </a:solidFill>
+                <a:latin typeface="Times New Roman" pitchFamily="34" charset="0"/>
+                <a:ea typeface="Times New Roman" pitchFamily="34" charset="-122"/>
+                <a:cs typeface="Times New Roman" pitchFamily="34" charset="-120"/>
+              </a:rPr>
+              <a:t>3. Coastal Management Strategies</a:t>
+            </a:r>
+            <a:endParaRPr lang="en-US" sz="3600" dirty="0"/>
+          </a:p>
+        </p:txBody>
+      </p:sp>
+      <p:sp>
+        <p:nvSpPr>
+          <p:cNvPr id="4" name="Text 2"/>
+          <p:cNvSpPr/>
+          <p:nvPr/>
+        </p:nvSpPr>
+        <p:spPr>
+          <a:xfrm>
+            <a:off x="365760" y="1783080"/>
+            <a:ext cx="4846320" cy="4617720"/>
+          </a:xfrm>
+          <a:prstGeom prst="rect">
+            <a:avLst/>
+          </a:prstGeom>
+          <a:noFill/>
+          <a:ln/>
+        </p:spPr>
+        <p:txBody>
+          <a:bodyPr wrap="square" lIns="0" tIns="0" rIns="0" bIns="0" rtlCol="0" anchor="t"/>
+          <a:lstStyle/>
+          <a:p>
+            <a:pPr algn="l" indent="0" marL="0">
+              <a:spcAft>
+                <a:spcPts val="800"/>
+              </a:spcAft>
+              <a:buNone/>
+            </a:pPr>
+            <a:r>
+              <a:rPr lang="en-US" sz="3600" b="1" dirty="0">
+                <a:solidFill>
+                  <a:srgbClr val="111111"/>
+                </a:solidFill>
+                <a:latin typeface="Times New Roman" pitchFamily="34" charset="0"/>
+                <a:ea typeface="Times New Roman" pitchFamily="34" charset="-122"/>
+                <a:cs typeface="Times New Roman" pitchFamily="34" charset="-120"/>
+              </a:rPr>
+              <a:t>Mangroves and trees: </a:t>
+            </a:r>
+            <a:pPr algn="l" indent="0" marL="0">
+              <a:spcAft>
+                <a:spcPts val="800"/>
+              </a:spcAft>
+              <a:buNone/>
+            </a:pPr>
+            <a:r>
+              <a:rPr lang="en-US" sz="3600" dirty="0">
+                <a:solidFill>
+                  <a:srgbClr val="111111"/>
+                </a:solidFill>
+                <a:latin typeface="Times New Roman" pitchFamily="34" charset="0"/>
+                <a:ea typeface="Times New Roman" pitchFamily="34" charset="-122"/>
+                <a:cs typeface="Times New Roman" pitchFamily="34" charset="-120"/>
+              </a:rPr>
+              <a:t>Mangroves and trees reduce the force of waves and hold the soil.</a:t>
+            </a:r>
+            <a:endParaRPr lang="en-US" sz="3600" dirty="0"/>
           </a:p>
         </p:txBody>
       </p:sp>
       <p:pic>
         <p:nvPicPr>
-          <p:cNvPr id="3" name="Image 0" descr="/home/claude/f4/img/minesec_sheet.png">    </p:cNvPr>
+          <p:cNvPr id="5" name="Image 0" descr="/home/claude/f4/img/v2/lsa_mangrove.jpg">    </p:cNvPr>
           <p:cNvPicPr>
             <a:picLocks noChangeAspect="1"/>
           </p:cNvPicPr>
@@ -14695,8 +15763,8 @@
         </p:blipFill>
         <p:spPr>
           <a:xfrm>
-            <a:off x="0" y="658368"/>
-            <a:ext cx="5120640" cy="5833872"/>
+            <a:off x="5349240" y="2070259"/>
+            <a:ext cx="6659575" cy="3695890"/>
           </a:xfrm>
           <a:prstGeom prst="rect">
             <a:avLst/>
@@ -14705,14 +15773,14 @@
       </p:pic>
       <p:sp>
         <p:nvSpPr>
-          <p:cNvPr id="4" name="Text 1"/>
+          <p:cNvPr id="6" name="Text 3"/>
           <p:cNvSpPr/>
           <p:nvPr/>
         </p:nvSpPr>
         <p:spPr>
           <a:xfrm>
-            <a:off x="5349240" y="1005840"/>
-            <a:ext cx="6522415" cy="731520"/>
+            <a:off x="5349240" y="6089904"/>
+            <a:ext cx="6659575" cy="347472"/>
           </a:xfrm>
           <a:prstGeom prst="rect">
             <a:avLst/>
@@ -14721,68 +15789,24 @@
           <a:ln/>
         </p:spPr>
         <p:txBody>
-          <a:bodyPr wrap="square" lIns="0" tIns="0" rIns="0" bIns="0" rtlCol="0" anchor="ctr">
-            <a:normAutofit/>
-          </a:bodyPr>
+          <a:bodyPr wrap="square" lIns="0" tIns="0" rIns="0" bIns="0" rtlCol="0" anchor="ctr"/>
           <a:lstStyle/>
           <a:p>
             <a:pPr algn="ctr" indent="0" marL="0">
               <a:buNone/>
             </a:pPr>
             <a:r>
-              <a:rPr lang="en-US" sz="3600" b="1" dirty="0">
-                <a:solidFill>
-                  <a:srgbClr val="990011"/>
+              <a:rPr lang="en-US" sz="1600" i="1" dirty="0">
+                <a:solidFill>
+                  <a:srgbClr val="555555"/>
                 </a:solidFill>
                 <a:latin typeface="Times New Roman" pitchFamily="34" charset="0"/>
                 <a:ea typeface="Times New Roman" pitchFamily="34" charset="-122"/>
                 <a:cs typeface="Times New Roman" pitchFamily="34" charset="-120"/>
               </a:rPr>
-              <a:t>Homework</a:t>
-            </a:r>
-            <a:endParaRPr lang="en-US" sz="3600" dirty="0"/>
-          </a:p>
-        </p:txBody>
-      </p:sp>
-      <p:sp>
-        <p:nvSpPr>
-          <p:cNvPr id="5" name="Text 2"/>
-          <p:cNvSpPr/>
-          <p:nvPr/>
-        </p:nvSpPr>
-        <p:spPr>
-          <a:xfrm>
-            <a:off x="5349240" y="1783080"/>
-            <a:ext cx="6522415" cy="4663440"/>
-          </a:xfrm>
-          <a:prstGeom prst="rect">
-            <a:avLst/>
-          </a:prstGeom>
-          <a:noFill/>
-          <a:ln/>
-        </p:spPr>
-        <p:txBody>
-          <a:bodyPr wrap="square" lIns="0" tIns="0" rIns="0" bIns="0" rtlCol="0" anchor="t"/>
-          <a:lstStyle/>
-          <a:p>
-            <a:pPr algn="l" indent="0" marL="0">
-              <a:spcAft>
-                <a:spcPts val="800"/>
-              </a:spcAft>
-              <a:buNone/>
-            </a:pPr>
-            <a:r>
-              <a:rPr lang="en-US" sz="4000" dirty="0">
-                <a:solidFill>
-                  <a:srgbClr val="111111"/>
-                </a:solidFill>
-                <a:latin typeface="Times New Roman" pitchFamily="34" charset="0"/>
-                <a:ea typeface="Times New Roman" pitchFamily="34" charset="-122"/>
-                <a:cs typeface="Times New Roman" pitchFamily="34" charset="-120"/>
-              </a:rPr>
-              <a:t>On a map of Africa in your atlas, find the Sahara, the Sahel and the Kalahari. Write in which part of Africa each one is located.</a:t>
-            </a:r>
-            <a:endParaRPr lang="en-US" sz="4000" dirty="0"/>
+              <a:t>Illustration: mangroves</a:t>
+            </a:r>
+            <a:endParaRPr lang="en-US" sz="1600" dirty="0"/>
           </a:p>
         </p:txBody>
       </p:sp>
@@ -14892,7 +15916,7 @@
                 <a:ea typeface="Calibri" pitchFamily="34" charset="-122"/>
                 <a:cs typeface="Calibri" pitchFamily="34" charset="-120"/>
               </a:rPr>
-              <a:t>NEXT LESSON</a:t>
+              <a:t>BOARD SUMMARY</a:t>
             </a:r>
             <a:endParaRPr lang="en-US" sz="1400" dirty="0"/>
           </a:p>
@@ -14957,7 +15981,7 @@
                 <a:ea typeface="Times New Roman" pitchFamily="34" charset="-122"/>
                 <a:cs typeface="Times New Roman" pitchFamily="34" charset="-120"/>
               </a:rPr>
-              <a:t>Next Lesson</a:t>
+              <a:t>3. Coastal Management Strategies</a:t>
             </a:r>
             <a:endParaRPr lang="en-US" sz="3600" dirty="0"/>
           </a:p>
@@ -14981,10 +16005,10 @@
           <a:ln/>
         </p:spPr>
         <p:txBody>
-          <a:bodyPr wrap="square" lIns="0" tIns="0" rIns="0" bIns="0" rtlCol="0" anchor="ctr"/>
-          <a:lstStyle/>
-          <a:p>
-            <a:pPr algn="ctr" indent="0" marL="0">
+          <a:bodyPr wrap="square" lIns="0" tIns="0" rIns="0" bIns="0" rtlCol="0" anchor="t"/>
+          <a:lstStyle/>
+          <a:p>
+            <a:pPr algn="l" indent="0" marL="0">
               <a:spcAft>
                 <a:spcPts val="800"/>
               </a:spcAft>
@@ -14999,27 +16023,24 @@
                 <a:ea typeface="Times New Roman" pitchFamily="34" charset="-122"/>
                 <a:cs typeface="Times New Roman" pitchFamily="34" charset="-120"/>
               </a:rPr>
-              <a:t>Our next lesson will be on:</a:t>
-            </a:r>
-            <a:endParaRPr lang="en-US" sz="4000" dirty="0"/>
-          </a:p>
-          <a:p>
-            <a:pPr algn="ctr" indent="0" marL="0">
+              <a:t>Regulations: </a:t>
+            </a:r>
+            <a:pPr algn="l" indent="0" marL="0">
               <a:spcAft>
                 <a:spcPts val="800"/>
               </a:spcAft>
               <a:buNone/>
             </a:pPr>
             <a:r>
-              <a:rPr lang="en-US" sz="4000" b="1" dirty="0">
-                <a:solidFill>
-                  <a:srgbClr val="990011"/>
+              <a:rPr lang="en-US" sz="4000" dirty="0">
+                <a:solidFill>
+                  <a:srgbClr val="111111"/>
                 </a:solidFill>
                 <a:latin typeface="Times New Roman" pitchFamily="34" charset="0"/>
                 <a:ea typeface="Times New Roman" pitchFamily="34" charset="-122"/>
                 <a:cs typeface="Times New Roman" pitchFamily="34" charset="-120"/>
               </a:rPr>
-              <a:t>Lesson 27: Semi-Arid and Desert Landscapes</a:t>
+              <a:t>Houses must be built far from the shore, and sand must not be removed from beaches.</a:t>
             </a:r>
             <a:endParaRPr lang="en-US" sz="4000" dirty="0"/>
           </a:p>
@@ -15131,6 +16152,1625 @@
                 <a:ea typeface="Calibri" pitchFamily="34" charset="-122"/>
                 <a:cs typeface="Calibri" pitchFamily="34" charset="-120"/>
               </a:rPr>
+              <a:t>FORMATIVE EVALUATION</a:t>
+            </a:r>
+            <a:endParaRPr lang="en-US" sz="1400" dirty="0"/>
+          </a:p>
+        </p:txBody>
+      </p:sp>
+      <p:pic>
+        <p:nvPicPr>
+          <p:cNvPr id="3" name="Image 0" descr="/home/claude/f4/img/minesec_sheet.png">    </p:cNvPr>
+          <p:cNvPicPr>
+            <a:picLocks noChangeAspect="1"/>
+          </p:cNvPicPr>
+          <p:nvPr/>
+        </p:nvPicPr>
+        <p:blipFill>
+          <a:blip r:embed="rId1"/>
+          <a:stretch>
+            <a:fillRect/>
+          </a:stretch>
+        </p:blipFill>
+        <p:spPr>
+          <a:xfrm>
+            <a:off x="0" y="658368"/>
+            <a:ext cx="5120640" cy="5833872"/>
+          </a:xfrm>
+          <a:prstGeom prst="rect">
+            <a:avLst/>
+          </a:prstGeom>
+        </p:spPr>
+      </p:pic>
+      <p:sp>
+        <p:nvSpPr>
+          <p:cNvPr id="4" name="Text 1"/>
+          <p:cNvSpPr/>
+          <p:nvPr/>
+        </p:nvSpPr>
+        <p:spPr>
+          <a:xfrm>
+            <a:off x="5349240" y="1005840"/>
+            <a:ext cx="6522415" cy="731520"/>
+          </a:xfrm>
+          <a:prstGeom prst="rect">
+            <a:avLst/>
+          </a:prstGeom>
+          <a:noFill/>
+          <a:ln/>
+        </p:spPr>
+        <p:txBody>
+          <a:bodyPr wrap="square" lIns="0" tIns="0" rIns="0" bIns="0" rtlCol="0" anchor="ctr">
+            <a:normAutofit/>
+          </a:bodyPr>
+          <a:lstStyle/>
+          <a:p>
+            <a:pPr algn="ctr" indent="0" marL="0">
+              <a:buNone/>
+            </a:pPr>
+            <a:r>
+              <a:rPr lang="en-US" sz="3600" b="1" dirty="0">
+                <a:solidFill>
+                  <a:srgbClr val="990011"/>
+                </a:solidFill>
+                <a:latin typeface="Times New Roman" pitchFamily="34" charset="0"/>
+                <a:ea typeface="Times New Roman" pitchFamily="34" charset="-122"/>
+                <a:cs typeface="Times New Roman" pitchFamily="34" charset="-120"/>
+              </a:rPr>
+              <a:t>Evaluation 1</a:t>
+            </a:r>
+            <a:endParaRPr lang="en-US" sz="3600" dirty="0"/>
+          </a:p>
+        </p:txBody>
+      </p:sp>
+      <p:sp>
+        <p:nvSpPr>
+          <p:cNvPr id="5" name="Text 2"/>
+          <p:cNvSpPr/>
+          <p:nvPr/>
+        </p:nvSpPr>
+        <p:spPr>
+          <a:xfrm>
+            <a:off x="5349240" y="1783080"/>
+            <a:ext cx="6522415" cy="4663440"/>
+          </a:xfrm>
+          <a:prstGeom prst="rect">
+            <a:avLst/>
+          </a:prstGeom>
+          <a:noFill/>
+          <a:ln/>
+        </p:spPr>
+        <p:txBody>
+          <a:bodyPr wrap="square" lIns="0" tIns="0" rIns="0" bIns="0" rtlCol="0" anchor="t"/>
+          <a:lstStyle/>
+          <a:p>
+            <a:pPr algn="l" indent="0" marL="0">
+              <a:spcAft>
+                <a:spcPts val="800"/>
+              </a:spcAft>
+              <a:buNone/>
+            </a:pPr>
+            <a:r>
+              <a:rPr lang="en-US" sz="4000" dirty="0">
+                <a:solidFill>
+                  <a:srgbClr val="111111"/>
+                </a:solidFill>
+                <a:latin typeface="Times New Roman" pitchFamily="34" charset="0"/>
+                <a:ea typeface="Times New Roman" pitchFamily="34" charset="-122"/>
+                <a:cs typeface="Times New Roman" pitchFamily="34" charset="-120"/>
+              </a:rPr>
+              <a:t>Name two ports of Cameroon.</a:t>
+            </a:r>
+            <a:endParaRPr lang="en-US" sz="4000" dirty="0"/>
+          </a:p>
+        </p:txBody>
+      </p:sp>
+      <p:sp>
+        <p:nvSpPr>
+          <p:cNvPr id="25" name="Slide Number Placeholder 0"/>
+          <p:cNvSpPr>
+            <a:spLocks noGrp="1"/>
+          </p:cNvSpPr>
+          <p:nvPr>
+            <p:ph type="sldNum" sz="quarter" idx="4294967295"/>
+          </p:nvPr>
+        </p:nvSpPr>
+        <p:spPr>
+          <a:xfrm>
+            <a:off x="27432" y="91440"/>
+            <a:ext cx="585216" cy="475488"/>
+          </a:xfrm>
+          <a:prstGeom prst="rect">
+            <a:avLst/>
+          </a:prstGeom>
+          <a:extLst>
+            <a:ext uri="{C572A759-6A51-4108-AA02-DFA0A04FC94B}">
+              <ma14:wrappingTextBoxFlag xmlns:ma14="http://schemas.microsoft.com/office/mac/drawingml/2011/main" val="0"/>
+            </a:ext>
+          </a:extLst>
+        </p:spPr>
+        <p:txBody>
+          <a:bodyPr/>
+          <a:lstStyle>
+            <a:lvl1pPr>
+              <a:defRPr sz="2000">
+                <a:solidFill>
+                  <a:srgbClr val="FFFFFF"/>
+                </a:solidFill>
+                <a:latin typeface="Calibri"/>
+                <a:ea typeface="Calibri"/>
+                <a:cs typeface="Calibri"/>
+              </a:defRPr>
+            </a:lvl1pPr>
+          </a:lstStyle>
+          <a:p>
+            <a:pPr algn="ctr"/>
+            <a:fld id="{F7021451-1387-4CA6-816F-3879F97B5CBC}" type="slidenum">
+              <a:rPr b="1" lang="en-US"/>
+              <a:t>42</a:t>
+            </a:fld>
+            <a:endParaRPr lang="en-US"/>
+          </a:p>
+        </p:txBody>
+      </p:sp>
+    </p:spTree>
+  </p:cSld>
+  <p:clrMapOvr>
+    <a:masterClrMapping/>
+  </p:clrMapOvr>
+</p:sld>
+</file>
+
+<file path=ppt/slides/slide43.xml><?xml version="1.0" encoding="utf-8"?>
+<p:sld xmlns:a="http://schemas.openxmlformats.org/drawingml/2006/main" xmlns:r="http://schemas.openxmlformats.org/officeDocument/2006/relationships" xmlns:p="http://schemas.openxmlformats.org/presentationml/2006/main">
+  <p:cSld name="Slide 43">
+    <p:spTree>
+      <p:nvGrpSpPr>
+        <p:cNvPr id="1" name=""/>
+        <p:cNvGrpSpPr/>
+        <p:nvPr/>
+      </p:nvGrpSpPr>
+      <p:grpSpPr>
+        <a:xfrm>
+          <a:off x="0" y="0"/>
+          <a:ext cx="0" cy="0"/>
+          <a:chOff x="0" y="0"/>
+          <a:chExt cx="0" cy="0"/>
+        </a:xfrm>
+      </p:grpSpPr>
+      <p:sp>
+        <p:nvSpPr>
+          <p:cNvPr id="2" name="Text 0"/>
+          <p:cNvSpPr/>
+          <p:nvPr/>
+        </p:nvSpPr>
+        <p:spPr>
+          <a:xfrm>
+            <a:off x="457200" y="713232"/>
+            <a:ext cx="11368735" cy="274320"/>
+          </a:xfrm>
+          <a:prstGeom prst="rect">
+            <a:avLst/>
+          </a:prstGeom>
+          <a:noFill/>
+          <a:ln/>
+        </p:spPr>
+        <p:txBody>
+          <a:bodyPr wrap="square" lIns="0" tIns="0" rIns="0" bIns="0" rtlCol="0" anchor="ctr"/>
+          <a:lstStyle/>
+          <a:p>
+            <a:pPr algn="r" indent="0" marL="0">
+              <a:buNone/>
+            </a:pPr>
+            <a:r>
+              <a:rPr lang="en-US" sz="1400" b="1" dirty="0">
+                <a:solidFill>
+                  <a:srgbClr val="1C3F6E"/>
+                </a:solidFill>
+                <a:latin typeface="Calibri" pitchFamily="34" charset="0"/>
+                <a:ea typeface="Calibri" pitchFamily="34" charset="-122"/>
+                <a:cs typeface="Calibri" pitchFamily="34" charset="-120"/>
+              </a:rPr>
+              <a:t>FORMATIVE EVALUATION</a:t>
+            </a:r>
+            <a:endParaRPr lang="en-US" sz="1400" dirty="0"/>
+          </a:p>
+        </p:txBody>
+      </p:sp>
+      <p:pic>
+        <p:nvPicPr>
+          <p:cNvPr id="3" name="Image 0" descr="/home/claude/f4/img/minesec_sheet.png">    </p:cNvPr>
+          <p:cNvPicPr>
+            <a:picLocks noChangeAspect="1"/>
+          </p:cNvPicPr>
+          <p:nvPr/>
+        </p:nvPicPr>
+        <p:blipFill>
+          <a:blip r:embed="rId1"/>
+          <a:stretch>
+            <a:fillRect/>
+          </a:stretch>
+        </p:blipFill>
+        <p:spPr>
+          <a:xfrm>
+            <a:off x="0" y="658368"/>
+            <a:ext cx="5120640" cy="5833872"/>
+          </a:xfrm>
+          <a:prstGeom prst="rect">
+            <a:avLst/>
+          </a:prstGeom>
+        </p:spPr>
+      </p:pic>
+      <p:sp>
+        <p:nvSpPr>
+          <p:cNvPr id="4" name="Text 1"/>
+          <p:cNvSpPr/>
+          <p:nvPr/>
+        </p:nvSpPr>
+        <p:spPr>
+          <a:xfrm>
+            <a:off x="5349240" y="1005840"/>
+            <a:ext cx="6522415" cy="731520"/>
+          </a:xfrm>
+          <a:prstGeom prst="rect">
+            <a:avLst/>
+          </a:prstGeom>
+          <a:noFill/>
+          <a:ln/>
+        </p:spPr>
+        <p:txBody>
+          <a:bodyPr wrap="square" lIns="0" tIns="0" rIns="0" bIns="0" rtlCol="0" anchor="ctr">
+            <a:normAutofit/>
+          </a:bodyPr>
+          <a:lstStyle/>
+          <a:p>
+            <a:pPr algn="ctr" indent="0" marL="0">
+              <a:buNone/>
+            </a:pPr>
+            <a:r>
+              <a:rPr lang="en-US" sz="3600" b="1" dirty="0">
+                <a:solidFill>
+                  <a:srgbClr val="990011"/>
+                </a:solidFill>
+                <a:latin typeface="Times New Roman" pitchFamily="34" charset="0"/>
+                <a:ea typeface="Times New Roman" pitchFamily="34" charset="-122"/>
+                <a:cs typeface="Times New Roman" pitchFamily="34" charset="-120"/>
+              </a:rPr>
+              <a:t>Expected Answer</a:t>
+            </a:r>
+            <a:endParaRPr lang="en-US" sz="3600" dirty="0"/>
+          </a:p>
+        </p:txBody>
+      </p:sp>
+      <p:sp>
+        <p:nvSpPr>
+          <p:cNvPr id="5" name="Text 2"/>
+          <p:cNvSpPr/>
+          <p:nvPr/>
+        </p:nvSpPr>
+        <p:spPr>
+          <a:xfrm>
+            <a:off x="5349240" y="1783080"/>
+            <a:ext cx="6522415" cy="4663440"/>
+          </a:xfrm>
+          <a:prstGeom prst="rect">
+            <a:avLst/>
+          </a:prstGeom>
+          <a:noFill/>
+          <a:ln/>
+        </p:spPr>
+        <p:txBody>
+          <a:bodyPr wrap="square" lIns="0" tIns="0" rIns="0" bIns="0" rtlCol="0" anchor="t"/>
+          <a:lstStyle/>
+          <a:p>
+            <a:pPr algn="l" indent="0" marL="0">
+              <a:spcAft>
+                <a:spcPts val="800"/>
+              </a:spcAft>
+              <a:buNone/>
+            </a:pPr>
+            <a:r>
+              <a:rPr lang="en-US" sz="4000" dirty="0">
+                <a:solidFill>
+                  <a:srgbClr val="111111"/>
+                </a:solidFill>
+                <a:latin typeface="Times New Roman" pitchFamily="34" charset="0"/>
+                <a:ea typeface="Times New Roman" pitchFamily="34" charset="-122"/>
+                <a:cs typeface="Times New Roman" pitchFamily="34" charset="-120"/>
+              </a:rPr>
+              <a:t>Douala and Kribi.</a:t>
+            </a:r>
+            <a:endParaRPr lang="en-US" sz="4000" dirty="0"/>
+          </a:p>
+        </p:txBody>
+      </p:sp>
+      <p:sp>
+        <p:nvSpPr>
+          <p:cNvPr id="25" name="Slide Number Placeholder 0"/>
+          <p:cNvSpPr>
+            <a:spLocks noGrp="1"/>
+          </p:cNvSpPr>
+          <p:nvPr>
+            <p:ph type="sldNum" sz="quarter" idx="4294967295"/>
+          </p:nvPr>
+        </p:nvSpPr>
+        <p:spPr>
+          <a:xfrm>
+            <a:off x="27432" y="91440"/>
+            <a:ext cx="585216" cy="475488"/>
+          </a:xfrm>
+          <a:prstGeom prst="rect">
+            <a:avLst/>
+          </a:prstGeom>
+          <a:extLst>
+            <a:ext uri="{C572A759-6A51-4108-AA02-DFA0A04FC94B}">
+              <ma14:wrappingTextBoxFlag xmlns:ma14="http://schemas.microsoft.com/office/mac/drawingml/2011/main" val="0"/>
+            </a:ext>
+          </a:extLst>
+        </p:spPr>
+        <p:txBody>
+          <a:bodyPr/>
+          <a:lstStyle>
+            <a:lvl1pPr>
+              <a:defRPr sz="2000">
+                <a:solidFill>
+                  <a:srgbClr val="FFFFFF"/>
+                </a:solidFill>
+                <a:latin typeface="Calibri"/>
+                <a:ea typeface="Calibri"/>
+                <a:cs typeface="Calibri"/>
+              </a:defRPr>
+            </a:lvl1pPr>
+          </a:lstStyle>
+          <a:p>
+            <a:pPr algn="ctr"/>
+            <a:fld id="{F7021451-1387-4CA6-816F-3879F97B5CBC}" type="slidenum">
+              <a:rPr b="1" lang="en-US"/>
+              <a:t>43</a:t>
+            </a:fld>
+            <a:endParaRPr lang="en-US"/>
+          </a:p>
+        </p:txBody>
+      </p:sp>
+    </p:spTree>
+  </p:cSld>
+  <p:clrMapOvr>
+    <a:masterClrMapping/>
+  </p:clrMapOvr>
+</p:sld>
+</file>
+
+<file path=ppt/slides/slide44.xml><?xml version="1.0" encoding="utf-8"?>
+<p:sld xmlns:a="http://schemas.openxmlformats.org/drawingml/2006/main" xmlns:r="http://schemas.openxmlformats.org/officeDocument/2006/relationships" xmlns:p="http://schemas.openxmlformats.org/presentationml/2006/main">
+  <p:cSld name="Slide 44">
+    <p:spTree>
+      <p:nvGrpSpPr>
+        <p:cNvPr id="1" name=""/>
+        <p:cNvGrpSpPr/>
+        <p:nvPr/>
+      </p:nvGrpSpPr>
+      <p:grpSpPr>
+        <a:xfrm>
+          <a:off x="0" y="0"/>
+          <a:ext cx="0" cy="0"/>
+          <a:chOff x="0" y="0"/>
+          <a:chExt cx="0" cy="0"/>
+        </a:xfrm>
+      </p:grpSpPr>
+      <p:sp>
+        <p:nvSpPr>
+          <p:cNvPr id="2" name="Text 0"/>
+          <p:cNvSpPr/>
+          <p:nvPr/>
+        </p:nvSpPr>
+        <p:spPr>
+          <a:xfrm>
+            <a:off x="457200" y="713232"/>
+            <a:ext cx="11368735" cy="274320"/>
+          </a:xfrm>
+          <a:prstGeom prst="rect">
+            <a:avLst/>
+          </a:prstGeom>
+          <a:noFill/>
+          <a:ln/>
+        </p:spPr>
+        <p:txBody>
+          <a:bodyPr wrap="square" lIns="0" tIns="0" rIns="0" bIns="0" rtlCol="0" anchor="ctr"/>
+          <a:lstStyle/>
+          <a:p>
+            <a:pPr algn="r" indent="0" marL="0">
+              <a:buNone/>
+            </a:pPr>
+            <a:r>
+              <a:rPr lang="en-US" sz="1400" b="1" dirty="0">
+                <a:solidFill>
+                  <a:srgbClr val="1C3F6E"/>
+                </a:solidFill>
+                <a:latin typeface="Calibri" pitchFamily="34" charset="0"/>
+                <a:ea typeface="Calibri" pitchFamily="34" charset="-122"/>
+                <a:cs typeface="Calibri" pitchFamily="34" charset="-120"/>
+              </a:rPr>
+              <a:t>FORMATIVE EVALUATION</a:t>
+            </a:r>
+            <a:endParaRPr lang="en-US" sz="1400" dirty="0"/>
+          </a:p>
+        </p:txBody>
+      </p:sp>
+      <p:pic>
+        <p:nvPicPr>
+          <p:cNvPr id="3" name="Image 0" descr="/home/claude/f4/img/minesec_sheet.png">    </p:cNvPr>
+          <p:cNvPicPr>
+            <a:picLocks noChangeAspect="1"/>
+          </p:cNvPicPr>
+          <p:nvPr/>
+        </p:nvPicPr>
+        <p:blipFill>
+          <a:blip r:embed="rId1"/>
+          <a:stretch>
+            <a:fillRect/>
+          </a:stretch>
+        </p:blipFill>
+        <p:spPr>
+          <a:xfrm>
+            <a:off x="0" y="658368"/>
+            <a:ext cx="5120640" cy="5833872"/>
+          </a:xfrm>
+          <a:prstGeom prst="rect">
+            <a:avLst/>
+          </a:prstGeom>
+        </p:spPr>
+      </p:pic>
+      <p:sp>
+        <p:nvSpPr>
+          <p:cNvPr id="4" name="Text 1"/>
+          <p:cNvSpPr/>
+          <p:nvPr/>
+        </p:nvSpPr>
+        <p:spPr>
+          <a:xfrm>
+            <a:off x="5349240" y="1005840"/>
+            <a:ext cx="6522415" cy="731520"/>
+          </a:xfrm>
+          <a:prstGeom prst="rect">
+            <a:avLst/>
+          </a:prstGeom>
+          <a:noFill/>
+          <a:ln/>
+        </p:spPr>
+        <p:txBody>
+          <a:bodyPr wrap="square" lIns="0" tIns="0" rIns="0" bIns="0" rtlCol="0" anchor="ctr">
+            <a:normAutofit/>
+          </a:bodyPr>
+          <a:lstStyle/>
+          <a:p>
+            <a:pPr algn="ctr" indent="0" marL="0">
+              <a:buNone/>
+            </a:pPr>
+            <a:r>
+              <a:rPr lang="en-US" sz="3600" b="1" dirty="0">
+                <a:solidFill>
+                  <a:srgbClr val="990011"/>
+                </a:solidFill>
+                <a:latin typeface="Times New Roman" pitchFamily="34" charset="0"/>
+                <a:ea typeface="Times New Roman" pitchFamily="34" charset="-122"/>
+                <a:cs typeface="Times New Roman" pitchFamily="34" charset="-120"/>
+              </a:rPr>
+              <a:t>Evaluation 2</a:t>
+            </a:r>
+            <a:endParaRPr lang="en-US" sz="3600" dirty="0"/>
+          </a:p>
+        </p:txBody>
+      </p:sp>
+      <p:sp>
+        <p:nvSpPr>
+          <p:cNvPr id="5" name="Text 2"/>
+          <p:cNvSpPr/>
+          <p:nvPr/>
+        </p:nvSpPr>
+        <p:spPr>
+          <a:xfrm>
+            <a:off x="5349240" y="1783080"/>
+            <a:ext cx="6522415" cy="4663440"/>
+          </a:xfrm>
+          <a:prstGeom prst="rect">
+            <a:avLst/>
+          </a:prstGeom>
+          <a:noFill/>
+          <a:ln/>
+        </p:spPr>
+        <p:txBody>
+          <a:bodyPr wrap="square" lIns="0" tIns="0" rIns="0" bIns="0" rtlCol="0" anchor="t"/>
+          <a:lstStyle/>
+          <a:p>
+            <a:pPr algn="l" indent="0" marL="0">
+              <a:spcAft>
+                <a:spcPts val="800"/>
+              </a:spcAft>
+              <a:buNone/>
+            </a:pPr>
+            <a:r>
+              <a:rPr lang="en-US" sz="4000" dirty="0">
+                <a:solidFill>
+                  <a:srgbClr val="111111"/>
+                </a:solidFill>
+                <a:latin typeface="Times New Roman" pitchFamily="34" charset="0"/>
+                <a:ea typeface="Times New Roman" pitchFamily="34" charset="-122"/>
+                <a:cs typeface="Times New Roman" pitchFamily="34" charset="-120"/>
+              </a:rPr>
+              <a:t>Give two ways to protect the coast.</a:t>
+            </a:r>
+            <a:endParaRPr lang="en-US" sz="4000" dirty="0"/>
+          </a:p>
+        </p:txBody>
+      </p:sp>
+      <p:sp>
+        <p:nvSpPr>
+          <p:cNvPr id="25" name="Slide Number Placeholder 0"/>
+          <p:cNvSpPr>
+            <a:spLocks noGrp="1"/>
+          </p:cNvSpPr>
+          <p:nvPr>
+            <p:ph type="sldNum" sz="quarter" idx="4294967295"/>
+          </p:nvPr>
+        </p:nvSpPr>
+        <p:spPr>
+          <a:xfrm>
+            <a:off x="27432" y="91440"/>
+            <a:ext cx="585216" cy="475488"/>
+          </a:xfrm>
+          <a:prstGeom prst="rect">
+            <a:avLst/>
+          </a:prstGeom>
+          <a:extLst>
+            <a:ext uri="{C572A759-6A51-4108-AA02-DFA0A04FC94B}">
+              <ma14:wrappingTextBoxFlag xmlns:ma14="http://schemas.microsoft.com/office/mac/drawingml/2011/main" val="0"/>
+            </a:ext>
+          </a:extLst>
+        </p:spPr>
+        <p:txBody>
+          <a:bodyPr/>
+          <a:lstStyle>
+            <a:lvl1pPr>
+              <a:defRPr sz="2000">
+                <a:solidFill>
+                  <a:srgbClr val="FFFFFF"/>
+                </a:solidFill>
+                <a:latin typeface="Calibri"/>
+                <a:ea typeface="Calibri"/>
+                <a:cs typeface="Calibri"/>
+              </a:defRPr>
+            </a:lvl1pPr>
+          </a:lstStyle>
+          <a:p>
+            <a:pPr algn="ctr"/>
+            <a:fld id="{F7021451-1387-4CA6-816F-3879F97B5CBC}" type="slidenum">
+              <a:rPr b="1" lang="en-US"/>
+              <a:t>44</a:t>
+            </a:fld>
+            <a:endParaRPr lang="en-US"/>
+          </a:p>
+        </p:txBody>
+      </p:sp>
+    </p:spTree>
+  </p:cSld>
+  <p:clrMapOvr>
+    <a:masterClrMapping/>
+  </p:clrMapOvr>
+</p:sld>
+</file>
+
+<file path=ppt/slides/slide45.xml><?xml version="1.0" encoding="utf-8"?>
+<p:sld xmlns:a="http://schemas.openxmlformats.org/drawingml/2006/main" xmlns:r="http://schemas.openxmlformats.org/officeDocument/2006/relationships" xmlns:p="http://schemas.openxmlformats.org/presentationml/2006/main">
+  <p:cSld name="Slide 45">
+    <p:spTree>
+      <p:nvGrpSpPr>
+        <p:cNvPr id="1" name=""/>
+        <p:cNvGrpSpPr/>
+        <p:nvPr/>
+      </p:nvGrpSpPr>
+      <p:grpSpPr>
+        <a:xfrm>
+          <a:off x="0" y="0"/>
+          <a:ext cx="0" cy="0"/>
+          <a:chOff x="0" y="0"/>
+          <a:chExt cx="0" cy="0"/>
+        </a:xfrm>
+      </p:grpSpPr>
+      <p:sp>
+        <p:nvSpPr>
+          <p:cNvPr id="2" name="Text 0"/>
+          <p:cNvSpPr/>
+          <p:nvPr/>
+        </p:nvSpPr>
+        <p:spPr>
+          <a:xfrm>
+            <a:off x="457200" y="713232"/>
+            <a:ext cx="11368735" cy="274320"/>
+          </a:xfrm>
+          <a:prstGeom prst="rect">
+            <a:avLst/>
+          </a:prstGeom>
+          <a:noFill/>
+          <a:ln/>
+        </p:spPr>
+        <p:txBody>
+          <a:bodyPr wrap="square" lIns="0" tIns="0" rIns="0" bIns="0" rtlCol="0" anchor="ctr"/>
+          <a:lstStyle/>
+          <a:p>
+            <a:pPr algn="r" indent="0" marL="0">
+              <a:buNone/>
+            </a:pPr>
+            <a:r>
+              <a:rPr lang="en-US" sz="1400" b="1" dirty="0">
+                <a:solidFill>
+                  <a:srgbClr val="1C3F6E"/>
+                </a:solidFill>
+                <a:latin typeface="Calibri" pitchFamily="34" charset="0"/>
+                <a:ea typeface="Calibri" pitchFamily="34" charset="-122"/>
+                <a:cs typeface="Calibri" pitchFamily="34" charset="-120"/>
+              </a:rPr>
+              <a:t>FORMATIVE EVALUATION</a:t>
+            </a:r>
+            <a:endParaRPr lang="en-US" sz="1400" dirty="0"/>
+          </a:p>
+        </p:txBody>
+      </p:sp>
+      <p:pic>
+        <p:nvPicPr>
+          <p:cNvPr id="3" name="Image 0" descr="/home/claude/f4/img/minesec_sheet.png">    </p:cNvPr>
+          <p:cNvPicPr>
+            <a:picLocks noChangeAspect="1"/>
+          </p:cNvPicPr>
+          <p:nvPr/>
+        </p:nvPicPr>
+        <p:blipFill>
+          <a:blip r:embed="rId1"/>
+          <a:stretch>
+            <a:fillRect/>
+          </a:stretch>
+        </p:blipFill>
+        <p:spPr>
+          <a:xfrm>
+            <a:off x="0" y="658368"/>
+            <a:ext cx="5120640" cy="5833872"/>
+          </a:xfrm>
+          <a:prstGeom prst="rect">
+            <a:avLst/>
+          </a:prstGeom>
+        </p:spPr>
+      </p:pic>
+      <p:sp>
+        <p:nvSpPr>
+          <p:cNvPr id="4" name="Text 1"/>
+          <p:cNvSpPr/>
+          <p:nvPr/>
+        </p:nvSpPr>
+        <p:spPr>
+          <a:xfrm>
+            <a:off x="5349240" y="1005840"/>
+            <a:ext cx="6522415" cy="731520"/>
+          </a:xfrm>
+          <a:prstGeom prst="rect">
+            <a:avLst/>
+          </a:prstGeom>
+          <a:noFill/>
+          <a:ln/>
+        </p:spPr>
+        <p:txBody>
+          <a:bodyPr wrap="square" lIns="0" tIns="0" rIns="0" bIns="0" rtlCol="0" anchor="ctr">
+            <a:normAutofit/>
+          </a:bodyPr>
+          <a:lstStyle/>
+          <a:p>
+            <a:pPr algn="ctr" indent="0" marL="0">
+              <a:buNone/>
+            </a:pPr>
+            <a:r>
+              <a:rPr lang="en-US" sz="3600" b="1" dirty="0">
+                <a:solidFill>
+                  <a:srgbClr val="990011"/>
+                </a:solidFill>
+                <a:latin typeface="Times New Roman" pitchFamily="34" charset="0"/>
+                <a:ea typeface="Times New Roman" pitchFamily="34" charset="-122"/>
+                <a:cs typeface="Times New Roman" pitchFamily="34" charset="-120"/>
+              </a:rPr>
+              <a:t>Expected Answer</a:t>
+            </a:r>
+            <a:endParaRPr lang="en-US" sz="3600" dirty="0"/>
+          </a:p>
+        </p:txBody>
+      </p:sp>
+      <p:sp>
+        <p:nvSpPr>
+          <p:cNvPr id="5" name="Text 2"/>
+          <p:cNvSpPr/>
+          <p:nvPr/>
+        </p:nvSpPr>
+        <p:spPr>
+          <a:xfrm>
+            <a:off x="5349240" y="1783080"/>
+            <a:ext cx="6522415" cy="4663440"/>
+          </a:xfrm>
+          <a:prstGeom prst="rect">
+            <a:avLst/>
+          </a:prstGeom>
+          <a:noFill/>
+          <a:ln/>
+        </p:spPr>
+        <p:txBody>
+          <a:bodyPr wrap="square" lIns="0" tIns="0" rIns="0" bIns="0" rtlCol="0" anchor="t"/>
+          <a:lstStyle/>
+          <a:p>
+            <a:pPr algn="l" indent="0" marL="0">
+              <a:spcAft>
+                <a:spcPts val="800"/>
+              </a:spcAft>
+              <a:buNone/>
+            </a:pPr>
+            <a:r>
+              <a:rPr lang="en-US" sz="4000" dirty="0">
+                <a:solidFill>
+                  <a:srgbClr val="111111"/>
+                </a:solidFill>
+                <a:latin typeface="Times New Roman" pitchFamily="34" charset="0"/>
+                <a:ea typeface="Times New Roman" pitchFamily="34" charset="-122"/>
+                <a:cs typeface="Times New Roman" pitchFamily="34" charset="-120"/>
+              </a:rPr>
+              <a:t>Sea walls and groynes (also mangroves).</a:t>
+            </a:r>
+            <a:endParaRPr lang="en-US" sz="4000" dirty="0"/>
+          </a:p>
+        </p:txBody>
+      </p:sp>
+      <p:sp>
+        <p:nvSpPr>
+          <p:cNvPr id="25" name="Slide Number Placeholder 0"/>
+          <p:cNvSpPr>
+            <a:spLocks noGrp="1"/>
+          </p:cNvSpPr>
+          <p:nvPr>
+            <p:ph type="sldNum" sz="quarter" idx="4294967295"/>
+          </p:nvPr>
+        </p:nvSpPr>
+        <p:spPr>
+          <a:xfrm>
+            <a:off x="27432" y="91440"/>
+            <a:ext cx="585216" cy="475488"/>
+          </a:xfrm>
+          <a:prstGeom prst="rect">
+            <a:avLst/>
+          </a:prstGeom>
+          <a:extLst>
+            <a:ext uri="{C572A759-6A51-4108-AA02-DFA0A04FC94B}">
+              <ma14:wrappingTextBoxFlag xmlns:ma14="http://schemas.microsoft.com/office/mac/drawingml/2011/main" val="0"/>
+            </a:ext>
+          </a:extLst>
+        </p:spPr>
+        <p:txBody>
+          <a:bodyPr/>
+          <a:lstStyle>
+            <a:lvl1pPr>
+              <a:defRPr sz="2000">
+                <a:solidFill>
+                  <a:srgbClr val="FFFFFF"/>
+                </a:solidFill>
+                <a:latin typeface="Calibri"/>
+                <a:ea typeface="Calibri"/>
+                <a:cs typeface="Calibri"/>
+              </a:defRPr>
+            </a:lvl1pPr>
+          </a:lstStyle>
+          <a:p>
+            <a:pPr algn="ctr"/>
+            <a:fld id="{F7021451-1387-4CA6-816F-3879F97B5CBC}" type="slidenum">
+              <a:rPr b="1" lang="en-US"/>
+              <a:t>45</a:t>
+            </a:fld>
+            <a:endParaRPr lang="en-US"/>
+          </a:p>
+        </p:txBody>
+      </p:sp>
+    </p:spTree>
+  </p:cSld>
+  <p:clrMapOvr>
+    <a:masterClrMapping/>
+  </p:clrMapOvr>
+</p:sld>
+</file>
+
+<file path=ppt/slides/slide46.xml><?xml version="1.0" encoding="utf-8"?>
+<p:sld xmlns:a="http://schemas.openxmlformats.org/drawingml/2006/main" xmlns:r="http://schemas.openxmlformats.org/officeDocument/2006/relationships" xmlns:p="http://schemas.openxmlformats.org/presentationml/2006/main">
+  <p:cSld name="Slide 46">
+    <p:spTree>
+      <p:nvGrpSpPr>
+        <p:cNvPr id="1" name=""/>
+        <p:cNvGrpSpPr/>
+        <p:nvPr/>
+      </p:nvGrpSpPr>
+      <p:grpSpPr>
+        <a:xfrm>
+          <a:off x="0" y="0"/>
+          <a:ext cx="0" cy="0"/>
+          <a:chOff x="0" y="0"/>
+          <a:chExt cx="0" cy="0"/>
+        </a:xfrm>
+      </p:grpSpPr>
+      <p:sp>
+        <p:nvSpPr>
+          <p:cNvPr id="2" name="Text 0"/>
+          <p:cNvSpPr/>
+          <p:nvPr/>
+        </p:nvSpPr>
+        <p:spPr>
+          <a:xfrm>
+            <a:off x="457200" y="713232"/>
+            <a:ext cx="11368735" cy="274320"/>
+          </a:xfrm>
+          <a:prstGeom prst="rect">
+            <a:avLst/>
+          </a:prstGeom>
+          <a:noFill/>
+          <a:ln/>
+        </p:spPr>
+        <p:txBody>
+          <a:bodyPr wrap="square" lIns="0" tIns="0" rIns="0" bIns="0" rtlCol="0" anchor="ctr"/>
+          <a:lstStyle/>
+          <a:p>
+            <a:pPr algn="r" indent="0" marL="0">
+              <a:buNone/>
+            </a:pPr>
+            <a:r>
+              <a:rPr lang="en-US" sz="1400" b="1" dirty="0">
+                <a:solidFill>
+                  <a:srgbClr val="1C3F6E"/>
+                </a:solidFill>
+                <a:latin typeface="Calibri" pitchFamily="34" charset="0"/>
+                <a:ea typeface="Calibri" pitchFamily="34" charset="-122"/>
+                <a:cs typeface="Calibri" pitchFamily="34" charset="-120"/>
+              </a:rPr>
+              <a:t>REMEDIATION</a:t>
+            </a:r>
+            <a:endParaRPr lang="en-US" sz="1400" dirty="0"/>
+          </a:p>
+        </p:txBody>
+      </p:sp>
+      <p:pic>
+        <p:nvPicPr>
+          <p:cNvPr id="3" name="Image 0" descr="/home/claude/f4/img/minesec_sheet.png">    </p:cNvPr>
+          <p:cNvPicPr>
+            <a:picLocks noChangeAspect="1"/>
+          </p:cNvPicPr>
+          <p:nvPr/>
+        </p:nvPicPr>
+        <p:blipFill>
+          <a:blip r:embed="rId1"/>
+          <a:stretch>
+            <a:fillRect/>
+          </a:stretch>
+        </p:blipFill>
+        <p:spPr>
+          <a:xfrm>
+            <a:off x="0" y="658368"/>
+            <a:ext cx="2468880" cy="5833872"/>
+          </a:xfrm>
+          <a:prstGeom prst="rect">
+            <a:avLst/>
+          </a:prstGeom>
+        </p:spPr>
+      </p:pic>
+      <p:sp>
+        <p:nvSpPr>
+          <p:cNvPr id="4" name="Text 1"/>
+          <p:cNvSpPr/>
+          <p:nvPr/>
+        </p:nvSpPr>
+        <p:spPr>
+          <a:xfrm>
+            <a:off x="2697480" y="1005840"/>
+            <a:ext cx="9174175" cy="731520"/>
+          </a:xfrm>
+          <a:prstGeom prst="rect">
+            <a:avLst/>
+          </a:prstGeom>
+          <a:noFill/>
+          <a:ln/>
+        </p:spPr>
+        <p:txBody>
+          <a:bodyPr wrap="square" lIns="0" tIns="0" rIns="0" bIns="0" rtlCol="0" anchor="ctr">
+            <a:normAutofit/>
+          </a:bodyPr>
+          <a:lstStyle/>
+          <a:p>
+            <a:pPr algn="ctr" indent="0" marL="0">
+              <a:buNone/>
+            </a:pPr>
+            <a:r>
+              <a:rPr lang="en-US" sz="3600" b="1" dirty="0">
+                <a:solidFill>
+                  <a:srgbClr val="990011"/>
+                </a:solidFill>
+                <a:latin typeface="Times New Roman" pitchFamily="34" charset="0"/>
+                <a:ea typeface="Times New Roman" pitchFamily="34" charset="-122"/>
+                <a:cs typeface="Times New Roman" pitchFamily="34" charset="-120"/>
+              </a:rPr>
+              <a:t>Remediation</a:t>
+            </a:r>
+            <a:endParaRPr lang="en-US" sz="3600" dirty="0"/>
+          </a:p>
+        </p:txBody>
+      </p:sp>
+      <p:sp>
+        <p:nvSpPr>
+          <p:cNvPr id="5" name="Text 2"/>
+          <p:cNvSpPr/>
+          <p:nvPr/>
+        </p:nvSpPr>
+        <p:spPr>
+          <a:xfrm>
+            <a:off x="2697480" y="1783080"/>
+            <a:ext cx="9174175" cy="4663440"/>
+          </a:xfrm>
+          <a:prstGeom prst="rect">
+            <a:avLst/>
+          </a:prstGeom>
+          <a:noFill/>
+          <a:ln/>
+        </p:spPr>
+        <p:txBody>
+          <a:bodyPr wrap="square" lIns="0" tIns="0" rIns="0" bIns="0" rtlCol="0" anchor="t"/>
+          <a:lstStyle/>
+          <a:p>
+            <a:pPr algn="l" indent="0" marL="0">
+              <a:spcAft>
+                <a:spcPts val="800"/>
+              </a:spcAft>
+              <a:buNone/>
+            </a:pPr>
+            <a:r>
+              <a:rPr lang="en-US" sz="4000" b="1" dirty="0">
+                <a:solidFill>
+                  <a:srgbClr val="111111"/>
+                </a:solidFill>
+                <a:latin typeface="Times New Roman" pitchFamily="34" charset="0"/>
+                <a:ea typeface="Times New Roman" pitchFamily="34" charset="-122"/>
+                <a:cs typeface="Times New Roman" pitchFamily="34" charset="-120"/>
+              </a:rPr>
+              <a:t>Fill in the blanks:</a:t>
+            </a:r>
+            <a:endParaRPr lang="en-US" sz="4000" dirty="0"/>
+          </a:p>
+          <a:p>
+            <a:pPr algn="l" marL="342900" indent="-342900">
+              <a:spcAft>
+                <a:spcPts val="800"/>
+              </a:spcAft>
+              <a:buSzPct val="100000"/>
+              <a:buFont typeface="+mj-lt"/>
+              <a:buAutoNum type="arabicPeriod" startAt="1"/>
+            </a:pPr>
+            <a:r>
+              <a:rPr lang="en-US" sz="4000" dirty="0">
+                <a:solidFill>
+                  <a:srgbClr val="111111"/>
+                </a:solidFill>
+                <a:latin typeface="Times New Roman" pitchFamily="34" charset="0"/>
+                <a:ea typeface="Times New Roman" pitchFamily="34" charset="-122"/>
+                <a:cs typeface="Times New Roman" pitchFamily="34" charset="-120"/>
+              </a:rPr>
+              <a:t>A place where ships load goods is a ______.</a:t>
+            </a:r>
+            <a:endParaRPr lang="en-US" sz="4000" dirty="0"/>
+          </a:p>
+          <a:p>
+            <a:pPr algn="l" marL="342900" indent="-342900">
+              <a:spcAft>
+                <a:spcPts val="800"/>
+              </a:spcAft>
+              <a:buSzPct val="100000"/>
+              <a:buFont typeface="+mj-lt"/>
+              <a:buAutoNum type="arabicPeriod" startAt="1"/>
+            </a:pPr>
+            <a:r>
+              <a:rPr lang="en-US" sz="4000" dirty="0">
+                <a:solidFill>
+                  <a:srgbClr val="111111"/>
+                </a:solidFill>
+                <a:latin typeface="Times New Roman" pitchFamily="34" charset="0"/>
+                <a:ea typeface="Times New Roman" pitchFamily="34" charset="-122"/>
+                <a:cs typeface="Times New Roman" pitchFamily="34" charset="-120"/>
+              </a:rPr>
+              <a:t>A low wall across a beach is a ______.</a:t>
+            </a:r>
+            <a:endParaRPr lang="en-US" sz="4000" dirty="0"/>
+          </a:p>
+          <a:p>
+            <a:pPr algn="l" marL="342900" indent="-342900">
+              <a:spcAft>
+                <a:spcPts val="800"/>
+              </a:spcAft>
+              <a:buSzPct val="100000"/>
+              <a:buFont typeface="+mj-lt"/>
+              <a:buAutoNum type="arabicPeriod" startAt="1"/>
+            </a:pPr>
+            <a:r>
+              <a:rPr lang="en-US" sz="4000" dirty="0">
+                <a:solidFill>
+                  <a:srgbClr val="111111"/>
+                </a:solidFill>
+                <a:latin typeface="Times New Roman" pitchFamily="34" charset="0"/>
+                <a:ea typeface="Times New Roman" pitchFamily="34" charset="-122"/>
+                <a:cs typeface="Times New Roman" pitchFamily="34" charset="-120"/>
+              </a:rPr>
+              <a:t>The wearing away of the coast is coastal ______.</a:t>
+            </a:r>
+            <a:endParaRPr lang="en-US" sz="4000" dirty="0"/>
+          </a:p>
+        </p:txBody>
+      </p:sp>
+      <p:sp>
+        <p:nvSpPr>
+          <p:cNvPr id="25" name="Slide Number Placeholder 0"/>
+          <p:cNvSpPr>
+            <a:spLocks noGrp="1"/>
+          </p:cNvSpPr>
+          <p:nvPr>
+            <p:ph type="sldNum" sz="quarter" idx="4294967295"/>
+          </p:nvPr>
+        </p:nvSpPr>
+        <p:spPr>
+          <a:xfrm>
+            <a:off x="27432" y="91440"/>
+            <a:ext cx="585216" cy="475488"/>
+          </a:xfrm>
+          <a:prstGeom prst="rect">
+            <a:avLst/>
+          </a:prstGeom>
+          <a:extLst>
+            <a:ext uri="{C572A759-6A51-4108-AA02-DFA0A04FC94B}">
+              <ma14:wrappingTextBoxFlag xmlns:ma14="http://schemas.microsoft.com/office/mac/drawingml/2011/main" val="0"/>
+            </a:ext>
+          </a:extLst>
+        </p:spPr>
+        <p:txBody>
+          <a:bodyPr/>
+          <a:lstStyle>
+            <a:lvl1pPr>
+              <a:defRPr sz="2000">
+                <a:solidFill>
+                  <a:srgbClr val="FFFFFF"/>
+                </a:solidFill>
+                <a:latin typeface="Calibri"/>
+                <a:ea typeface="Calibri"/>
+                <a:cs typeface="Calibri"/>
+              </a:defRPr>
+            </a:lvl1pPr>
+          </a:lstStyle>
+          <a:p>
+            <a:pPr algn="ctr"/>
+            <a:fld id="{F7021451-1387-4CA6-816F-3879F97B5CBC}" type="slidenum">
+              <a:rPr b="1" lang="en-US"/>
+              <a:t>46</a:t>
+            </a:fld>
+            <a:endParaRPr lang="en-US"/>
+          </a:p>
+        </p:txBody>
+      </p:sp>
+    </p:spTree>
+  </p:cSld>
+  <p:clrMapOvr>
+    <a:masterClrMapping/>
+  </p:clrMapOvr>
+</p:sld>
+</file>
+
+<file path=ppt/slides/slide47.xml><?xml version="1.0" encoding="utf-8"?>
+<p:sld xmlns:a="http://schemas.openxmlformats.org/drawingml/2006/main" xmlns:r="http://schemas.openxmlformats.org/officeDocument/2006/relationships" xmlns:p="http://schemas.openxmlformats.org/presentationml/2006/main">
+  <p:cSld name="Slide 47">
+    <p:spTree>
+      <p:nvGrpSpPr>
+        <p:cNvPr id="1" name=""/>
+        <p:cNvGrpSpPr/>
+        <p:nvPr/>
+      </p:nvGrpSpPr>
+      <p:grpSpPr>
+        <a:xfrm>
+          <a:off x="0" y="0"/>
+          <a:ext cx="0" cy="0"/>
+          <a:chOff x="0" y="0"/>
+          <a:chExt cx="0" cy="0"/>
+        </a:xfrm>
+      </p:grpSpPr>
+      <p:sp>
+        <p:nvSpPr>
+          <p:cNvPr id="2" name="Text 0"/>
+          <p:cNvSpPr/>
+          <p:nvPr/>
+        </p:nvSpPr>
+        <p:spPr>
+          <a:xfrm>
+            <a:off x="457200" y="713232"/>
+            <a:ext cx="11368735" cy="274320"/>
+          </a:xfrm>
+          <a:prstGeom prst="rect">
+            <a:avLst/>
+          </a:prstGeom>
+          <a:noFill/>
+          <a:ln/>
+        </p:spPr>
+        <p:txBody>
+          <a:bodyPr wrap="square" lIns="0" tIns="0" rIns="0" bIns="0" rtlCol="0" anchor="ctr"/>
+          <a:lstStyle/>
+          <a:p>
+            <a:pPr algn="r" indent="0" marL="0">
+              <a:buNone/>
+            </a:pPr>
+            <a:r>
+              <a:rPr lang="en-US" sz="1400" b="1" dirty="0">
+                <a:solidFill>
+                  <a:srgbClr val="1C3F6E"/>
+                </a:solidFill>
+                <a:latin typeface="Calibri" pitchFamily="34" charset="0"/>
+                <a:ea typeface="Calibri" pitchFamily="34" charset="-122"/>
+                <a:cs typeface="Calibri" pitchFamily="34" charset="-120"/>
+              </a:rPr>
+              <a:t>HOMEWORK</a:t>
+            </a:r>
+            <a:endParaRPr lang="en-US" sz="1400" dirty="0"/>
+          </a:p>
+        </p:txBody>
+      </p:sp>
+      <p:pic>
+        <p:nvPicPr>
+          <p:cNvPr id="3" name="Image 0" descr="/home/claude/f4/img/minesec_sheet.png">    </p:cNvPr>
+          <p:cNvPicPr>
+            <a:picLocks noChangeAspect="1"/>
+          </p:cNvPicPr>
+          <p:nvPr/>
+        </p:nvPicPr>
+        <p:blipFill>
+          <a:blip r:embed="rId1"/>
+          <a:stretch>
+            <a:fillRect/>
+          </a:stretch>
+        </p:blipFill>
+        <p:spPr>
+          <a:xfrm>
+            <a:off x="0" y="658368"/>
+            <a:ext cx="5120640" cy="5833872"/>
+          </a:xfrm>
+          <a:prstGeom prst="rect">
+            <a:avLst/>
+          </a:prstGeom>
+        </p:spPr>
+      </p:pic>
+      <p:sp>
+        <p:nvSpPr>
+          <p:cNvPr id="4" name="Text 1"/>
+          <p:cNvSpPr/>
+          <p:nvPr/>
+        </p:nvSpPr>
+        <p:spPr>
+          <a:xfrm>
+            <a:off x="5349240" y="1005840"/>
+            <a:ext cx="6522415" cy="731520"/>
+          </a:xfrm>
+          <a:prstGeom prst="rect">
+            <a:avLst/>
+          </a:prstGeom>
+          <a:noFill/>
+          <a:ln/>
+        </p:spPr>
+        <p:txBody>
+          <a:bodyPr wrap="square" lIns="0" tIns="0" rIns="0" bIns="0" rtlCol="0" anchor="ctr">
+            <a:normAutofit/>
+          </a:bodyPr>
+          <a:lstStyle/>
+          <a:p>
+            <a:pPr algn="ctr" indent="0" marL="0">
+              <a:buNone/>
+            </a:pPr>
+            <a:r>
+              <a:rPr lang="en-US" sz="3600" b="1" dirty="0">
+                <a:solidFill>
+                  <a:srgbClr val="990011"/>
+                </a:solidFill>
+                <a:latin typeface="Times New Roman" pitchFamily="34" charset="0"/>
+                <a:ea typeface="Times New Roman" pitchFamily="34" charset="-122"/>
+                <a:cs typeface="Times New Roman" pitchFamily="34" charset="-120"/>
+              </a:rPr>
+              <a:t>Homework</a:t>
+            </a:r>
+            <a:endParaRPr lang="en-US" sz="3600" dirty="0"/>
+          </a:p>
+        </p:txBody>
+      </p:sp>
+      <p:sp>
+        <p:nvSpPr>
+          <p:cNvPr id="5" name="Text 2"/>
+          <p:cNvSpPr/>
+          <p:nvPr/>
+        </p:nvSpPr>
+        <p:spPr>
+          <a:xfrm>
+            <a:off x="5349240" y="1783080"/>
+            <a:ext cx="6522415" cy="4663440"/>
+          </a:xfrm>
+          <a:prstGeom prst="rect">
+            <a:avLst/>
+          </a:prstGeom>
+          <a:noFill/>
+          <a:ln/>
+        </p:spPr>
+        <p:txBody>
+          <a:bodyPr wrap="square" lIns="0" tIns="0" rIns="0" bIns="0" rtlCol="0" anchor="t"/>
+          <a:lstStyle/>
+          <a:p>
+            <a:pPr algn="l" indent="0" marL="0">
+              <a:spcAft>
+                <a:spcPts val="800"/>
+              </a:spcAft>
+              <a:buNone/>
+            </a:pPr>
+            <a:r>
+              <a:rPr lang="en-US" sz="4000" dirty="0">
+                <a:solidFill>
+                  <a:srgbClr val="111111"/>
+                </a:solidFill>
+                <a:latin typeface="Times New Roman" pitchFamily="34" charset="0"/>
+                <a:ea typeface="Times New Roman" pitchFamily="34" charset="-122"/>
+                <a:cs typeface="Times New Roman" pitchFamily="34" charset="-120"/>
+              </a:rPr>
+              <a:t>On a map of Africa in your atlas, find the Sahara, the Sahel and the Kalahari. Write in which part of Africa each one is located.</a:t>
+            </a:r>
+            <a:endParaRPr lang="en-US" sz="4000" dirty="0"/>
+          </a:p>
+        </p:txBody>
+      </p:sp>
+      <p:sp>
+        <p:nvSpPr>
+          <p:cNvPr id="25" name="Slide Number Placeholder 0"/>
+          <p:cNvSpPr>
+            <a:spLocks noGrp="1"/>
+          </p:cNvSpPr>
+          <p:nvPr>
+            <p:ph type="sldNum" sz="quarter" idx="4294967295"/>
+          </p:nvPr>
+        </p:nvSpPr>
+        <p:spPr>
+          <a:xfrm>
+            <a:off x="27432" y="91440"/>
+            <a:ext cx="585216" cy="475488"/>
+          </a:xfrm>
+          <a:prstGeom prst="rect">
+            <a:avLst/>
+          </a:prstGeom>
+          <a:extLst>
+            <a:ext uri="{C572A759-6A51-4108-AA02-DFA0A04FC94B}">
+              <ma14:wrappingTextBoxFlag xmlns:ma14="http://schemas.microsoft.com/office/mac/drawingml/2011/main" val="0"/>
+            </a:ext>
+          </a:extLst>
+        </p:spPr>
+        <p:txBody>
+          <a:bodyPr/>
+          <a:lstStyle>
+            <a:lvl1pPr>
+              <a:defRPr sz="2000">
+                <a:solidFill>
+                  <a:srgbClr val="FFFFFF"/>
+                </a:solidFill>
+                <a:latin typeface="Calibri"/>
+                <a:ea typeface="Calibri"/>
+                <a:cs typeface="Calibri"/>
+              </a:defRPr>
+            </a:lvl1pPr>
+          </a:lstStyle>
+          <a:p>
+            <a:pPr algn="ctr"/>
+            <a:fld id="{F7021451-1387-4CA6-816F-3879F97B5CBC}" type="slidenum">
+              <a:rPr b="1" lang="en-US"/>
+              <a:t>47</a:t>
+            </a:fld>
+            <a:endParaRPr lang="en-US"/>
+          </a:p>
+        </p:txBody>
+      </p:sp>
+    </p:spTree>
+  </p:cSld>
+  <p:clrMapOvr>
+    <a:masterClrMapping/>
+  </p:clrMapOvr>
+</p:sld>
+</file>
+
+<file path=ppt/slides/slide48.xml><?xml version="1.0" encoding="utf-8"?>
+<p:sld xmlns:a="http://schemas.openxmlformats.org/drawingml/2006/main" xmlns:r="http://schemas.openxmlformats.org/officeDocument/2006/relationships" xmlns:p="http://schemas.openxmlformats.org/presentationml/2006/main">
+  <p:cSld name="Slide 48">
+    <p:spTree>
+      <p:nvGrpSpPr>
+        <p:cNvPr id="1" name=""/>
+        <p:cNvGrpSpPr/>
+        <p:nvPr/>
+      </p:nvGrpSpPr>
+      <p:grpSpPr>
+        <a:xfrm>
+          <a:off x="0" y="0"/>
+          <a:ext cx="0" cy="0"/>
+          <a:chOff x="0" y="0"/>
+          <a:chExt cx="0" cy="0"/>
+        </a:xfrm>
+      </p:grpSpPr>
+      <p:sp>
+        <p:nvSpPr>
+          <p:cNvPr id="2" name="Text 0"/>
+          <p:cNvSpPr/>
+          <p:nvPr/>
+        </p:nvSpPr>
+        <p:spPr>
+          <a:xfrm>
+            <a:off x="457200" y="713232"/>
+            <a:ext cx="11368735" cy="274320"/>
+          </a:xfrm>
+          <a:prstGeom prst="rect">
+            <a:avLst/>
+          </a:prstGeom>
+          <a:noFill/>
+          <a:ln/>
+        </p:spPr>
+        <p:txBody>
+          <a:bodyPr wrap="square" lIns="0" tIns="0" rIns="0" bIns="0" rtlCol="0" anchor="ctr"/>
+          <a:lstStyle/>
+          <a:p>
+            <a:pPr algn="r" indent="0" marL="0">
+              <a:buNone/>
+            </a:pPr>
+            <a:r>
+              <a:rPr lang="en-US" sz="1400" b="1" dirty="0">
+                <a:solidFill>
+                  <a:srgbClr val="1C3F6E"/>
+                </a:solidFill>
+                <a:latin typeface="Calibri" pitchFamily="34" charset="0"/>
+                <a:ea typeface="Calibri" pitchFamily="34" charset="-122"/>
+                <a:cs typeface="Calibri" pitchFamily="34" charset="-120"/>
+              </a:rPr>
+              <a:t>NEXT LESSON</a:t>
+            </a:r>
+            <a:endParaRPr lang="en-US" sz="1400" dirty="0"/>
+          </a:p>
+        </p:txBody>
+      </p:sp>
+      <p:pic>
+        <p:nvPicPr>
+          <p:cNvPr id="3" name="Image 0" descr="/home/claude/f4/img/minesec_sheet.png">    </p:cNvPr>
+          <p:cNvPicPr>
+            <a:picLocks noChangeAspect="1"/>
+          </p:cNvPicPr>
+          <p:nvPr/>
+        </p:nvPicPr>
+        <p:blipFill>
+          <a:blip r:embed="rId1"/>
+          <a:stretch>
+            <a:fillRect/>
+          </a:stretch>
+        </p:blipFill>
+        <p:spPr>
+          <a:xfrm>
+            <a:off x="0" y="658368"/>
+            <a:ext cx="5120640" cy="5833872"/>
+          </a:xfrm>
+          <a:prstGeom prst="rect">
+            <a:avLst/>
+          </a:prstGeom>
+        </p:spPr>
+      </p:pic>
+      <p:sp>
+        <p:nvSpPr>
+          <p:cNvPr id="4" name="Text 1"/>
+          <p:cNvSpPr/>
+          <p:nvPr/>
+        </p:nvSpPr>
+        <p:spPr>
+          <a:xfrm>
+            <a:off x="5349240" y="1005840"/>
+            <a:ext cx="6522415" cy="731520"/>
+          </a:xfrm>
+          <a:prstGeom prst="rect">
+            <a:avLst/>
+          </a:prstGeom>
+          <a:noFill/>
+          <a:ln/>
+        </p:spPr>
+        <p:txBody>
+          <a:bodyPr wrap="square" lIns="0" tIns="0" rIns="0" bIns="0" rtlCol="0" anchor="ctr">
+            <a:normAutofit/>
+          </a:bodyPr>
+          <a:lstStyle/>
+          <a:p>
+            <a:pPr algn="ctr" indent="0" marL="0">
+              <a:buNone/>
+            </a:pPr>
+            <a:r>
+              <a:rPr lang="en-US" sz="3600" b="1" dirty="0">
+                <a:solidFill>
+                  <a:srgbClr val="990011"/>
+                </a:solidFill>
+                <a:latin typeface="Times New Roman" pitchFamily="34" charset="0"/>
+                <a:ea typeface="Times New Roman" pitchFamily="34" charset="-122"/>
+                <a:cs typeface="Times New Roman" pitchFamily="34" charset="-120"/>
+              </a:rPr>
+              <a:t>Next Lesson</a:t>
+            </a:r>
+            <a:endParaRPr lang="en-US" sz="3600" dirty="0"/>
+          </a:p>
+        </p:txBody>
+      </p:sp>
+      <p:sp>
+        <p:nvSpPr>
+          <p:cNvPr id="5" name="Text 2"/>
+          <p:cNvSpPr/>
+          <p:nvPr/>
+        </p:nvSpPr>
+        <p:spPr>
+          <a:xfrm>
+            <a:off x="5349240" y="1783080"/>
+            <a:ext cx="6522415" cy="4663440"/>
+          </a:xfrm>
+          <a:prstGeom prst="rect">
+            <a:avLst/>
+          </a:prstGeom>
+          <a:noFill/>
+          <a:ln/>
+        </p:spPr>
+        <p:txBody>
+          <a:bodyPr wrap="square" lIns="0" tIns="0" rIns="0" bIns="0" rtlCol="0" anchor="ctr"/>
+          <a:lstStyle/>
+          <a:p>
+            <a:pPr algn="ctr" indent="0" marL="0">
+              <a:spcAft>
+                <a:spcPts val="800"/>
+              </a:spcAft>
+              <a:buNone/>
+            </a:pPr>
+            <a:r>
+              <a:rPr lang="en-US" sz="4000" b="1" dirty="0">
+                <a:solidFill>
+                  <a:srgbClr val="111111"/>
+                </a:solidFill>
+                <a:latin typeface="Times New Roman" pitchFamily="34" charset="0"/>
+                <a:ea typeface="Times New Roman" pitchFamily="34" charset="-122"/>
+                <a:cs typeface="Times New Roman" pitchFamily="34" charset="-120"/>
+              </a:rPr>
+              <a:t>Our next lesson will be on:</a:t>
+            </a:r>
+            <a:endParaRPr lang="en-US" sz="4000" dirty="0"/>
+          </a:p>
+          <a:p>
+            <a:pPr algn="ctr" indent="0" marL="0">
+              <a:spcAft>
+                <a:spcPts val="800"/>
+              </a:spcAft>
+              <a:buNone/>
+            </a:pPr>
+            <a:r>
+              <a:rPr lang="en-US" sz="4000" b="1" dirty="0">
+                <a:solidFill>
+                  <a:srgbClr val="990011"/>
+                </a:solidFill>
+                <a:latin typeface="Times New Roman" pitchFamily="34" charset="0"/>
+                <a:ea typeface="Times New Roman" pitchFamily="34" charset="-122"/>
+                <a:cs typeface="Times New Roman" pitchFamily="34" charset="-120"/>
+              </a:rPr>
+              <a:t>Lesson 27: Semi-Arid and Desert Landscapes</a:t>
+            </a:r>
+            <a:endParaRPr lang="en-US" sz="4000" dirty="0"/>
+          </a:p>
+        </p:txBody>
+      </p:sp>
+      <p:sp>
+        <p:nvSpPr>
+          <p:cNvPr id="25" name="Slide Number Placeholder 0"/>
+          <p:cNvSpPr>
+            <a:spLocks noGrp="1"/>
+          </p:cNvSpPr>
+          <p:nvPr>
+            <p:ph type="sldNum" sz="quarter" idx="4294967295"/>
+          </p:nvPr>
+        </p:nvSpPr>
+        <p:spPr>
+          <a:xfrm>
+            <a:off x="27432" y="91440"/>
+            <a:ext cx="585216" cy="475488"/>
+          </a:xfrm>
+          <a:prstGeom prst="rect">
+            <a:avLst/>
+          </a:prstGeom>
+          <a:extLst>
+            <a:ext uri="{C572A759-6A51-4108-AA02-DFA0A04FC94B}">
+              <ma14:wrappingTextBoxFlag xmlns:ma14="http://schemas.microsoft.com/office/mac/drawingml/2011/main" val="0"/>
+            </a:ext>
+          </a:extLst>
+        </p:spPr>
+        <p:txBody>
+          <a:bodyPr/>
+          <a:lstStyle>
+            <a:lvl1pPr>
+              <a:defRPr sz="2000">
+                <a:solidFill>
+                  <a:srgbClr val="FFFFFF"/>
+                </a:solidFill>
+                <a:latin typeface="Calibri"/>
+                <a:ea typeface="Calibri"/>
+                <a:cs typeface="Calibri"/>
+              </a:defRPr>
+            </a:lvl1pPr>
+          </a:lstStyle>
+          <a:p>
+            <a:pPr algn="ctr"/>
+            <a:fld id="{F7021451-1387-4CA6-816F-3879F97B5CBC}" type="slidenum">
+              <a:rPr b="1" lang="en-US"/>
+              <a:t>48</a:t>
+            </a:fld>
+            <a:endParaRPr lang="en-US"/>
+          </a:p>
+        </p:txBody>
+      </p:sp>
+    </p:spTree>
+  </p:cSld>
+  <p:clrMapOvr>
+    <a:masterClrMapping/>
+  </p:clrMapOvr>
+</p:sld>
+</file>
+
+<file path=ppt/slides/slide49.xml><?xml version="1.0" encoding="utf-8"?>
+<p:sld xmlns:a="http://schemas.openxmlformats.org/drawingml/2006/main" xmlns:r="http://schemas.openxmlformats.org/officeDocument/2006/relationships" xmlns:p="http://schemas.openxmlformats.org/presentationml/2006/main">
+  <p:cSld name="Slide 49">
+    <p:spTree>
+      <p:nvGrpSpPr>
+        <p:cNvPr id="1" name=""/>
+        <p:cNvGrpSpPr/>
+        <p:nvPr/>
+      </p:nvGrpSpPr>
+      <p:grpSpPr>
+        <a:xfrm>
+          <a:off x="0" y="0"/>
+          <a:ext cx="0" cy="0"/>
+          <a:chOff x="0" y="0"/>
+          <a:chExt cx="0" cy="0"/>
+        </a:xfrm>
+      </p:grpSpPr>
+      <p:sp>
+        <p:nvSpPr>
+          <p:cNvPr id="2" name="Text 0"/>
+          <p:cNvSpPr/>
+          <p:nvPr/>
+        </p:nvSpPr>
+        <p:spPr>
+          <a:xfrm>
+            <a:off x="457200" y="713232"/>
+            <a:ext cx="11368735" cy="274320"/>
+          </a:xfrm>
+          <a:prstGeom prst="rect">
+            <a:avLst/>
+          </a:prstGeom>
+          <a:noFill/>
+          <a:ln/>
+        </p:spPr>
+        <p:txBody>
+          <a:bodyPr wrap="square" lIns="0" tIns="0" rIns="0" bIns="0" rtlCol="0" anchor="ctr"/>
+          <a:lstStyle/>
+          <a:p>
+            <a:pPr algn="r" indent="0" marL="0">
+              <a:buNone/>
+            </a:pPr>
+            <a:r>
+              <a:rPr lang="en-US" sz="1400" b="1" dirty="0">
+                <a:solidFill>
+                  <a:srgbClr val="1C3F6E"/>
+                </a:solidFill>
+                <a:latin typeface="Calibri" pitchFamily="34" charset="0"/>
+                <a:ea typeface="Calibri" pitchFamily="34" charset="-122"/>
+                <a:cs typeface="Calibri" pitchFamily="34" charset="-120"/>
+              </a:rPr>
               <a:t>BILINGUAL GAME</a:t>
             </a:r>
             <a:endParaRPr lang="en-US" sz="1400" dirty="0"/>
@@ -15178,7 +17818,7 @@
       </p:sp>
       <p:graphicFrame>
         <p:nvGraphicFramePr>
-          <p:cNvPr id="43" name="Table 0"/>
+          <p:cNvPr id="50" name="Table 0"/>
           <p:cNvGraphicFramePr>
             <a:graphicFrameLocks noGrp="1"/>
           </p:cNvGraphicFramePr>
@@ -16490,7 +19130,7 @@
             <a:pPr algn="ctr"/>
             <a:fld id="{F7021451-1387-4CA6-816F-3879F97B5CBC}" type="slidenum">
               <a:rPr b="1" lang="en-US"/>
-              <a:t>42</a:t>
+              <a:t>49</a:t>
             </a:fld>
             <a:endParaRPr lang="en-US"/>
           </a:p>
@@ -16504,9 +19144,9 @@
 </p:sld>
 </file>
 
-<file path=ppt/slides/slide43.xml><?xml version="1.0" encoding="utf-8"?>
+<file path=ppt/slides/slide5.xml><?xml version="1.0" encoding="utf-8"?>
 <p:sld xmlns:a="http://schemas.openxmlformats.org/drawingml/2006/main" xmlns:r="http://schemas.openxmlformats.org/officeDocument/2006/relationships" xmlns:p="http://schemas.openxmlformats.org/presentationml/2006/main">
-  <p:cSld name="Slide 43">
+  <p:cSld name="Slide 5">
     <p:spTree>
       <p:nvGrpSpPr>
         <p:cNvPr id="1" name=""/>
@@ -16554,6 +19194,225 @@
                 <a:ea typeface="Calibri" pitchFamily="34" charset="-122"/>
                 <a:cs typeface="Calibri" pitchFamily="34" charset="-120"/>
               </a:rPr>
+              <a:t>HOMEWORK CORRECTION</a:t>
+            </a:r>
+            <a:endParaRPr lang="en-US" sz="1400" dirty="0"/>
+          </a:p>
+        </p:txBody>
+      </p:sp>
+      <p:pic>
+        <p:nvPicPr>
+          <p:cNvPr id="3" name="Image 0" descr="/home/claude/f4/img/minesec_sheet.png">    </p:cNvPr>
+          <p:cNvPicPr>
+            <a:picLocks noChangeAspect="1"/>
+          </p:cNvPicPr>
+          <p:nvPr/>
+        </p:nvPicPr>
+        <p:blipFill>
+          <a:blip r:embed="rId1"/>
+          <a:stretch>
+            <a:fillRect/>
+          </a:stretch>
+        </p:blipFill>
+        <p:spPr>
+          <a:xfrm>
+            <a:off x="0" y="658368"/>
+            <a:ext cx="5120640" cy="5833872"/>
+          </a:xfrm>
+          <a:prstGeom prst="rect">
+            <a:avLst/>
+          </a:prstGeom>
+        </p:spPr>
+      </p:pic>
+      <p:sp>
+        <p:nvSpPr>
+          <p:cNvPr id="4" name="Text 1"/>
+          <p:cNvSpPr/>
+          <p:nvPr/>
+        </p:nvSpPr>
+        <p:spPr>
+          <a:xfrm>
+            <a:off x="5349240" y="1005840"/>
+            <a:ext cx="6522415" cy="731520"/>
+          </a:xfrm>
+          <a:prstGeom prst="rect">
+            <a:avLst/>
+          </a:prstGeom>
+          <a:noFill/>
+          <a:ln/>
+        </p:spPr>
+        <p:txBody>
+          <a:bodyPr wrap="square" lIns="0" tIns="0" rIns="0" bIns="0" rtlCol="0" anchor="ctr">
+            <a:normAutofit/>
+          </a:bodyPr>
+          <a:lstStyle/>
+          <a:p>
+            <a:pPr algn="ctr" indent="0" marL="0">
+              <a:buNone/>
+            </a:pPr>
+            <a:r>
+              <a:rPr lang="en-US" sz="3600" b="1" dirty="0">
+                <a:solidFill>
+                  <a:srgbClr val="990011"/>
+                </a:solidFill>
+                <a:latin typeface="Times New Roman" pitchFamily="34" charset="0"/>
+                <a:ea typeface="Times New Roman" pitchFamily="34" charset="-122"/>
+                <a:cs typeface="Times New Roman" pitchFamily="34" charset="-120"/>
+              </a:rPr>
+              <a:t>Correction: Possible Answer</a:t>
+            </a:r>
+            <a:endParaRPr lang="en-US" sz="3600" dirty="0"/>
+          </a:p>
+        </p:txBody>
+      </p:sp>
+      <p:sp>
+        <p:nvSpPr>
+          <p:cNvPr id="5" name="Text 2"/>
+          <p:cNvSpPr/>
+          <p:nvPr/>
+        </p:nvSpPr>
+        <p:spPr>
+          <a:xfrm>
+            <a:off x="5349240" y="1783080"/>
+            <a:ext cx="6522415" cy="4663440"/>
+          </a:xfrm>
+          <a:prstGeom prst="rect">
+            <a:avLst/>
+          </a:prstGeom>
+          <a:noFill/>
+          <a:ln/>
+        </p:spPr>
+        <p:txBody>
+          <a:bodyPr wrap="square" lIns="0" tIns="0" rIns="0" bIns="0" rtlCol="0" anchor="t"/>
+          <a:lstStyle/>
+          <a:p>
+            <a:pPr algn="l" indent="0" marL="0">
+              <a:spcAft>
+                <a:spcPts val="800"/>
+              </a:spcAft>
+              <a:buNone/>
+            </a:pPr>
+            <a:r>
+              <a:rPr lang="en-US" sz="4000" dirty="0">
+                <a:solidFill>
+                  <a:srgbClr val="111111"/>
+                </a:solidFill>
+                <a:latin typeface="Times New Roman" pitchFamily="34" charset="0"/>
+                <a:ea typeface="Times New Roman" pitchFamily="34" charset="-122"/>
+                <a:cs typeface="Times New Roman" pitchFamily="34" charset="-120"/>
+              </a:rPr>
+              <a:t>Examples: rice, frozen fish, second-hand clothes, cars, phones and cement clinker. Traders say they entered through the port of Douala (some through Kribi).</a:t>
+            </a:r>
+            <a:endParaRPr lang="en-US" sz="4000" dirty="0"/>
+          </a:p>
+        </p:txBody>
+      </p:sp>
+      <p:sp>
+        <p:nvSpPr>
+          <p:cNvPr id="25" name="Slide Number Placeholder 0"/>
+          <p:cNvSpPr>
+            <a:spLocks noGrp="1"/>
+          </p:cNvSpPr>
+          <p:nvPr>
+            <p:ph type="sldNum" sz="quarter" idx="4294967295"/>
+          </p:nvPr>
+        </p:nvSpPr>
+        <p:spPr>
+          <a:xfrm>
+            <a:off x="27432" y="91440"/>
+            <a:ext cx="585216" cy="475488"/>
+          </a:xfrm>
+          <a:prstGeom prst="rect">
+            <a:avLst/>
+          </a:prstGeom>
+          <a:extLst>
+            <a:ext uri="{C572A759-6A51-4108-AA02-DFA0A04FC94B}">
+              <ma14:wrappingTextBoxFlag xmlns:ma14="http://schemas.microsoft.com/office/mac/drawingml/2011/main" val="0"/>
+            </a:ext>
+          </a:extLst>
+        </p:spPr>
+        <p:txBody>
+          <a:bodyPr/>
+          <a:lstStyle>
+            <a:lvl1pPr>
+              <a:defRPr sz="2000">
+                <a:solidFill>
+                  <a:srgbClr val="FFFFFF"/>
+                </a:solidFill>
+                <a:latin typeface="Calibri"/>
+                <a:ea typeface="Calibri"/>
+                <a:cs typeface="Calibri"/>
+              </a:defRPr>
+            </a:lvl1pPr>
+          </a:lstStyle>
+          <a:p>
+            <a:pPr algn="ctr"/>
+            <a:fld id="{F7021451-1387-4CA6-816F-3879F97B5CBC}" type="slidenum">
+              <a:rPr b="1" lang="en-US"/>
+              <a:t>5</a:t>
+            </a:fld>
+            <a:endParaRPr lang="en-US"/>
+          </a:p>
+        </p:txBody>
+      </p:sp>
+    </p:spTree>
+  </p:cSld>
+  <p:clrMapOvr>
+    <a:masterClrMapping/>
+  </p:clrMapOvr>
+</p:sld>
+</file>
+
+<file path=ppt/slides/slide50.xml><?xml version="1.0" encoding="utf-8"?>
+<p:sld xmlns:a="http://schemas.openxmlformats.org/drawingml/2006/main" xmlns:r="http://schemas.openxmlformats.org/officeDocument/2006/relationships" xmlns:p="http://schemas.openxmlformats.org/presentationml/2006/main">
+  <p:cSld name="Slide 50">
+    <p:spTree>
+      <p:nvGrpSpPr>
+        <p:cNvPr id="1" name=""/>
+        <p:cNvGrpSpPr/>
+        <p:nvPr/>
+      </p:nvGrpSpPr>
+      <p:grpSpPr>
+        <a:xfrm>
+          <a:off x="0" y="0"/>
+          <a:ext cx="0" cy="0"/>
+          <a:chOff x="0" y="0"/>
+          <a:chExt cx="0" cy="0"/>
+        </a:xfrm>
+      </p:grpSpPr>
+      <p:sp>
+        <p:nvSpPr>
+          <p:cNvPr id="2" name="Text 0"/>
+          <p:cNvSpPr/>
+          <p:nvPr/>
+        </p:nvSpPr>
+        <p:spPr>
+          <a:xfrm>
+            <a:off x="457200" y="713232"/>
+            <a:ext cx="11368735" cy="274320"/>
+          </a:xfrm>
+          <a:prstGeom prst="rect">
+            <a:avLst/>
+          </a:prstGeom>
+          <a:noFill/>
+          <a:ln/>
+        </p:spPr>
+        <p:txBody>
+          <a:bodyPr wrap="square" lIns="0" tIns="0" rIns="0" bIns="0" rtlCol="0" anchor="ctr"/>
+          <a:lstStyle/>
+          <a:p>
+            <a:pPr algn="r" indent="0" marL="0">
+              <a:buNone/>
+            </a:pPr>
+            <a:r>
+              <a:rPr lang="en-US" sz="1400" b="1" dirty="0">
+                <a:solidFill>
+                  <a:srgbClr val="1C3F6E"/>
+                </a:solidFill>
+                <a:latin typeface="Calibri" pitchFamily="34" charset="0"/>
+                <a:ea typeface="Calibri" pitchFamily="34" charset="-122"/>
+                <a:cs typeface="Calibri" pitchFamily="34" charset="-120"/>
+              </a:rPr>
               <a:t>LOGBOOK</a:t>
             </a:r>
             <a:endParaRPr lang="en-US" sz="1400" dirty="0"/>
@@ -16601,7 +19460,7 @@
       </p:sp>
       <p:graphicFrame>
         <p:nvGraphicFramePr>
-          <p:cNvPr id="44" name="Table 0"/>
+          <p:cNvPr id="51" name="Table 0"/>
           <p:cNvGraphicFramePr>
             <a:graphicFrameLocks noGrp="1"/>
           </p:cNvGraphicFramePr>
@@ -17223,7 +20082,7 @@
             <a:pPr algn="ctr"/>
             <a:fld id="{F7021451-1387-4CA6-816F-3879F97B5CBC}" type="slidenum">
               <a:rPr b="1" lang="en-US"/>
-              <a:t>43</a:t>
+              <a:t>50</a:t>
             </a:fld>
             <a:endParaRPr lang="en-US"/>
           </a:p>
@@ -17237,9 +20096,9 @@
 </p:sld>
 </file>
 
-<file path=ppt/slides/slide44.xml><?xml version="1.0" encoding="utf-8"?>
+<file path=ppt/slides/slide51.xml><?xml version="1.0" encoding="utf-8"?>
 <p:sld xmlns:a="http://schemas.openxmlformats.org/drawingml/2006/main" xmlns:r="http://schemas.openxmlformats.org/officeDocument/2006/relationships" xmlns:p="http://schemas.openxmlformats.org/presentationml/2006/main">
-  <p:cSld name="Slide 44">
+  <p:cSld name="Slide 51">
     <p:spTree>
       <p:nvGrpSpPr>
         <p:cNvPr id="1" name=""/>
@@ -17334,7 +20193,7 @@
       </p:sp>
       <p:graphicFrame>
         <p:nvGraphicFramePr>
-          <p:cNvPr id="45" name="Table 0"/>
+          <p:cNvPr id="52" name="Table 0"/>
           <p:cNvGraphicFramePr>
             <a:graphicFrameLocks noGrp="1"/>
           </p:cNvGraphicFramePr>
@@ -17444,7 +20303,7 @@
                           <a:ea typeface="Calibri" pitchFamily="34" charset="-122"/>
                           <a:cs typeface="Calibri" pitchFamily="34" charset="-120"/>
                         </a:rPr>
-                        <a:t>Importance of Coasts; Coastal Hazards; Coastal Management Strategies.</a:t>
+                        <a:t>DEFINITIONS; Importance of Coasts (Resources); Coastal Hazards; Coastal Management Strategies.</a:t>
                       </a:r>
                       <a:endParaRPr lang="en-US" sz="1600" dirty="0">
                         <a:latin typeface="Calibri" charset="0"/>
@@ -18094,7 +20953,7 @@
             <a:pPr algn="ctr"/>
             <a:fld id="{F7021451-1387-4CA6-816F-3879F97B5CBC}" type="slidenum">
               <a:rPr b="1" lang="en-US"/>
-              <a:t>44</a:t>
+              <a:t>51</a:t>
             </a:fld>
             <a:endParaRPr lang="en-US"/>
           </a:p>
@@ -18108,9 +20967,9 @@
 </p:sld>
 </file>
 
-<file path=ppt/slides/slide45.xml><?xml version="1.0" encoding="utf-8"?>
+<file path=ppt/slides/slide52.xml><?xml version="1.0" encoding="utf-8"?>
 <p:sld xmlns:a="http://schemas.openxmlformats.org/drawingml/2006/main" xmlns:r="http://schemas.openxmlformats.org/officeDocument/2006/relationships" xmlns:p="http://schemas.openxmlformats.org/presentationml/2006/main">
-  <p:cSld name="Slide 45">
+  <p:cSld name="Slide 52">
     <p:spTree>
       <p:nvGrpSpPr>
         <p:cNvPr id="1" name=""/>
@@ -18287,7 +21146,7 @@
                 <a:ea typeface="Calibri" pitchFamily="34" charset="-122"/>
                 <a:cs typeface="Calibri" pitchFamily="34" charset="-120"/>
               </a:rPr>
-              <a:t>Without the projector (Activity 1): ask learners what products come from the port of Douala.</a:t>
+              <a:t>Without the projector (Activity 1): name goods that come through Douala.</a:t>
             </a:r>
             <a:endParaRPr lang="en-US" sz="2000" dirty="0"/>
           </a:p>
@@ -18308,7 +21167,7 @@
                 <a:ea typeface="Calibri" pitchFamily="34" charset="-122"/>
                 <a:cs typeface="Calibri" pitchFamily="34" charset="-120"/>
               </a:rPr>
-              <a:t>Without the projector (Activity 2): describe houses near the sea that are damaged by waves.</a:t>
+              <a:t>Without the projector (Activity 2): describe coastal erosion at Kribi.</a:t>
             </a:r>
             <a:endParaRPr lang="en-US" sz="2000" dirty="0"/>
           </a:p>
@@ -18329,7 +21188,7 @@
                 <a:ea typeface="Calibri" pitchFamily="34" charset="-122"/>
                 <a:cs typeface="Calibri" pitchFamily="34" charset="-120"/>
               </a:rPr>
-              <a:t>Without the projector (Activity 3): draw a beach with walls across it.</a:t>
+              <a:t>Without the projector (Activity 3): draw a beach with groynes.</a:t>
             </a:r>
             <a:endParaRPr lang="en-US" sz="2000" dirty="0"/>
           </a:p>
@@ -18377,7 +21236,7 @@
             <a:pPr algn="ctr"/>
             <a:fld id="{F7021451-1387-4CA6-816F-3879F97B5CBC}" type="slidenum">
               <a:rPr b="1" lang="en-US"/>
-              <a:t>45</a:t>
+              <a:t>52</a:t>
             </a:fld>
             <a:endParaRPr lang="en-US"/>
           </a:p>
@@ -18391,9 +21250,9 @@
 </p:sld>
 </file>
 
-<file path=ppt/slides/slide46.xml><?xml version="1.0" encoding="utf-8"?>
+<file path=ppt/slides/slide53.xml><?xml version="1.0" encoding="utf-8"?>
 <p:sld xmlns:a="http://schemas.openxmlformats.org/drawingml/2006/main" xmlns:r="http://schemas.openxmlformats.org/officeDocument/2006/relationships" xmlns:p="http://schemas.openxmlformats.org/presentationml/2006/main">
-  <p:cSld name="Slide 46">
+  <p:cSld name="Slide 53">
     <p:spTree>
       <p:nvGrpSpPr>
         <p:cNvPr id="1" name=""/>
@@ -18464,7 +21323,7 @@
         <p:spPr>
           <a:xfrm>
             <a:off x="0" y="658368"/>
-            <a:ext cx="3840480" cy="5833872"/>
+            <a:ext cx="1463040" cy="5833872"/>
           </a:xfrm>
           <a:prstGeom prst="rect">
             <a:avLst/>
@@ -18479,8 +21338,8 @@
         </p:nvSpPr>
         <p:spPr>
           <a:xfrm>
-            <a:off x="4069080" y="1005840"/>
-            <a:ext cx="7802575" cy="731520"/>
+            <a:off x="1691640" y="1005840"/>
+            <a:ext cx="10180015" cy="731520"/>
           </a:xfrm>
           <a:prstGeom prst="rect">
             <a:avLst/>
@@ -18520,8 +21379,8 @@
         </p:nvSpPr>
         <p:spPr>
           <a:xfrm>
-            <a:off x="4069080" y="1783080"/>
-            <a:ext cx="7802575" cy="4663440"/>
+            <a:off x="1691640" y="1783080"/>
+            <a:ext cx="10180015" cy="4663440"/>
           </a:xfrm>
           <a:prstGeom prst="rect">
             <a:avLst/>
@@ -18612,7 +21471,7 @@
                 <a:ea typeface="Calibri" pitchFamily="34" charset="-122"/>
                 <a:cs typeface="Calibri" pitchFamily="34" charset="-120"/>
               </a:rPr>
-              <a:t>Photo, Activity 2: “Coastal defences no longer being maintained - Why? Spurn Head, Yorkshi” by Richard Allaway, CC BY 2.0, via Flickr (https://www.flickr.com/photos/16287002@N00/6605676971)</a:t>
+              <a:t>Photo, Activity 2: “Wave Explosion, Monterey Bay, California” by John William Hammond, CC BY-NC-SA 2.0, via Flickr (https://www.flickr.com/photos/8398907@N02/16328053911)</a:t>
             </a:r>
             <a:endParaRPr lang="en-US" sz="1800" dirty="0"/>
           </a:p>
@@ -18654,7 +21513,28 @@
                 <a:ea typeface="Calibri" pitchFamily="34" charset="-122"/>
                 <a:cs typeface="Calibri" pitchFamily="34" charset="-120"/>
               </a:rPr>
-              <a:t>Diagrams and animations: drawn for this lesson (Geography Department).</a:t>
+              <a:t>Photo, board summary (Tourism): “Sunset in Limbe” by visulogik, CC BY 2.0, via Flickr (https://www.flickr.com/photos/55671677@N00/2202334428)</a:t>
+            </a:r>
+            <a:endParaRPr lang="en-US" sz="1800" dirty="0"/>
+          </a:p>
+          <a:p>
+            <a:pPr algn="l" marL="342900" indent="-342900">
+              <a:spcAft>
+                <a:spcPts val="800"/>
+              </a:spcAft>
+              <a:buSzPct val="100000"/>
+              <a:buChar char="•"/>
+            </a:pPr>
+            <a:r>
+              <a:rPr lang="en-US" sz="1800" dirty="0">
+                <a:solidFill>
+                  <a:srgbClr val="111111"/>
+                </a:solidFill>
+                <a:latin typeface="Calibri" pitchFamily="34" charset="0"/>
+                <a:ea typeface="Calibri" pitchFamily="34" charset="-122"/>
+                <a:cs typeface="Calibri" pitchFamily="34" charset="-120"/>
+              </a:rPr>
+              <a:t>Photo, board summary (Mangroves and trees): “Pitchavaram waterway - Mangrove forest” by Balaji.B Photography, CC BY 2.0, via Flickr (https://www.flickr.com/photos/81073027@N00/1745978833)</a:t>
             </a:r>
             <a:endParaRPr lang="en-US" sz="1800" dirty="0"/>
           </a:p>
@@ -18702,7 +21582,7 @@
             <a:pPr algn="ctr"/>
             <a:fld id="{F7021451-1387-4CA6-816F-3879F97B5CBC}" type="slidenum">
               <a:rPr b="1" lang="en-US"/>
-              <a:t>46</a:t>
+              <a:t>53</a:t>
             </a:fld>
             <a:endParaRPr lang="en-US"/>
           </a:p>
@@ -18716,9 +21596,9 @@
 </p:sld>
 </file>
 
-<file path=ppt/slides/slide5.xml><?xml version="1.0" encoding="utf-8"?>
+<file path=ppt/slides/slide54.xml><?xml version="1.0" encoding="utf-8"?>
 <p:sld xmlns:a="http://schemas.openxmlformats.org/drawingml/2006/main" xmlns:r="http://schemas.openxmlformats.org/officeDocument/2006/relationships" xmlns:p="http://schemas.openxmlformats.org/presentationml/2006/main">
-  <p:cSld name="Slide 5">
+  <p:cSld name="Slide 54">
     <p:spTree>
       <p:nvGrpSpPr>
         <p:cNvPr id="1" name=""/>
@@ -18766,7 +21646,7 @@
                 <a:ea typeface="Calibri" pitchFamily="34" charset="-122"/>
                 <a:cs typeface="Calibri" pitchFamily="34" charset="-120"/>
               </a:rPr>
-              <a:t>HOMEWORK CORRECTION</a:t>
+              <a:t>REFERENCES</a:t>
             </a:r>
             <a:endParaRPr lang="en-US" sz="1400" dirty="0"/>
           </a:p>
@@ -18831,7 +21711,7 @@
                 <a:ea typeface="Times New Roman" pitchFamily="34" charset="-122"/>
                 <a:cs typeface="Times New Roman" pitchFamily="34" charset="-120"/>
               </a:rPr>
-              <a:t>Correction: Possible Answer</a:t>
+              <a:t>References (continued)</a:t>
             </a:r>
             <a:endParaRPr lang="en-US" sz="3600" dirty="0"/>
           </a:p>
@@ -18858,24 +21738,25 @@
           <a:bodyPr wrap="square" lIns="0" tIns="0" rIns="0" bIns="0" rtlCol="0" anchor="t"/>
           <a:lstStyle/>
           <a:p>
-            <a:pPr algn="l" indent="0" marL="0">
+            <a:pPr algn="l" marL="342900" indent="-342900">
               <a:spcAft>
                 <a:spcPts val="800"/>
               </a:spcAft>
-              <a:buNone/>
+              <a:buSzPct val="100000"/>
+              <a:buChar char="•"/>
             </a:pPr>
             <a:r>
-              <a:rPr lang="en-US" sz="4000" dirty="0">
+              <a:rPr lang="en-US" sz="1800" dirty="0">
                 <a:solidFill>
                   <a:srgbClr val="111111"/>
                 </a:solidFill>
-                <a:latin typeface="Times New Roman" pitchFamily="34" charset="0"/>
-                <a:ea typeface="Times New Roman" pitchFamily="34" charset="-122"/>
-                <a:cs typeface="Times New Roman" pitchFamily="34" charset="-120"/>
+                <a:latin typeface="Calibri" pitchFamily="34" charset="0"/>
+                <a:ea typeface="Calibri" pitchFamily="34" charset="-122"/>
+                <a:cs typeface="Calibri" pitchFamily="34" charset="-120"/>
               </a:rPr>
-              <a:t>Examples: rice, frozen fish, second-hand clothes, cars, phones and cement clinker. Traders say they entered through the port of Douala (some through Kribi).</a:t>
-            </a:r>
-            <a:endParaRPr lang="en-US" sz="4000" dirty="0"/>
+              <a:t>Diagrams and animations: drawn for this lesson (Geography Department).</a:t>
+            </a:r>
+            <a:endParaRPr lang="en-US" sz="1800" dirty="0"/>
           </a:p>
         </p:txBody>
       </p:sp>
@@ -18921,7 +21802,7 @@
             <a:pPr algn="ctr"/>
             <a:fld id="{F7021451-1387-4CA6-816F-3879F97B5CBC}" type="slidenum">
               <a:rPr b="1" lang="en-US"/>
-              <a:t>5</a:t>
+              <a:t>54</a:t>
             </a:fld>
             <a:endParaRPr lang="en-US"/>
           </a:p>
@@ -19886,7 +22767,7 @@
         <p:spPr>
           <a:xfrm>
             <a:off x="0" y="658368"/>
-            <a:ext cx="5120640" cy="5833872"/>
+            <a:ext cx="2468880" cy="5833872"/>
           </a:xfrm>
           <a:prstGeom prst="rect">
             <a:avLst/>
@@ -19901,8 +22782,8 @@
         </p:nvSpPr>
         <p:spPr>
           <a:xfrm>
-            <a:off x="5349240" y="1005840"/>
-            <a:ext cx="6522415" cy="731520"/>
+            <a:off x="2697480" y="1005840"/>
+            <a:ext cx="9174175" cy="731520"/>
           </a:xfrm>
           <a:prstGeom prst="rect">
             <a:avLst/>
@@ -19942,8 +22823,8 @@
         </p:nvSpPr>
         <p:spPr>
           <a:xfrm>
-            <a:off x="5349240" y="1783080"/>
-            <a:ext cx="6522415" cy="4663440"/>
+            <a:off x="2697480" y="1783080"/>
+            <a:ext cx="9174175" cy="4663440"/>
           </a:xfrm>
           <a:prstGeom prst="rect">
             <a:avLst/>
@@ -19970,7 +22851,47 @@
                 <a:ea typeface="Times New Roman" pitchFamily="34" charset="-122"/>
                 <a:cs typeface="Times New Roman" pitchFamily="34" charset="-120"/>
               </a:rPr>
-              <a:t>In the market of Garoua, Idrissa sees phones, cloth and rice from abroad. Most of them came by ship to the ports of Douala or Kribi, then by road to Garoua.</a:t>
+              <a:t>In the market of Garoua, Idrissa sees phones, cloth and rice that came by ship to Douala or Kribi.</a:t>
+            </a:r>
+            <a:endParaRPr lang="en-US" sz="4000" dirty="0"/>
+          </a:p>
+          <a:p>
+            <a:pPr algn="l" indent="0" marL="0">
+              <a:spcAft>
+                <a:spcPts val="800"/>
+              </a:spcAft>
+              <a:buNone/>
+            </a:pPr>
+            <a:r>
+              <a:rPr lang="en-US" sz="4000" dirty="0">
+                <a:solidFill>
+                  <a:srgbClr val="111111"/>
+                </a:solidFill>
+                <a:latin typeface="Times New Roman" pitchFamily="34" charset="0"/>
+                <a:ea typeface="Times New Roman" pitchFamily="34" charset="-122"/>
+                <a:cs typeface="Times New Roman" pitchFamily="34" charset="-120"/>
+              </a:rPr>
+              <a:t>His uncle in Douala says that the sea brings trade and fish, but that strong waves also destroy beaches and houses.</a:t>
+            </a:r>
+            <a:endParaRPr lang="en-US" sz="4000" dirty="0"/>
+          </a:p>
+          <a:p>
+            <a:pPr algn="l" indent="0" marL="0">
+              <a:spcAft>
+                <a:spcPts val="800"/>
+              </a:spcAft>
+              <a:buNone/>
+            </a:pPr>
+            <a:r>
+              <a:rPr lang="en-US" sz="4000" dirty="0">
+                <a:solidFill>
+                  <a:srgbClr val="111111"/>
+                </a:solidFill>
+                <a:latin typeface="Times New Roman" pitchFamily="34" charset="0"/>
+                <a:ea typeface="Times New Roman" pitchFamily="34" charset="-122"/>
+                <a:cs typeface="Times New Roman" pitchFamily="34" charset="-120"/>
+              </a:rPr>
+              <a:t>"</a:t>
             </a:r>
             <a:endParaRPr lang="en-US" sz="4000" dirty="0"/>
           </a:p>

--- a/lecons/F3/30_FORM4_LESSON26_Impact_of_Wave_Action_on_Coastal_Development.pptx
+++ b/lecons/F3/30_FORM4_LESSON26_Impact_of_Wave_Action_on_Coastal_Development.pptx
@@ -3459,7 +3459,7 @@
           <a:p>
             <a:r>
               <a:rPr lang="en-US" dirty="0"/>
-              <a:t>Before we start the new lesson, let us correct the homework I gave you at the end of Lesson 25: Main Depositional Features of Wave Action. The question was: List five goods sold in the market of Garoua that come from abroad. Ask a trader through which port they entered Cameroon. Take out your exercise books.</a:t>
+              <a:t>Before we start the new lesson, let us correct the homework I gave you at the end of Lesson 25: Main Depositional Features of Wave Action. The question was: Name the two main sea ports of Cameroon. Take out your exercise books.</a:t>
             </a:r>
             <a:endParaRPr lang="en-US" dirty="0"/>
           </a:p>
@@ -4163,7 +4163,7 @@
           <a:p>
             <a:r>
               <a:rPr lang="en-US" dirty="0"/>
-              <a:t>For your homework: On a map of Africa in your atlas, find the Sahara, the Sahel and the Kalahari. Write in which part of Africa each one is located. We shall correct it at the beginning of our next lesson.</a:t>
+              <a:t>For your homework: Name the largest hot desert of Africa. We shall correct it at the beginning of our next lesson.</a:t>
             </a:r>
             <a:endParaRPr lang="en-US" dirty="0"/>
           </a:p>
@@ -4427,7 +4427,7 @@
           <a:p>
             <a:r>
               <a:rPr lang="en-US" dirty="0"/>
-              <a:t>Here is a good answer. Examples: rice, frozen fish, second-hand clothes, cars, phones and cement clinker. Traders say they entered through the port of Douala (some through Kribi). Compare it with your own answer and correct your work in red.</a:t>
+              <a:t>Here is a good answer. Douala and Kribi. Compare it with your own answer and correct your work in red.</a:t>
             </a:r>
             <a:endParaRPr lang="en-US" dirty="0"/>
           </a:p>
@@ -15425,7 +15425,7 @@
         <p:spPr>
           <a:xfrm>
             <a:off x="0" y="658368"/>
-            <a:ext cx="3840480" cy="5833872"/>
+            <a:ext cx="5120640" cy="5833872"/>
           </a:xfrm>
           <a:prstGeom prst="rect">
             <a:avLst/>
@@ -15440,8 +15440,8 @@
         </p:nvSpPr>
         <p:spPr>
           <a:xfrm>
-            <a:off x="4069080" y="1005840"/>
-            <a:ext cx="7802575" cy="731520"/>
+            <a:off x="5349240" y="1005840"/>
+            <a:ext cx="6522415" cy="731520"/>
           </a:xfrm>
           <a:prstGeom prst="rect">
             <a:avLst/>
@@ -15481,8 +15481,8 @@
         </p:nvSpPr>
         <p:spPr>
           <a:xfrm>
-            <a:off x="4069080" y="1783080"/>
-            <a:ext cx="7802575" cy="4663440"/>
+            <a:off x="5349240" y="1783080"/>
+            <a:ext cx="6522415" cy="4663440"/>
           </a:xfrm>
           <a:prstGeom prst="rect">
             <a:avLst/>
@@ -15529,7 +15529,7 @@
                 <a:ea typeface="Times New Roman" pitchFamily="34" charset="-122"/>
                 <a:cs typeface="Times New Roman" pitchFamily="34" charset="-120"/>
               </a:rPr>
-              <a:t>List five goods sold in the market of Garoua that come from abroad. Ask a trader through which port they entered Cameroon.</a:t>
+              <a:t>Name the two main sea ports of Cameroon.</a:t>
             </a:r>
             <a:endParaRPr lang="en-US" sz="4000" dirty="0"/>
           </a:p>
@@ -17420,7 +17420,7 @@
                 <a:ea typeface="Times New Roman" pitchFamily="34" charset="-122"/>
                 <a:cs typeface="Times New Roman" pitchFamily="34" charset="-120"/>
               </a:rPr>
-              <a:t>On a map of Africa in your atlas, find the Sahara, the Sahel and the Kalahari. Write in which part of Africa each one is located.</a:t>
+              <a:t>Name the largest hot desert of Africa.</a:t>
             </a:r>
             <a:endParaRPr lang="en-US" sz="4000" dirty="0"/>
           </a:p>
@@ -19301,7 +19301,7 @@
                 <a:ea typeface="Times New Roman" pitchFamily="34" charset="-122"/>
                 <a:cs typeface="Times New Roman" pitchFamily="34" charset="-120"/>
               </a:rPr>
-              <a:t>Examples: rice, frozen fish, second-hand clothes, cars, phones and cement clinker. Traders say they entered through the port of Douala (some through Kribi).</a:t>
+              <a:t>Douala and Kribi.</a:t>
             </a:r>
             <a:endParaRPr lang="en-US" sz="4000" dirty="0"/>
           </a:p>
@@ -20579,7 +20579,7 @@
                           <a:ea typeface="Calibri" pitchFamily="34" charset="-122"/>
                           <a:cs typeface="Calibri" pitchFamily="34" charset="-120"/>
                         </a:rPr>
-                        <a:t>On a map of Africa in your atlas, find the Sahara, the Sahel and the Kalahari. Write in which part of Africa each one is located.</a:t>
+                        <a:t>Name the largest hot desert of Africa.</a:t>
                       </a:r>
                       <a:endParaRPr lang="en-US" sz="1600" dirty="0">
                         <a:latin typeface="Calibri" charset="0"/>

--- a/lecons/F3/30_FORM4_LESSON26_Impact_of_Wave_Action_on_Coastal_Development.pptx
+++ b/lecons/F3/30_FORM4_LESSON26_Impact_of_Wave_Action_on_Coastal_Development.pptx
@@ -59,9 +59,10 @@
     <p:sldId id="307" r:id="rId53"/>
     <p:sldId id="308" r:id="rId54"/>
     <p:sldId id="309" r:id="rId55"/>
+    <p:sldId id="310" r:id="rId56"/>
   </p:sldIdLst>
   <p:notesMasterIdLst>
-    <p:notesMasterId r:id="rId56"/>
+    <p:notesMasterId r:id="rId57"/>
   </p:notesMasterIdLst>
   <p:sldSz cx="12192000" cy="6858000"/>
   <p:notesSz cx="6858000" cy="12192000"/>
@@ -643,7 +644,7 @@
           <a:p>
             <a:r>
               <a:rPr lang="en-US" dirty="0"/>
-              <a:t>Question 1: What is the problem in the situation? Think for a moment, then raise your hand to answer.</a:t>
+              <a:t>Listen carefully to this situation from real life. In the market of Garoua, Idrissa sees phones, cloth and rice that came by ship to Douala or Kribi. His uncle in Douala says that the sea brings trade and fish, but that strong waves also destroy beaches and houses. Idrissa asks: "Is the coast a blessing or a danger, and how can it be protected?" Think about it, because I am going to ask you some questions.</a:t>
             </a:r>
             <a:endParaRPr lang="en-US" dirty="0"/>
           </a:p>
@@ -731,7 +732,7 @@
           <a:p>
             <a:r>
               <a:rPr lang="en-US" dirty="0"/>
-              <a:t>Good. Idrissa does not know whether the coast is more useful or more dangerous, and how it can be protected.</a:t>
+              <a:t>Question 1: What is the problem in the situation? Think for a moment, then raise your hand to answer.</a:t>
             </a:r>
             <a:endParaRPr lang="en-US" dirty="0"/>
           </a:p>
@@ -819,7 +820,7 @@
           <a:p>
             <a:r>
               <a:rPr lang="en-US" dirty="0"/>
-              <a:t>Question 2: How did the goods reach Cameroon? Think for a moment, then raise your hand to answer.</a:t>
+              <a:t>Good. Idrissa does not know whether the coast is more useful or more dangerous, and how it can be protected.</a:t>
             </a:r>
             <a:endParaRPr lang="en-US" dirty="0"/>
           </a:p>
@@ -907,7 +908,7 @@
           <a:p>
             <a:r>
               <a:rPr lang="en-US" dirty="0"/>
-              <a:t>Good. By ship, through the ports of Douala or Kribi.</a:t>
+              <a:t>Question 2: How did the goods reach Cameroon? Think for a moment, then raise your hand to answer.</a:t>
             </a:r>
             <a:endParaRPr lang="en-US" dirty="0"/>
           </a:p>
@@ -995,7 +996,7 @@
           <a:p>
             <a:r>
               <a:rPr lang="en-US" dirty="0"/>
-              <a:t>Question 3: Give one danger of the sea. Think for a moment, then raise your hand to answer.</a:t>
+              <a:t>Good. By ship, through the ports of Douala or Kribi.</a:t>
             </a:r>
             <a:endParaRPr lang="en-US" dirty="0"/>
           </a:p>
@@ -1083,7 +1084,7 @@
           <a:p>
             <a:r>
               <a:rPr lang="en-US" dirty="0"/>
-              <a:t>Good. Strong waves destroy beaches and houses.</a:t>
+              <a:t>Question 3: Give one danger of the sea. Think for a moment, then raise your hand to answer.</a:t>
             </a:r>
             <a:endParaRPr lang="en-US" dirty="0"/>
           </a:p>
@@ -1171,7 +1172,7 @@
           <a:p>
             <a:r>
               <a:rPr lang="en-US" dirty="0"/>
-              <a:t>From this situation, the action we are working towards in this lesson is the following: protect mangroves and keep beaches clean.</a:t>
+              <a:t>Good. Strong waves destroy beaches and houses.</a:t>
             </a:r>
             <a:endParaRPr lang="en-US" dirty="0"/>
           </a:p>
@@ -1259,7 +1260,7 @@
           <a:p>
             <a:r>
               <a:rPr lang="en-US" dirty="0"/>
-              <a:t>Why is this lesson important for you? This lesson helps us to know the importance and the dangers of the coast.</a:t>
+              <a:t>From this situation, the action we are working towards in this lesson is the following: protect mangroves and keep beaches clean.</a:t>
             </a:r>
             <a:endParaRPr lang="en-US" dirty="0"/>
           </a:p>
@@ -1347,7 +1348,7 @@
           <a:p>
             <a:r>
               <a:rPr lang="en-US" dirty="0"/>
-              <a:t>Activity 1. Look carefully at this picture: a container ship in a port. Observe every detail before I ask the question.</a:t>
+              <a:t>Why is this lesson important for you? This lesson helps us to know the importance and the dangers of the coast.</a:t>
             </a:r>
             <a:endParaRPr lang="en-US" dirty="0"/>
           </a:p>
@@ -1435,7 +1436,7 @@
           <a:p>
             <a:r>
               <a:rPr lang="en-US" dirty="0"/>
-              <a:t>Here is the question for Activity 1: Why are ports important for Cameroon? Take one minute to think and write your answer in your rough notebook.</a:t>
+              <a:t>Activity 1. Look carefully at this picture: a container ship in a port. Observe every detail before I ask the question.</a:t>
             </a:r>
             <a:endParaRPr lang="en-US" dirty="0"/>
           </a:p>
@@ -1611,7 +1612,7 @@
           <a:p>
             <a:r>
               <a:rPr lang="en-US" dirty="0"/>
-              <a:t>Let us check the answer together. Ships bring in and take out goods: they carry most of the country's trade.</a:t>
+              <a:t>Here is the question for Activity 1: Why are ports important for Cameroon? Take one minute to think and write your answer in your rough notebook.</a:t>
             </a:r>
             <a:endParaRPr lang="en-US" dirty="0"/>
           </a:p>
@@ -1699,7 +1700,7 @@
           <a:p>
             <a:r>
               <a:rPr lang="en-US" dirty="0"/>
-              <a:t>Activity 2. Look carefully at this picture: high waves on a beach. Observe every detail before I ask the question.</a:t>
+              <a:t>Let us check the answer together. Ships bring in and take out goods: they carry most of the country's trade.</a:t>
             </a:r>
             <a:endParaRPr lang="en-US" dirty="0"/>
           </a:p>
@@ -1787,7 +1788,7 @@
           <a:p>
             <a:r>
               <a:rPr lang="en-US" dirty="0"/>
-              <a:t>Here is the question for Activity 2: What can such waves do to houses built near the beach? Take one minute to think and write your answer in your rough notebook.</a:t>
+              <a:t>Activity 2. Look carefully at this picture: high waves on a beach. Observe every detail before I ask the question.</a:t>
             </a:r>
             <a:endParaRPr lang="en-US" dirty="0"/>
           </a:p>
@@ -1875,7 +1876,7 @@
           <a:p>
             <a:r>
               <a:rPr lang="en-US" dirty="0"/>
-              <a:t>Let us check the answer together. They erode the beach and can destroy the houses.</a:t>
+              <a:t>Here is the question for Activity 2: What can such waves do to houses built near the beach? Take one minute to think and write your answer in your rough notebook.</a:t>
             </a:r>
             <a:endParaRPr lang="en-US" dirty="0"/>
           </a:p>
@@ -1963,7 +1964,7 @@
           <a:p>
             <a:r>
               <a:rPr lang="en-US" dirty="0"/>
-              <a:t>Activity 3. Look carefully at this picture: low walls across a beach. Observe every detail before I ask the question.</a:t>
+              <a:t>Let us check the answer together. They erode the beach and can destroy the houses.</a:t>
             </a:r>
             <a:endParaRPr lang="en-US" dirty="0"/>
           </a:p>
@@ -2051,7 +2052,7 @@
           <a:p>
             <a:r>
               <a:rPr lang="en-US" dirty="0"/>
-              <a:t>Here is the question for Activity 3: How do these low walls protect the beach? Take one minute to think and write your answer in your rough notebook.</a:t>
+              <a:t>Activity 3. Look carefully at this picture: low walls across a beach. Observe every detail before I ask the question.</a:t>
             </a:r>
             <a:endParaRPr lang="en-US" dirty="0"/>
           </a:p>
@@ -2139,7 +2140,7 @@
           <a:p>
             <a:r>
               <a:rPr lang="en-US" dirty="0"/>
-              <a:t>Let us check the answer together. They trap the sand and stop longshore drift from carrying it away.</a:t>
+              <a:t>Here is the question for Activity 3: How do these low walls protect the beach? Take one minute to think and write your answer in your rough notebook.</a:t>
             </a:r>
             <a:endParaRPr lang="en-US" dirty="0"/>
           </a:p>
@@ -2227,7 +2228,7 @@
           <a:p>
             <a:r>
               <a:rPr lang="en-US" dirty="0"/>
-              <a:t>Now we are going to copy the board summary. Write the title and the headings neatly in your notebooks. I will give you enough time for each slide, so do not rush.</a:t>
+              <a:t>Let us check the answer together. They trap the sand and stop longshore drift from carrying it away.</a:t>
             </a:r>
             <a:endParaRPr lang="en-US" dirty="0"/>
           </a:p>
@@ -2315,7 +2316,7 @@
           <a:p>
             <a:r>
               <a:rPr lang="en-US" dirty="0"/>
-              <a:t>Let us copy the definitions. The key terms of this lesson are defined as follows. On this slide we have Resource and Coastal hazard. Write each point on a new line, with the key term first, and explain it in your own words when we revise. When you finish, we go to the next slide.</a:t>
+              <a:t>Now we are going to copy the board summary. Write the title and the headings neatly in your notebooks. I will give you enough time for each slide, so do not rush.</a:t>
             </a:r>
             <a:endParaRPr lang="en-US" dirty="0"/>
           </a:p>
@@ -2403,7 +2404,7 @@
           <a:p>
             <a:r>
               <a:rPr lang="en-US" dirty="0"/>
-              <a:t>We continue with the definitions. On this slide we have Coastal management. Write each point on a new line, with the key term first, and explain it in your own words when we revise.</a:t>
+              <a:t>Let us copy the definitions. The key terms of this lesson are defined as follows. On this slide we have Resource and Coastal hazard. Write each point on a new line, with the key term first, and explain it in your own words when we revise. When you finish, we go to the next slide.</a:t>
             </a:r>
             <a:endParaRPr lang="en-US" dirty="0"/>
           </a:p>
@@ -2579,7 +2580,7 @@
           <a:p>
             <a:r>
               <a:rPr lang="en-US" dirty="0"/>
-              <a:t>Let us copy Importance of Coasts (Resources). Coasts provide the following resources. Copy the point on Ports and trade on the left, then draw the diagram on the right: a port. Give it a title and label it clearly.</a:t>
+              <a:t>We continue with the definitions. On this slide we have Coastal management. Write each point on a new line, with the key term first, and explain it in your own words when we revise.</a:t>
             </a:r>
             <a:endParaRPr lang="en-US" dirty="0"/>
           </a:p>
@@ -2667,7 +2668,7 @@
           <a:p>
             <a:r>
               <a:rPr lang="en-US" dirty="0"/>
-              <a:t>We continue with Importance of Coasts (Resources). On this slide we have Fishing. Write each point on a new line, with the key term first, and explain it in your own words when we revise.</a:t>
+              <a:t>Let us copy Importance of Coasts (Resources). Coasts provide the following resources. Copy the point on Ports and trade on the left, then draw the diagram on the right: a port. Give it a title and label it clearly.</a:t>
             </a:r>
             <a:endParaRPr lang="en-US" dirty="0"/>
           </a:p>
@@ -2755,7 +2756,7 @@
           <a:p>
             <a:r>
               <a:rPr lang="en-US" dirty="0"/>
-              <a:t>Copy the point on Tourism on the left, then draw the diagram on the right: the coast at Limbe. Give it a title and label it clearly.</a:t>
+              <a:t>We continue with Importance of Coasts (Resources). On this slide we have Fishing. Write each point on a new line, with the key term first, and explain it in your own words when we revise.</a:t>
             </a:r>
             <a:endParaRPr lang="en-US" dirty="0"/>
           </a:p>
@@ -2843,7 +2844,7 @@
           <a:p>
             <a:r>
               <a:rPr lang="en-US" dirty="0"/>
-              <a:t>We continue with Importance of Coasts (Resources). On this slide we have Oil and gas and Industry and settlement. Write each point on a new line, with the key term first, and explain it in your own words when we revise.</a:t>
+              <a:t>Copy the point on Tourism on the left, then draw the diagram on the right: the coast at Limbe. Give it a title and label it clearly.</a:t>
             </a:r>
             <a:endParaRPr lang="en-US" dirty="0"/>
           </a:p>
@@ -2931,7 +2932,7 @@
           <a:p>
             <a:r>
               <a:rPr lang="en-US" dirty="0"/>
-              <a:t>Let us copy Coastal Hazards. People on the coast face the following hazards. Copy the point on Coastal erosion on the left, then draw the diagram on the right: high waves. Give it a title and label it clearly.</a:t>
+              <a:t>We continue with Importance of Coasts (Resources). On this slide we have Oil and gas and Industry and settlement. Write each point on a new line, with the key term first, and explain it in your own words when we revise.</a:t>
             </a:r>
             <a:endParaRPr lang="en-US" dirty="0"/>
           </a:p>
@@ -3019,7 +3020,7 @@
           <a:p>
             <a:r>
               <a:rPr lang="en-US" dirty="0"/>
-              <a:t>We continue with Coastal Hazards. On this slide we have Floods, Salt-water incursion and Sea-level rise. Write each point on a new line, with the key term first, and explain it in your own words when we revise. When you finish, we go to the next slide.</a:t>
+              <a:t>Let us copy Coastal Hazards. People on the coast face the following hazards. Copy the point on Coastal erosion on the left, then draw the diagram on the right: high waves. Give it a title and label it clearly.</a:t>
             </a:r>
             <a:endParaRPr lang="en-US" dirty="0"/>
           </a:p>
@@ -3107,7 +3108,7 @@
           <a:p>
             <a:r>
               <a:rPr lang="en-US" dirty="0"/>
-              <a:t>We continue with Coastal Hazards. On this slide we have Pollution. Write each point on a new line, with the key term first, and explain it in your own words when we revise.</a:t>
+              <a:t>We continue with Coastal Hazards. On this slide we have Floods, Salt-water incursion and Sea-level rise. Write each point on a new line, with the key term first, and explain it in your own words when we revise. When you finish, we go to the next slide.</a:t>
             </a:r>
             <a:endParaRPr lang="en-US" dirty="0"/>
           </a:p>
@@ -3195,7 +3196,7 @@
           <a:p>
             <a:r>
               <a:rPr lang="en-US" dirty="0"/>
-              <a:t>Let us copy Coastal Management Strategies. Coasts are protected with the following strategies. Copy the point on Sea walls on the left, then draw the diagram on the right: a sea wall and groynes. Give it a title and label it clearly.</a:t>
+              <a:t>We continue with Coastal Hazards. On this slide we have Pollution. Write each point on a new line, with the key term first, and explain it in your own words when we revise.</a:t>
             </a:r>
             <a:endParaRPr lang="en-US" dirty="0"/>
           </a:p>
@@ -3283,7 +3284,7 @@
           <a:p>
             <a:r>
               <a:rPr lang="en-US" dirty="0"/>
-              <a:t>Copy the point on Groynes on the left, then draw the diagram on the right: groynes. Give it a title and label it clearly.</a:t>
+              <a:t>Let us copy Coastal Management Strategies. Coasts are protected with the following strategies. Copy the point on Sea walls on the left, then draw the diagram on the right: a sea wall and groynes. Give it a title and label it clearly.</a:t>
             </a:r>
             <a:endParaRPr lang="en-US" dirty="0"/>
           </a:p>
@@ -3371,7 +3372,7 @@
           <a:p>
             <a:r>
               <a:rPr lang="en-US" dirty="0"/>
-              <a:t>We continue with Coastal Management Strategies. On this slide we have Rock armour and sandbanks. Write each point on a new line, with the key term first, and explain it in your own words when we revise.</a:t>
+              <a:t>Copy the point on Groynes on the left, then draw the diagram on the right: groynes. Give it a title and label it clearly.</a:t>
             </a:r>
             <a:endParaRPr lang="en-US" dirty="0"/>
           </a:p>
@@ -3547,7 +3548,7 @@
           <a:p>
             <a:r>
               <a:rPr lang="en-US" dirty="0"/>
-              <a:t>Copy the point on Mangroves and trees on the left, then draw the diagram on the right: mangroves. Give it a title and label it clearly.</a:t>
+              <a:t>We continue with Coastal Management Strategies. On this slide we have Rock armour and sandbanks. Write each point on a new line, with the key term first, and explain it in your own words when we revise.</a:t>
             </a:r>
             <a:endParaRPr lang="en-US" dirty="0"/>
           </a:p>
@@ -3635,7 +3636,7 @@
           <a:p>
             <a:r>
               <a:rPr lang="en-US" dirty="0"/>
-              <a:t>We continue with Coastal Management Strategies. On this slide we have Regulations. Write each point on a new line, with the key term first, and explain it in your own words when we revise.</a:t>
+              <a:t>Copy the point on Mangroves and trees on the left, then draw the diagram on the right: mangroves. Give it a title and label it clearly.</a:t>
             </a:r>
             <a:endParaRPr lang="en-US" dirty="0"/>
           </a:p>
@@ -3723,7 +3724,7 @@
           <a:p>
             <a:r>
               <a:rPr lang="en-US" dirty="0"/>
-              <a:t>Now let us check what you have understood. Question 1: Name two ports of Cameroon. Answer in your exercise book.</a:t>
+              <a:t>We continue with Coastal Management Strategies. On this slide we have Regulations. Write each point on a new line, with the key term first, and explain it in your own words when we revise.</a:t>
             </a:r>
             <a:endParaRPr lang="en-US" dirty="0"/>
           </a:p>
@@ -3811,7 +3812,7 @@
           <a:p>
             <a:r>
               <a:rPr lang="en-US" dirty="0"/>
-              <a:t>The expected answer is: douala and Kribi. If you got it right, well done.</a:t>
+              <a:t>Now let us check what you have understood. Question 1: Name two ports of Cameroon. Answer in your exercise book.</a:t>
             </a:r>
             <a:endParaRPr lang="en-US" dirty="0"/>
           </a:p>
@@ -3899,7 +3900,7 @@
           <a:p>
             <a:r>
               <a:rPr lang="en-US" dirty="0"/>
-              <a:t>Now let us check what you have understood. Question 2: Give two ways to protect the coast. Answer in your exercise book.</a:t>
+              <a:t>The expected answer is: douala and Kribi. If you got it right, well done.</a:t>
             </a:r>
             <a:endParaRPr lang="en-US" dirty="0"/>
           </a:p>
@@ -3987,7 +3988,7 @@
           <a:p>
             <a:r>
               <a:rPr lang="en-US" dirty="0"/>
-              <a:t>The expected answer is: sea walls and groynes (also mangroves). If you got it right, well done.</a:t>
+              <a:t>Now let us check what you have understood. Question 2: Give two ways to protect the coast. Answer in your exercise book.</a:t>
             </a:r>
             <a:endParaRPr lang="en-US" dirty="0"/>
           </a:p>
@@ -4075,7 +4076,7 @@
           <a:p>
             <a:r>
               <a:rPr lang="en-US" dirty="0"/>
-              <a:t>For those who need more practice, fill in the blanks in your exercise book. The answers are: number 1, port; number 2, groyne; number 3, erosion.</a:t>
+              <a:t>The expected answer is: sea walls and groynes (also mangroves). If you got it right, well done.</a:t>
             </a:r>
             <a:endParaRPr lang="en-US" dirty="0"/>
           </a:p>
@@ -4163,7 +4164,7 @@
           <a:p>
             <a:r>
               <a:rPr lang="en-US" dirty="0"/>
-              <a:t>For your homework: Name the largest hot desert of Africa. We shall correct it at the beginning of our next lesson.</a:t>
+              <a:t>For those who need more practice, fill in the blanks in your exercise book. The answers are: number 1, port; number 2, groyne; number 3, erosion.</a:t>
             </a:r>
             <a:endParaRPr lang="en-US" dirty="0"/>
           </a:p>
@@ -4251,7 +4252,7 @@
           <a:p>
             <a:r>
               <a:rPr lang="en-US" dirty="0"/>
-              <a:t>Our next lesson will be on Lesson 27: Semi-Arid and Desert Landscapes. Thank you for your attention, and see you next time.</a:t>
+              <a:t>For your homework: Name the largest hot desert of Africa. We shall correct it at the beginning of our next lesson.</a:t>
             </a:r>
             <a:endParaRPr lang="en-US" dirty="0"/>
           </a:p>
@@ -4339,7 +4340,7 @@
           <a:p>
             <a:r>
               <a:rPr lang="en-US" dirty="0"/>
-              <a:t>Let us play the bilingual game. I say a word in English, and you give me the French word. Then we do the reverse.</a:t>
+              <a:t>Our next lesson will be on Lesson 27: Semi-Arid and Desert Landscapes. Thank you for your attention, and see you next time.</a:t>
             </a:r>
             <a:endParaRPr lang="en-US" dirty="0"/>
           </a:p>
@@ -4515,7 +4516,7 @@
           <a:p>
             <a:r>
               <a:rPr lang="en-US" dirty="0"/>
-              <a:t>I record this information in the official logbook of the class after the lesson.</a:t>
+              <a:t>Let us play the bilingual game. I say a word in English, and you give me the French word. Then we do the reverse.</a:t>
             </a:r>
             <a:endParaRPr lang="en-US" dirty="0"/>
           </a:p>
@@ -4603,7 +4604,7 @@
           <a:p>
             <a:r>
               <a:rPr lang="en-US" dirty="0"/>
-              <a:t>I complete the second page of the logbook: the matter taught, the evaluation, the homework and the attendance.</a:t>
+              <a:t>I record this information in the official logbook of the class after the lesson.</a:t>
             </a:r>
             <a:endParaRPr lang="en-US" dirty="0"/>
           </a:p>
@@ -4691,7 +4692,7 @@
           <a:p>
             <a:r>
               <a:rPr lang="en-US" dirty="0"/>
-              <a:t>This slide is for me, the teacher: it gives the timing of the lesson and what to do if the projector is not available.</a:t>
+              <a:t>I complete the second page of the logbook: the matter taught, the evaluation, the homework and the attendance.</a:t>
             </a:r>
             <a:endParaRPr lang="en-US" dirty="0"/>
           </a:p>
@@ -4779,7 +4780,7 @@
           <a:p>
             <a:r>
               <a:rPr lang="en-US" dirty="0"/>
-              <a:t>Take your time to copy this part; we will continue together.</a:t>
+              <a:t>This slide is for me, the teacher: it gives the timing of the lesson and what to do if the projector is not available.</a:t>
             </a:r>
             <a:endParaRPr lang="en-US" dirty="0"/>
           </a:p>
@@ -4867,7 +4868,7 @@
           <a:p>
             <a:r>
               <a:rPr lang="en-US" dirty="0"/>
-              <a:t>These are the references and picture credits used to prepare this lesson.</a:t>
+              <a:t>Take your time to copy this part; we will continue together.</a:t>
             </a:r>
             <a:endParaRPr lang="en-US" dirty="0"/>
           </a:p>
@@ -4891,6 +4892,94 @@
             <a:fld id="{F7021451-1387-4CA6-816F-3879F97B5CBC}" type="slidenum">
               <a:rPr lang="en-US"/>
               <a:t>54</a:t>
+            </a:fld>
+            <a:endParaRPr lang="en-US"/>
+          </a:p>
+        </p:txBody>
+      </p:sp>
+    </p:spTree>
+    <p:extLst>
+      <p:ext uri="{BB962C8B-B14F-4D97-AF65-F5344CB8AC3E}">
+        <p14:creationId xmlns:p14="http://schemas.microsoft.com/office/powerpoint/2010/main" val="1024086991"/>
+      </p:ext>
+    </p:extLst>
+  </p:cSld>
+  <p:clrMapOvr>
+    <a:masterClrMapping/>
+  </p:clrMapOvr>
+</p:notes>
+</file>
+
+<file path=ppt/notesSlides/notesSlide55.xml><?xml version="1.0" encoding="utf-8"?>
+<p:notes xmlns:a="http://schemas.openxmlformats.org/drawingml/2006/main" xmlns:r="http://schemas.openxmlformats.org/officeDocument/2006/relationships" xmlns:p="http://schemas.openxmlformats.org/presentationml/2006/main">
+  <p:cSld>
+    <p:spTree>
+      <p:nvGrpSpPr>
+        <p:cNvPr id="1" name=""/>
+        <p:cNvGrpSpPr/>
+        <p:nvPr/>
+      </p:nvGrpSpPr>
+      <p:grpSpPr>
+        <a:xfrm>
+          <a:off x="0" y="0"/>
+          <a:ext cx="0" cy="0"/>
+          <a:chOff x="0" y="0"/>
+          <a:chExt cx="0" cy="0"/>
+        </a:xfrm>
+      </p:grpSpPr>
+      <p:sp>
+        <p:nvSpPr>
+          <p:cNvPr id="2" name="Slide Image Placeholder 1"/>
+          <p:cNvSpPr>
+            <a:spLocks noGrp="1" noRot="1" noChangeAspect="1"/>
+          </p:cNvSpPr>
+          <p:nvPr>
+            <p:ph type="sldImg"/>
+          </p:nvPr>
+        </p:nvSpPr>
+        <p:spPr/>
+      </p:sp>
+      <p:sp>
+        <p:nvSpPr>
+          <p:cNvPr id="3" name="Notes Placeholder 2"/>
+          <p:cNvSpPr>
+            <a:spLocks noGrp="1"/>
+          </p:cNvSpPr>
+          <p:nvPr>
+            <p:ph type="body" idx="1"/>
+          </p:nvPr>
+        </p:nvSpPr>
+        <p:spPr/>
+        <p:txBody>
+          <a:bodyPr/>
+          <a:lstStyle/>
+          <a:p>
+            <a:r>
+              <a:rPr lang="en-US" dirty="0"/>
+              <a:t>These are the references and picture credits used to prepare this lesson.</a:t>
+            </a:r>
+            <a:endParaRPr lang="en-US" dirty="0"/>
+          </a:p>
+        </p:txBody>
+      </p:sp>
+      <p:sp>
+        <p:nvSpPr>
+          <p:cNvPr id="4" name="Slide Number Placeholder 3"/>
+          <p:cNvSpPr>
+            <a:spLocks noGrp="1"/>
+          </p:cNvSpPr>
+          <p:nvPr>
+            <p:ph type="sldNum" sz="quarter" idx="10"/>
+          </p:nvPr>
+        </p:nvSpPr>
+        <p:spPr/>
+        <p:txBody>
+          <a:bodyPr/>
+          <a:lstStyle/>
+          <a:p>
+            <a:fld id="{F7021451-1387-4CA6-816F-3879F97B5CBC}" type="slidenum">
+              <a:rPr lang="en-US"/>
+              <a:t>55</a:t>
             </a:fld>
             <a:endParaRPr lang="en-US"/>
           </a:p>
@@ -5219,7 +5308,7 @@
           <a:p>
             <a:r>
               <a:rPr lang="en-US" dirty="0"/>
-              <a:t>Listen carefully to this situation from real life. In the market of Garoua, Idrissa sees phones, cloth and rice that came by ship to Douala or Kribi. His uncle in Douala says that the sea brings trade and fish, but that strong waves also destroy beaches and houses. Idrissa asks: "Is the coast a blessing or a danger, and how can it be protected?" Think about it, because I am going to ask you some questions.</a:t>
+              <a:t>Take your time to copy this part; we will continue together.</a:t>
             </a:r>
             <a:endParaRPr lang="en-US" dirty="0"/>
           </a:p>
@@ -6641,7 +6730,7 @@
                 <a:ea typeface="Times New Roman" pitchFamily="34" charset="-122"/>
                 <a:cs typeface="Times New Roman" pitchFamily="34" charset="-120"/>
               </a:rPr>
-              <a:t>Situation: Question 1</a:t>
+              <a:t>Situation in Real Life (continued)</a:t>
             </a:r>
             <a:endParaRPr lang="en-US" sz="3600" dirty="0"/>
           </a:p>
@@ -6683,7 +6772,7 @@
                 <a:ea typeface="Times New Roman" pitchFamily="34" charset="-122"/>
                 <a:cs typeface="Times New Roman" pitchFamily="34" charset="-120"/>
               </a:rPr>
-              <a:t>What is the problem in the situation?</a:t>
+              <a:t>Idrissa asks: "Is the coast a blessing or a danger, and how can it be protected?"</a:t>
             </a:r>
             <a:endParaRPr lang="en-US" sz="4000" dirty="0"/>
           </a:p>
@@ -6860,7 +6949,7 @@
                 <a:ea typeface="Times New Roman" pitchFamily="34" charset="-122"/>
                 <a:cs typeface="Times New Roman" pitchFamily="34" charset="-120"/>
               </a:rPr>
-              <a:t>Answer</a:t>
+              <a:t>Situation: Question 1</a:t>
             </a:r>
             <a:endParaRPr lang="en-US" sz="3600" dirty="0"/>
           </a:p>
@@ -6902,7 +6991,7 @@
                 <a:ea typeface="Times New Roman" pitchFamily="34" charset="-122"/>
                 <a:cs typeface="Times New Roman" pitchFamily="34" charset="-120"/>
               </a:rPr>
-              <a:t>Idrissa does not know whether the coast is more useful or more dangerous, and how it can be protected.</a:t>
+              <a:t>What is the problem in the situation?</a:t>
             </a:r>
             <a:endParaRPr lang="en-US" sz="4000" dirty="0"/>
           </a:p>
@@ -7079,7 +7168,7 @@
                 <a:ea typeface="Times New Roman" pitchFamily="34" charset="-122"/>
                 <a:cs typeface="Times New Roman" pitchFamily="34" charset="-120"/>
               </a:rPr>
-              <a:t>Situation: Question 2</a:t>
+              <a:t>Answer</a:t>
             </a:r>
             <a:endParaRPr lang="en-US" sz="3600" dirty="0"/>
           </a:p>
@@ -7121,7 +7210,7 @@
                 <a:ea typeface="Times New Roman" pitchFamily="34" charset="-122"/>
                 <a:cs typeface="Times New Roman" pitchFamily="34" charset="-120"/>
               </a:rPr>
-              <a:t>How did the goods reach Cameroon?</a:t>
+              <a:t>Idrissa does not know whether the coast is more useful or more dangerous, and how it can be protected.</a:t>
             </a:r>
             <a:endParaRPr lang="en-US" sz="4000" dirty="0"/>
           </a:p>
@@ -7298,7 +7387,7 @@
                 <a:ea typeface="Times New Roman" pitchFamily="34" charset="-122"/>
                 <a:cs typeface="Times New Roman" pitchFamily="34" charset="-120"/>
               </a:rPr>
-              <a:t>Answer</a:t>
+              <a:t>Situation: Question 2</a:t>
             </a:r>
             <a:endParaRPr lang="en-US" sz="3600" dirty="0"/>
           </a:p>
@@ -7340,7 +7429,7 @@
                 <a:ea typeface="Times New Roman" pitchFamily="34" charset="-122"/>
                 <a:cs typeface="Times New Roman" pitchFamily="34" charset="-120"/>
               </a:rPr>
-              <a:t>By ship, through the ports of Douala or Kribi.</a:t>
+              <a:t>How did the goods reach Cameroon?</a:t>
             </a:r>
             <a:endParaRPr lang="en-US" sz="4000" dirty="0"/>
           </a:p>
@@ -7517,7 +7606,7 @@
                 <a:ea typeface="Times New Roman" pitchFamily="34" charset="-122"/>
                 <a:cs typeface="Times New Roman" pitchFamily="34" charset="-120"/>
               </a:rPr>
-              <a:t>Situation: Question 3</a:t>
+              <a:t>Answer</a:t>
             </a:r>
             <a:endParaRPr lang="en-US" sz="3600" dirty="0"/>
           </a:p>
@@ -7559,7 +7648,7 @@
                 <a:ea typeface="Times New Roman" pitchFamily="34" charset="-122"/>
                 <a:cs typeface="Times New Roman" pitchFamily="34" charset="-120"/>
               </a:rPr>
-              <a:t>Give one danger of the sea.</a:t>
+              <a:t>By ship, through the ports of Douala or Kribi.</a:t>
             </a:r>
             <a:endParaRPr lang="en-US" sz="4000" dirty="0"/>
           </a:p>
@@ -7736,7 +7825,7 @@
                 <a:ea typeface="Times New Roman" pitchFamily="34" charset="-122"/>
                 <a:cs typeface="Times New Roman" pitchFamily="34" charset="-120"/>
               </a:rPr>
-              <a:t>Possible Answer</a:t>
+              <a:t>Situation: Question 3</a:t>
             </a:r>
             <a:endParaRPr lang="en-US" sz="3600" dirty="0"/>
           </a:p>
@@ -7778,7 +7867,7 @@
                 <a:ea typeface="Times New Roman" pitchFamily="34" charset="-122"/>
                 <a:cs typeface="Times New Roman" pitchFamily="34" charset="-120"/>
               </a:rPr>
-              <a:t>Strong waves destroy beaches and houses.</a:t>
+              <a:t>Give one danger of the sea.</a:t>
             </a:r>
             <a:endParaRPr lang="en-US" sz="4000" dirty="0"/>
           </a:p>
@@ -7890,7 +7979,7 @@
                 <a:ea typeface="Calibri" pitchFamily="34" charset="-122"/>
                 <a:cs typeface="Calibri" pitchFamily="34" charset="-120"/>
               </a:rPr>
-              <a:t>ACTION TO TAKE</a:t>
+              <a:t>REAL-LIFE SITUATION</a:t>
             </a:r>
             <a:endParaRPr lang="en-US" sz="1400" dirty="0"/>
           </a:p>
@@ -7955,7 +8044,7 @@
                 <a:ea typeface="Times New Roman" pitchFamily="34" charset="-122"/>
                 <a:cs typeface="Times New Roman" pitchFamily="34" charset="-120"/>
               </a:rPr>
-              <a:t>Action to Take</a:t>
+              <a:t>Possible Answer</a:t>
             </a:r>
             <a:endParaRPr lang="en-US" sz="3600" dirty="0"/>
           </a:p>
@@ -7997,7 +8086,7 @@
                 <a:ea typeface="Times New Roman" pitchFamily="34" charset="-122"/>
                 <a:cs typeface="Times New Roman" pitchFamily="34" charset="-120"/>
               </a:rPr>
-              <a:t>Protect mangroves and keep beaches clean.</a:t>
+              <a:t>Strong waves destroy beaches and houses.</a:t>
             </a:r>
             <a:endParaRPr lang="en-US" sz="4000" dirty="0"/>
           </a:p>
@@ -8109,7 +8198,7 @@
                 <a:ea typeface="Calibri" pitchFamily="34" charset="-122"/>
                 <a:cs typeface="Calibri" pitchFamily="34" charset="-120"/>
               </a:rPr>
-              <a:t>JUSTIFICATION</a:t>
+              <a:t>ACTION TO TAKE</a:t>
             </a:r>
             <a:endParaRPr lang="en-US" sz="1400" dirty="0"/>
           </a:p>
@@ -8174,7 +8263,7 @@
                 <a:ea typeface="Times New Roman" pitchFamily="34" charset="-122"/>
                 <a:cs typeface="Times New Roman" pitchFamily="34" charset="-120"/>
               </a:rPr>
-              <a:t>Justification of the Lesson</a:t>
+              <a:t>Action to Take</a:t>
             </a:r>
             <a:endParaRPr lang="en-US" sz="3600" dirty="0"/>
           </a:p>
@@ -8216,7 +8305,7 @@
                 <a:ea typeface="Times New Roman" pitchFamily="34" charset="-122"/>
                 <a:cs typeface="Times New Roman" pitchFamily="34" charset="-120"/>
               </a:rPr>
-              <a:t>This lesson helps us to know the importance and the dangers of the coast.</a:t>
+              <a:t>Protect mangroves and keep beaches clean.</a:t>
             </a:r>
             <a:endParaRPr lang="en-US" sz="4000" dirty="0"/>
           </a:p>
@@ -8328,54 +8417,15 @@
                 <a:ea typeface="Calibri" pitchFamily="34" charset="-122"/>
                 <a:cs typeface="Calibri" pitchFamily="34" charset="-120"/>
               </a:rPr>
-              <a:t>1. IMPORTANCE OF COASTS</a:t>
+              <a:t>JUSTIFICATION</a:t>
             </a:r>
             <a:endParaRPr lang="en-US" sz="1400" dirty="0"/>
-          </a:p>
-        </p:txBody>
-      </p:sp>
-      <p:sp>
-        <p:nvSpPr>
-          <p:cNvPr id="3" name="Text 1"/>
-          <p:cNvSpPr/>
-          <p:nvPr/>
-        </p:nvSpPr>
-        <p:spPr>
-          <a:xfrm>
-            <a:off x="457200" y="1005840"/>
-            <a:ext cx="11277295" cy="731520"/>
-          </a:xfrm>
-          <a:prstGeom prst="rect">
-            <a:avLst/>
-          </a:prstGeom>
-          <a:noFill/>
-          <a:ln/>
-        </p:spPr>
-        <p:txBody>
-          <a:bodyPr wrap="square" lIns="0" tIns="0" rIns="0" bIns="0" rtlCol="0" anchor="ctr"/>
-          <a:lstStyle/>
-          <a:p>
-            <a:pPr algn="ctr" indent="0" marL="0">
-              <a:buNone/>
-            </a:pPr>
-            <a:r>
-              <a:rPr lang="en-US" sz="3600" b="1" dirty="0">
-                <a:solidFill>
-                  <a:srgbClr val="990011"/>
-                </a:solidFill>
-                <a:latin typeface="Times New Roman" pitchFamily="34" charset="0"/>
-                <a:ea typeface="Times New Roman" pitchFamily="34" charset="-122"/>
-                <a:cs typeface="Times New Roman" pitchFamily="34" charset="-120"/>
-              </a:rPr>
-              <a:t>Activity 1</a:t>
-            </a:r>
-            <a:endParaRPr lang="en-US" sz="3600" dirty="0"/>
           </a:p>
         </p:txBody>
       </p:sp>
       <p:pic>
         <p:nvPicPr>
-          <p:cNvPr id="4" name="Image 0" descr="/home/claude/f4/img/v2/f4_port.jpg">    </p:cNvPr>
+          <p:cNvPr id="3" name="Image 0" descr="/home/claude/f4/img/minesec_sheet.png">    </p:cNvPr>
           <p:cNvPicPr>
             <a:picLocks noChangeAspect="1"/>
           </p:cNvPicPr>
@@ -8389,8 +8439,8 @@
         </p:blipFill>
         <p:spPr>
           <a:xfrm>
-            <a:off x="2246610" y="1783080"/>
-            <a:ext cx="7698475" cy="4270248"/>
+            <a:off x="0" y="658368"/>
+            <a:ext cx="5120640" cy="5833872"/>
           </a:xfrm>
           <a:prstGeom prst="rect">
             <a:avLst/>
@@ -8399,14 +8449,14 @@
       </p:pic>
       <p:sp>
         <p:nvSpPr>
-          <p:cNvPr id="5" name="Text 2"/>
+          <p:cNvPr id="4" name="Text 1"/>
           <p:cNvSpPr/>
           <p:nvPr/>
         </p:nvSpPr>
         <p:spPr>
           <a:xfrm>
-            <a:off x="457200" y="6089904"/>
-            <a:ext cx="11277295" cy="347472"/>
+            <a:off x="5349240" y="1005840"/>
+            <a:ext cx="6522415" cy="731520"/>
           </a:xfrm>
           <a:prstGeom prst="rect">
             <a:avLst/>
@@ -8415,24 +8465,68 @@
           <a:ln/>
         </p:spPr>
         <p:txBody>
-          <a:bodyPr wrap="square" lIns="0" tIns="0" rIns="0" bIns="0" rtlCol="0" anchor="ctr"/>
+          <a:bodyPr wrap="square" lIns="0" tIns="0" rIns="0" bIns="0" rtlCol="0" anchor="ctr">
+            <a:normAutofit/>
+          </a:bodyPr>
           <a:lstStyle/>
           <a:p>
             <a:pPr algn="ctr" indent="0" marL="0">
               <a:buNone/>
             </a:pPr>
             <a:r>
-              <a:rPr lang="en-US" sz="1800" i="1" dirty="0">
-                <a:solidFill>
-                  <a:srgbClr val="555555"/>
+              <a:rPr lang="en-US" sz="3600" b="1" dirty="0">
+                <a:solidFill>
+                  <a:srgbClr val="990011"/>
                 </a:solidFill>
                 <a:latin typeface="Times New Roman" pitchFamily="34" charset="0"/>
                 <a:ea typeface="Times New Roman" pitchFamily="34" charset="-122"/>
                 <a:cs typeface="Times New Roman" pitchFamily="34" charset="-120"/>
               </a:rPr>
-              <a:t>A container ship in a port.</a:t>
-            </a:r>
-            <a:endParaRPr lang="en-US" sz="1800" dirty="0"/>
+              <a:t>Justification of the Lesson</a:t>
+            </a:r>
+            <a:endParaRPr lang="en-US" sz="3600" dirty="0"/>
+          </a:p>
+        </p:txBody>
+      </p:sp>
+      <p:sp>
+        <p:nvSpPr>
+          <p:cNvPr id="5" name="Text 2"/>
+          <p:cNvSpPr/>
+          <p:nvPr/>
+        </p:nvSpPr>
+        <p:spPr>
+          <a:xfrm>
+            <a:off x="5349240" y="1783080"/>
+            <a:ext cx="6522415" cy="4663440"/>
+          </a:xfrm>
+          <a:prstGeom prst="rect">
+            <a:avLst/>
+          </a:prstGeom>
+          <a:noFill/>
+          <a:ln/>
+        </p:spPr>
+        <p:txBody>
+          <a:bodyPr wrap="square" lIns="0" tIns="0" rIns="0" bIns="0" rtlCol="0" anchor="t"/>
+          <a:lstStyle/>
+          <a:p>
+            <a:pPr algn="l" indent="0" marL="0">
+              <a:spcAft>
+                <a:spcPts val="800"/>
+              </a:spcAft>
+              <a:buNone/>
+            </a:pPr>
+            <a:r>
+              <a:rPr lang="en-US" sz="4000" dirty="0">
+                <a:solidFill>
+                  <a:srgbClr val="111111"/>
+                </a:solidFill>
+                <a:latin typeface="Times New Roman" pitchFamily="34" charset="0"/>
+                <a:ea typeface="Times New Roman" pitchFamily="34" charset="-122"/>
+                <a:cs typeface="Times New Roman" pitchFamily="34" charset="-120"/>
+              </a:rPr>
+              <a:t>This lesson helps us to know the importance and the dangers of the coast.</a:t>
+            </a:r>
+            <a:endParaRPr lang="en-US" sz="4000" dirty="0"/>
           </a:p>
         </p:txBody>
       </p:sp>
@@ -8548,9 +8642,48 @@
           </a:p>
         </p:txBody>
       </p:sp>
+      <p:sp>
+        <p:nvSpPr>
+          <p:cNvPr id="3" name="Text 1"/>
+          <p:cNvSpPr/>
+          <p:nvPr/>
+        </p:nvSpPr>
+        <p:spPr>
+          <a:xfrm>
+            <a:off x="457200" y="1005840"/>
+            <a:ext cx="11277295" cy="731520"/>
+          </a:xfrm>
+          <a:prstGeom prst="rect">
+            <a:avLst/>
+          </a:prstGeom>
+          <a:noFill/>
+          <a:ln/>
+        </p:spPr>
+        <p:txBody>
+          <a:bodyPr wrap="square" lIns="0" tIns="0" rIns="0" bIns="0" rtlCol="0" anchor="ctr"/>
+          <a:lstStyle/>
+          <a:p>
+            <a:pPr algn="ctr" indent="0" marL="0">
+              <a:buNone/>
+            </a:pPr>
+            <a:r>
+              <a:rPr lang="en-US" sz="3600" b="1" dirty="0">
+                <a:solidFill>
+                  <a:srgbClr val="990011"/>
+                </a:solidFill>
+                <a:latin typeface="Times New Roman" pitchFamily="34" charset="0"/>
+                <a:ea typeface="Times New Roman" pitchFamily="34" charset="-122"/>
+                <a:cs typeface="Times New Roman" pitchFamily="34" charset="-120"/>
+              </a:rPr>
+              <a:t>Activity 1</a:t>
+            </a:r>
+            <a:endParaRPr lang="en-US" sz="3600" dirty="0"/>
+          </a:p>
+        </p:txBody>
+      </p:sp>
       <p:pic>
         <p:nvPicPr>
-          <p:cNvPr id="3" name="Image 0" descr="/home/claude/f4/img/minesec_sheet.png">    </p:cNvPr>
+          <p:cNvPr id="4" name="Image 0" descr="/home/claude/f4/img/v2/f4_port.jpg">    </p:cNvPr>
           <p:cNvPicPr>
             <a:picLocks noChangeAspect="1"/>
           </p:cNvPicPr>
@@ -8564,8 +8697,8 @@
         </p:blipFill>
         <p:spPr>
           <a:xfrm>
-            <a:off x="0" y="658368"/>
-            <a:ext cx="5120640" cy="5833872"/>
+            <a:off x="2246610" y="1783080"/>
+            <a:ext cx="7698475" cy="4270248"/>
           </a:xfrm>
           <a:prstGeom prst="rect">
             <a:avLst/>
@@ -8574,14 +8707,14 @@
       </p:pic>
       <p:sp>
         <p:nvSpPr>
-          <p:cNvPr id="4" name="Text 1"/>
+          <p:cNvPr id="5" name="Text 2"/>
           <p:cNvSpPr/>
           <p:nvPr/>
         </p:nvSpPr>
         <p:spPr>
           <a:xfrm>
-            <a:off x="5349240" y="1005840"/>
-            <a:ext cx="6522415" cy="731520"/>
+            <a:off x="457200" y="6089904"/>
+            <a:ext cx="11277295" cy="347472"/>
           </a:xfrm>
           <a:prstGeom prst="rect">
             <a:avLst/>
@@ -8590,68 +8723,24 @@
           <a:ln/>
         </p:spPr>
         <p:txBody>
-          <a:bodyPr wrap="square" lIns="0" tIns="0" rIns="0" bIns="0" rtlCol="0" anchor="ctr">
-            <a:normAutofit/>
-          </a:bodyPr>
+          <a:bodyPr wrap="square" lIns="0" tIns="0" rIns="0" bIns="0" rtlCol="0" anchor="ctr"/>
           <a:lstStyle/>
           <a:p>
             <a:pPr algn="ctr" indent="0" marL="0">
               <a:buNone/>
             </a:pPr>
             <a:r>
-              <a:rPr lang="en-US" sz="3600" b="1" dirty="0">
-                <a:solidFill>
-                  <a:srgbClr val="990011"/>
+              <a:rPr lang="en-US" sz="1800" i="1" dirty="0">
+                <a:solidFill>
+                  <a:srgbClr val="555555"/>
                 </a:solidFill>
                 <a:latin typeface="Times New Roman" pitchFamily="34" charset="0"/>
                 <a:ea typeface="Times New Roman" pitchFamily="34" charset="-122"/>
                 <a:cs typeface="Times New Roman" pitchFamily="34" charset="-120"/>
               </a:rPr>
-              <a:t>Activity 1: Question</a:t>
-            </a:r>
-            <a:endParaRPr lang="en-US" sz="3600" dirty="0"/>
-          </a:p>
-        </p:txBody>
-      </p:sp>
-      <p:sp>
-        <p:nvSpPr>
-          <p:cNvPr id="5" name="Text 2"/>
-          <p:cNvSpPr/>
-          <p:nvPr/>
-        </p:nvSpPr>
-        <p:spPr>
-          <a:xfrm>
-            <a:off x="5349240" y="1783080"/>
-            <a:ext cx="6522415" cy="4663440"/>
-          </a:xfrm>
-          <a:prstGeom prst="rect">
-            <a:avLst/>
-          </a:prstGeom>
-          <a:noFill/>
-          <a:ln/>
-        </p:spPr>
-        <p:txBody>
-          <a:bodyPr wrap="square" lIns="0" tIns="0" rIns="0" bIns="0" rtlCol="0" anchor="t"/>
-          <a:lstStyle/>
-          <a:p>
-            <a:pPr algn="l" indent="0" marL="0">
-              <a:spcAft>
-                <a:spcPts val="800"/>
-              </a:spcAft>
-              <a:buNone/>
-            </a:pPr>
-            <a:r>
-              <a:rPr lang="en-US" sz="4000" dirty="0">
-                <a:solidFill>
-                  <a:srgbClr val="111111"/>
-                </a:solidFill>
-                <a:latin typeface="Times New Roman" pitchFamily="34" charset="0"/>
-                <a:ea typeface="Times New Roman" pitchFamily="34" charset="-122"/>
-                <a:cs typeface="Times New Roman" pitchFamily="34" charset="-120"/>
-              </a:rPr>
-              <a:t>Why are ports important for Cameroon?</a:t>
-            </a:r>
-            <a:endParaRPr lang="en-US" sz="4000" dirty="0"/>
+              <a:t>A container ship in a port.</a:t>
+            </a:r>
+            <a:endParaRPr lang="en-US" sz="1800" dirty="0"/>
           </a:p>
         </p:txBody>
       </p:sp>
@@ -9421,7 +9510,7 @@
                 <a:ea typeface="Times New Roman" pitchFamily="34" charset="-122"/>
                 <a:cs typeface="Times New Roman" pitchFamily="34" charset="-120"/>
               </a:rPr>
-              <a:t>Activity 1: Answer</a:t>
+              <a:t>Activity 1: Question</a:t>
             </a:r>
             <a:endParaRPr lang="en-US" sz="3600" dirty="0"/>
           </a:p>
@@ -9463,7 +9552,7 @@
                 <a:ea typeface="Times New Roman" pitchFamily="34" charset="-122"/>
                 <a:cs typeface="Times New Roman" pitchFamily="34" charset="-120"/>
               </a:rPr>
-              <a:t>Ships bring in and take out goods: they carry most of the country's trade.</a:t>
+              <a:t>Why are ports important for Cameroon?</a:t>
             </a:r>
             <a:endParaRPr lang="en-US" sz="4000" dirty="0"/>
           </a:p>
@@ -9575,54 +9664,15 @@
                 <a:ea typeface="Calibri" pitchFamily="34" charset="-122"/>
                 <a:cs typeface="Calibri" pitchFamily="34" charset="-120"/>
               </a:rPr>
-              <a:t>2. COASTAL HAZARDS</a:t>
+              <a:t>1. IMPORTANCE OF COASTS</a:t>
             </a:r>
             <a:endParaRPr lang="en-US" sz="1400" dirty="0"/>
-          </a:p>
-        </p:txBody>
-      </p:sp>
-      <p:sp>
-        <p:nvSpPr>
-          <p:cNvPr id="3" name="Text 1"/>
-          <p:cNvSpPr/>
-          <p:nvPr/>
-        </p:nvSpPr>
-        <p:spPr>
-          <a:xfrm>
-            <a:off x="457200" y="1005840"/>
-            <a:ext cx="11277295" cy="731520"/>
-          </a:xfrm>
-          <a:prstGeom prst="rect">
-            <a:avLst/>
-          </a:prstGeom>
-          <a:noFill/>
-          <a:ln/>
-        </p:spPr>
-        <p:txBody>
-          <a:bodyPr wrap="square" lIns="0" tIns="0" rIns="0" bIns="0" rtlCol="0" anchor="ctr"/>
-          <a:lstStyle/>
-          <a:p>
-            <a:pPr algn="ctr" indent="0" marL="0">
-              <a:buNone/>
-            </a:pPr>
-            <a:r>
-              <a:rPr lang="en-US" sz="3600" b="1" dirty="0">
-                <a:solidFill>
-                  <a:srgbClr val="990011"/>
-                </a:solidFill>
-                <a:latin typeface="Times New Roman" pitchFamily="34" charset="0"/>
-                <a:ea typeface="Times New Roman" pitchFamily="34" charset="-122"/>
-                <a:cs typeface="Times New Roman" pitchFamily="34" charset="-120"/>
-              </a:rPr>
-              <a:t>Activity 2</a:t>
-            </a:r>
-            <a:endParaRPr lang="en-US" sz="3600" dirty="0"/>
           </a:p>
         </p:txBody>
       </p:sp>
       <p:pic>
         <p:nvPicPr>
-          <p:cNvPr id="4" name="Image 0" descr="/home/claude/f4/img/v2/f4_bigwaves.jpg">    </p:cNvPr>
+          <p:cNvPr id="3" name="Image 0" descr="/home/claude/f4/img/minesec_sheet.png">    </p:cNvPr>
           <p:cNvPicPr>
             <a:picLocks noChangeAspect="1"/>
           </p:cNvPicPr>
@@ -9636,8 +9686,8 @@
         </p:blipFill>
         <p:spPr>
           <a:xfrm>
-            <a:off x="2246610" y="1783080"/>
-            <a:ext cx="7698475" cy="4270248"/>
+            <a:off x="0" y="658368"/>
+            <a:ext cx="5120640" cy="5833872"/>
           </a:xfrm>
           <a:prstGeom prst="rect">
             <a:avLst/>
@@ -9646,14 +9696,14 @@
       </p:pic>
       <p:sp>
         <p:nvSpPr>
-          <p:cNvPr id="5" name="Text 2"/>
+          <p:cNvPr id="4" name="Text 1"/>
           <p:cNvSpPr/>
           <p:nvPr/>
         </p:nvSpPr>
         <p:spPr>
           <a:xfrm>
-            <a:off x="457200" y="6089904"/>
-            <a:ext cx="11277295" cy="347472"/>
+            <a:off x="5349240" y="1005840"/>
+            <a:ext cx="6522415" cy="731520"/>
           </a:xfrm>
           <a:prstGeom prst="rect">
             <a:avLst/>
@@ -9662,24 +9712,68 @@
           <a:ln/>
         </p:spPr>
         <p:txBody>
-          <a:bodyPr wrap="square" lIns="0" tIns="0" rIns="0" bIns="0" rtlCol="0" anchor="ctr"/>
+          <a:bodyPr wrap="square" lIns="0" tIns="0" rIns="0" bIns="0" rtlCol="0" anchor="ctr">
+            <a:normAutofit/>
+          </a:bodyPr>
           <a:lstStyle/>
           <a:p>
             <a:pPr algn="ctr" indent="0" marL="0">
               <a:buNone/>
             </a:pPr>
             <a:r>
-              <a:rPr lang="en-US" sz="1800" i="1" dirty="0">
-                <a:solidFill>
-                  <a:srgbClr val="555555"/>
+              <a:rPr lang="en-US" sz="3600" b="1" dirty="0">
+                <a:solidFill>
+                  <a:srgbClr val="990011"/>
                 </a:solidFill>
                 <a:latin typeface="Times New Roman" pitchFamily="34" charset="0"/>
                 <a:ea typeface="Times New Roman" pitchFamily="34" charset="-122"/>
                 <a:cs typeface="Times New Roman" pitchFamily="34" charset="-120"/>
               </a:rPr>
-              <a:t>High waves on a beach.</a:t>
-            </a:r>
-            <a:endParaRPr lang="en-US" sz="1800" dirty="0"/>
+              <a:t>Activity 1: Answer</a:t>
+            </a:r>
+            <a:endParaRPr lang="en-US" sz="3600" dirty="0"/>
+          </a:p>
+        </p:txBody>
+      </p:sp>
+      <p:sp>
+        <p:nvSpPr>
+          <p:cNvPr id="5" name="Text 2"/>
+          <p:cNvSpPr/>
+          <p:nvPr/>
+        </p:nvSpPr>
+        <p:spPr>
+          <a:xfrm>
+            <a:off x="5349240" y="1783080"/>
+            <a:ext cx="6522415" cy="4663440"/>
+          </a:xfrm>
+          <a:prstGeom prst="rect">
+            <a:avLst/>
+          </a:prstGeom>
+          <a:noFill/>
+          <a:ln/>
+        </p:spPr>
+        <p:txBody>
+          <a:bodyPr wrap="square" lIns="0" tIns="0" rIns="0" bIns="0" rtlCol="0" anchor="t"/>
+          <a:lstStyle/>
+          <a:p>
+            <a:pPr algn="l" indent="0" marL="0">
+              <a:spcAft>
+                <a:spcPts val="800"/>
+              </a:spcAft>
+              <a:buNone/>
+            </a:pPr>
+            <a:r>
+              <a:rPr lang="en-US" sz="4000" dirty="0">
+                <a:solidFill>
+                  <a:srgbClr val="111111"/>
+                </a:solidFill>
+                <a:latin typeface="Times New Roman" pitchFamily="34" charset="0"/>
+                <a:ea typeface="Times New Roman" pitchFamily="34" charset="-122"/>
+                <a:cs typeface="Times New Roman" pitchFamily="34" charset="-120"/>
+              </a:rPr>
+              <a:t>Ships bring in and take out goods: they carry most of the country's trade.</a:t>
+            </a:r>
+            <a:endParaRPr lang="en-US" sz="4000" dirty="0"/>
           </a:p>
         </p:txBody>
       </p:sp>
@@ -9795,9 +9889,48 @@
           </a:p>
         </p:txBody>
       </p:sp>
+      <p:sp>
+        <p:nvSpPr>
+          <p:cNvPr id="3" name="Text 1"/>
+          <p:cNvSpPr/>
+          <p:nvPr/>
+        </p:nvSpPr>
+        <p:spPr>
+          <a:xfrm>
+            <a:off x="457200" y="1005840"/>
+            <a:ext cx="11277295" cy="731520"/>
+          </a:xfrm>
+          <a:prstGeom prst="rect">
+            <a:avLst/>
+          </a:prstGeom>
+          <a:noFill/>
+          <a:ln/>
+        </p:spPr>
+        <p:txBody>
+          <a:bodyPr wrap="square" lIns="0" tIns="0" rIns="0" bIns="0" rtlCol="0" anchor="ctr"/>
+          <a:lstStyle/>
+          <a:p>
+            <a:pPr algn="ctr" indent="0" marL="0">
+              <a:buNone/>
+            </a:pPr>
+            <a:r>
+              <a:rPr lang="en-US" sz="3600" b="1" dirty="0">
+                <a:solidFill>
+                  <a:srgbClr val="990011"/>
+                </a:solidFill>
+                <a:latin typeface="Times New Roman" pitchFamily="34" charset="0"/>
+                <a:ea typeface="Times New Roman" pitchFamily="34" charset="-122"/>
+                <a:cs typeface="Times New Roman" pitchFamily="34" charset="-120"/>
+              </a:rPr>
+              <a:t>Activity 2</a:t>
+            </a:r>
+            <a:endParaRPr lang="en-US" sz="3600" dirty="0"/>
+          </a:p>
+        </p:txBody>
+      </p:sp>
       <p:pic>
         <p:nvPicPr>
-          <p:cNvPr id="3" name="Image 0" descr="/home/claude/f4/img/minesec_sheet.png">    </p:cNvPr>
+          <p:cNvPr id="4" name="Image 0" descr="/home/claude/f4/img/v2/f4_bigwaves.jpg">    </p:cNvPr>
           <p:cNvPicPr>
             <a:picLocks noChangeAspect="1"/>
           </p:cNvPicPr>
@@ -9811,8 +9944,8 @@
         </p:blipFill>
         <p:spPr>
           <a:xfrm>
-            <a:off x="0" y="658368"/>
-            <a:ext cx="5120640" cy="5833872"/>
+            <a:off x="2246610" y="1783080"/>
+            <a:ext cx="7698475" cy="4270248"/>
           </a:xfrm>
           <a:prstGeom prst="rect">
             <a:avLst/>
@@ -9821,14 +9954,14 @@
       </p:pic>
       <p:sp>
         <p:nvSpPr>
-          <p:cNvPr id="4" name="Text 1"/>
+          <p:cNvPr id="5" name="Text 2"/>
           <p:cNvSpPr/>
           <p:nvPr/>
         </p:nvSpPr>
         <p:spPr>
           <a:xfrm>
-            <a:off x="5349240" y="1005840"/>
-            <a:ext cx="6522415" cy="731520"/>
+            <a:off x="457200" y="6089904"/>
+            <a:ext cx="11277295" cy="347472"/>
           </a:xfrm>
           <a:prstGeom prst="rect">
             <a:avLst/>
@@ -9837,68 +9970,24 @@
           <a:ln/>
         </p:spPr>
         <p:txBody>
-          <a:bodyPr wrap="square" lIns="0" tIns="0" rIns="0" bIns="0" rtlCol="0" anchor="ctr">
-            <a:normAutofit/>
-          </a:bodyPr>
+          <a:bodyPr wrap="square" lIns="0" tIns="0" rIns="0" bIns="0" rtlCol="0" anchor="ctr"/>
           <a:lstStyle/>
           <a:p>
             <a:pPr algn="ctr" indent="0" marL="0">
               <a:buNone/>
             </a:pPr>
             <a:r>
-              <a:rPr lang="en-US" sz="3600" b="1" dirty="0">
-                <a:solidFill>
-                  <a:srgbClr val="990011"/>
+              <a:rPr lang="en-US" sz="1800" i="1" dirty="0">
+                <a:solidFill>
+                  <a:srgbClr val="555555"/>
                 </a:solidFill>
                 <a:latin typeface="Times New Roman" pitchFamily="34" charset="0"/>
                 <a:ea typeface="Times New Roman" pitchFamily="34" charset="-122"/>
                 <a:cs typeface="Times New Roman" pitchFamily="34" charset="-120"/>
               </a:rPr>
-              <a:t>Activity 2: Question</a:t>
-            </a:r>
-            <a:endParaRPr lang="en-US" sz="3600" dirty="0"/>
-          </a:p>
-        </p:txBody>
-      </p:sp>
-      <p:sp>
-        <p:nvSpPr>
-          <p:cNvPr id="5" name="Text 2"/>
-          <p:cNvSpPr/>
-          <p:nvPr/>
-        </p:nvSpPr>
-        <p:spPr>
-          <a:xfrm>
-            <a:off x="5349240" y="1783080"/>
-            <a:ext cx="6522415" cy="4663440"/>
-          </a:xfrm>
-          <a:prstGeom prst="rect">
-            <a:avLst/>
-          </a:prstGeom>
-          <a:noFill/>
-          <a:ln/>
-        </p:spPr>
-        <p:txBody>
-          <a:bodyPr wrap="square" lIns="0" tIns="0" rIns="0" bIns="0" rtlCol="0" anchor="t"/>
-          <a:lstStyle/>
-          <a:p>
-            <a:pPr algn="l" indent="0" marL="0">
-              <a:spcAft>
-                <a:spcPts val="800"/>
-              </a:spcAft>
-              <a:buNone/>
-            </a:pPr>
-            <a:r>
-              <a:rPr lang="en-US" sz="4000" dirty="0">
-                <a:solidFill>
-                  <a:srgbClr val="111111"/>
-                </a:solidFill>
-                <a:latin typeface="Times New Roman" pitchFamily="34" charset="0"/>
-                <a:ea typeface="Times New Roman" pitchFamily="34" charset="-122"/>
-                <a:cs typeface="Times New Roman" pitchFamily="34" charset="-120"/>
-              </a:rPr>
-              <a:t>What can such waves do to houses built near the beach?</a:t>
-            </a:r>
-            <a:endParaRPr lang="en-US" sz="4000" dirty="0"/>
+              <a:t>High waves on a beach.</a:t>
+            </a:r>
+            <a:endParaRPr lang="en-US" sz="1800" dirty="0"/>
           </a:p>
         </p:txBody>
       </p:sp>
@@ -10073,7 +10162,7 @@
                 <a:ea typeface="Times New Roman" pitchFamily="34" charset="-122"/>
                 <a:cs typeface="Times New Roman" pitchFamily="34" charset="-120"/>
               </a:rPr>
-              <a:t>Activity 2: Answer</a:t>
+              <a:t>Activity 2: Question</a:t>
             </a:r>
             <a:endParaRPr lang="en-US" sz="3600" dirty="0"/>
           </a:p>
@@ -10115,7 +10204,7 @@
                 <a:ea typeface="Times New Roman" pitchFamily="34" charset="-122"/>
                 <a:cs typeface="Times New Roman" pitchFamily="34" charset="-120"/>
               </a:rPr>
-              <a:t>They erode the beach and can destroy the houses.</a:t>
+              <a:t>What can such waves do to houses built near the beach?</a:t>
             </a:r>
             <a:endParaRPr lang="en-US" sz="4000" dirty="0"/>
           </a:p>
@@ -10227,54 +10316,15 @@
                 <a:ea typeface="Calibri" pitchFamily="34" charset="-122"/>
                 <a:cs typeface="Calibri" pitchFamily="34" charset="-120"/>
               </a:rPr>
-              <a:t>3. COASTAL MANAGEMENT</a:t>
+              <a:t>2. COASTAL HAZARDS</a:t>
             </a:r>
             <a:endParaRPr lang="en-US" sz="1400" dirty="0"/>
-          </a:p>
-        </p:txBody>
-      </p:sp>
-      <p:sp>
-        <p:nvSpPr>
-          <p:cNvPr id="3" name="Text 1"/>
-          <p:cNvSpPr/>
-          <p:nvPr/>
-        </p:nvSpPr>
-        <p:spPr>
-          <a:xfrm>
-            <a:off x="457200" y="1005840"/>
-            <a:ext cx="11277295" cy="731520"/>
-          </a:xfrm>
-          <a:prstGeom prst="rect">
-            <a:avLst/>
-          </a:prstGeom>
-          <a:noFill/>
-          <a:ln/>
-        </p:spPr>
-        <p:txBody>
-          <a:bodyPr wrap="square" lIns="0" tIns="0" rIns="0" bIns="0" rtlCol="0" anchor="ctr"/>
-          <a:lstStyle/>
-          <a:p>
-            <a:pPr algn="ctr" indent="0" marL="0">
-              <a:buNone/>
-            </a:pPr>
-            <a:r>
-              <a:rPr lang="en-US" sz="3600" b="1" dirty="0">
-                <a:solidFill>
-                  <a:srgbClr val="990011"/>
-                </a:solidFill>
-                <a:latin typeface="Times New Roman" pitchFamily="34" charset="0"/>
-                <a:ea typeface="Times New Roman" pitchFamily="34" charset="-122"/>
-                <a:cs typeface="Times New Roman" pitchFamily="34" charset="-120"/>
-              </a:rPr>
-              <a:t>Activity 3</a:t>
-            </a:r>
-            <a:endParaRPr lang="en-US" sz="3600" dirty="0"/>
           </a:p>
         </p:txBody>
       </p:sp>
       <p:pic>
         <p:nvPicPr>
-          <p:cNvPr id="4" name="Image 0" descr="/home/claude/f4/img/v2/f4_groynes.jpg">    </p:cNvPr>
+          <p:cNvPr id="3" name="Image 0" descr="/home/claude/f4/img/minesec_sheet.png">    </p:cNvPr>
           <p:cNvPicPr>
             <a:picLocks noChangeAspect="1"/>
           </p:cNvPicPr>
@@ -10288,8 +10338,8 @@
         </p:blipFill>
         <p:spPr>
           <a:xfrm>
-            <a:off x="2246610" y="1783080"/>
-            <a:ext cx="7698475" cy="4270248"/>
+            <a:off x="0" y="658368"/>
+            <a:ext cx="5120640" cy="5833872"/>
           </a:xfrm>
           <a:prstGeom prst="rect">
             <a:avLst/>
@@ -10298,14 +10348,14 @@
       </p:pic>
       <p:sp>
         <p:nvSpPr>
-          <p:cNvPr id="5" name="Text 2"/>
+          <p:cNvPr id="4" name="Text 1"/>
           <p:cNvSpPr/>
           <p:nvPr/>
         </p:nvSpPr>
         <p:spPr>
           <a:xfrm>
-            <a:off x="457200" y="6089904"/>
-            <a:ext cx="11277295" cy="347472"/>
+            <a:off x="5349240" y="1005840"/>
+            <a:ext cx="6522415" cy="731520"/>
           </a:xfrm>
           <a:prstGeom prst="rect">
             <a:avLst/>
@@ -10314,24 +10364,68 @@
           <a:ln/>
         </p:spPr>
         <p:txBody>
-          <a:bodyPr wrap="square" lIns="0" tIns="0" rIns="0" bIns="0" rtlCol="0" anchor="ctr"/>
+          <a:bodyPr wrap="square" lIns="0" tIns="0" rIns="0" bIns="0" rtlCol="0" anchor="ctr">
+            <a:normAutofit/>
+          </a:bodyPr>
           <a:lstStyle/>
           <a:p>
             <a:pPr algn="ctr" indent="0" marL="0">
               <a:buNone/>
             </a:pPr>
             <a:r>
-              <a:rPr lang="en-US" sz="1800" i="1" dirty="0">
-                <a:solidFill>
-                  <a:srgbClr val="555555"/>
+              <a:rPr lang="en-US" sz="3600" b="1" dirty="0">
+                <a:solidFill>
+                  <a:srgbClr val="990011"/>
                 </a:solidFill>
                 <a:latin typeface="Times New Roman" pitchFamily="34" charset="0"/>
                 <a:ea typeface="Times New Roman" pitchFamily="34" charset="-122"/>
                 <a:cs typeface="Times New Roman" pitchFamily="34" charset="-120"/>
               </a:rPr>
-              <a:t>Low walls across a beach.</a:t>
-            </a:r>
-            <a:endParaRPr lang="en-US" sz="1800" dirty="0"/>
+              <a:t>Activity 2: Answer</a:t>
+            </a:r>
+            <a:endParaRPr lang="en-US" sz="3600" dirty="0"/>
+          </a:p>
+        </p:txBody>
+      </p:sp>
+      <p:sp>
+        <p:nvSpPr>
+          <p:cNvPr id="5" name="Text 2"/>
+          <p:cNvSpPr/>
+          <p:nvPr/>
+        </p:nvSpPr>
+        <p:spPr>
+          <a:xfrm>
+            <a:off x="5349240" y="1783080"/>
+            <a:ext cx="6522415" cy="4663440"/>
+          </a:xfrm>
+          <a:prstGeom prst="rect">
+            <a:avLst/>
+          </a:prstGeom>
+          <a:noFill/>
+          <a:ln/>
+        </p:spPr>
+        <p:txBody>
+          <a:bodyPr wrap="square" lIns="0" tIns="0" rIns="0" bIns="0" rtlCol="0" anchor="t"/>
+          <a:lstStyle/>
+          <a:p>
+            <a:pPr algn="l" indent="0" marL="0">
+              <a:spcAft>
+                <a:spcPts val="800"/>
+              </a:spcAft>
+              <a:buNone/>
+            </a:pPr>
+            <a:r>
+              <a:rPr lang="en-US" sz="4000" dirty="0">
+                <a:solidFill>
+                  <a:srgbClr val="111111"/>
+                </a:solidFill>
+                <a:latin typeface="Times New Roman" pitchFamily="34" charset="0"/>
+                <a:ea typeface="Times New Roman" pitchFamily="34" charset="-122"/>
+                <a:cs typeface="Times New Roman" pitchFamily="34" charset="-120"/>
+              </a:rPr>
+              <a:t>They erode the beach and can destroy the houses.</a:t>
+            </a:r>
+            <a:endParaRPr lang="en-US" sz="4000" dirty="0"/>
           </a:p>
         </p:txBody>
       </p:sp>
@@ -10447,9 +10541,48 @@
           </a:p>
         </p:txBody>
       </p:sp>
+      <p:sp>
+        <p:nvSpPr>
+          <p:cNvPr id="3" name="Text 1"/>
+          <p:cNvSpPr/>
+          <p:nvPr/>
+        </p:nvSpPr>
+        <p:spPr>
+          <a:xfrm>
+            <a:off x="457200" y="1005840"/>
+            <a:ext cx="11277295" cy="731520"/>
+          </a:xfrm>
+          <a:prstGeom prst="rect">
+            <a:avLst/>
+          </a:prstGeom>
+          <a:noFill/>
+          <a:ln/>
+        </p:spPr>
+        <p:txBody>
+          <a:bodyPr wrap="square" lIns="0" tIns="0" rIns="0" bIns="0" rtlCol="0" anchor="ctr"/>
+          <a:lstStyle/>
+          <a:p>
+            <a:pPr algn="ctr" indent="0" marL="0">
+              <a:buNone/>
+            </a:pPr>
+            <a:r>
+              <a:rPr lang="en-US" sz="3600" b="1" dirty="0">
+                <a:solidFill>
+                  <a:srgbClr val="990011"/>
+                </a:solidFill>
+                <a:latin typeface="Times New Roman" pitchFamily="34" charset="0"/>
+                <a:ea typeface="Times New Roman" pitchFamily="34" charset="-122"/>
+                <a:cs typeface="Times New Roman" pitchFamily="34" charset="-120"/>
+              </a:rPr>
+              <a:t>Activity 3</a:t>
+            </a:r>
+            <a:endParaRPr lang="en-US" sz="3600" dirty="0"/>
+          </a:p>
+        </p:txBody>
+      </p:sp>
       <p:pic>
         <p:nvPicPr>
-          <p:cNvPr id="3" name="Image 0" descr="/home/claude/f4/img/minesec_sheet.png">    </p:cNvPr>
+          <p:cNvPr id="4" name="Image 0" descr="/home/claude/f4/img/v2/f4_groynes.jpg">    </p:cNvPr>
           <p:cNvPicPr>
             <a:picLocks noChangeAspect="1"/>
           </p:cNvPicPr>
@@ -10463,8 +10596,8 @@
         </p:blipFill>
         <p:spPr>
           <a:xfrm>
-            <a:off x="0" y="658368"/>
-            <a:ext cx="5120640" cy="5833872"/>
+            <a:off x="2246610" y="1783080"/>
+            <a:ext cx="7698475" cy="4270248"/>
           </a:xfrm>
           <a:prstGeom prst="rect">
             <a:avLst/>
@@ -10473,14 +10606,14 @@
       </p:pic>
       <p:sp>
         <p:nvSpPr>
-          <p:cNvPr id="4" name="Text 1"/>
+          <p:cNvPr id="5" name="Text 2"/>
           <p:cNvSpPr/>
           <p:nvPr/>
         </p:nvSpPr>
         <p:spPr>
           <a:xfrm>
-            <a:off x="5349240" y="1005840"/>
-            <a:ext cx="6522415" cy="731520"/>
+            <a:off x="457200" y="6089904"/>
+            <a:ext cx="11277295" cy="347472"/>
           </a:xfrm>
           <a:prstGeom prst="rect">
             <a:avLst/>
@@ -10489,68 +10622,24 @@
           <a:ln/>
         </p:spPr>
         <p:txBody>
-          <a:bodyPr wrap="square" lIns="0" tIns="0" rIns="0" bIns="0" rtlCol="0" anchor="ctr">
-            <a:normAutofit/>
-          </a:bodyPr>
+          <a:bodyPr wrap="square" lIns="0" tIns="0" rIns="0" bIns="0" rtlCol="0" anchor="ctr"/>
           <a:lstStyle/>
           <a:p>
             <a:pPr algn="ctr" indent="0" marL="0">
               <a:buNone/>
             </a:pPr>
             <a:r>
-              <a:rPr lang="en-US" sz="3600" b="1" dirty="0">
-                <a:solidFill>
-                  <a:srgbClr val="990011"/>
+              <a:rPr lang="en-US" sz="1800" i="1" dirty="0">
+                <a:solidFill>
+                  <a:srgbClr val="555555"/>
                 </a:solidFill>
                 <a:latin typeface="Times New Roman" pitchFamily="34" charset="0"/>
                 <a:ea typeface="Times New Roman" pitchFamily="34" charset="-122"/>
                 <a:cs typeface="Times New Roman" pitchFamily="34" charset="-120"/>
               </a:rPr>
-              <a:t>Activity 3: Question</a:t>
-            </a:r>
-            <a:endParaRPr lang="en-US" sz="3600" dirty="0"/>
-          </a:p>
-        </p:txBody>
-      </p:sp>
-      <p:sp>
-        <p:nvSpPr>
-          <p:cNvPr id="5" name="Text 2"/>
-          <p:cNvSpPr/>
-          <p:nvPr/>
-        </p:nvSpPr>
-        <p:spPr>
-          <a:xfrm>
-            <a:off x="5349240" y="1783080"/>
-            <a:ext cx="6522415" cy="4663440"/>
-          </a:xfrm>
-          <a:prstGeom prst="rect">
-            <a:avLst/>
-          </a:prstGeom>
-          <a:noFill/>
-          <a:ln/>
-        </p:spPr>
-        <p:txBody>
-          <a:bodyPr wrap="square" lIns="0" tIns="0" rIns="0" bIns="0" rtlCol="0" anchor="t"/>
-          <a:lstStyle/>
-          <a:p>
-            <a:pPr algn="l" indent="0" marL="0">
-              <a:spcAft>
-                <a:spcPts val="800"/>
-              </a:spcAft>
-              <a:buNone/>
-            </a:pPr>
-            <a:r>
-              <a:rPr lang="en-US" sz="4000" dirty="0">
-                <a:solidFill>
-                  <a:srgbClr val="111111"/>
-                </a:solidFill>
-                <a:latin typeface="Times New Roman" pitchFamily="34" charset="0"/>
-                <a:ea typeface="Times New Roman" pitchFamily="34" charset="-122"/>
-                <a:cs typeface="Times New Roman" pitchFamily="34" charset="-120"/>
-              </a:rPr>
-              <a:t>How do these low walls protect the beach?</a:t>
-            </a:r>
-            <a:endParaRPr lang="en-US" sz="4000" dirty="0"/>
+              <a:t>Low walls across a beach.</a:t>
+            </a:r>
+            <a:endParaRPr lang="en-US" sz="1800" dirty="0"/>
           </a:p>
         </p:txBody>
       </p:sp>
@@ -10725,7 +10814,7 @@
                 <a:ea typeface="Times New Roman" pitchFamily="34" charset="-122"/>
                 <a:cs typeface="Times New Roman" pitchFamily="34" charset="-120"/>
               </a:rPr>
-              <a:t>Activity 3: Answer</a:t>
+              <a:t>Activity 3: Question</a:t>
             </a:r>
             <a:endParaRPr lang="en-US" sz="3600" dirty="0"/>
           </a:p>
@@ -10767,7 +10856,7 @@
                 <a:ea typeface="Times New Roman" pitchFamily="34" charset="-122"/>
                 <a:cs typeface="Times New Roman" pitchFamily="34" charset="-120"/>
               </a:rPr>
-              <a:t>They trap the sand and stop longshore drift from carrying it away.</a:t>
+              <a:t>How do these low walls protect the beach?</a:t>
             </a:r>
             <a:endParaRPr lang="en-US" sz="4000" dirty="0"/>
           </a:p>
@@ -10879,7 +10968,7 @@
                 <a:ea typeface="Calibri" pitchFamily="34" charset="-122"/>
                 <a:cs typeface="Calibri" pitchFamily="34" charset="-120"/>
               </a:rPr>
-              <a:t>BOARD SUMMARY</a:t>
+              <a:t>3. COASTAL MANAGEMENT</a:t>
             </a:r>
             <a:endParaRPr lang="en-US" sz="1400" dirty="0"/>
           </a:p>
@@ -10944,7 +11033,7 @@
                 <a:ea typeface="Times New Roman" pitchFamily="34" charset="-122"/>
                 <a:cs typeface="Times New Roman" pitchFamily="34" charset="-120"/>
               </a:rPr>
-              <a:t>Board Summary</a:t>
+              <a:t>Activity 3: Answer</a:t>
             </a:r>
             <a:endParaRPr lang="en-US" sz="3600" dirty="0"/>
           </a:p>
@@ -10978,7 +11067,7 @@
               <a:buNone/>
             </a:pPr>
             <a:r>
-              <a:rPr lang="en-US" sz="3200" b="1" dirty="0">
+              <a:rPr lang="en-US" sz="4000" dirty="0">
                 <a:solidFill>
                   <a:srgbClr val="111111"/>
                 </a:solidFill>
@@ -10986,49 +11075,9 @@
                 <a:ea typeface="Times New Roman" pitchFamily="34" charset="-122"/>
                 <a:cs typeface="Times New Roman" pitchFamily="34" charset="-120"/>
               </a:rPr>
-              <a:t>Topic: Denudation Processes, Landforms and Impacts on Man</a:t>
-            </a:r>
-            <a:endParaRPr lang="en-US" sz="3200" dirty="0"/>
-          </a:p>
-          <a:p>
-            <a:pPr algn="l" indent="0" marL="0">
-              <a:spcAft>
-                <a:spcPts val="800"/>
-              </a:spcAft>
-              <a:buNone/>
-            </a:pPr>
-            <a:r>
-              <a:rPr lang="en-US" sz="3200" b="1" dirty="0">
-                <a:solidFill>
-                  <a:srgbClr val="111111"/>
-                </a:solidFill>
-                <a:latin typeface="Times New Roman" pitchFamily="34" charset="0"/>
-                <a:ea typeface="Times New Roman" pitchFamily="34" charset="-122"/>
-                <a:cs typeface="Times New Roman" pitchFamily="34" charset="-120"/>
-              </a:rPr>
-              <a:t>Sub-topic: Wave Action along the Coast and Impacts on Man</a:t>
-            </a:r>
-            <a:endParaRPr lang="en-US" sz="3200" dirty="0"/>
-          </a:p>
-          <a:p>
-            <a:pPr algn="l" indent="0" marL="0">
-              <a:spcAft>
-                <a:spcPts val="800"/>
-              </a:spcAft>
-              <a:buNone/>
-            </a:pPr>
-            <a:r>
-              <a:rPr lang="en-US" sz="3200" b="1" dirty="0">
-                <a:solidFill>
-                  <a:srgbClr val="990011"/>
-                </a:solidFill>
-                <a:latin typeface="Times New Roman" pitchFamily="34" charset="0"/>
-                <a:ea typeface="Times New Roman" pitchFamily="34" charset="-122"/>
-                <a:cs typeface="Times New Roman" pitchFamily="34" charset="-120"/>
-              </a:rPr>
-              <a:t>Lesson 26: Impact of Wave Action on Human Development along Coastal Areas</a:t>
-            </a:r>
-            <a:endParaRPr lang="en-US" sz="3200" dirty="0"/>
+              <a:t>They trap the sand and stop longshore drift from carrying it away.</a:t>
+            </a:r>
+            <a:endParaRPr lang="en-US" sz="4000" dirty="0"/>
           </a:p>
         </p:txBody>
       </p:sp>
@@ -11161,7 +11210,7 @@
         <p:spPr>
           <a:xfrm>
             <a:off x="0" y="658368"/>
-            <a:ext cx="3840480" cy="5833872"/>
+            <a:ext cx="5120640" cy="5833872"/>
           </a:xfrm>
           <a:prstGeom prst="rect">
             <a:avLst/>
@@ -11176,8 +11225,8 @@
         </p:nvSpPr>
         <p:spPr>
           <a:xfrm>
-            <a:off x="4069080" y="1005840"/>
-            <a:ext cx="7802575" cy="731520"/>
+            <a:off x="5349240" y="1005840"/>
+            <a:ext cx="6522415" cy="731520"/>
           </a:xfrm>
           <a:prstGeom prst="rect">
             <a:avLst/>
@@ -11203,7 +11252,7 @@
                 <a:ea typeface="Times New Roman" pitchFamily="34" charset="-122"/>
                 <a:cs typeface="Times New Roman" pitchFamily="34" charset="-120"/>
               </a:rPr>
-              <a:t>DEFINITIONS</a:t>
+              <a:t>Board Summary</a:t>
             </a:r>
             <a:endParaRPr lang="en-US" sz="3600" dirty="0"/>
           </a:p>
@@ -11217,8 +11266,8 @@
         </p:nvSpPr>
         <p:spPr>
           <a:xfrm>
-            <a:off x="4069080" y="1783080"/>
-            <a:ext cx="7802575" cy="4663440"/>
+            <a:off x="5349240" y="1783080"/>
+            <a:ext cx="6522415" cy="4663440"/>
           </a:xfrm>
           <a:prstGeom prst="rect">
             <a:avLst/>
@@ -11237,7 +11286,7 @@
               <a:buNone/>
             </a:pPr>
             <a:r>
-              <a:rPr lang="en-US" sz="4000" i="1" dirty="0">
+              <a:rPr lang="en-US" sz="3200" b="1" dirty="0">
                 <a:solidFill>
                   <a:srgbClr val="111111"/>
                 </a:solidFill>
@@ -11245,9 +11294,9 @@
                 <a:ea typeface="Times New Roman" pitchFamily="34" charset="-122"/>
                 <a:cs typeface="Times New Roman" pitchFamily="34" charset="-120"/>
               </a:rPr>
-              <a:t>The key terms of this lesson are defined as follows:</a:t>
-            </a:r>
-            <a:endParaRPr lang="en-US" sz="4000" dirty="0"/>
+              <a:t>Topic: Denudation Processes, Landforms and Impacts on Man</a:t>
+            </a:r>
+            <a:endParaRPr lang="en-US" sz="3200" dirty="0"/>
           </a:p>
           <a:p>
             <a:pPr algn="l" indent="0" marL="0">
@@ -11257,7 +11306,7 @@
               <a:buNone/>
             </a:pPr>
             <a:r>
-              <a:rPr lang="en-US" sz="4000" b="1" dirty="0">
+              <a:rPr lang="en-US" sz="3200" b="1" dirty="0">
                 <a:solidFill>
                   <a:srgbClr val="111111"/>
                 </a:solidFill>
@@ -11265,8 +11314,11 @@
                 <a:ea typeface="Times New Roman" pitchFamily="34" charset="-122"/>
                 <a:cs typeface="Times New Roman" pitchFamily="34" charset="-120"/>
               </a:rPr>
-              <a:t>Resource: </a:t>
-            </a:r>
+              <a:t>Sub-topic: Wave Action along the Coast and Impacts on Man</a:t>
+            </a:r>
+            <a:endParaRPr lang="en-US" sz="3200" dirty="0"/>
+          </a:p>
+          <a:p>
             <a:pPr algn="l" indent="0" marL="0">
               <a:spcAft>
                 <a:spcPts val="800"/>
@@ -11274,54 +11326,17 @@
               <a:buNone/>
             </a:pPr>
             <a:r>
-              <a:rPr lang="en-US" sz="4000" dirty="0">
-                <a:solidFill>
-                  <a:srgbClr val="111111"/>
+              <a:rPr lang="en-US" sz="3200" b="1" dirty="0">
+                <a:solidFill>
+                  <a:srgbClr val="990011"/>
                 </a:solidFill>
                 <a:latin typeface="Times New Roman" pitchFamily="34" charset="0"/>
                 <a:ea typeface="Times New Roman" pitchFamily="34" charset="-122"/>
                 <a:cs typeface="Times New Roman" pitchFamily="34" charset="-120"/>
               </a:rPr>
-              <a:t>It is anything in nature that people can use.</a:t>
-            </a:r>
-            <a:endParaRPr lang="en-US" sz="4000" dirty="0"/>
-          </a:p>
-          <a:p>
-            <a:pPr algn="l" indent="0" marL="0">
-              <a:spcAft>
-                <a:spcPts val="800"/>
-              </a:spcAft>
-              <a:buNone/>
-            </a:pPr>
-            <a:r>
-              <a:rPr lang="en-US" sz="4000" b="1" dirty="0">
-                <a:solidFill>
-                  <a:srgbClr val="111111"/>
-                </a:solidFill>
-                <a:latin typeface="Times New Roman" pitchFamily="34" charset="0"/>
-                <a:ea typeface="Times New Roman" pitchFamily="34" charset="-122"/>
-                <a:cs typeface="Times New Roman" pitchFamily="34" charset="-120"/>
-              </a:rPr>
-              <a:t>Coastal hazard: </a:t>
-            </a:r>
-            <a:pPr algn="l" indent="0" marL="0">
-              <a:spcAft>
-                <a:spcPts val="800"/>
-              </a:spcAft>
-              <a:buNone/>
-            </a:pPr>
-            <a:r>
-              <a:rPr lang="en-US" sz="4000" dirty="0">
-                <a:solidFill>
-                  <a:srgbClr val="111111"/>
-                </a:solidFill>
-                <a:latin typeface="Times New Roman" pitchFamily="34" charset="0"/>
-                <a:ea typeface="Times New Roman" pitchFamily="34" charset="-122"/>
-                <a:cs typeface="Times New Roman" pitchFamily="34" charset="-120"/>
-              </a:rPr>
-              <a:t>It is a danger that threatens people and property along the coast.</a:t>
-            </a:r>
-            <a:endParaRPr lang="en-US" sz="4000" dirty="0"/>
+              <a:t>Lesson 26: Impact of Wave Action on Human Development along Coastal Areas</a:t>
+            </a:r>
+            <a:endParaRPr lang="en-US" sz="3200" dirty="0"/>
           </a:p>
         </p:txBody>
       </p:sp>
@@ -11454,7 +11469,7 @@
         <p:spPr>
           <a:xfrm>
             <a:off x="0" y="658368"/>
-            <a:ext cx="5120640" cy="5833872"/>
+            <a:ext cx="3840480" cy="5833872"/>
           </a:xfrm>
           <a:prstGeom prst="rect">
             <a:avLst/>
@@ -11469,8 +11484,8 @@
         </p:nvSpPr>
         <p:spPr>
           <a:xfrm>
-            <a:off x="5349240" y="1005840"/>
-            <a:ext cx="6522415" cy="731520"/>
+            <a:off x="4069080" y="1005840"/>
+            <a:ext cx="7802575" cy="731520"/>
           </a:xfrm>
           <a:prstGeom prst="rect">
             <a:avLst/>
@@ -11496,7 +11511,7 @@
                 <a:ea typeface="Times New Roman" pitchFamily="34" charset="-122"/>
                 <a:cs typeface="Times New Roman" pitchFamily="34" charset="-120"/>
               </a:rPr>
-              <a:t>DEFINITIONS (continued)</a:t>
+              <a:t>DEFINITIONS</a:t>
             </a:r>
             <a:endParaRPr lang="en-US" sz="3600" dirty="0"/>
           </a:p>
@@ -11510,8 +11525,8 @@
         </p:nvSpPr>
         <p:spPr>
           <a:xfrm>
-            <a:off x="5349240" y="1783080"/>
-            <a:ext cx="6522415" cy="4663440"/>
+            <a:off x="4069080" y="1783080"/>
+            <a:ext cx="7802575" cy="4663440"/>
           </a:xfrm>
           <a:prstGeom prst="rect">
             <a:avLst/>
@@ -11530,7 +11545,7 @@
               <a:buNone/>
             </a:pPr>
             <a:r>
-              <a:rPr lang="en-US" sz="4000" b="1" dirty="0">
+              <a:rPr lang="en-US" sz="4000" i="1" dirty="0">
                 <a:solidFill>
                   <a:srgbClr val="111111"/>
                 </a:solidFill>
@@ -11538,8 +11553,11 @@
                 <a:ea typeface="Times New Roman" pitchFamily="34" charset="-122"/>
                 <a:cs typeface="Times New Roman" pitchFamily="34" charset="-120"/>
               </a:rPr>
-              <a:t>Coastal management: </a:t>
-            </a:r>
+              <a:t>The key terms of this lesson are defined as follows:</a:t>
+            </a:r>
+            <a:endParaRPr lang="en-US" sz="4000" dirty="0"/>
+          </a:p>
+          <a:p>
             <a:pPr algn="l" indent="0" marL="0">
               <a:spcAft>
                 <a:spcPts val="800"/>
@@ -11547,7 +11565,7 @@
               <a:buNone/>
             </a:pPr>
             <a:r>
-              <a:rPr lang="en-US" sz="4000" dirty="0">
+              <a:rPr lang="en-US" sz="4000" b="1" dirty="0">
                 <a:solidFill>
                   <a:srgbClr val="111111"/>
                 </a:solidFill>
@@ -11555,7 +11573,61 @@
                 <a:ea typeface="Times New Roman" pitchFamily="34" charset="-122"/>
                 <a:cs typeface="Times New Roman" pitchFamily="34" charset="-120"/>
               </a:rPr>
-              <a:t>It is the set of measures used to protect the coast and use it wisely.</a:t>
+              <a:t>Resource: </a:t>
+            </a:r>
+            <a:pPr algn="l" indent="0" marL="0">
+              <a:spcAft>
+                <a:spcPts val="800"/>
+              </a:spcAft>
+              <a:buNone/>
+            </a:pPr>
+            <a:r>
+              <a:rPr lang="en-US" sz="4000" dirty="0">
+                <a:solidFill>
+                  <a:srgbClr val="111111"/>
+                </a:solidFill>
+                <a:latin typeface="Times New Roman" pitchFamily="34" charset="0"/>
+                <a:ea typeface="Times New Roman" pitchFamily="34" charset="-122"/>
+                <a:cs typeface="Times New Roman" pitchFamily="34" charset="-120"/>
+              </a:rPr>
+              <a:t>It is anything in nature that people can use.</a:t>
+            </a:r>
+            <a:endParaRPr lang="en-US" sz="4000" dirty="0"/>
+          </a:p>
+          <a:p>
+            <a:pPr algn="l" indent="0" marL="0">
+              <a:spcAft>
+                <a:spcPts val="800"/>
+              </a:spcAft>
+              <a:buNone/>
+            </a:pPr>
+            <a:r>
+              <a:rPr lang="en-US" sz="4000" b="1" dirty="0">
+                <a:solidFill>
+                  <a:srgbClr val="111111"/>
+                </a:solidFill>
+                <a:latin typeface="Times New Roman" pitchFamily="34" charset="0"/>
+                <a:ea typeface="Times New Roman" pitchFamily="34" charset="-122"/>
+                <a:cs typeface="Times New Roman" pitchFamily="34" charset="-120"/>
+              </a:rPr>
+              <a:t>Coastal hazard: </a:t>
+            </a:r>
+            <a:pPr algn="l" indent="0" marL="0">
+              <a:spcAft>
+                <a:spcPts val="800"/>
+              </a:spcAft>
+              <a:buNone/>
+            </a:pPr>
+            <a:r>
+              <a:rPr lang="en-US" sz="4000" dirty="0">
+                <a:solidFill>
+                  <a:srgbClr val="111111"/>
+                </a:solidFill>
+                <a:latin typeface="Times New Roman" pitchFamily="34" charset="0"/>
+                <a:ea typeface="Times New Roman" pitchFamily="34" charset="-122"/>
+                <a:cs typeface="Times New Roman" pitchFamily="34" charset="-120"/>
+              </a:rPr>
+              <a:t>It is a danger that threatens people and property along the coast.</a:t>
             </a:r>
             <a:endParaRPr lang="en-US" sz="4000" dirty="0"/>
           </a:p>
@@ -12682,129 +12754,9 @@
           </a:p>
         </p:txBody>
       </p:sp>
-      <p:sp>
-        <p:nvSpPr>
-          <p:cNvPr id="3" name="Text 1"/>
-          <p:cNvSpPr/>
-          <p:nvPr/>
-        </p:nvSpPr>
-        <p:spPr>
-          <a:xfrm>
-            <a:off x="365760" y="1005840"/>
-            <a:ext cx="11460175" cy="731520"/>
-          </a:xfrm>
-          <a:prstGeom prst="rect">
-            <a:avLst/>
-          </a:prstGeom>
-          <a:noFill/>
-          <a:ln/>
-        </p:spPr>
-        <p:txBody>
-          <a:bodyPr wrap="square" lIns="0" tIns="0" rIns="0" bIns="0" rtlCol="0" anchor="ctr">
-            <a:normAutofit/>
-          </a:bodyPr>
-          <a:lstStyle/>
-          <a:p>
-            <a:pPr algn="ctr" indent="0" marL="0">
-              <a:buNone/>
-            </a:pPr>
-            <a:r>
-              <a:rPr lang="en-US" sz="3600" b="1" dirty="0">
-                <a:solidFill>
-                  <a:srgbClr val="990011"/>
-                </a:solidFill>
-                <a:latin typeface="Times New Roman" pitchFamily="34" charset="0"/>
-                <a:ea typeface="Times New Roman" pitchFamily="34" charset="-122"/>
-                <a:cs typeface="Times New Roman" pitchFamily="34" charset="-120"/>
-              </a:rPr>
-              <a:t>1. Importance of Coasts (Resources)</a:t>
-            </a:r>
-            <a:endParaRPr lang="en-US" sz="3600" dirty="0"/>
-          </a:p>
-        </p:txBody>
-      </p:sp>
-      <p:sp>
-        <p:nvSpPr>
-          <p:cNvPr id="4" name="Text 2"/>
-          <p:cNvSpPr/>
-          <p:nvPr/>
-        </p:nvSpPr>
-        <p:spPr>
-          <a:xfrm>
-            <a:off x="365760" y="1783080"/>
-            <a:ext cx="4846320" cy="4617720"/>
-          </a:xfrm>
-          <a:prstGeom prst="rect">
-            <a:avLst/>
-          </a:prstGeom>
-          <a:noFill/>
-          <a:ln/>
-        </p:spPr>
-        <p:txBody>
-          <a:bodyPr wrap="square" lIns="0" tIns="0" rIns="0" bIns="0" rtlCol="0" anchor="t"/>
-          <a:lstStyle/>
-          <a:p>
-            <a:pPr algn="l" indent="0" marL="0">
-              <a:spcAft>
-                <a:spcPts val="800"/>
-              </a:spcAft>
-              <a:buNone/>
-            </a:pPr>
-            <a:r>
-              <a:rPr lang="en-US" sz="3600" i="1" dirty="0">
-                <a:solidFill>
-                  <a:srgbClr val="111111"/>
-                </a:solidFill>
-                <a:latin typeface="Times New Roman" pitchFamily="34" charset="0"/>
-                <a:ea typeface="Times New Roman" pitchFamily="34" charset="-122"/>
-                <a:cs typeface="Times New Roman" pitchFamily="34" charset="-120"/>
-              </a:rPr>
-              <a:t>Coasts provide the following resources:</a:t>
-            </a:r>
-            <a:endParaRPr lang="en-US" sz="3600" dirty="0"/>
-          </a:p>
-          <a:p>
-            <a:pPr algn="l" indent="0" marL="0">
-              <a:spcAft>
-                <a:spcPts val="800"/>
-              </a:spcAft>
-              <a:buNone/>
-            </a:pPr>
-            <a:r>
-              <a:rPr lang="en-US" sz="3600" b="1" dirty="0">
-                <a:solidFill>
-                  <a:srgbClr val="111111"/>
-                </a:solidFill>
-                <a:latin typeface="Times New Roman" pitchFamily="34" charset="0"/>
-                <a:ea typeface="Times New Roman" pitchFamily="34" charset="-122"/>
-                <a:cs typeface="Times New Roman" pitchFamily="34" charset="-120"/>
-              </a:rPr>
-              <a:t>Ports and trade: </a:t>
-            </a:r>
-            <a:pPr algn="l" indent="0" marL="0">
-              <a:spcAft>
-                <a:spcPts val="800"/>
-              </a:spcAft>
-              <a:buNone/>
-            </a:pPr>
-            <a:r>
-              <a:rPr lang="en-US" sz="3600" dirty="0">
-                <a:solidFill>
-                  <a:srgbClr val="111111"/>
-                </a:solidFill>
-                <a:latin typeface="Times New Roman" pitchFamily="34" charset="0"/>
-                <a:ea typeface="Times New Roman" pitchFamily="34" charset="-122"/>
-                <a:cs typeface="Times New Roman" pitchFamily="34" charset="-120"/>
-              </a:rPr>
-              <a:t>Ports such as Douala and Kribi handle the trade of Cameroon, Chad and the Central African Republic.</a:t>
-            </a:r>
-            <a:endParaRPr lang="en-US" sz="3600" dirty="0"/>
-          </a:p>
-        </p:txBody>
-      </p:sp>
       <p:pic>
         <p:nvPicPr>
-          <p:cNvPr id="5" name="Image 0" descr="/home/claude/f4/img/v2/f4_port.jpg">    </p:cNvPr>
+          <p:cNvPr id="3" name="Image 0" descr="/home/claude/f4/img/minesec_sheet.png">    </p:cNvPr>
           <p:cNvPicPr>
             <a:picLocks noChangeAspect="1"/>
           </p:cNvPicPr>
@@ -12818,8 +12770,8 @@
         </p:blipFill>
         <p:spPr>
           <a:xfrm>
-            <a:off x="5349240" y="2071212"/>
-            <a:ext cx="6659575" cy="3693983"/>
+            <a:off x="0" y="658368"/>
+            <a:ext cx="5120640" cy="5833872"/>
           </a:xfrm>
           <a:prstGeom prst="rect">
             <a:avLst/>
@@ -12828,14 +12780,14 @@
       </p:pic>
       <p:sp>
         <p:nvSpPr>
-          <p:cNvPr id="6" name="Text 3"/>
+          <p:cNvPr id="4" name="Text 1"/>
           <p:cNvSpPr/>
           <p:nvPr/>
         </p:nvSpPr>
         <p:spPr>
           <a:xfrm>
-            <a:off x="5349240" y="6089904"/>
-            <a:ext cx="6659575" cy="347472"/>
+            <a:off x="5349240" y="1005840"/>
+            <a:ext cx="6522415" cy="731520"/>
           </a:xfrm>
           <a:prstGeom prst="rect">
             <a:avLst/>
@@ -12844,24 +12796,85 @@
           <a:ln/>
         </p:spPr>
         <p:txBody>
-          <a:bodyPr wrap="square" lIns="0" tIns="0" rIns="0" bIns="0" rtlCol="0" anchor="ctr"/>
+          <a:bodyPr wrap="square" lIns="0" tIns="0" rIns="0" bIns="0" rtlCol="0" anchor="ctr">
+            <a:normAutofit/>
+          </a:bodyPr>
           <a:lstStyle/>
           <a:p>
             <a:pPr algn="ctr" indent="0" marL="0">
               <a:buNone/>
             </a:pPr>
             <a:r>
-              <a:rPr lang="en-US" sz="1600" i="1" dirty="0">
-                <a:solidFill>
-                  <a:srgbClr val="555555"/>
+              <a:rPr lang="en-US" sz="3600" b="1" dirty="0">
+                <a:solidFill>
+                  <a:srgbClr val="990011"/>
                 </a:solidFill>
                 <a:latin typeface="Times New Roman" pitchFamily="34" charset="0"/>
                 <a:ea typeface="Times New Roman" pitchFamily="34" charset="-122"/>
                 <a:cs typeface="Times New Roman" pitchFamily="34" charset="-120"/>
               </a:rPr>
-              <a:t>Illustration: a port</a:t>
-            </a:r>
-            <a:endParaRPr lang="en-US" sz="1600" dirty="0"/>
+              <a:t>DEFINITIONS (continued)</a:t>
+            </a:r>
+            <a:endParaRPr lang="en-US" sz="3600" dirty="0"/>
+          </a:p>
+        </p:txBody>
+      </p:sp>
+      <p:sp>
+        <p:nvSpPr>
+          <p:cNvPr id="5" name="Text 2"/>
+          <p:cNvSpPr/>
+          <p:nvPr/>
+        </p:nvSpPr>
+        <p:spPr>
+          <a:xfrm>
+            <a:off x="5349240" y="1783080"/>
+            <a:ext cx="6522415" cy="4663440"/>
+          </a:xfrm>
+          <a:prstGeom prst="rect">
+            <a:avLst/>
+          </a:prstGeom>
+          <a:noFill/>
+          <a:ln/>
+        </p:spPr>
+        <p:txBody>
+          <a:bodyPr wrap="square" lIns="0" tIns="0" rIns="0" bIns="0" rtlCol="0" anchor="t"/>
+          <a:lstStyle/>
+          <a:p>
+            <a:pPr algn="l" indent="0" marL="0">
+              <a:spcAft>
+                <a:spcPts val="800"/>
+              </a:spcAft>
+              <a:buNone/>
+            </a:pPr>
+            <a:r>
+              <a:rPr lang="en-US" sz="4000" b="1" dirty="0">
+                <a:solidFill>
+                  <a:srgbClr val="111111"/>
+                </a:solidFill>
+                <a:latin typeface="Times New Roman" pitchFamily="34" charset="0"/>
+                <a:ea typeface="Times New Roman" pitchFamily="34" charset="-122"/>
+                <a:cs typeface="Times New Roman" pitchFamily="34" charset="-120"/>
+              </a:rPr>
+              <a:t>Coastal management: </a:t>
+            </a:r>
+            <a:pPr algn="l" indent="0" marL="0">
+              <a:spcAft>
+                <a:spcPts val="800"/>
+              </a:spcAft>
+              <a:buNone/>
+            </a:pPr>
+            <a:r>
+              <a:rPr lang="en-US" sz="4000" dirty="0">
+                <a:solidFill>
+                  <a:srgbClr val="111111"/>
+                </a:solidFill>
+                <a:latin typeface="Times New Roman" pitchFamily="34" charset="0"/>
+                <a:ea typeface="Times New Roman" pitchFamily="34" charset="-122"/>
+                <a:cs typeface="Times New Roman" pitchFamily="34" charset="-120"/>
+              </a:rPr>
+              <a:t>It is the set of measures used to protect the coast and use it wisely.</a:t>
+            </a:r>
+            <a:endParaRPr lang="en-US" sz="4000" dirty="0"/>
           </a:p>
         </p:txBody>
       </p:sp>
@@ -12977,9 +12990,129 @@
           </a:p>
         </p:txBody>
       </p:sp>
+      <p:sp>
+        <p:nvSpPr>
+          <p:cNvPr id="3" name="Text 1"/>
+          <p:cNvSpPr/>
+          <p:nvPr/>
+        </p:nvSpPr>
+        <p:spPr>
+          <a:xfrm>
+            <a:off x="365760" y="1005840"/>
+            <a:ext cx="11460175" cy="731520"/>
+          </a:xfrm>
+          <a:prstGeom prst="rect">
+            <a:avLst/>
+          </a:prstGeom>
+          <a:noFill/>
+          <a:ln/>
+        </p:spPr>
+        <p:txBody>
+          <a:bodyPr wrap="square" lIns="0" tIns="0" rIns="0" bIns="0" rtlCol="0" anchor="ctr">
+            <a:normAutofit/>
+          </a:bodyPr>
+          <a:lstStyle/>
+          <a:p>
+            <a:pPr algn="ctr" indent="0" marL="0">
+              <a:buNone/>
+            </a:pPr>
+            <a:r>
+              <a:rPr lang="en-US" sz="3600" b="1" dirty="0">
+                <a:solidFill>
+                  <a:srgbClr val="990011"/>
+                </a:solidFill>
+                <a:latin typeface="Times New Roman" pitchFamily="34" charset="0"/>
+                <a:ea typeface="Times New Roman" pitchFamily="34" charset="-122"/>
+                <a:cs typeface="Times New Roman" pitchFamily="34" charset="-120"/>
+              </a:rPr>
+              <a:t>1. Importance of Coasts (Resources)</a:t>
+            </a:r>
+            <a:endParaRPr lang="en-US" sz="3600" dirty="0"/>
+          </a:p>
+        </p:txBody>
+      </p:sp>
+      <p:sp>
+        <p:nvSpPr>
+          <p:cNvPr id="4" name="Text 2"/>
+          <p:cNvSpPr/>
+          <p:nvPr/>
+        </p:nvSpPr>
+        <p:spPr>
+          <a:xfrm>
+            <a:off x="365760" y="1783080"/>
+            <a:ext cx="4846320" cy="4617720"/>
+          </a:xfrm>
+          <a:prstGeom prst="rect">
+            <a:avLst/>
+          </a:prstGeom>
+          <a:noFill/>
+          <a:ln/>
+        </p:spPr>
+        <p:txBody>
+          <a:bodyPr wrap="square" lIns="0" tIns="0" rIns="0" bIns="0" rtlCol="0" anchor="t"/>
+          <a:lstStyle/>
+          <a:p>
+            <a:pPr algn="l" indent="0" marL="0">
+              <a:spcAft>
+                <a:spcPts val="800"/>
+              </a:spcAft>
+              <a:buNone/>
+            </a:pPr>
+            <a:r>
+              <a:rPr lang="en-US" sz="3600" i="1" dirty="0">
+                <a:solidFill>
+                  <a:srgbClr val="111111"/>
+                </a:solidFill>
+                <a:latin typeface="Times New Roman" pitchFamily="34" charset="0"/>
+                <a:ea typeface="Times New Roman" pitchFamily="34" charset="-122"/>
+                <a:cs typeface="Times New Roman" pitchFamily="34" charset="-120"/>
+              </a:rPr>
+              <a:t>Coasts provide the following resources:</a:t>
+            </a:r>
+            <a:endParaRPr lang="en-US" sz="3600" dirty="0"/>
+          </a:p>
+          <a:p>
+            <a:pPr algn="l" indent="0" marL="0">
+              <a:spcAft>
+                <a:spcPts val="800"/>
+              </a:spcAft>
+              <a:buNone/>
+            </a:pPr>
+            <a:r>
+              <a:rPr lang="en-US" sz="3600" b="1" dirty="0">
+                <a:solidFill>
+                  <a:srgbClr val="111111"/>
+                </a:solidFill>
+                <a:latin typeface="Times New Roman" pitchFamily="34" charset="0"/>
+                <a:ea typeface="Times New Roman" pitchFamily="34" charset="-122"/>
+                <a:cs typeface="Times New Roman" pitchFamily="34" charset="-120"/>
+              </a:rPr>
+              <a:t>Ports and trade: </a:t>
+            </a:r>
+            <a:pPr algn="l" indent="0" marL="0">
+              <a:spcAft>
+                <a:spcPts val="800"/>
+              </a:spcAft>
+              <a:buNone/>
+            </a:pPr>
+            <a:r>
+              <a:rPr lang="en-US" sz="3600" dirty="0">
+                <a:solidFill>
+                  <a:srgbClr val="111111"/>
+                </a:solidFill>
+                <a:latin typeface="Times New Roman" pitchFamily="34" charset="0"/>
+                <a:ea typeface="Times New Roman" pitchFamily="34" charset="-122"/>
+                <a:cs typeface="Times New Roman" pitchFamily="34" charset="-120"/>
+              </a:rPr>
+              <a:t>Ports such as Douala and Kribi handle the trade of Cameroon, Chad and the Central African Republic.</a:t>
+            </a:r>
+            <a:endParaRPr lang="en-US" sz="3600" dirty="0"/>
+          </a:p>
+        </p:txBody>
+      </p:sp>
       <p:pic>
         <p:nvPicPr>
-          <p:cNvPr id="3" name="Image 0" descr="/home/claude/f4/img/minesec_sheet.png">    </p:cNvPr>
+          <p:cNvPr id="5" name="Image 0" descr="/home/claude/f4/img/v2/f4_port.jpg">    </p:cNvPr>
           <p:cNvPicPr>
             <a:picLocks noChangeAspect="1"/>
           </p:cNvPicPr>
@@ -12993,8 +13126,8 @@
         </p:blipFill>
         <p:spPr>
           <a:xfrm>
-            <a:off x="0" y="658368"/>
-            <a:ext cx="5120640" cy="5833872"/>
+            <a:off x="5349240" y="2071212"/>
+            <a:ext cx="6659575" cy="3693983"/>
           </a:xfrm>
           <a:prstGeom prst="rect">
             <a:avLst/>
@@ -13003,14 +13136,14 @@
       </p:pic>
       <p:sp>
         <p:nvSpPr>
-          <p:cNvPr id="4" name="Text 1"/>
+          <p:cNvPr id="6" name="Text 3"/>
           <p:cNvSpPr/>
           <p:nvPr/>
         </p:nvSpPr>
         <p:spPr>
           <a:xfrm>
-            <a:off x="5349240" y="1005840"/>
-            <a:ext cx="6522415" cy="731520"/>
+            <a:off x="5349240" y="6089904"/>
+            <a:ext cx="6659575" cy="347472"/>
           </a:xfrm>
           <a:prstGeom prst="rect">
             <a:avLst/>
@@ -13019,85 +13152,24 @@
           <a:ln/>
         </p:spPr>
         <p:txBody>
-          <a:bodyPr wrap="square" lIns="0" tIns="0" rIns="0" bIns="0" rtlCol="0" anchor="ctr">
-            <a:normAutofit/>
-          </a:bodyPr>
+          <a:bodyPr wrap="square" lIns="0" tIns="0" rIns="0" bIns="0" rtlCol="0" anchor="ctr"/>
           <a:lstStyle/>
           <a:p>
             <a:pPr algn="ctr" indent="0" marL="0">
               <a:buNone/>
             </a:pPr>
             <a:r>
-              <a:rPr lang="en-US" sz="3600" b="1" dirty="0">
-                <a:solidFill>
-                  <a:srgbClr val="990011"/>
+              <a:rPr lang="en-US" sz="1600" i="1" dirty="0">
+                <a:solidFill>
+                  <a:srgbClr val="555555"/>
                 </a:solidFill>
                 <a:latin typeface="Times New Roman" pitchFamily="34" charset="0"/>
                 <a:ea typeface="Times New Roman" pitchFamily="34" charset="-122"/>
                 <a:cs typeface="Times New Roman" pitchFamily="34" charset="-120"/>
               </a:rPr>
-              <a:t>1. Importance of Coasts (Resources)</a:t>
-            </a:r>
-            <a:endParaRPr lang="en-US" sz="3600" dirty="0"/>
-          </a:p>
-        </p:txBody>
-      </p:sp>
-      <p:sp>
-        <p:nvSpPr>
-          <p:cNvPr id="5" name="Text 2"/>
-          <p:cNvSpPr/>
-          <p:nvPr/>
-        </p:nvSpPr>
-        <p:spPr>
-          <a:xfrm>
-            <a:off x="5349240" y="1783080"/>
-            <a:ext cx="6522415" cy="4663440"/>
-          </a:xfrm>
-          <a:prstGeom prst="rect">
-            <a:avLst/>
-          </a:prstGeom>
-          <a:noFill/>
-          <a:ln/>
-        </p:spPr>
-        <p:txBody>
-          <a:bodyPr wrap="square" lIns="0" tIns="0" rIns="0" bIns="0" rtlCol="0" anchor="t"/>
-          <a:lstStyle/>
-          <a:p>
-            <a:pPr algn="l" indent="0" marL="0">
-              <a:spcAft>
-                <a:spcPts val="800"/>
-              </a:spcAft>
-              <a:buNone/>
-            </a:pPr>
-            <a:r>
-              <a:rPr lang="en-US" sz="4000" b="1" dirty="0">
-                <a:solidFill>
-                  <a:srgbClr val="111111"/>
-                </a:solidFill>
-                <a:latin typeface="Times New Roman" pitchFamily="34" charset="0"/>
-                <a:ea typeface="Times New Roman" pitchFamily="34" charset="-122"/>
-                <a:cs typeface="Times New Roman" pitchFamily="34" charset="-120"/>
-              </a:rPr>
-              <a:t>Fishing: </a:t>
-            </a:r>
-            <a:pPr algn="l" indent="0" marL="0">
-              <a:spcAft>
-                <a:spcPts val="800"/>
-              </a:spcAft>
-              <a:buNone/>
-            </a:pPr>
-            <a:r>
-              <a:rPr lang="en-US" sz="4000" dirty="0">
-                <a:solidFill>
-                  <a:srgbClr val="111111"/>
-                </a:solidFill>
-                <a:latin typeface="Times New Roman" pitchFamily="34" charset="0"/>
-                <a:ea typeface="Times New Roman" pitchFamily="34" charset="-122"/>
-                <a:cs typeface="Times New Roman" pitchFamily="34" charset="-120"/>
-              </a:rPr>
-              <a:t>Coastal waters and mangroves provide fish, shrimps and crabs.</a:t>
-            </a:r>
-            <a:endParaRPr lang="en-US" sz="4000" dirty="0"/>
+              <a:t>Illustration: a port</a:t>
+            </a:r>
+            <a:endParaRPr lang="en-US" sz="1600" dirty="0"/>
           </a:p>
         </p:txBody>
       </p:sp>
@@ -13213,109 +13285,9 @@
           </a:p>
         </p:txBody>
       </p:sp>
-      <p:sp>
-        <p:nvSpPr>
-          <p:cNvPr id="3" name="Text 1"/>
-          <p:cNvSpPr/>
-          <p:nvPr/>
-        </p:nvSpPr>
-        <p:spPr>
-          <a:xfrm>
-            <a:off x="365760" y="1005840"/>
-            <a:ext cx="11460175" cy="731520"/>
-          </a:xfrm>
-          <a:prstGeom prst="rect">
-            <a:avLst/>
-          </a:prstGeom>
-          <a:noFill/>
-          <a:ln/>
-        </p:spPr>
-        <p:txBody>
-          <a:bodyPr wrap="square" lIns="0" tIns="0" rIns="0" bIns="0" rtlCol="0" anchor="ctr">
-            <a:normAutofit/>
-          </a:bodyPr>
-          <a:lstStyle/>
-          <a:p>
-            <a:pPr algn="ctr" indent="0" marL="0">
-              <a:buNone/>
-            </a:pPr>
-            <a:r>
-              <a:rPr lang="en-US" sz="3600" b="1" dirty="0">
-                <a:solidFill>
-                  <a:srgbClr val="990011"/>
-                </a:solidFill>
-                <a:latin typeface="Times New Roman" pitchFamily="34" charset="0"/>
-                <a:ea typeface="Times New Roman" pitchFamily="34" charset="-122"/>
-                <a:cs typeface="Times New Roman" pitchFamily="34" charset="-120"/>
-              </a:rPr>
-              <a:t>1. Importance of Coasts (Resources)</a:t>
-            </a:r>
-            <a:endParaRPr lang="en-US" sz="3600" dirty="0"/>
-          </a:p>
-        </p:txBody>
-      </p:sp>
-      <p:sp>
-        <p:nvSpPr>
-          <p:cNvPr id="4" name="Text 2"/>
-          <p:cNvSpPr/>
-          <p:nvPr/>
-        </p:nvSpPr>
-        <p:spPr>
-          <a:xfrm>
-            <a:off x="365760" y="1783080"/>
-            <a:ext cx="4846320" cy="4617720"/>
-          </a:xfrm>
-          <a:prstGeom prst="rect">
-            <a:avLst/>
-          </a:prstGeom>
-          <a:noFill/>
-          <a:ln/>
-        </p:spPr>
-        <p:txBody>
-          <a:bodyPr wrap="square" lIns="0" tIns="0" rIns="0" bIns="0" rtlCol="0" anchor="t"/>
-          <a:lstStyle/>
-          <a:p>
-            <a:pPr algn="l" indent="0" marL="0">
-              <a:spcAft>
-                <a:spcPts val="800"/>
-              </a:spcAft>
-              <a:buNone/>
-            </a:pPr>
-            <a:r>
-              <a:rPr lang="en-US" sz="3600" b="1" dirty="0">
-                <a:solidFill>
-                  <a:srgbClr val="111111"/>
-                </a:solidFill>
-                <a:latin typeface="Times New Roman" pitchFamily="34" charset="0"/>
-                <a:ea typeface="Times New Roman" pitchFamily="34" charset="-122"/>
-                <a:cs typeface="Times New Roman" pitchFamily="34" charset="-120"/>
-              </a:rPr>
-              <a:t>Tourism: </a:t>
-            </a:r>
-            <a:pPr algn="l" indent="0" marL="0">
-              <a:spcAft>
-                <a:spcPts val="800"/>
-              </a:spcAft>
-              <a:buNone/>
-            </a:pPr>
-            <a:r>
-              <a:rPr lang="en-US" sz="3600" dirty="0">
-                <a:solidFill>
-                  <a:srgbClr val="111111"/>
-                </a:solidFill>
-                <a:latin typeface="Times New Roman" pitchFamily="34" charset="0"/>
-                <a:ea typeface="Times New Roman" pitchFamily="34" charset="-122"/>
-                <a:cs typeface="Times New Roman" pitchFamily="34" charset="-120"/>
-              </a:rPr>
-              <a:t>The beaches of Kribi and Limbe attract tourists.</a:t>
-            </a:r>
-            <a:endParaRPr lang="en-US" sz="3600" dirty="0"/>
-          </a:p>
-        </p:txBody>
-      </p:sp>
       <p:pic>
         <p:nvPicPr>
-          <p:cNvPr id="5" name="Image 0" descr="/home/claude/f4/img/v2/usa_limbe.jpg">    </p:cNvPr>
+          <p:cNvPr id="3" name="Image 0" descr="/home/claude/f4/img/minesec_sheet.png">    </p:cNvPr>
           <p:cNvPicPr>
             <a:picLocks noChangeAspect="1"/>
           </p:cNvPicPr>
@@ -13329,8 +13301,8 @@
         </p:blipFill>
         <p:spPr>
           <a:xfrm>
-            <a:off x="5349240" y="2071212"/>
-            <a:ext cx="6659575" cy="3693983"/>
+            <a:off x="0" y="658368"/>
+            <a:ext cx="5120640" cy="5833872"/>
           </a:xfrm>
           <a:prstGeom prst="rect">
             <a:avLst/>
@@ -13339,14 +13311,14 @@
       </p:pic>
       <p:sp>
         <p:nvSpPr>
-          <p:cNvPr id="6" name="Text 3"/>
+          <p:cNvPr id="4" name="Text 1"/>
           <p:cNvSpPr/>
           <p:nvPr/>
         </p:nvSpPr>
         <p:spPr>
           <a:xfrm>
-            <a:off x="5349240" y="6089904"/>
-            <a:ext cx="6659575" cy="347472"/>
+            <a:off x="5349240" y="1005840"/>
+            <a:ext cx="6522415" cy="731520"/>
           </a:xfrm>
           <a:prstGeom prst="rect">
             <a:avLst/>
@@ -13355,24 +13327,85 @@
           <a:ln/>
         </p:spPr>
         <p:txBody>
-          <a:bodyPr wrap="square" lIns="0" tIns="0" rIns="0" bIns="0" rtlCol="0" anchor="ctr"/>
+          <a:bodyPr wrap="square" lIns="0" tIns="0" rIns="0" bIns="0" rtlCol="0" anchor="ctr">
+            <a:normAutofit/>
+          </a:bodyPr>
           <a:lstStyle/>
           <a:p>
             <a:pPr algn="ctr" indent="0" marL="0">
               <a:buNone/>
             </a:pPr>
             <a:r>
-              <a:rPr lang="en-US" sz="1600" i="1" dirty="0">
-                <a:solidFill>
-                  <a:srgbClr val="555555"/>
+              <a:rPr lang="en-US" sz="3600" b="1" dirty="0">
+                <a:solidFill>
+                  <a:srgbClr val="990011"/>
                 </a:solidFill>
                 <a:latin typeface="Times New Roman" pitchFamily="34" charset="0"/>
                 <a:ea typeface="Times New Roman" pitchFamily="34" charset="-122"/>
                 <a:cs typeface="Times New Roman" pitchFamily="34" charset="-120"/>
               </a:rPr>
-              <a:t>Illustration: the coast at Limbe</a:t>
-            </a:r>
-            <a:endParaRPr lang="en-US" sz="1600" dirty="0"/>
+              <a:t>1. Importance of Coasts (Resources)</a:t>
+            </a:r>
+            <a:endParaRPr lang="en-US" sz="3600" dirty="0"/>
+          </a:p>
+        </p:txBody>
+      </p:sp>
+      <p:sp>
+        <p:nvSpPr>
+          <p:cNvPr id="5" name="Text 2"/>
+          <p:cNvSpPr/>
+          <p:nvPr/>
+        </p:nvSpPr>
+        <p:spPr>
+          <a:xfrm>
+            <a:off x="5349240" y="1783080"/>
+            <a:ext cx="6522415" cy="4663440"/>
+          </a:xfrm>
+          <a:prstGeom prst="rect">
+            <a:avLst/>
+          </a:prstGeom>
+          <a:noFill/>
+          <a:ln/>
+        </p:spPr>
+        <p:txBody>
+          <a:bodyPr wrap="square" lIns="0" tIns="0" rIns="0" bIns="0" rtlCol="0" anchor="t"/>
+          <a:lstStyle/>
+          <a:p>
+            <a:pPr algn="l" indent="0" marL="0">
+              <a:spcAft>
+                <a:spcPts val="800"/>
+              </a:spcAft>
+              <a:buNone/>
+            </a:pPr>
+            <a:r>
+              <a:rPr lang="en-US" sz="4000" b="1" dirty="0">
+                <a:solidFill>
+                  <a:srgbClr val="111111"/>
+                </a:solidFill>
+                <a:latin typeface="Times New Roman" pitchFamily="34" charset="0"/>
+                <a:ea typeface="Times New Roman" pitchFamily="34" charset="-122"/>
+                <a:cs typeface="Times New Roman" pitchFamily="34" charset="-120"/>
+              </a:rPr>
+              <a:t>Fishing: </a:t>
+            </a:r>
+            <a:pPr algn="l" indent="0" marL="0">
+              <a:spcAft>
+                <a:spcPts val="800"/>
+              </a:spcAft>
+              <a:buNone/>
+            </a:pPr>
+            <a:r>
+              <a:rPr lang="en-US" sz="4000" dirty="0">
+                <a:solidFill>
+                  <a:srgbClr val="111111"/>
+                </a:solidFill>
+                <a:latin typeface="Times New Roman" pitchFamily="34" charset="0"/>
+                <a:ea typeface="Times New Roman" pitchFamily="34" charset="-122"/>
+                <a:cs typeface="Times New Roman" pitchFamily="34" charset="-120"/>
+              </a:rPr>
+              <a:t>Coastal waters and mangroves provide fish, shrimps and crabs.</a:t>
+            </a:r>
+            <a:endParaRPr lang="en-US" sz="4000" dirty="0"/>
           </a:p>
         </p:txBody>
       </p:sp>
@@ -13488,9 +13521,109 @@
           </a:p>
         </p:txBody>
       </p:sp>
+      <p:sp>
+        <p:nvSpPr>
+          <p:cNvPr id="3" name="Text 1"/>
+          <p:cNvSpPr/>
+          <p:nvPr/>
+        </p:nvSpPr>
+        <p:spPr>
+          <a:xfrm>
+            <a:off x="365760" y="1005840"/>
+            <a:ext cx="11460175" cy="731520"/>
+          </a:xfrm>
+          <a:prstGeom prst="rect">
+            <a:avLst/>
+          </a:prstGeom>
+          <a:noFill/>
+          <a:ln/>
+        </p:spPr>
+        <p:txBody>
+          <a:bodyPr wrap="square" lIns="0" tIns="0" rIns="0" bIns="0" rtlCol="0" anchor="ctr">
+            <a:normAutofit/>
+          </a:bodyPr>
+          <a:lstStyle/>
+          <a:p>
+            <a:pPr algn="ctr" indent="0" marL="0">
+              <a:buNone/>
+            </a:pPr>
+            <a:r>
+              <a:rPr lang="en-US" sz="3600" b="1" dirty="0">
+                <a:solidFill>
+                  <a:srgbClr val="990011"/>
+                </a:solidFill>
+                <a:latin typeface="Times New Roman" pitchFamily="34" charset="0"/>
+                <a:ea typeface="Times New Roman" pitchFamily="34" charset="-122"/>
+                <a:cs typeface="Times New Roman" pitchFamily="34" charset="-120"/>
+              </a:rPr>
+              <a:t>1. Importance of Coasts (Resources)</a:t>
+            </a:r>
+            <a:endParaRPr lang="en-US" sz="3600" dirty="0"/>
+          </a:p>
+        </p:txBody>
+      </p:sp>
+      <p:sp>
+        <p:nvSpPr>
+          <p:cNvPr id="4" name="Text 2"/>
+          <p:cNvSpPr/>
+          <p:nvPr/>
+        </p:nvSpPr>
+        <p:spPr>
+          <a:xfrm>
+            <a:off x="365760" y="1783080"/>
+            <a:ext cx="4846320" cy="4617720"/>
+          </a:xfrm>
+          <a:prstGeom prst="rect">
+            <a:avLst/>
+          </a:prstGeom>
+          <a:noFill/>
+          <a:ln/>
+        </p:spPr>
+        <p:txBody>
+          <a:bodyPr wrap="square" lIns="0" tIns="0" rIns="0" bIns="0" rtlCol="0" anchor="t"/>
+          <a:lstStyle/>
+          <a:p>
+            <a:pPr algn="l" indent="0" marL="0">
+              <a:spcAft>
+                <a:spcPts val="800"/>
+              </a:spcAft>
+              <a:buNone/>
+            </a:pPr>
+            <a:r>
+              <a:rPr lang="en-US" sz="3600" b="1" dirty="0">
+                <a:solidFill>
+                  <a:srgbClr val="111111"/>
+                </a:solidFill>
+                <a:latin typeface="Times New Roman" pitchFamily="34" charset="0"/>
+                <a:ea typeface="Times New Roman" pitchFamily="34" charset="-122"/>
+                <a:cs typeface="Times New Roman" pitchFamily="34" charset="-120"/>
+              </a:rPr>
+              <a:t>Tourism: </a:t>
+            </a:r>
+            <a:pPr algn="l" indent="0" marL="0">
+              <a:spcAft>
+                <a:spcPts val="800"/>
+              </a:spcAft>
+              <a:buNone/>
+            </a:pPr>
+            <a:r>
+              <a:rPr lang="en-US" sz="3600" dirty="0">
+                <a:solidFill>
+                  <a:srgbClr val="111111"/>
+                </a:solidFill>
+                <a:latin typeface="Times New Roman" pitchFamily="34" charset="0"/>
+                <a:ea typeface="Times New Roman" pitchFamily="34" charset="-122"/>
+                <a:cs typeface="Times New Roman" pitchFamily="34" charset="-120"/>
+              </a:rPr>
+              <a:t>The beaches of Kribi and Limbe attract tourists.</a:t>
+            </a:r>
+            <a:endParaRPr lang="en-US" sz="3600" dirty="0"/>
+          </a:p>
+        </p:txBody>
+      </p:sp>
       <p:pic>
         <p:nvPicPr>
-          <p:cNvPr id="3" name="Image 0" descr="/home/claude/f4/img/minesec_sheet.png">    </p:cNvPr>
+          <p:cNvPr id="5" name="Image 0" descr="/home/claude/f4/img/v2/usa_limbe.jpg">    </p:cNvPr>
           <p:cNvPicPr>
             <a:picLocks noChangeAspect="1"/>
           </p:cNvPicPr>
@@ -13504,8 +13637,8 @@
         </p:blipFill>
         <p:spPr>
           <a:xfrm>
-            <a:off x="0" y="658368"/>
-            <a:ext cx="5120640" cy="5833872"/>
+            <a:off x="5349240" y="2071212"/>
+            <a:ext cx="6659575" cy="3693983"/>
           </a:xfrm>
           <a:prstGeom prst="rect">
             <a:avLst/>
@@ -13514,14 +13647,14 @@
       </p:pic>
       <p:sp>
         <p:nvSpPr>
-          <p:cNvPr id="4" name="Text 1"/>
+          <p:cNvPr id="6" name="Text 3"/>
           <p:cNvSpPr/>
           <p:nvPr/>
         </p:nvSpPr>
         <p:spPr>
           <a:xfrm>
-            <a:off x="5349240" y="1005840"/>
-            <a:ext cx="6522415" cy="731520"/>
+            <a:off x="5349240" y="6089904"/>
+            <a:ext cx="6659575" cy="347472"/>
           </a:xfrm>
           <a:prstGeom prst="rect">
             <a:avLst/>
@@ -13530,122 +13663,24 @@
           <a:ln/>
         </p:spPr>
         <p:txBody>
-          <a:bodyPr wrap="square" lIns="0" tIns="0" rIns="0" bIns="0" rtlCol="0" anchor="ctr">
-            <a:normAutofit/>
-          </a:bodyPr>
+          <a:bodyPr wrap="square" lIns="0" tIns="0" rIns="0" bIns="0" rtlCol="0" anchor="ctr"/>
           <a:lstStyle/>
           <a:p>
             <a:pPr algn="ctr" indent="0" marL="0">
               <a:buNone/>
             </a:pPr>
             <a:r>
-              <a:rPr lang="en-US" sz="3600" b="1" dirty="0">
-                <a:solidFill>
-                  <a:srgbClr val="990011"/>
+              <a:rPr lang="en-US" sz="1600" i="1" dirty="0">
+                <a:solidFill>
+                  <a:srgbClr val="555555"/>
                 </a:solidFill>
                 <a:latin typeface="Times New Roman" pitchFamily="34" charset="0"/>
                 <a:ea typeface="Times New Roman" pitchFamily="34" charset="-122"/>
                 <a:cs typeface="Times New Roman" pitchFamily="34" charset="-120"/>
               </a:rPr>
-              <a:t>1. Importance of Coasts (Resources)</a:t>
-            </a:r>
-            <a:endParaRPr lang="en-US" sz="3600" dirty="0"/>
-          </a:p>
-        </p:txBody>
-      </p:sp>
-      <p:sp>
-        <p:nvSpPr>
-          <p:cNvPr id="5" name="Text 2"/>
-          <p:cNvSpPr/>
-          <p:nvPr/>
-        </p:nvSpPr>
-        <p:spPr>
-          <a:xfrm>
-            <a:off x="5349240" y="1783080"/>
-            <a:ext cx="6522415" cy="4663440"/>
-          </a:xfrm>
-          <a:prstGeom prst="rect">
-            <a:avLst/>
-          </a:prstGeom>
-          <a:noFill/>
-          <a:ln/>
-        </p:spPr>
-        <p:txBody>
-          <a:bodyPr wrap="square" lIns="0" tIns="0" rIns="0" bIns="0" rtlCol="0" anchor="t"/>
-          <a:lstStyle/>
-          <a:p>
-            <a:pPr algn="l" indent="0" marL="0">
-              <a:spcAft>
-                <a:spcPts val="800"/>
-              </a:spcAft>
-              <a:buNone/>
-            </a:pPr>
-            <a:r>
-              <a:rPr lang="en-US" sz="4000" b="1" dirty="0">
-                <a:solidFill>
-                  <a:srgbClr val="111111"/>
-                </a:solidFill>
-                <a:latin typeface="Times New Roman" pitchFamily="34" charset="0"/>
-                <a:ea typeface="Times New Roman" pitchFamily="34" charset="-122"/>
-                <a:cs typeface="Times New Roman" pitchFamily="34" charset="-120"/>
-              </a:rPr>
-              <a:t>Oil and gas: </a:t>
-            </a:r>
-            <a:pPr algn="l" indent="0" marL="0">
-              <a:spcAft>
-                <a:spcPts val="800"/>
-              </a:spcAft>
-              <a:buNone/>
-            </a:pPr>
-            <a:r>
-              <a:rPr lang="en-US" sz="4000" dirty="0">
-                <a:solidFill>
-                  <a:srgbClr val="111111"/>
-                </a:solidFill>
-                <a:latin typeface="Times New Roman" pitchFamily="34" charset="0"/>
-                <a:ea typeface="Times New Roman" pitchFamily="34" charset="-122"/>
-                <a:cs typeface="Times New Roman" pitchFamily="34" charset="-120"/>
-              </a:rPr>
-              <a:t>Oil and gas are extracted under the sea near Limbe and Kribi.</a:t>
-            </a:r>
-            <a:endParaRPr lang="en-US" sz="4000" dirty="0"/>
-          </a:p>
-          <a:p>
-            <a:pPr algn="l" indent="0" marL="0">
-              <a:spcAft>
-                <a:spcPts val="800"/>
-              </a:spcAft>
-              <a:buNone/>
-            </a:pPr>
-            <a:r>
-              <a:rPr lang="en-US" sz="4000" b="1" dirty="0">
-                <a:solidFill>
-                  <a:srgbClr val="111111"/>
-                </a:solidFill>
-                <a:latin typeface="Times New Roman" pitchFamily="34" charset="0"/>
-                <a:ea typeface="Times New Roman" pitchFamily="34" charset="-122"/>
-                <a:cs typeface="Times New Roman" pitchFamily="34" charset="-120"/>
-              </a:rPr>
-              <a:t>Industry and settlement: </a:t>
-            </a:r>
-            <a:pPr algn="l" indent="0" marL="0">
-              <a:spcAft>
-                <a:spcPts val="800"/>
-              </a:spcAft>
-              <a:buNone/>
-            </a:pPr>
-            <a:r>
-              <a:rPr lang="en-US" sz="4000" dirty="0">
-                <a:solidFill>
-                  <a:srgbClr val="111111"/>
-                </a:solidFill>
-                <a:latin typeface="Times New Roman" pitchFamily="34" charset="0"/>
-                <a:ea typeface="Times New Roman" pitchFamily="34" charset="-122"/>
-                <a:cs typeface="Times New Roman" pitchFamily="34" charset="-120"/>
-              </a:rPr>
-              <a:t>Flat coastal land attracts towns, factories and plantations.</a:t>
-            </a:r>
-            <a:endParaRPr lang="en-US" sz="4000" dirty="0"/>
+              <a:t>Illustration: the coast at Limbe</a:t>
+            </a:r>
+            <a:endParaRPr lang="en-US" sz="1600" dirty="0"/>
           </a:p>
         </p:txBody>
       </p:sp>
@@ -13761,129 +13796,9 @@
           </a:p>
         </p:txBody>
       </p:sp>
-      <p:sp>
-        <p:nvSpPr>
-          <p:cNvPr id="3" name="Text 1"/>
-          <p:cNvSpPr/>
-          <p:nvPr/>
-        </p:nvSpPr>
-        <p:spPr>
-          <a:xfrm>
-            <a:off x="365760" y="1005840"/>
-            <a:ext cx="11460175" cy="731520"/>
-          </a:xfrm>
-          <a:prstGeom prst="rect">
-            <a:avLst/>
-          </a:prstGeom>
-          <a:noFill/>
-          <a:ln/>
-        </p:spPr>
-        <p:txBody>
-          <a:bodyPr wrap="square" lIns="0" tIns="0" rIns="0" bIns="0" rtlCol="0" anchor="ctr">
-            <a:normAutofit/>
-          </a:bodyPr>
-          <a:lstStyle/>
-          <a:p>
-            <a:pPr algn="ctr" indent="0" marL="0">
-              <a:buNone/>
-            </a:pPr>
-            <a:r>
-              <a:rPr lang="en-US" sz="3600" b="1" dirty="0">
-                <a:solidFill>
-                  <a:srgbClr val="990011"/>
-                </a:solidFill>
-                <a:latin typeface="Times New Roman" pitchFamily="34" charset="0"/>
-                <a:ea typeface="Times New Roman" pitchFamily="34" charset="-122"/>
-                <a:cs typeface="Times New Roman" pitchFamily="34" charset="-120"/>
-              </a:rPr>
-              <a:t>2. Coastal Hazards</a:t>
-            </a:r>
-            <a:endParaRPr lang="en-US" sz="3600" dirty="0"/>
-          </a:p>
-        </p:txBody>
-      </p:sp>
-      <p:sp>
-        <p:nvSpPr>
-          <p:cNvPr id="4" name="Text 2"/>
-          <p:cNvSpPr/>
-          <p:nvPr/>
-        </p:nvSpPr>
-        <p:spPr>
-          <a:xfrm>
-            <a:off x="365760" y="1783080"/>
-            <a:ext cx="4846320" cy="4617720"/>
-          </a:xfrm>
-          <a:prstGeom prst="rect">
-            <a:avLst/>
-          </a:prstGeom>
-          <a:noFill/>
-          <a:ln/>
-        </p:spPr>
-        <p:txBody>
-          <a:bodyPr wrap="square" lIns="0" tIns="0" rIns="0" bIns="0" rtlCol="0" anchor="t"/>
-          <a:lstStyle/>
-          <a:p>
-            <a:pPr algn="l" indent="0" marL="0">
-              <a:spcAft>
-                <a:spcPts val="800"/>
-              </a:spcAft>
-              <a:buNone/>
-            </a:pPr>
-            <a:r>
-              <a:rPr lang="en-US" sz="3600" i="1" dirty="0">
-                <a:solidFill>
-                  <a:srgbClr val="111111"/>
-                </a:solidFill>
-                <a:latin typeface="Times New Roman" pitchFamily="34" charset="0"/>
-                <a:ea typeface="Times New Roman" pitchFamily="34" charset="-122"/>
-                <a:cs typeface="Times New Roman" pitchFamily="34" charset="-120"/>
-              </a:rPr>
-              <a:t>People on the coast face the following hazards:</a:t>
-            </a:r>
-            <a:endParaRPr lang="en-US" sz="3600" dirty="0"/>
-          </a:p>
-          <a:p>
-            <a:pPr algn="l" indent="0" marL="0">
-              <a:spcAft>
-                <a:spcPts val="800"/>
-              </a:spcAft>
-              <a:buNone/>
-            </a:pPr>
-            <a:r>
-              <a:rPr lang="en-US" sz="3600" b="1" dirty="0">
-                <a:solidFill>
-                  <a:srgbClr val="111111"/>
-                </a:solidFill>
-                <a:latin typeface="Times New Roman" pitchFamily="34" charset="0"/>
-                <a:ea typeface="Times New Roman" pitchFamily="34" charset="-122"/>
-                <a:cs typeface="Times New Roman" pitchFamily="34" charset="-120"/>
-              </a:rPr>
-              <a:t>Coastal erosion: </a:t>
-            </a:r>
-            <a:pPr algn="l" indent="0" marL="0">
-              <a:spcAft>
-                <a:spcPts val="800"/>
-              </a:spcAft>
-              <a:buNone/>
-            </a:pPr>
-            <a:r>
-              <a:rPr lang="en-US" sz="3600" dirty="0">
-                <a:solidFill>
-                  <a:srgbClr val="111111"/>
-                </a:solidFill>
-                <a:latin typeface="Times New Roman" pitchFamily="34" charset="0"/>
-                <a:ea typeface="Times New Roman" pitchFamily="34" charset="-122"/>
-                <a:cs typeface="Times New Roman" pitchFamily="34" charset="-120"/>
-              </a:rPr>
-              <a:t>Destructive waves wear away beaches and destroy roads and houses.</a:t>
-            </a:r>
-            <a:endParaRPr lang="en-US" sz="3600" dirty="0"/>
-          </a:p>
-        </p:txBody>
-      </p:sp>
       <p:pic>
         <p:nvPicPr>
-          <p:cNvPr id="5" name="Image 0" descr="/home/claude/f4/img/v2/f4_bigwaves.jpg">    </p:cNvPr>
+          <p:cNvPr id="3" name="Image 0" descr="/home/claude/f4/img/minesec_sheet.png">    </p:cNvPr>
           <p:cNvPicPr>
             <a:picLocks noChangeAspect="1"/>
           </p:cNvPicPr>
@@ -13897,8 +13812,8 @@
         </p:blipFill>
         <p:spPr>
           <a:xfrm>
-            <a:off x="5349240" y="2071212"/>
-            <a:ext cx="6659575" cy="3693983"/>
+            <a:off x="0" y="658368"/>
+            <a:ext cx="5120640" cy="5833872"/>
           </a:xfrm>
           <a:prstGeom prst="rect">
             <a:avLst/>
@@ -13907,14 +13822,14 @@
       </p:pic>
       <p:sp>
         <p:nvSpPr>
-          <p:cNvPr id="6" name="Text 3"/>
+          <p:cNvPr id="4" name="Text 1"/>
           <p:cNvSpPr/>
           <p:nvPr/>
         </p:nvSpPr>
         <p:spPr>
           <a:xfrm>
-            <a:off x="5349240" y="6089904"/>
-            <a:ext cx="6659575" cy="347472"/>
+            <a:off x="5349240" y="1005840"/>
+            <a:ext cx="6522415" cy="731520"/>
           </a:xfrm>
           <a:prstGeom prst="rect">
             <a:avLst/>
@@ -13923,24 +13838,122 @@
           <a:ln/>
         </p:spPr>
         <p:txBody>
-          <a:bodyPr wrap="square" lIns="0" tIns="0" rIns="0" bIns="0" rtlCol="0" anchor="ctr"/>
+          <a:bodyPr wrap="square" lIns="0" tIns="0" rIns="0" bIns="0" rtlCol="0" anchor="ctr">
+            <a:normAutofit/>
+          </a:bodyPr>
           <a:lstStyle/>
           <a:p>
             <a:pPr algn="ctr" indent="0" marL="0">
               <a:buNone/>
             </a:pPr>
             <a:r>
-              <a:rPr lang="en-US" sz="1600" i="1" dirty="0">
-                <a:solidFill>
-                  <a:srgbClr val="555555"/>
+              <a:rPr lang="en-US" sz="3600" b="1" dirty="0">
+                <a:solidFill>
+                  <a:srgbClr val="990011"/>
                 </a:solidFill>
                 <a:latin typeface="Times New Roman" pitchFamily="34" charset="0"/>
                 <a:ea typeface="Times New Roman" pitchFamily="34" charset="-122"/>
                 <a:cs typeface="Times New Roman" pitchFamily="34" charset="-120"/>
               </a:rPr>
-              <a:t>Illustration: high waves</a:t>
-            </a:r>
-            <a:endParaRPr lang="en-US" sz="1600" dirty="0"/>
+              <a:t>1. Importance of Coasts (Resources)</a:t>
+            </a:r>
+            <a:endParaRPr lang="en-US" sz="3600" dirty="0"/>
+          </a:p>
+        </p:txBody>
+      </p:sp>
+      <p:sp>
+        <p:nvSpPr>
+          <p:cNvPr id="5" name="Text 2"/>
+          <p:cNvSpPr/>
+          <p:nvPr/>
+        </p:nvSpPr>
+        <p:spPr>
+          <a:xfrm>
+            <a:off x="5349240" y="1783080"/>
+            <a:ext cx="6522415" cy="4663440"/>
+          </a:xfrm>
+          <a:prstGeom prst="rect">
+            <a:avLst/>
+          </a:prstGeom>
+          <a:noFill/>
+          <a:ln/>
+        </p:spPr>
+        <p:txBody>
+          <a:bodyPr wrap="square" lIns="0" tIns="0" rIns="0" bIns="0" rtlCol="0" anchor="t"/>
+          <a:lstStyle/>
+          <a:p>
+            <a:pPr algn="l" indent="0" marL="0">
+              <a:spcAft>
+                <a:spcPts val="800"/>
+              </a:spcAft>
+              <a:buNone/>
+            </a:pPr>
+            <a:r>
+              <a:rPr lang="en-US" sz="4000" b="1" dirty="0">
+                <a:solidFill>
+                  <a:srgbClr val="111111"/>
+                </a:solidFill>
+                <a:latin typeface="Times New Roman" pitchFamily="34" charset="0"/>
+                <a:ea typeface="Times New Roman" pitchFamily="34" charset="-122"/>
+                <a:cs typeface="Times New Roman" pitchFamily="34" charset="-120"/>
+              </a:rPr>
+              <a:t>Oil and gas: </a:t>
+            </a:r>
+            <a:pPr algn="l" indent="0" marL="0">
+              <a:spcAft>
+                <a:spcPts val="800"/>
+              </a:spcAft>
+              <a:buNone/>
+            </a:pPr>
+            <a:r>
+              <a:rPr lang="en-US" sz="4000" dirty="0">
+                <a:solidFill>
+                  <a:srgbClr val="111111"/>
+                </a:solidFill>
+                <a:latin typeface="Times New Roman" pitchFamily="34" charset="0"/>
+                <a:ea typeface="Times New Roman" pitchFamily="34" charset="-122"/>
+                <a:cs typeface="Times New Roman" pitchFamily="34" charset="-120"/>
+              </a:rPr>
+              <a:t>Oil and gas are extracted under the sea near Limbe and Kribi.</a:t>
+            </a:r>
+            <a:endParaRPr lang="en-US" sz="4000" dirty="0"/>
+          </a:p>
+          <a:p>
+            <a:pPr algn="l" indent="0" marL="0">
+              <a:spcAft>
+                <a:spcPts val="800"/>
+              </a:spcAft>
+              <a:buNone/>
+            </a:pPr>
+            <a:r>
+              <a:rPr lang="en-US" sz="4000" b="1" dirty="0">
+                <a:solidFill>
+                  <a:srgbClr val="111111"/>
+                </a:solidFill>
+                <a:latin typeface="Times New Roman" pitchFamily="34" charset="0"/>
+                <a:ea typeface="Times New Roman" pitchFamily="34" charset="-122"/>
+                <a:cs typeface="Times New Roman" pitchFamily="34" charset="-120"/>
+              </a:rPr>
+              <a:t>Industry and settlement: </a:t>
+            </a:r>
+            <a:pPr algn="l" indent="0" marL="0">
+              <a:spcAft>
+                <a:spcPts val="800"/>
+              </a:spcAft>
+              <a:buNone/>
+            </a:pPr>
+            <a:r>
+              <a:rPr lang="en-US" sz="4000" dirty="0">
+                <a:solidFill>
+                  <a:srgbClr val="111111"/>
+                </a:solidFill>
+                <a:latin typeface="Times New Roman" pitchFamily="34" charset="0"/>
+                <a:ea typeface="Times New Roman" pitchFamily="34" charset="-122"/>
+                <a:cs typeface="Times New Roman" pitchFamily="34" charset="-120"/>
+              </a:rPr>
+              <a:t>Flat coastal land attracts towns, factories and plantations.</a:t>
+            </a:r>
+            <a:endParaRPr lang="en-US" sz="4000" dirty="0"/>
           </a:p>
         </p:txBody>
       </p:sp>
@@ -14056,9 +14069,129 @@
           </a:p>
         </p:txBody>
       </p:sp>
+      <p:sp>
+        <p:nvSpPr>
+          <p:cNvPr id="3" name="Text 1"/>
+          <p:cNvSpPr/>
+          <p:nvPr/>
+        </p:nvSpPr>
+        <p:spPr>
+          <a:xfrm>
+            <a:off x="365760" y="1005840"/>
+            <a:ext cx="11460175" cy="731520"/>
+          </a:xfrm>
+          <a:prstGeom prst="rect">
+            <a:avLst/>
+          </a:prstGeom>
+          <a:noFill/>
+          <a:ln/>
+        </p:spPr>
+        <p:txBody>
+          <a:bodyPr wrap="square" lIns="0" tIns="0" rIns="0" bIns="0" rtlCol="0" anchor="ctr">
+            <a:normAutofit/>
+          </a:bodyPr>
+          <a:lstStyle/>
+          <a:p>
+            <a:pPr algn="ctr" indent="0" marL="0">
+              <a:buNone/>
+            </a:pPr>
+            <a:r>
+              <a:rPr lang="en-US" sz="3600" b="1" dirty="0">
+                <a:solidFill>
+                  <a:srgbClr val="990011"/>
+                </a:solidFill>
+                <a:latin typeface="Times New Roman" pitchFamily="34" charset="0"/>
+                <a:ea typeface="Times New Roman" pitchFamily="34" charset="-122"/>
+                <a:cs typeface="Times New Roman" pitchFamily="34" charset="-120"/>
+              </a:rPr>
+              <a:t>2. Coastal Hazards</a:t>
+            </a:r>
+            <a:endParaRPr lang="en-US" sz="3600" dirty="0"/>
+          </a:p>
+        </p:txBody>
+      </p:sp>
+      <p:sp>
+        <p:nvSpPr>
+          <p:cNvPr id="4" name="Text 2"/>
+          <p:cNvSpPr/>
+          <p:nvPr/>
+        </p:nvSpPr>
+        <p:spPr>
+          <a:xfrm>
+            <a:off x="365760" y="1783080"/>
+            <a:ext cx="4846320" cy="4617720"/>
+          </a:xfrm>
+          <a:prstGeom prst="rect">
+            <a:avLst/>
+          </a:prstGeom>
+          <a:noFill/>
+          <a:ln/>
+        </p:spPr>
+        <p:txBody>
+          <a:bodyPr wrap="square" lIns="0" tIns="0" rIns="0" bIns="0" rtlCol="0" anchor="t"/>
+          <a:lstStyle/>
+          <a:p>
+            <a:pPr algn="l" indent="0" marL="0">
+              <a:spcAft>
+                <a:spcPts val="800"/>
+              </a:spcAft>
+              <a:buNone/>
+            </a:pPr>
+            <a:r>
+              <a:rPr lang="en-US" sz="3600" i="1" dirty="0">
+                <a:solidFill>
+                  <a:srgbClr val="111111"/>
+                </a:solidFill>
+                <a:latin typeface="Times New Roman" pitchFamily="34" charset="0"/>
+                <a:ea typeface="Times New Roman" pitchFamily="34" charset="-122"/>
+                <a:cs typeface="Times New Roman" pitchFamily="34" charset="-120"/>
+              </a:rPr>
+              <a:t>People on the coast face the following hazards:</a:t>
+            </a:r>
+            <a:endParaRPr lang="en-US" sz="3600" dirty="0"/>
+          </a:p>
+          <a:p>
+            <a:pPr algn="l" indent="0" marL="0">
+              <a:spcAft>
+                <a:spcPts val="800"/>
+              </a:spcAft>
+              <a:buNone/>
+            </a:pPr>
+            <a:r>
+              <a:rPr lang="en-US" sz="3600" b="1" dirty="0">
+                <a:solidFill>
+                  <a:srgbClr val="111111"/>
+                </a:solidFill>
+                <a:latin typeface="Times New Roman" pitchFamily="34" charset="0"/>
+                <a:ea typeface="Times New Roman" pitchFamily="34" charset="-122"/>
+                <a:cs typeface="Times New Roman" pitchFamily="34" charset="-120"/>
+              </a:rPr>
+              <a:t>Coastal erosion: </a:t>
+            </a:r>
+            <a:pPr algn="l" indent="0" marL="0">
+              <a:spcAft>
+                <a:spcPts val="800"/>
+              </a:spcAft>
+              <a:buNone/>
+            </a:pPr>
+            <a:r>
+              <a:rPr lang="en-US" sz="3600" dirty="0">
+                <a:solidFill>
+                  <a:srgbClr val="111111"/>
+                </a:solidFill>
+                <a:latin typeface="Times New Roman" pitchFamily="34" charset="0"/>
+                <a:ea typeface="Times New Roman" pitchFamily="34" charset="-122"/>
+                <a:cs typeface="Times New Roman" pitchFamily="34" charset="-120"/>
+              </a:rPr>
+              <a:t>Destructive waves wear away beaches and destroy roads and houses.</a:t>
+            </a:r>
+            <a:endParaRPr lang="en-US" sz="3600" dirty="0"/>
+          </a:p>
+        </p:txBody>
+      </p:sp>
       <p:pic>
         <p:nvPicPr>
-          <p:cNvPr id="3" name="Image 0" descr="/home/claude/f4/img/minesec_sheet.png">    </p:cNvPr>
+          <p:cNvPr id="5" name="Image 0" descr="/home/claude/f4/img/v2/f4_bigwaves.jpg">    </p:cNvPr>
           <p:cNvPicPr>
             <a:picLocks noChangeAspect="1"/>
           </p:cNvPicPr>
@@ -14072,8 +14205,8 @@
         </p:blipFill>
         <p:spPr>
           <a:xfrm>
-            <a:off x="0" y="658368"/>
-            <a:ext cx="1463040" cy="5833872"/>
+            <a:off x="5349240" y="2071212"/>
+            <a:ext cx="6659575" cy="3693983"/>
           </a:xfrm>
           <a:prstGeom prst="rect">
             <a:avLst/>
@@ -14082,14 +14215,14 @@
       </p:pic>
       <p:sp>
         <p:nvSpPr>
-          <p:cNvPr id="4" name="Text 1"/>
+          <p:cNvPr id="6" name="Text 3"/>
           <p:cNvSpPr/>
           <p:nvPr/>
         </p:nvSpPr>
         <p:spPr>
           <a:xfrm>
-            <a:off x="1691640" y="1005840"/>
-            <a:ext cx="10180015" cy="731520"/>
+            <a:off x="5349240" y="6089904"/>
+            <a:ext cx="6659575" cy="347472"/>
           </a:xfrm>
           <a:prstGeom prst="rect">
             <a:avLst/>
@@ -14098,159 +14231,24 @@
           <a:ln/>
         </p:spPr>
         <p:txBody>
-          <a:bodyPr wrap="square" lIns="0" tIns="0" rIns="0" bIns="0" rtlCol="0" anchor="ctr">
-            <a:normAutofit/>
-          </a:bodyPr>
+          <a:bodyPr wrap="square" lIns="0" tIns="0" rIns="0" bIns="0" rtlCol="0" anchor="ctr"/>
           <a:lstStyle/>
           <a:p>
             <a:pPr algn="ctr" indent="0" marL="0">
               <a:buNone/>
             </a:pPr>
             <a:r>
-              <a:rPr lang="en-US" sz="3600" b="1" dirty="0">
-                <a:solidFill>
-                  <a:srgbClr val="990011"/>
+              <a:rPr lang="en-US" sz="1600" i="1" dirty="0">
+                <a:solidFill>
+                  <a:srgbClr val="555555"/>
                 </a:solidFill>
                 <a:latin typeface="Times New Roman" pitchFamily="34" charset="0"/>
                 <a:ea typeface="Times New Roman" pitchFamily="34" charset="-122"/>
                 <a:cs typeface="Times New Roman" pitchFamily="34" charset="-120"/>
               </a:rPr>
-              <a:t>2. Coastal Hazards</a:t>
-            </a:r>
-            <a:endParaRPr lang="en-US" sz="3600" dirty="0"/>
-          </a:p>
-        </p:txBody>
-      </p:sp>
-      <p:sp>
-        <p:nvSpPr>
-          <p:cNvPr id="5" name="Text 2"/>
-          <p:cNvSpPr/>
-          <p:nvPr/>
-        </p:nvSpPr>
-        <p:spPr>
-          <a:xfrm>
-            <a:off x="1691640" y="1783080"/>
-            <a:ext cx="10180015" cy="4663440"/>
-          </a:xfrm>
-          <a:prstGeom prst="rect">
-            <a:avLst/>
-          </a:prstGeom>
-          <a:noFill/>
-          <a:ln/>
-        </p:spPr>
-        <p:txBody>
-          <a:bodyPr wrap="square" lIns="0" tIns="0" rIns="0" bIns="0" rtlCol="0" anchor="t"/>
-          <a:lstStyle/>
-          <a:p>
-            <a:pPr algn="l" indent="0" marL="0">
-              <a:spcAft>
-                <a:spcPts val="800"/>
-              </a:spcAft>
-              <a:buNone/>
-            </a:pPr>
-            <a:r>
-              <a:rPr lang="en-US" sz="4000" b="1" dirty="0">
-                <a:solidFill>
-                  <a:srgbClr val="111111"/>
-                </a:solidFill>
-                <a:latin typeface="Times New Roman" pitchFamily="34" charset="0"/>
-                <a:ea typeface="Times New Roman" pitchFamily="34" charset="-122"/>
-                <a:cs typeface="Times New Roman" pitchFamily="34" charset="-120"/>
-              </a:rPr>
-              <a:t>Floods: </a:t>
-            </a:r>
-            <a:pPr algn="l" indent="0" marL="0">
-              <a:spcAft>
-                <a:spcPts val="800"/>
-              </a:spcAft>
-              <a:buNone/>
-            </a:pPr>
-            <a:r>
-              <a:rPr lang="en-US" sz="4000" dirty="0">
-                <a:solidFill>
-                  <a:srgbClr val="111111"/>
-                </a:solidFill>
-                <a:latin typeface="Times New Roman" pitchFamily="34" charset="0"/>
-                <a:ea typeface="Times New Roman" pitchFamily="34" charset="-122"/>
-                <a:cs typeface="Times New Roman" pitchFamily="34" charset="-120"/>
-              </a:rPr>
-              <a:t>The sea covers low-lying land during storms and high tides.</a:t>
-            </a:r>
-            <a:endParaRPr lang="en-US" sz="4000" dirty="0"/>
-          </a:p>
-          <a:p>
-            <a:pPr algn="l" indent="0" marL="0">
-              <a:spcAft>
-                <a:spcPts val="800"/>
-              </a:spcAft>
-              <a:buNone/>
-            </a:pPr>
-            <a:r>
-              <a:rPr lang="en-US" sz="4000" b="1" dirty="0">
-                <a:solidFill>
-                  <a:srgbClr val="111111"/>
-                </a:solidFill>
-                <a:latin typeface="Times New Roman" pitchFamily="34" charset="0"/>
-                <a:ea typeface="Times New Roman" pitchFamily="34" charset="-122"/>
-                <a:cs typeface="Times New Roman" pitchFamily="34" charset="-120"/>
-              </a:rPr>
-              <a:t>Salt-water incursion: </a:t>
-            </a:r>
-            <a:pPr algn="l" indent="0" marL="0">
-              <a:spcAft>
-                <a:spcPts val="800"/>
-              </a:spcAft>
-              <a:buNone/>
-            </a:pPr>
-            <a:r>
-              <a:rPr lang="en-US" sz="4000" dirty="0">
-                <a:solidFill>
-                  <a:srgbClr val="111111"/>
-                </a:solidFill>
-                <a:latin typeface="Times New Roman" pitchFamily="34" charset="0"/>
-                <a:ea typeface="Times New Roman" pitchFamily="34" charset="-122"/>
-                <a:cs typeface="Times New Roman" pitchFamily="34" charset="-120"/>
-              </a:rPr>
-              <a:t>Sea water enters wells and rivers and makes the water salty.</a:t>
-            </a:r>
-            <a:endParaRPr lang="en-US" sz="4000" dirty="0"/>
-          </a:p>
-          <a:p>
-            <a:pPr algn="l" indent="0" marL="0">
-              <a:spcAft>
-                <a:spcPts val="800"/>
-              </a:spcAft>
-              <a:buNone/>
-            </a:pPr>
-            <a:r>
-              <a:rPr lang="en-US" sz="4000" b="1" dirty="0">
-                <a:solidFill>
-                  <a:srgbClr val="111111"/>
-                </a:solidFill>
-                <a:latin typeface="Times New Roman" pitchFamily="34" charset="0"/>
-                <a:ea typeface="Times New Roman" pitchFamily="34" charset="-122"/>
-                <a:cs typeface="Times New Roman" pitchFamily="34" charset="-120"/>
-              </a:rPr>
-              <a:t>Sea-level rise: </a:t>
-            </a:r>
-            <a:pPr algn="l" indent="0" marL="0">
-              <a:spcAft>
-                <a:spcPts val="800"/>
-              </a:spcAft>
-              <a:buNone/>
-            </a:pPr>
-            <a:r>
-              <a:rPr lang="en-US" sz="4000" dirty="0">
-                <a:solidFill>
-                  <a:srgbClr val="111111"/>
-                </a:solidFill>
-                <a:latin typeface="Times New Roman" pitchFamily="34" charset="0"/>
-                <a:ea typeface="Times New Roman" pitchFamily="34" charset="-122"/>
-                <a:cs typeface="Times New Roman" pitchFamily="34" charset="-120"/>
-              </a:rPr>
-              <a:t>Rising sea levels threaten low coastal towns such as Douala.</a:t>
-            </a:r>
-            <a:endParaRPr lang="en-US" sz="4000" dirty="0"/>
+              <a:t>Illustration: high waves</a:t>
+            </a:r>
+            <a:endParaRPr lang="en-US" sz="1600" dirty="0"/>
           </a:p>
         </p:txBody>
       </p:sp>
@@ -14383,7 +14381,7 @@
         <p:spPr>
           <a:xfrm>
             <a:off x="0" y="658368"/>
-            <a:ext cx="5120640" cy="5833872"/>
+            <a:ext cx="1463040" cy="5833872"/>
           </a:xfrm>
           <a:prstGeom prst="rect">
             <a:avLst/>
@@ -14398,8 +14396,8 @@
         </p:nvSpPr>
         <p:spPr>
           <a:xfrm>
-            <a:off x="5349240" y="1005840"/>
-            <a:ext cx="6522415" cy="731520"/>
+            <a:off x="1691640" y="1005840"/>
+            <a:ext cx="10180015" cy="731520"/>
           </a:xfrm>
           <a:prstGeom prst="rect">
             <a:avLst/>
@@ -14425,7 +14423,7 @@
                 <a:ea typeface="Times New Roman" pitchFamily="34" charset="-122"/>
                 <a:cs typeface="Times New Roman" pitchFamily="34" charset="-120"/>
               </a:rPr>
-              <a:t>2. Coastal Hazards (continued)</a:t>
+              <a:t>2. Coastal Hazards</a:t>
             </a:r>
             <a:endParaRPr lang="en-US" sz="3600" dirty="0"/>
           </a:p>
@@ -14439,8 +14437,8 @@
         </p:nvSpPr>
         <p:spPr>
           <a:xfrm>
-            <a:off x="5349240" y="1783080"/>
-            <a:ext cx="6522415" cy="4663440"/>
+            <a:off x="1691640" y="1783080"/>
+            <a:ext cx="10180015" cy="4663440"/>
           </a:xfrm>
           <a:prstGeom prst="rect">
             <a:avLst/>
@@ -14467,7 +14465,7 @@
                 <a:ea typeface="Times New Roman" pitchFamily="34" charset="-122"/>
                 <a:cs typeface="Times New Roman" pitchFamily="34" charset="-120"/>
               </a:rPr>
-              <a:t>Pollution: </a:t>
+              <a:t>Floods: </a:t>
             </a:r>
             <a:pPr algn="l" indent="0" marL="0">
               <a:spcAft>
@@ -14484,7 +14482,81 @@
                 <a:ea typeface="Times New Roman" pitchFamily="34" charset="-122"/>
                 <a:cs typeface="Times New Roman" pitchFamily="34" charset="-120"/>
               </a:rPr>
-              <a:t>Oil spills and rubbish pollute beaches and kill fish.</a:t>
+              <a:t>The sea covers low-lying land during storms and high tides.</a:t>
+            </a:r>
+            <a:endParaRPr lang="en-US" sz="4000" dirty="0"/>
+          </a:p>
+          <a:p>
+            <a:pPr algn="l" indent="0" marL="0">
+              <a:spcAft>
+                <a:spcPts val="800"/>
+              </a:spcAft>
+              <a:buNone/>
+            </a:pPr>
+            <a:r>
+              <a:rPr lang="en-US" sz="4000" b="1" dirty="0">
+                <a:solidFill>
+                  <a:srgbClr val="111111"/>
+                </a:solidFill>
+                <a:latin typeface="Times New Roman" pitchFamily="34" charset="0"/>
+                <a:ea typeface="Times New Roman" pitchFamily="34" charset="-122"/>
+                <a:cs typeface="Times New Roman" pitchFamily="34" charset="-120"/>
+              </a:rPr>
+              <a:t>Salt-water incursion: </a:t>
+            </a:r>
+            <a:pPr algn="l" indent="0" marL="0">
+              <a:spcAft>
+                <a:spcPts val="800"/>
+              </a:spcAft>
+              <a:buNone/>
+            </a:pPr>
+            <a:r>
+              <a:rPr lang="en-US" sz="4000" dirty="0">
+                <a:solidFill>
+                  <a:srgbClr val="111111"/>
+                </a:solidFill>
+                <a:latin typeface="Times New Roman" pitchFamily="34" charset="0"/>
+                <a:ea typeface="Times New Roman" pitchFamily="34" charset="-122"/>
+                <a:cs typeface="Times New Roman" pitchFamily="34" charset="-120"/>
+              </a:rPr>
+              <a:t>Sea water enters wells and rivers and makes the water salty.</a:t>
+            </a:r>
+            <a:endParaRPr lang="en-US" sz="4000" dirty="0"/>
+          </a:p>
+          <a:p>
+            <a:pPr algn="l" indent="0" marL="0">
+              <a:spcAft>
+                <a:spcPts val="800"/>
+              </a:spcAft>
+              <a:buNone/>
+            </a:pPr>
+            <a:r>
+              <a:rPr lang="en-US" sz="4000" b="1" dirty="0">
+                <a:solidFill>
+                  <a:srgbClr val="111111"/>
+                </a:solidFill>
+                <a:latin typeface="Times New Roman" pitchFamily="34" charset="0"/>
+                <a:ea typeface="Times New Roman" pitchFamily="34" charset="-122"/>
+                <a:cs typeface="Times New Roman" pitchFamily="34" charset="-120"/>
+              </a:rPr>
+              <a:t>Sea-level rise: </a:t>
+            </a:r>
+            <a:pPr algn="l" indent="0" marL="0">
+              <a:spcAft>
+                <a:spcPts val="800"/>
+              </a:spcAft>
+              <a:buNone/>
+            </a:pPr>
+            <a:r>
+              <a:rPr lang="en-US" sz="4000" dirty="0">
+                <a:solidFill>
+                  <a:srgbClr val="111111"/>
+                </a:solidFill>
+                <a:latin typeface="Times New Roman" pitchFamily="34" charset="0"/>
+                <a:ea typeface="Times New Roman" pitchFamily="34" charset="-122"/>
+                <a:cs typeface="Times New Roman" pitchFamily="34" charset="-120"/>
+              </a:rPr>
+              <a:t>Rising sea levels threaten low coastal towns such as Douala.</a:t>
             </a:r>
             <a:endParaRPr lang="en-US" sz="4000" dirty="0"/>
           </a:p>
@@ -14602,129 +14674,9 @@
           </a:p>
         </p:txBody>
       </p:sp>
-      <p:sp>
-        <p:nvSpPr>
-          <p:cNvPr id="3" name="Text 1"/>
-          <p:cNvSpPr/>
-          <p:nvPr/>
-        </p:nvSpPr>
-        <p:spPr>
-          <a:xfrm>
-            <a:off x="365760" y="1005840"/>
-            <a:ext cx="11460175" cy="731520"/>
-          </a:xfrm>
-          <a:prstGeom prst="rect">
-            <a:avLst/>
-          </a:prstGeom>
-          <a:noFill/>
-          <a:ln/>
-        </p:spPr>
-        <p:txBody>
-          <a:bodyPr wrap="square" lIns="0" tIns="0" rIns="0" bIns="0" rtlCol="0" anchor="ctr">
-            <a:normAutofit/>
-          </a:bodyPr>
-          <a:lstStyle/>
-          <a:p>
-            <a:pPr algn="ctr" indent="0" marL="0">
-              <a:buNone/>
-            </a:pPr>
-            <a:r>
-              <a:rPr lang="en-US" sz="3600" b="1" dirty="0">
-                <a:solidFill>
-                  <a:srgbClr val="990011"/>
-                </a:solidFill>
-                <a:latin typeface="Times New Roman" pitchFamily="34" charset="0"/>
-                <a:ea typeface="Times New Roman" pitchFamily="34" charset="-122"/>
-                <a:cs typeface="Times New Roman" pitchFamily="34" charset="-120"/>
-              </a:rPr>
-              <a:t>3. Coastal Management Strategies</a:t>
-            </a:r>
-            <a:endParaRPr lang="en-US" sz="3600" dirty="0"/>
-          </a:p>
-        </p:txBody>
-      </p:sp>
-      <p:sp>
-        <p:nvSpPr>
-          <p:cNvPr id="4" name="Text 2"/>
-          <p:cNvSpPr/>
-          <p:nvPr/>
-        </p:nvSpPr>
-        <p:spPr>
-          <a:xfrm>
-            <a:off x="365760" y="1783080"/>
-            <a:ext cx="4846320" cy="4617720"/>
-          </a:xfrm>
-          <a:prstGeom prst="rect">
-            <a:avLst/>
-          </a:prstGeom>
-          <a:noFill/>
-          <a:ln/>
-        </p:spPr>
-        <p:txBody>
-          <a:bodyPr wrap="square" lIns="0" tIns="0" rIns="0" bIns="0" rtlCol="0" anchor="t"/>
-          <a:lstStyle/>
-          <a:p>
-            <a:pPr algn="l" indent="0" marL="0">
-              <a:spcAft>
-                <a:spcPts val="800"/>
-              </a:spcAft>
-              <a:buNone/>
-            </a:pPr>
-            <a:r>
-              <a:rPr lang="en-US" sz="3600" i="1" dirty="0">
-                <a:solidFill>
-                  <a:srgbClr val="111111"/>
-                </a:solidFill>
-                <a:latin typeface="Times New Roman" pitchFamily="34" charset="0"/>
-                <a:ea typeface="Times New Roman" pitchFamily="34" charset="-122"/>
-                <a:cs typeface="Times New Roman" pitchFamily="34" charset="-120"/>
-              </a:rPr>
-              <a:t>Coasts are protected with the following strategies:</a:t>
-            </a:r>
-            <a:endParaRPr lang="en-US" sz="3600" dirty="0"/>
-          </a:p>
-          <a:p>
-            <a:pPr algn="l" indent="0" marL="0">
-              <a:spcAft>
-                <a:spcPts val="800"/>
-              </a:spcAft>
-              <a:buNone/>
-            </a:pPr>
-            <a:r>
-              <a:rPr lang="en-US" sz="3600" b="1" dirty="0">
-                <a:solidFill>
-                  <a:srgbClr val="111111"/>
-                </a:solidFill>
-                <a:latin typeface="Times New Roman" pitchFamily="34" charset="0"/>
-                <a:ea typeface="Times New Roman" pitchFamily="34" charset="-122"/>
-                <a:cs typeface="Times New Roman" pitchFamily="34" charset="-120"/>
-              </a:rPr>
-              <a:t>Sea walls: </a:t>
-            </a:r>
-            <a:pPr algn="l" indent="0" marL="0">
-              <a:spcAft>
-                <a:spcPts val="800"/>
-              </a:spcAft>
-              <a:buNone/>
-            </a:pPr>
-            <a:r>
-              <a:rPr lang="en-US" sz="3600" dirty="0">
-                <a:solidFill>
-                  <a:srgbClr val="111111"/>
-                </a:solidFill>
-                <a:latin typeface="Times New Roman" pitchFamily="34" charset="0"/>
-                <a:ea typeface="Times New Roman" pitchFamily="34" charset="-122"/>
-                <a:cs typeface="Times New Roman" pitchFamily="34" charset="-120"/>
-              </a:rPr>
-              <a:t>They are strong walls that stop waves from reaching the land.</a:t>
-            </a:r>
-            <a:endParaRPr lang="en-US" sz="3600" dirty="0"/>
-          </a:p>
-        </p:txBody>
-      </p:sp>
       <p:pic>
         <p:nvPicPr>
-          <p:cNvPr id="5" name="Image 0" descr="/home/claude/f4/img/v2/coastal_defence_big.png">    </p:cNvPr>
+          <p:cNvPr id="3" name="Image 0" descr="/home/claude/f4/img/minesec_sheet.png">    </p:cNvPr>
           <p:cNvPicPr>
             <a:picLocks noChangeAspect="1"/>
           </p:cNvPicPr>
@@ -14738,8 +14690,8 @@
         </p:blipFill>
         <p:spPr>
           <a:xfrm>
-            <a:off x="5349240" y="2617506"/>
-            <a:ext cx="6659575" cy="2601397"/>
+            <a:off x="0" y="658368"/>
+            <a:ext cx="5120640" cy="5833872"/>
           </a:xfrm>
           <a:prstGeom prst="rect">
             <a:avLst/>
@@ -14748,14 +14700,14 @@
       </p:pic>
       <p:sp>
         <p:nvSpPr>
-          <p:cNvPr id="6" name="Text 3"/>
+          <p:cNvPr id="4" name="Text 1"/>
           <p:cNvSpPr/>
           <p:nvPr/>
         </p:nvSpPr>
         <p:spPr>
           <a:xfrm>
-            <a:off x="5349240" y="6089904"/>
-            <a:ext cx="6659575" cy="347472"/>
+            <a:off x="5349240" y="1005840"/>
+            <a:ext cx="6522415" cy="731520"/>
           </a:xfrm>
           <a:prstGeom prst="rect">
             <a:avLst/>
@@ -14764,24 +14716,85 @@
           <a:ln/>
         </p:spPr>
         <p:txBody>
-          <a:bodyPr wrap="square" lIns="0" tIns="0" rIns="0" bIns="0" rtlCol="0" anchor="ctr"/>
+          <a:bodyPr wrap="square" lIns="0" tIns="0" rIns="0" bIns="0" rtlCol="0" anchor="ctr">
+            <a:normAutofit/>
+          </a:bodyPr>
           <a:lstStyle/>
           <a:p>
             <a:pPr algn="ctr" indent="0" marL="0">
               <a:buNone/>
             </a:pPr>
             <a:r>
-              <a:rPr lang="en-US" sz="1600" i="1" dirty="0">
-                <a:solidFill>
-                  <a:srgbClr val="555555"/>
+              <a:rPr lang="en-US" sz="3600" b="1" dirty="0">
+                <a:solidFill>
+                  <a:srgbClr val="990011"/>
                 </a:solidFill>
                 <a:latin typeface="Times New Roman" pitchFamily="34" charset="0"/>
                 <a:ea typeface="Times New Roman" pitchFamily="34" charset="-122"/>
                 <a:cs typeface="Times New Roman" pitchFamily="34" charset="-120"/>
               </a:rPr>
-              <a:t>Illustration: a sea wall and groynes</a:t>
-            </a:r>
-            <a:endParaRPr lang="en-US" sz="1600" dirty="0"/>
+              <a:t>2. Coastal Hazards (continued)</a:t>
+            </a:r>
+            <a:endParaRPr lang="en-US" sz="3600" dirty="0"/>
+          </a:p>
+        </p:txBody>
+      </p:sp>
+      <p:sp>
+        <p:nvSpPr>
+          <p:cNvPr id="5" name="Text 2"/>
+          <p:cNvSpPr/>
+          <p:nvPr/>
+        </p:nvSpPr>
+        <p:spPr>
+          <a:xfrm>
+            <a:off x="5349240" y="1783080"/>
+            <a:ext cx="6522415" cy="4663440"/>
+          </a:xfrm>
+          <a:prstGeom prst="rect">
+            <a:avLst/>
+          </a:prstGeom>
+          <a:noFill/>
+          <a:ln/>
+        </p:spPr>
+        <p:txBody>
+          <a:bodyPr wrap="square" lIns="0" tIns="0" rIns="0" bIns="0" rtlCol="0" anchor="t"/>
+          <a:lstStyle/>
+          <a:p>
+            <a:pPr algn="l" indent="0" marL="0">
+              <a:spcAft>
+                <a:spcPts val="800"/>
+              </a:spcAft>
+              <a:buNone/>
+            </a:pPr>
+            <a:r>
+              <a:rPr lang="en-US" sz="4000" b="1" dirty="0">
+                <a:solidFill>
+                  <a:srgbClr val="111111"/>
+                </a:solidFill>
+                <a:latin typeface="Times New Roman" pitchFamily="34" charset="0"/>
+                <a:ea typeface="Times New Roman" pitchFamily="34" charset="-122"/>
+                <a:cs typeface="Times New Roman" pitchFamily="34" charset="-120"/>
+              </a:rPr>
+              <a:t>Pollution: </a:t>
+            </a:r>
+            <a:pPr algn="l" indent="0" marL="0">
+              <a:spcAft>
+                <a:spcPts val="800"/>
+              </a:spcAft>
+              <a:buNone/>
+            </a:pPr>
+            <a:r>
+              <a:rPr lang="en-US" sz="4000" dirty="0">
+                <a:solidFill>
+                  <a:srgbClr val="111111"/>
+                </a:solidFill>
+                <a:latin typeface="Times New Roman" pitchFamily="34" charset="0"/>
+                <a:ea typeface="Times New Roman" pitchFamily="34" charset="-122"/>
+                <a:cs typeface="Times New Roman" pitchFamily="34" charset="-120"/>
+              </a:rPr>
+              <a:t>Oil spills and rubbish pollute beaches and kill fish.</a:t>
+            </a:r>
+            <a:endParaRPr lang="en-US" sz="4000" dirty="0"/>
           </a:p>
         </p:txBody>
       </p:sp>
@@ -14966,7 +14979,7 @@
               <a:buNone/>
             </a:pPr>
             <a:r>
-              <a:rPr lang="en-US" sz="3600" b="1" dirty="0">
+              <a:rPr lang="en-US" sz="3600" i="1" dirty="0">
                 <a:solidFill>
                   <a:srgbClr val="111111"/>
                 </a:solidFill>
@@ -14974,8 +14987,11 @@
                 <a:ea typeface="Times New Roman" pitchFamily="34" charset="-122"/>
                 <a:cs typeface="Times New Roman" pitchFamily="34" charset="-120"/>
               </a:rPr>
-              <a:t>Groynes: </a:t>
-            </a:r>
+              <a:t>Coasts are protected with the following strategies:</a:t>
+            </a:r>
+            <a:endParaRPr lang="en-US" sz="3600" dirty="0"/>
+          </a:p>
+          <a:p>
             <a:pPr algn="l" indent="0" marL="0">
               <a:spcAft>
                 <a:spcPts val="800"/>
@@ -14983,7 +14999,7 @@
               <a:buNone/>
             </a:pPr>
             <a:r>
-              <a:rPr lang="en-US" sz="3600" dirty="0">
+              <a:rPr lang="en-US" sz="3600" b="1" dirty="0">
                 <a:solidFill>
                   <a:srgbClr val="111111"/>
                 </a:solidFill>
@@ -14991,7 +15007,24 @@
                 <a:ea typeface="Times New Roman" pitchFamily="34" charset="-122"/>
                 <a:cs typeface="Times New Roman" pitchFamily="34" charset="-120"/>
               </a:rPr>
-              <a:t>They are low walls built across a beach to trap the sand moved by longshore drift.</a:t>
+              <a:t>Sea walls: </a:t>
+            </a:r>
+            <a:pPr algn="l" indent="0" marL="0">
+              <a:spcAft>
+                <a:spcPts val="800"/>
+              </a:spcAft>
+              <a:buNone/>
+            </a:pPr>
+            <a:r>
+              <a:rPr lang="en-US" sz="3600" dirty="0">
+                <a:solidFill>
+                  <a:srgbClr val="111111"/>
+                </a:solidFill>
+                <a:latin typeface="Times New Roman" pitchFamily="34" charset="0"/>
+                <a:ea typeface="Times New Roman" pitchFamily="34" charset="-122"/>
+                <a:cs typeface="Times New Roman" pitchFamily="34" charset="-120"/>
+              </a:rPr>
+              <a:t>They are strong walls that stop waves from reaching the land.</a:t>
             </a:r>
             <a:endParaRPr lang="en-US" sz="3600" dirty="0"/>
           </a:p>
@@ -14999,7 +15032,7 @@
       </p:sp>
       <p:pic>
         <p:nvPicPr>
-          <p:cNvPr id="5" name="Image 0" descr="/home/claude/f4/img/v2/f4_groynes.jpg">    </p:cNvPr>
+          <p:cNvPr id="5" name="Image 0" descr="/home/claude/f4/img/v2/coastal_defence_big.png">    </p:cNvPr>
           <p:cNvPicPr>
             <a:picLocks noChangeAspect="1"/>
           </p:cNvPicPr>
@@ -15013,8 +15046,8 @@
         </p:blipFill>
         <p:spPr>
           <a:xfrm>
-            <a:off x="5349240" y="2071212"/>
-            <a:ext cx="6659575" cy="3693983"/>
+            <a:off x="5349240" y="2617506"/>
+            <a:ext cx="6659575" cy="2601397"/>
           </a:xfrm>
           <a:prstGeom prst="rect">
             <a:avLst/>
@@ -15054,7 +15087,7 @@
                 <a:ea typeface="Times New Roman" pitchFamily="34" charset="-122"/>
                 <a:cs typeface="Times New Roman" pitchFamily="34" charset="-120"/>
               </a:rPr>
-              <a:t>Illustration: groynes</a:t>
+              <a:t>Illustration: a sea wall and groynes</a:t>
             </a:r>
             <a:endParaRPr lang="en-US" sz="1600" dirty="0"/>
           </a:p>
@@ -15172,9 +15205,109 @@
           </a:p>
         </p:txBody>
       </p:sp>
+      <p:sp>
+        <p:nvSpPr>
+          <p:cNvPr id="3" name="Text 1"/>
+          <p:cNvSpPr/>
+          <p:nvPr/>
+        </p:nvSpPr>
+        <p:spPr>
+          <a:xfrm>
+            <a:off x="365760" y="1005840"/>
+            <a:ext cx="11460175" cy="731520"/>
+          </a:xfrm>
+          <a:prstGeom prst="rect">
+            <a:avLst/>
+          </a:prstGeom>
+          <a:noFill/>
+          <a:ln/>
+        </p:spPr>
+        <p:txBody>
+          <a:bodyPr wrap="square" lIns="0" tIns="0" rIns="0" bIns="0" rtlCol="0" anchor="ctr">
+            <a:normAutofit/>
+          </a:bodyPr>
+          <a:lstStyle/>
+          <a:p>
+            <a:pPr algn="ctr" indent="0" marL="0">
+              <a:buNone/>
+            </a:pPr>
+            <a:r>
+              <a:rPr lang="en-US" sz="3600" b="1" dirty="0">
+                <a:solidFill>
+                  <a:srgbClr val="990011"/>
+                </a:solidFill>
+                <a:latin typeface="Times New Roman" pitchFamily="34" charset="0"/>
+                <a:ea typeface="Times New Roman" pitchFamily="34" charset="-122"/>
+                <a:cs typeface="Times New Roman" pitchFamily="34" charset="-120"/>
+              </a:rPr>
+              <a:t>3. Coastal Management Strategies</a:t>
+            </a:r>
+            <a:endParaRPr lang="en-US" sz="3600" dirty="0"/>
+          </a:p>
+        </p:txBody>
+      </p:sp>
+      <p:sp>
+        <p:nvSpPr>
+          <p:cNvPr id="4" name="Text 2"/>
+          <p:cNvSpPr/>
+          <p:nvPr/>
+        </p:nvSpPr>
+        <p:spPr>
+          <a:xfrm>
+            <a:off x="365760" y="1783080"/>
+            <a:ext cx="4846320" cy="4617720"/>
+          </a:xfrm>
+          <a:prstGeom prst="rect">
+            <a:avLst/>
+          </a:prstGeom>
+          <a:noFill/>
+          <a:ln/>
+        </p:spPr>
+        <p:txBody>
+          <a:bodyPr wrap="square" lIns="0" tIns="0" rIns="0" bIns="0" rtlCol="0" anchor="t"/>
+          <a:lstStyle/>
+          <a:p>
+            <a:pPr algn="l" indent="0" marL="0">
+              <a:spcAft>
+                <a:spcPts val="800"/>
+              </a:spcAft>
+              <a:buNone/>
+            </a:pPr>
+            <a:r>
+              <a:rPr lang="en-US" sz="3600" b="1" dirty="0">
+                <a:solidFill>
+                  <a:srgbClr val="111111"/>
+                </a:solidFill>
+                <a:latin typeface="Times New Roman" pitchFamily="34" charset="0"/>
+                <a:ea typeface="Times New Roman" pitchFamily="34" charset="-122"/>
+                <a:cs typeface="Times New Roman" pitchFamily="34" charset="-120"/>
+              </a:rPr>
+              <a:t>Groynes: </a:t>
+            </a:r>
+            <a:pPr algn="l" indent="0" marL="0">
+              <a:spcAft>
+                <a:spcPts val="800"/>
+              </a:spcAft>
+              <a:buNone/>
+            </a:pPr>
+            <a:r>
+              <a:rPr lang="en-US" sz="3600" dirty="0">
+                <a:solidFill>
+                  <a:srgbClr val="111111"/>
+                </a:solidFill>
+                <a:latin typeface="Times New Roman" pitchFamily="34" charset="0"/>
+                <a:ea typeface="Times New Roman" pitchFamily="34" charset="-122"/>
+                <a:cs typeface="Times New Roman" pitchFamily="34" charset="-120"/>
+              </a:rPr>
+              <a:t>They are low walls built across a beach to trap the sand moved by longshore drift.</a:t>
+            </a:r>
+            <a:endParaRPr lang="en-US" sz="3600" dirty="0"/>
+          </a:p>
+        </p:txBody>
+      </p:sp>
       <p:pic>
         <p:nvPicPr>
-          <p:cNvPr id="3" name="Image 0" descr="/home/claude/f4/img/minesec_sheet.png">    </p:cNvPr>
+          <p:cNvPr id="5" name="Image 0" descr="/home/claude/f4/img/v2/f4_groynes.jpg">    </p:cNvPr>
           <p:cNvPicPr>
             <a:picLocks noChangeAspect="1"/>
           </p:cNvPicPr>
@@ -15188,8 +15321,8 @@
         </p:blipFill>
         <p:spPr>
           <a:xfrm>
-            <a:off x="0" y="658368"/>
-            <a:ext cx="5120640" cy="5833872"/>
+            <a:off x="5349240" y="2071212"/>
+            <a:ext cx="6659575" cy="3693983"/>
           </a:xfrm>
           <a:prstGeom prst="rect">
             <a:avLst/>
@@ -15198,14 +15331,14 @@
       </p:pic>
       <p:sp>
         <p:nvSpPr>
-          <p:cNvPr id="4" name="Text 1"/>
+          <p:cNvPr id="6" name="Text 3"/>
           <p:cNvSpPr/>
           <p:nvPr/>
         </p:nvSpPr>
         <p:spPr>
           <a:xfrm>
-            <a:off x="5349240" y="1005840"/>
-            <a:ext cx="6522415" cy="731520"/>
+            <a:off x="5349240" y="6089904"/>
+            <a:ext cx="6659575" cy="347472"/>
           </a:xfrm>
           <a:prstGeom prst="rect">
             <a:avLst/>
@@ -15214,85 +15347,24 @@
           <a:ln/>
         </p:spPr>
         <p:txBody>
-          <a:bodyPr wrap="square" lIns="0" tIns="0" rIns="0" bIns="0" rtlCol="0" anchor="ctr">
-            <a:normAutofit/>
-          </a:bodyPr>
+          <a:bodyPr wrap="square" lIns="0" tIns="0" rIns="0" bIns="0" rtlCol="0" anchor="ctr"/>
           <a:lstStyle/>
           <a:p>
             <a:pPr algn="ctr" indent="0" marL="0">
               <a:buNone/>
             </a:pPr>
             <a:r>
-              <a:rPr lang="en-US" sz="3600" b="1" dirty="0">
-                <a:solidFill>
-                  <a:srgbClr val="990011"/>
+              <a:rPr lang="en-US" sz="1600" i="1" dirty="0">
+                <a:solidFill>
+                  <a:srgbClr val="555555"/>
                 </a:solidFill>
                 <a:latin typeface="Times New Roman" pitchFamily="34" charset="0"/>
                 <a:ea typeface="Times New Roman" pitchFamily="34" charset="-122"/>
                 <a:cs typeface="Times New Roman" pitchFamily="34" charset="-120"/>
               </a:rPr>
-              <a:t>3. Coastal Management Strategies</a:t>
-            </a:r>
-            <a:endParaRPr lang="en-US" sz="3600" dirty="0"/>
-          </a:p>
-        </p:txBody>
-      </p:sp>
-      <p:sp>
-        <p:nvSpPr>
-          <p:cNvPr id="5" name="Text 2"/>
-          <p:cNvSpPr/>
-          <p:nvPr/>
-        </p:nvSpPr>
-        <p:spPr>
-          <a:xfrm>
-            <a:off x="5349240" y="1783080"/>
-            <a:ext cx="6522415" cy="4663440"/>
-          </a:xfrm>
-          <a:prstGeom prst="rect">
-            <a:avLst/>
-          </a:prstGeom>
-          <a:noFill/>
-          <a:ln/>
-        </p:spPr>
-        <p:txBody>
-          <a:bodyPr wrap="square" lIns="0" tIns="0" rIns="0" bIns="0" rtlCol="0" anchor="t"/>
-          <a:lstStyle/>
-          <a:p>
-            <a:pPr algn="l" indent="0" marL="0">
-              <a:spcAft>
-                <a:spcPts val="800"/>
-              </a:spcAft>
-              <a:buNone/>
-            </a:pPr>
-            <a:r>
-              <a:rPr lang="en-US" sz="4000" b="1" dirty="0">
-                <a:solidFill>
-                  <a:srgbClr val="111111"/>
-                </a:solidFill>
-                <a:latin typeface="Times New Roman" pitchFamily="34" charset="0"/>
-                <a:ea typeface="Times New Roman" pitchFamily="34" charset="-122"/>
-                <a:cs typeface="Times New Roman" pitchFamily="34" charset="-120"/>
-              </a:rPr>
-              <a:t>Rock armour and sandbanks: </a:t>
-            </a:r>
-            <a:pPr algn="l" indent="0" marL="0">
-              <a:spcAft>
-                <a:spcPts val="800"/>
-              </a:spcAft>
-              <a:buNone/>
-            </a:pPr>
-            <a:r>
-              <a:rPr lang="en-US" sz="4000" dirty="0">
-                <a:solidFill>
-                  <a:srgbClr val="111111"/>
-                </a:solidFill>
-                <a:latin typeface="Times New Roman" pitchFamily="34" charset="0"/>
-                <a:ea typeface="Times New Roman" pitchFamily="34" charset="-122"/>
-                <a:cs typeface="Times New Roman" pitchFamily="34" charset="-120"/>
-              </a:rPr>
-              <a:t>Large rocks and banks of sand are placed in front of the coast to break the waves.</a:t>
-            </a:r>
-            <a:endParaRPr lang="en-US" sz="4000" dirty="0"/>
+              <a:t>Illustration: groynes</a:t>
+            </a:r>
+            <a:endParaRPr lang="en-US" sz="1600" dirty="0"/>
           </a:p>
         </p:txBody>
       </p:sp>
@@ -15647,109 +15719,9 @@
           </a:p>
         </p:txBody>
       </p:sp>
-      <p:sp>
-        <p:nvSpPr>
-          <p:cNvPr id="3" name="Text 1"/>
-          <p:cNvSpPr/>
-          <p:nvPr/>
-        </p:nvSpPr>
-        <p:spPr>
-          <a:xfrm>
-            <a:off x="365760" y="1005840"/>
-            <a:ext cx="11460175" cy="731520"/>
-          </a:xfrm>
-          <a:prstGeom prst="rect">
-            <a:avLst/>
-          </a:prstGeom>
-          <a:noFill/>
-          <a:ln/>
-        </p:spPr>
-        <p:txBody>
-          <a:bodyPr wrap="square" lIns="0" tIns="0" rIns="0" bIns="0" rtlCol="0" anchor="ctr">
-            <a:normAutofit/>
-          </a:bodyPr>
-          <a:lstStyle/>
-          <a:p>
-            <a:pPr algn="ctr" indent="0" marL="0">
-              <a:buNone/>
-            </a:pPr>
-            <a:r>
-              <a:rPr lang="en-US" sz="3600" b="1" dirty="0">
-                <a:solidFill>
-                  <a:srgbClr val="990011"/>
-                </a:solidFill>
-                <a:latin typeface="Times New Roman" pitchFamily="34" charset="0"/>
-                <a:ea typeface="Times New Roman" pitchFamily="34" charset="-122"/>
-                <a:cs typeface="Times New Roman" pitchFamily="34" charset="-120"/>
-              </a:rPr>
-              <a:t>3. Coastal Management Strategies</a:t>
-            </a:r>
-            <a:endParaRPr lang="en-US" sz="3600" dirty="0"/>
-          </a:p>
-        </p:txBody>
-      </p:sp>
-      <p:sp>
-        <p:nvSpPr>
-          <p:cNvPr id="4" name="Text 2"/>
-          <p:cNvSpPr/>
-          <p:nvPr/>
-        </p:nvSpPr>
-        <p:spPr>
-          <a:xfrm>
-            <a:off x="365760" y="1783080"/>
-            <a:ext cx="4846320" cy="4617720"/>
-          </a:xfrm>
-          <a:prstGeom prst="rect">
-            <a:avLst/>
-          </a:prstGeom>
-          <a:noFill/>
-          <a:ln/>
-        </p:spPr>
-        <p:txBody>
-          <a:bodyPr wrap="square" lIns="0" tIns="0" rIns="0" bIns="0" rtlCol="0" anchor="t"/>
-          <a:lstStyle/>
-          <a:p>
-            <a:pPr algn="l" indent="0" marL="0">
-              <a:spcAft>
-                <a:spcPts val="800"/>
-              </a:spcAft>
-              <a:buNone/>
-            </a:pPr>
-            <a:r>
-              <a:rPr lang="en-US" sz="3600" b="1" dirty="0">
-                <a:solidFill>
-                  <a:srgbClr val="111111"/>
-                </a:solidFill>
-                <a:latin typeface="Times New Roman" pitchFamily="34" charset="0"/>
-                <a:ea typeface="Times New Roman" pitchFamily="34" charset="-122"/>
-                <a:cs typeface="Times New Roman" pitchFamily="34" charset="-120"/>
-              </a:rPr>
-              <a:t>Mangroves and trees: </a:t>
-            </a:r>
-            <a:pPr algn="l" indent="0" marL="0">
-              <a:spcAft>
-                <a:spcPts val="800"/>
-              </a:spcAft>
-              <a:buNone/>
-            </a:pPr>
-            <a:r>
-              <a:rPr lang="en-US" sz="3600" dirty="0">
-                <a:solidFill>
-                  <a:srgbClr val="111111"/>
-                </a:solidFill>
-                <a:latin typeface="Times New Roman" pitchFamily="34" charset="0"/>
-                <a:ea typeface="Times New Roman" pitchFamily="34" charset="-122"/>
-                <a:cs typeface="Times New Roman" pitchFamily="34" charset="-120"/>
-              </a:rPr>
-              <a:t>Mangroves and trees reduce the force of waves and hold the soil.</a:t>
-            </a:r>
-            <a:endParaRPr lang="en-US" sz="3600" dirty="0"/>
-          </a:p>
-        </p:txBody>
-      </p:sp>
       <p:pic>
         <p:nvPicPr>
-          <p:cNvPr id="5" name="Image 0" descr="/home/claude/f4/img/v2/lsa_mangrove.jpg">    </p:cNvPr>
+          <p:cNvPr id="3" name="Image 0" descr="/home/claude/f4/img/minesec_sheet.png">    </p:cNvPr>
           <p:cNvPicPr>
             <a:picLocks noChangeAspect="1"/>
           </p:cNvPicPr>
@@ -15763,8 +15735,8 @@
         </p:blipFill>
         <p:spPr>
           <a:xfrm>
-            <a:off x="5349240" y="2070259"/>
-            <a:ext cx="6659575" cy="3695890"/>
+            <a:off x="0" y="658368"/>
+            <a:ext cx="5120640" cy="5833872"/>
           </a:xfrm>
           <a:prstGeom prst="rect">
             <a:avLst/>
@@ -15773,14 +15745,14 @@
       </p:pic>
       <p:sp>
         <p:nvSpPr>
-          <p:cNvPr id="6" name="Text 3"/>
+          <p:cNvPr id="4" name="Text 1"/>
           <p:cNvSpPr/>
           <p:nvPr/>
         </p:nvSpPr>
         <p:spPr>
           <a:xfrm>
-            <a:off x="5349240" y="6089904"/>
-            <a:ext cx="6659575" cy="347472"/>
+            <a:off x="5349240" y="1005840"/>
+            <a:ext cx="6522415" cy="731520"/>
           </a:xfrm>
           <a:prstGeom prst="rect">
             <a:avLst/>
@@ -15789,24 +15761,85 @@
           <a:ln/>
         </p:spPr>
         <p:txBody>
-          <a:bodyPr wrap="square" lIns="0" tIns="0" rIns="0" bIns="0" rtlCol="0" anchor="ctr"/>
+          <a:bodyPr wrap="square" lIns="0" tIns="0" rIns="0" bIns="0" rtlCol="0" anchor="ctr">
+            <a:normAutofit/>
+          </a:bodyPr>
           <a:lstStyle/>
           <a:p>
             <a:pPr algn="ctr" indent="0" marL="0">
               <a:buNone/>
             </a:pPr>
             <a:r>
-              <a:rPr lang="en-US" sz="1600" i="1" dirty="0">
-                <a:solidFill>
-                  <a:srgbClr val="555555"/>
+              <a:rPr lang="en-US" sz="3600" b="1" dirty="0">
+                <a:solidFill>
+                  <a:srgbClr val="990011"/>
                 </a:solidFill>
                 <a:latin typeface="Times New Roman" pitchFamily="34" charset="0"/>
                 <a:ea typeface="Times New Roman" pitchFamily="34" charset="-122"/>
                 <a:cs typeface="Times New Roman" pitchFamily="34" charset="-120"/>
               </a:rPr>
-              <a:t>Illustration: mangroves</a:t>
-            </a:r>
-            <a:endParaRPr lang="en-US" sz="1600" dirty="0"/>
+              <a:t>3. Coastal Management Strategies</a:t>
+            </a:r>
+            <a:endParaRPr lang="en-US" sz="3600" dirty="0"/>
+          </a:p>
+        </p:txBody>
+      </p:sp>
+      <p:sp>
+        <p:nvSpPr>
+          <p:cNvPr id="5" name="Text 2"/>
+          <p:cNvSpPr/>
+          <p:nvPr/>
+        </p:nvSpPr>
+        <p:spPr>
+          <a:xfrm>
+            <a:off x="5349240" y="1783080"/>
+            <a:ext cx="6522415" cy="4663440"/>
+          </a:xfrm>
+          <a:prstGeom prst="rect">
+            <a:avLst/>
+          </a:prstGeom>
+          <a:noFill/>
+          <a:ln/>
+        </p:spPr>
+        <p:txBody>
+          <a:bodyPr wrap="square" lIns="0" tIns="0" rIns="0" bIns="0" rtlCol="0" anchor="t"/>
+          <a:lstStyle/>
+          <a:p>
+            <a:pPr algn="l" indent="0" marL="0">
+              <a:spcAft>
+                <a:spcPts val="800"/>
+              </a:spcAft>
+              <a:buNone/>
+            </a:pPr>
+            <a:r>
+              <a:rPr lang="en-US" sz="4000" b="1" dirty="0">
+                <a:solidFill>
+                  <a:srgbClr val="111111"/>
+                </a:solidFill>
+                <a:latin typeface="Times New Roman" pitchFamily="34" charset="0"/>
+                <a:ea typeface="Times New Roman" pitchFamily="34" charset="-122"/>
+                <a:cs typeface="Times New Roman" pitchFamily="34" charset="-120"/>
+              </a:rPr>
+              <a:t>Rock armour and sandbanks: </a:t>
+            </a:r>
+            <a:pPr algn="l" indent="0" marL="0">
+              <a:spcAft>
+                <a:spcPts val="800"/>
+              </a:spcAft>
+              <a:buNone/>
+            </a:pPr>
+            <a:r>
+              <a:rPr lang="en-US" sz="4000" dirty="0">
+                <a:solidFill>
+                  <a:srgbClr val="111111"/>
+                </a:solidFill>
+                <a:latin typeface="Times New Roman" pitchFamily="34" charset="0"/>
+                <a:ea typeface="Times New Roman" pitchFamily="34" charset="-122"/>
+                <a:cs typeface="Times New Roman" pitchFamily="34" charset="-120"/>
+              </a:rPr>
+              <a:t>Large rocks and banks of sand are placed in front of the coast to break the waves.</a:t>
+            </a:r>
+            <a:endParaRPr lang="en-US" sz="4000" dirty="0"/>
           </a:p>
         </p:txBody>
       </p:sp>
@@ -15922,9 +15955,109 @@
           </a:p>
         </p:txBody>
       </p:sp>
+      <p:sp>
+        <p:nvSpPr>
+          <p:cNvPr id="3" name="Text 1"/>
+          <p:cNvSpPr/>
+          <p:nvPr/>
+        </p:nvSpPr>
+        <p:spPr>
+          <a:xfrm>
+            <a:off x="365760" y="1005840"/>
+            <a:ext cx="11460175" cy="731520"/>
+          </a:xfrm>
+          <a:prstGeom prst="rect">
+            <a:avLst/>
+          </a:prstGeom>
+          <a:noFill/>
+          <a:ln/>
+        </p:spPr>
+        <p:txBody>
+          <a:bodyPr wrap="square" lIns="0" tIns="0" rIns="0" bIns="0" rtlCol="0" anchor="ctr">
+            <a:normAutofit/>
+          </a:bodyPr>
+          <a:lstStyle/>
+          <a:p>
+            <a:pPr algn="ctr" indent="0" marL="0">
+              <a:buNone/>
+            </a:pPr>
+            <a:r>
+              <a:rPr lang="en-US" sz="3600" b="1" dirty="0">
+                <a:solidFill>
+                  <a:srgbClr val="990011"/>
+                </a:solidFill>
+                <a:latin typeface="Times New Roman" pitchFamily="34" charset="0"/>
+                <a:ea typeface="Times New Roman" pitchFamily="34" charset="-122"/>
+                <a:cs typeface="Times New Roman" pitchFamily="34" charset="-120"/>
+              </a:rPr>
+              <a:t>3. Coastal Management Strategies</a:t>
+            </a:r>
+            <a:endParaRPr lang="en-US" sz="3600" dirty="0"/>
+          </a:p>
+        </p:txBody>
+      </p:sp>
+      <p:sp>
+        <p:nvSpPr>
+          <p:cNvPr id="4" name="Text 2"/>
+          <p:cNvSpPr/>
+          <p:nvPr/>
+        </p:nvSpPr>
+        <p:spPr>
+          <a:xfrm>
+            <a:off x="365760" y="1783080"/>
+            <a:ext cx="4846320" cy="4617720"/>
+          </a:xfrm>
+          <a:prstGeom prst="rect">
+            <a:avLst/>
+          </a:prstGeom>
+          <a:noFill/>
+          <a:ln/>
+        </p:spPr>
+        <p:txBody>
+          <a:bodyPr wrap="square" lIns="0" tIns="0" rIns="0" bIns="0" rtlCol="0" anchor="t"/>
+          <a:lstStyle/>
+          <a:p>
+            <a:pPr algn="l" indent="0" marL="0">
+              <a:spcAft>
+                <a:spcPts val="800"/>
+              </a:spcAft>
+              <a:buNone/>
+            </a:pPr>
+            <a:r>
+              <a:rPr lang="en-US" sz="3600" b="1" dirty="0">
+                <a:solidFill>
+                  <a:srgbClr val="111111"/>
+                </a:solidFill>
+                <a:latin typeface="Times New Roman" pitchFamily="34" charset="0"/>
+                <a:ea typeface="Times New Roman" pitchFamily="34" charset="-122"/>
+                <a:cs typeface="Times New Roman" pitchFamily="34" charset="-120"/>
+              </a:rPr>
+              <a:t>Mangroves and trees: </a:t>
+            </a:r>
+            <a:pPr algn="l" indent="0" marL="0">
+              <a:spcAft>
+                <a:spcPts val="800"/>
+              </a:spcAft>
+              <a:buNone/>
+            </a:pPr>
+            <a:r>
+              <a:rPr lang="en-US" sz="3600" dirty="0">
+                <a:solidFill>
+                  <a:srgbClr val="111111"/>
+                </a:solidFill>
+                <a:latin typeface="Times New Roman" pitchFamily="34" charset="0"/>
+                <a:ea typeface="Times New Roman" pitchFamily="34" charset="-122"/>
+                <a:cs typeface="Times New Roman" pitchFamily="34" charset="-120"/>
+              </a:rPr>
+              <a:t>Mangroves and trees reduce the force of waves and hold the soil.</a:t>
+            </a:r>
+            <a:endParaRPr lang="en-US" sz="3600" dirty="0"/>
+          </a:p>
+        </p:txBody>
+      </p:sp>
       <p:pic>
         <p:nvPicPr>
-          <p:cNvPr id="3" name="Image 0" descr="/home/claude/f4/img/minesec_sheet.png">    </p:cNvPr>
+          <p:cNvPr id="5" name="Image 0" descr="/home/claude/f4/img/v2/lsa_mangrove.jpg">    </p:cNvPr>
           <p:cNvPicPr>
             <a:picLocks noChangeAspect="1"/>
           </p:cNvPicPr>
@@ -15938,8 +16071,8 @@
         </p:blipFill>
         <p:spPr>
           <a:xfrm>
-            <a:off x="0" y="658368"/>
-            <a:ext cx="5120640" cy="5833872"/>
+            <a:off x="5349240" y="2070259"/>
+            <a:ext cx="6659575" cy="3695890"/>
           </a:xfrm>
           <a:prstGeom prst="rect">
             <a:avLst/>
@@ -15948,14 +16081,14 @@
       </p:pic>
       <p:sp>
         <p:nvSpPr>
-          <p:cNvPr id="4" name="Text 1"/>
+          <p:cNvPr id="6" name="Text 3"/>
           <p:cNvSpPr/>
           <p:nvPr/>
         </p:nvSpPr>
         <p:spPr>
           <a:xfrm>
-            <a:off x="5349240" y="1005840"/>
-            <a:ext cx="6522415" cy="731520"/>
+            <a:off x="5349240" y="6089904"/>
+            <a:ext cx="6659575" cy="347472"/>
           </a:xfrm>
           <a:prstGeom prst="rect">
             <a:avLst/>
@@ -15964,85 +16097,24 @@
           <a:ln/>
         </p:spPr>
         <p:txBody>
-          <a:bodyPr wrap="square" lIns="0" tIns="0" rIns="0" bIns="0" rtlCol="0" anchor="ctr">
-            <a:normAutofit/>
-          </a:bodyPr>
+          <a:bodyPr wrap="square" lIns="0" tIns="0" rIns="0" bIns="0" rtlCol="0" anchor="ctr"/>
           <a:lstStyle/>
           <a:p>
             <a:pPr algn="ctr" indent="0" marL="0">
               <a:buNone/>
             </a:pPr>
             <a:r>
-              <a:rPr lang="en-US" sz="3600" b="1" dirty="0">
-                <a:solidFill>
-                  <a:srgbClr val="990011"/>
+              <a:rPr lang="en-US" sz="1600" i="1" dirty="0">
+                <a:solidFill>
+                  <a:srgbClr val="555555"/>
                 </a:solidFill>
                 <a:latin typeface="Times New Roman" pitchFamily="34" charset="0"/>
                 <a:ea typeface="Times New Roman" pitchFamily="34" charset="-122"/>
                 <a:cs typeface="Times New Roman" pitchFamily="34" charset="-120"/>
               </a:rPr>
-              <a:t>3. Coastal Management Strategies</a:t>
-            </a:r>
-            <a:endParaRPr lang="en-US" sz="3600" dirty="0"/>
-          </a:p>
-        </p:txBody>
-      </p:sp>
-      <p:sp>
-        <p:nvSpPr>
-          <p:cNvPr id="5" name="Text 2"/>
-          <p:cNvSpPr/>
-          <p:nvPr/>
-        </p:nvSpPr>
-        <p:spPr>
-          <a:xfrm>
-            <a:off x="5349240" y="1783080"/>
-            <a:ext cx="6522415" cy="4663440"/>
-          </a:xfrm>
-          <a:prstGeom prst="rect">
-            <a:avLst/>
-          </a:prstGeom>
-          <a:noFill/>
-          <a:ln/>
-        </p:spPr>
-        <p:txBody>
-          <a:bodyPr wrap="square" lIns="0" tIns="0" rIns="0" bIns="0" rtlCol="0" anchor="t"/>
-          <a:lstStyle/>
-          <a:p>
-            <a:pPr algn="l" indent="0" marL="0">
-              <a:spcAft>
-                <a:spcPts val="800"/>
-              </a:spcAft>
-              <a:buNone/>
-            </a:pPr>
-            <a:r>
-              <a:rPr lang="en-US" sz="4000" b="1" dirty="0">
-                <a:solidFill>
-                  <a:srgbClr val="111111"/>
-                </a:solidFill>
-                <a:latin typeface="Times New Roman" pitchFamily="34" charset="0"/>
-                <a:ea typeface="Times New Roman" pitchFamily="34" charset="-122"/>
-                <a:cs typeface="Times New Roman" pitchFamily="34" charset="-120"/>
-              </a:rPr>
-              <a:t>Regulations: </a:t>
-            </a:r>
-            <a:pPr algn="l" indent="0" marL="0">
-              <a:spcAft>
-                <a:spcPts val="800"/>
-              </a:spcAft>
-              <a:buNone/>
-            </a:pPr>
-            <a:r>
-              <a:rPr lang="en-US" sz="4000" dirty="0">
-                <a:solidFill>
-                  <a:srgbClr val="111111"/>
-                </a:solidFill>
-                <a:latin typeface="Times New Roman" pitchFamily="34" charset="0"/>
-                <a:ea typeface="Times New Roman" pitchFamily="34" charset="-122"/>
-                <a:cs typeface="Times New Roman" pitchFamily="34" charset="-120"/>
-              </a:rPr>
-              <a:t>Houses must be built far from the shore, and sand must not be removed from beaches.</a:t>
-            </a:r>
-            <a:endParaRPr lang="en-US" sz="4000" dirty="0"/>
+              <a:t>Illustration: mangroves</a:t>
+            </a:r>
+            <a:endParaRPr lang="en-US" sz="1600" dirty="0"/>
           </a:p>
         </p:txBody>
       </p:sp>
@@ -16152,7 +16224,7 @@
                 <a:ea typeface="Calibri" pitchFamily="34" charset="-122"/>
                 <a:cs typeface="Calibri" pitchFamily="34" charset="-120"/>
               </a:rPr>
-              <a:t>FORMATIVE EVALUATION</a:t>
+              <a:t>BOARD SUMMARY</a:t>
             </a:r>
             <a:endParaRPr lang="en-US" sz="1400" dirty="0"/>
           </a:p>
@@ -16217,7 +16289,7 @@
                 <a:ea typeface="Times New Roman" pitchFamily="34" charset="-122"/>
                 <a:cs typeface="Times New Roman" pitchFamily="34" charset="-120"/>
               </a:rPr>
-              <a:t>Evaluation 1</a:t>
+              <a:t>3. Coastal Management Strategies</a:t>
             </a:r>
             <a:endParaRPr lang="en-US" sz="3600" dirty="0"/>
           </a:p>
@@ -16251,7 +16323,7 @@
               <a:buNone/>
             </a:pPr>
             <a:r>
-              <a:rPr lang="en-US" sz="4000" dirty="0">
+              <a:rPr lang="en-US" sz="4000" b="1" dirty="0">
                 <a:solidFill>
                   <a:srgbClr val="111111"/>
                 </a:solidFill>
@@ -16259,7 +16331,24 @@
                 <a:ea typeface="Times New Roman" pitchFamily="34" charset="-122"/>
                 <a:cs typeface="Times New Roman" pitchFamily="34" charset="-120"/>
               </a:rPr>
-              <a:t>Name two ports of Cameroon.</a:t>
+              <a:t>Regulations: </a:t>
+            </a:r>
+            <a:pPr algn="l" indent="0" marL="0">
+              <a:spcAft>
+                <a:spcPts val="800"/>
+              </a:spcAft>
+              <a:buNone/>
+            </a:pPr>
+            <a:r>
+              <a:rPr lang="en-US" sz="4000" dirty="0">
+                <a:solidFill>
+                  <a:srgbClr val="111111"/>
+                </a:solidFill>
+                <a:latin typeface="Times New Roman" pitchFamily="34" charset="0"/>
+                <a:ea typeface="Times New Roman" pitchFamily="34" charset="-122"/>
+                <a:cs typeface="Times New Roman" pitchFamily="34" charset="-120"/>
+              </a:rPr>
+              <a:t>Houses must be built far from the shore, and sand must not be removed from beaches.</a:t>
             </a:r>
             <a:endParaRPr lang="en-US" sz="4000" dirty="0"/>
           </a:p>
@@ -16436,7 +16525,7 @@
                 <a:ea typeface="Times New Roman" pitchFamily="34" charset="-122"/>
                 <a:cs typeface="Times New Roman" pitchFamily="34" charset="-120"/>
               </a:rPr>
-              <a:t>Expected Answer</a:t>
+              <a:t>Evaluation 1</a:t>
             </a:r>
             <a:endParaRPr lang="en-US" sz="3600" dirty="0"/>
           </a:p>
@@ -16478,7 +16567,7 @@
                 <a:ea typeface="Times New Roman" pitchFamily="34" charset="-122"/>
                 <a:cs typeface="Times New Roman" pitchFamily="34" charset="-120"/>
               </a:rPr>
-              <a:t>Douala and Kribi.</a:t>
+              <a:t>Name two ports of Cameroon.</a:t>
             </a:r>
             <a:endParaRPr lang="en-US" sz="4000" dirty="0"/>
           </a:p>
@@ -16655,7 +16744,7 @@
                 <a:ea typeface="Times New Roman" pitchFamily="34" charset="-122"/>
                 <a:cs typeface="Times New Roman" pitchFamily="34" charset="-120"/>
               </a:rPr>
-              <a:t>Evaluation 2</a:t>
+              <a:t>Expected Answer</a:t>
             </a:r>
             <a:endParaRPr lang="en-US" sz="3600" dirty="0"/>
           </a:p>
@@ -16697,7 +16786,7 @@
                 <a:ea typeface="Times New Roman" pitchFamily="34" charset="-122"/>
                 <a:cs typeface="Times New Roman" pitchFamily="34" charset="-120"/>
               </a:rPr>
-              <a:t>Give two ways to protect the coast.</a:t>
+              <a:t>Douala and Kribi.</a:t>
             </a:r>
             <a:endParaRPr lang="en-US" sz="4000" dirty="0"/>
           </a:p>
@@ -16874,7 +16963,7 @@
                 <a:ea typeface="Times New Roman" pitchFamily="34" charset="-122"/>
                 <a:cs typeface="Times New Roman" pitchFamily="34" charset="-120"/>
               </a:rPr>
-              <a:t>Expected Answer</a:t>
+              <a:t>Evaluation 2</a:t>
             </a:r>
             <a:endParaRPr lang="en-US" sz="3600" dirty="0"/>
           </a:p>
@@ -16916,7 +17005,7 @@
                 <a:ea typeface="Times New Roman" pitchFamily="34" charset="-122"/>
                 <a:cs typeface="Times New Roman" pitchFamily="34" charset="-120"/>
               </a:rPr>
-              <a:t>Sea walls and groynes (also mangroves).</a:t>
+              <a:t>Give two ways to protect the coast.</a:t>
             </a:r>
             <a:endParaRPr lang="en-US" sz="4000" dirty="0"/>
           </a:p>
@@ -17028,7 +17117,7 @@
                 <a:ea typeface="Calibri" pitchFamily="34" charset="-122"/>
                 <a:cs typeface="Calibri" pitchFamily="34" charset="-120"/>
               </a:rPr>
-              <a:t>REMEDIATION</a:t>
+              <a:t>FORMATIVE EVALUATION</a:t>
             </a:r>
             <a:endParaRPr lang="en-US" sz="1400" dirty="0"/>
           </a:p>
@@ -17051,7 +17140,7 @@
         <p:spPr>
           <a:xfrm>
             <a:off x="0" y="658368"/>
-            <a:ext cx="2468880" cy="5833872"/>
+            <a:ext cx="5120640" cy="5833872"/>
           </a:xfrm>
           <a:prstGeom prst="rect">
             <a:avLst/>
@@ -17066,8 +17155,8 @@
         </p:nvSpPr>
         <p:spPr>
           <a:xfrm>
-            <a:off x="2697480" y="1005840"/>
-            <a:ext cx="9174175" cy="731520"/>
+            <a:off x="5349240" y="1005840"/>
+            <a:ext cx="6522415" cy="731520"/>
           </a:xfrm>
           <a:prstGeom prst="rect">
             <a:avLst/>
@@ -17093,7 +17182,7 @@
                 <a:ea typeface="Times New Roman" pitchFamily="34" charset="-122"/>
                 <a:cs typeface="Times New Roman" pitchFamily="34" charset="-120"/>
               </a:rPr>
-              <a:t>Remediation</a:t>
+              <a:t>Expected Answer</a:t>
             </a:r>
             <a:endParaRPr lang="en-US" sz="3600" dirty="0"/>
           </a:p>
@@ -17107,8 +17196,8 @@
         </p:nvSpPr>
         <p:spPr>
           <a:xfrm>
-            <a:off x="2697480" y="1783080"/>
-            <a:ext cx="9174175" cy="4663440"/>
+            <a:off x="5349240" y="1783080"/>
+            <a:ext cx="6522415" cy="4663440"/>
           </a:xfrm>
           <a:prstGeom prst="rect">
             <a:avLst/>
@@ -17127,7 +17216,7 @@
               <a:buNone/>
             </a:pPr>
             <a:r>
-              <a:rPr lang="en-US" sz="4000" b="1" dirty="0">
+              <a:rPr lang="en-US" sz="4000" dirty="0">
                 <a:solidFill>
                   <a:srgbClr val="111111"/>
                 </a:solidFill>
@@ -17135,73 +17224,7 @@
                 <a:ea typeface="Times New Roman" pitchFamily="34" charset="-122"/>
                 <a:cs typeface="Times New Roman" pitchFamily="34" charset="-120"/>
               </a:rPr>
-              <a:t>Fill in the blanks:</a:t>
-            </a:r>
-            <a:endParaRPr lang="en-US" sz="4000" dirty="0"/>
-          </a:p>
-          <a:p>
-            <a:pPr algn="l" marL="342900" indent="-342900">
-              <a:spcAft>
-                <a:spcPts val="800"/>
-              </a:spcAft>
-              <a:buSzPct val="100000"/>
-              <a:buFont typeface="+mj-lt"/>
-              <a:buAutoNum type="arabicPeriod" startAt="1"/>
-            </a:pPr>
-            <a:r>
-              <a:rPr lang="en-US" sz="4000" dirty="0">
-                <a:solidFill>
-                  <a:srgbClr val="111111"/>
-                </a:solidFill>
-                <a:latin typeface="Times New Roman" pitchFamily="34" charset="0"/>
-                <a:ea typeface="Times New Roman" pitchFamily="34" charset="-122"/>
-                <a:cs typeface="Times New Roman" pitchFamily="34" charset="-120"/>
-              </a:rPr>
-              <a:t>A place where ships load goods is a ______.</a:t>
-            </a:r>
-            <a:endParaRPr lang="en-US" sz="4000" dirty="0"/>
-          </a:p>
-          <a:p>
-            <a:pPr algn="l" marL="342900" indent="-342900">
-              <a:spcAft>
-                <a:spcPts val="800"/>
-              </a:spcAft>
-              <a:buSzPct val="100000"/>
-              <a:buFont typeface="+mj-lt"/>
-              <a:buAutoNum type="arabicPeriod" startAt="1"/>
-            </a:pPr>
-            <a:r>
-              <a:rPr lang="en-US" sz="4000" dirty="0">
-                <a:solidFill>
-                  <a:srgbClr val="111111"/>
-                </a:solidFill>
-                <a:latin typeface="Times New Roman" pitchFamily="34" charset="0"/>
-                <a:ea typeface="Times New Roman" pitchFamily="34" charset="-122"/>
-                <a:cs typeface="Times New Roman" pitchFamily="34" charset="-120"/>
-              </a:rPr>
-              <a:t>A low wall across a beach is a ______.</a:t>
-            </a:r>
-            <a:endParaRPr lang="en-US" sz="4000" dirty="0"/>
-          </a:p>
-          <a:p>
-            <a:pPr algn="l" marL="342900" indent="-342900">
-              <a:spcAft>
-                <a:spcPts val="800"/>
-              </a:spcAft>
-              <a:buSzPct val="100000"/>
-              <a:buFont typeface="+mj-lt"/>
-              <a:buAutoNum type="arabicPeriod" startAt="1"/>
-            </a:pPr>
-            <a:r>
-              <a:rPr lang="en-US" sz="4000" dirty="0">
-                <a:solidFill>
-                  <a:srgbClr val="111111"/>
-                </a:solidFill>
-                <a:latin typeface="Times New Roman" pitchFamily="34" charset="0"/>
-                <a:ea typeface="Times New Roman" pitchFamily="34" charset="-122"/>
-                <a:cs typeface="Times New Roman" pitchFamily="34" charset="-120"/>
-              </a:rPr>
-              <a:t>The wearing away of the coast is coastal ______.</a:t>
+              <a:t>Sea walls and groynes (also mangroves).</a:t>
             </a:r>
             <a:endParaRPr lang="en-US" sz="4000" dirty="0"/>
           </a:p>
@@ -17313,7 +17336,7 @@
                 <a:ea typeface="Calibri" pitchFamily="34" charset="-122"/>
                 <a:cs typeface="Calibri" pitchFamily="34" charset="-120"/>
               </a:rPr>
-              <a:t>HOMEWORK</a:t>
+              <a:t>REMEDIATION</a:t>
             </a:r>
             <a:endParaRPr lang="en-US" sz="1400" dirty="0"/>
           </a:p>
@@ -17336,7 +17359,7 @@
         <p:spPr>
           <a:xfrm>
             <a:off x="0" y="658368"/>
-            <a:ext cx="5120640" cy="5833872"/>
+            <a:ext cx="2468880" cy="5833872"/>
           </a:xfrm>
           <a:prstGeom prst="rect">
             <a:avLst/>
@@ -17351,8 +17374,8 @@
         </p:nvSpPr>
         <p:spPr>
           <a:xfrm>
-            <a:off x="5349240" y="1005840"/>
-            <a:ext cx="6522415" cy="731520"/>
+            <a:off x="2697480" y="1005840"/>
+            <a:ext cx="9174175" cy="731520"/>
           </a:xfrm>
           <a:prstGeom prst="rect">
             <a:avLst/>
@@ -17378,7 +17401,7 @@
                 <a:ea typeface="Times New Roman" pitchFamily="34" charset="-122"/>
                 <a:cs typeface="Times New Roman" pitchFamily="34" charset="-120"/>
               </a:rPr>
-              <a:t>Homework</a:t>
+              <a:t>Remediation</a:t>
             </a:r>
             <a:endParaRPr lang="en-US" sz="3600" dirty="0"/>
           </a:p>
@@ -17392,8 +17415,8 @@
         </p:nvSpPr>
         <p:spPr>
           <a:xfrm>
-            <a:off x="5349240" y="1783080"/>
-            <a:ext cx="6522415" cy="4663440"/>
+            <a:off x="2697480" y="1783080"/>
+            <a:ext cx="9174175" cy="4663440"/>
           </a:xfrm>
           <a:prstGeom prst="rect">
             <a:avLst/>
@@ -17412,7 +17435,7 @@
               <a:buNone/>
             </a:pPr>
             <a:r>
-              <a:rPr lang="en-US" sz="4000" dirty="0">
+              <a:rPr lang="en-US" sz="4000" b="1" dirty="0">
                 <a:solidFill>
                   <a:srgbClr val="111111"/>
                 </a:solidFill>
@@ -17420,7 +17443,73 @@
                 <a:ea typeface="Times New Roman" pitchFamily="34" charset="-122"/>
                 <a:cs typeface="Times New Roman" pitchFamily="34" charset="-120"/>
               </a:rPr>
-              <a:t>Name the largest hot desert of Africa.</a:t>
+              <a:t>Fill in the blanks:</a:t>
+            </a:r>
+            <a:endParaRPr lang="en-US" sz="4000" dirty="0"/>
+          </a:p>
+          <a:p>
+            <a:pPr algn="l" marL="342900" indent="-342900">
+              <a:spcAft>
+                <a:spcPts val="800"/>
+              </a:spcAft>
+              <a:buSzPct val="100000"/>
+              <a:buFont typeface="+mj-lt"/>
+              <a:buAutoNum type="arabicPeriod" startAt="1"/>
+            </a:pPr>
+            <a:r>
+              <a:rPr lang="en-US" sz="4000" dirty="0">
+                <a:solidFill>
+                  <a:srgbClr val="111111"/>
+                </a:solidFill>
+                <a:latin typeface="Times New Roman" pitchFamily="34" charset="0"/>
+                <a:ea typeface="Times New Roman" pitchFamily="34" charset="-122"/>
+                <a:cs typeface="Times New Roman" pitchFamily="34" charset="-120"/>
+              </a:rPr>
+              <a:t>A place where ships load goods is a ______.</a:t>
+            </a:r>
+            <a:endParaRPr lang="en-US" sz="4000" dirty="0"/>
+          </a:p>
+          <a:p>
+            <a:pPr algn="l" marL="342900" indent="-342900">
+              <a:spcAft>
+                <a:spcPts val="800"/>
+              </a:spcAft>
+              <a:buSzPct val="100000"/>
+              <a:buFont typeface="+mj-lt"/>
+              <a:buAutoNum type="arabicPeriod" startAt="1"/>
+            </a:pPr>
+            <a:r>
+              <a:rPr lang="en-US" sz="4000" dirty="0">
+                <a:solidFill>
+                  <a:srgbClr val="111111"/>
+                </a:solidFill>
+                <a:latin typeface="Times New Roman" pitchFamily="34" charset="0"/>
+                <a:ea typeface="Times New Roman" pitchFamily="34" charset="-122"/>
+                <a:cs typeface="Times New Roman" pitchFamily="34" charset="-120"/>
+              </a:rPr>
+              <a:t>A low wall across a beach is a ______.</a:t>
+            </a:r>
+            <a:endParaRPr lang="en-US" sz="4000" dirty="0"/>
+          </a:p>
+          <a:p>
+            <a:pPr algn="l" marL="342900" indent="-342900">
+              <a:spcAft>
+                <a:spcPts val="800"/>
+              </a:spcAft>
+              <a:buSzPct val="100000"/>
+              <a:buFont typeface="+mj-lt"/>
+              <a:buAutoNum type="arabicPeriod" startAt="1"/>
+            </a:pPr>
+            <a:r>
+              <a:rPr lang="en-US" sz="4000" dirty="0">
+                <a:solidFill>
+                  <a:srgbClr val="111111"/>
+                </a:solidFill>
+                <a:latin typeface="Times New Roman" pitchFamily="34" charset="0"/>
+                <a:ea typeface="Times New Roman" pitchFamily="34" charset="-122"/>
+                <a:cs typeface="Times New Roman" pitchFamily="34" charset="-120"/>
+              </a:rPr>
+              <a:t>The wearing away of the coast is coastal ______.</a:t>
             </a:r>
             <a:endParaRPr lang="en-US" sz="4000" dirty="0"/>
           </a:p>
@@ -17532,7 +17621,7 @@
                 <a:ea typeface="Calibri" pitchFamily="34" charset="-122"/>
                 <a:cs typeface="Calibri" pitchFamily="34" charset="-120"/>
               </a:rPr>
-              <a:t>NEXT LESSON</a:t>
+              <a:t>HOMEWORK</a:t>
             </a:r>
             <a:endParaRPr lang="en-US" sz="1400" dirty="0"/>
           </a:p>
@@ -17597,7 +17686,7 @@
                 <a:ea typeface="Times New Roman" pitchFamily="34" charset="-122"/>
                 <a:cs typeface="Times New Roman" pitchFamily="34" charset="-120"/>
               </a:rPr>
-              <a:t>Next Lesson</a:t>
+              <a:t>Homework</a:t>
             </a:r>
             <a:endParaRPr lang="en-US" sz="3600" dirty="0"/>
           </a:p>
@@ -17621,17 +17710,17 @@
           <a:ln/>
         </p:spPr>
         <p:txBody>
-          <a:bodyPr wrap="square" lIns="0" tIns="0" rIns="0" bIns="0" rtlCol="0" anchor="ctr"/>
-          <a:lstStyle/>
-          <a:p>
-            <a:pPr algn="ctr" indent="0" marL="0">
+          <a:bodyPr wrap="square" lIns="0" tIns="0" rIns="0" bIns="0" rtlCol="0" anchor="t"/>
+          <a:lstStyle/>
+          <a:p>
+            <a:pPr algn="l" indent="0" marL="0">
               <a:spcAft>
                 <a:spcPts val="800"/>
               </a:spcAft>
               <a:buNone/>
             </a:pPr>
             <a:r>
-              <a:rPr lang="en-US" sz="4000" b="1" dirty="0">
+              <a:rPr lang="en-US" sz="4000" dirty="0">
                 <a:solidFill>
                   <a:srgbClr val="111111"/>
                 </a:solidFill>
@@ -17639,27 +17728,7 @@
                 <a:ea typeface="Times New Roman" pitchFamily="34" charset="-122"/>
                 <a:cs typeface="Times New Roman" pitchFamily="34" charset="-120"/>
               </a:rPr>
-              <a:t>Our next lesson will be on:</a:t>
-            </a:r>
-            <a:endParaRPr lang="en-US" sz="4000" dirty="0"/>
-          </a:p>
-          <a:p>
-            <a:pPr algn="ctr" indent="0" marL="0">
-              <a:spcAft>
-                <a:spcPts val="800"/>
-              </a:spcAft>
-              <a:buNone/>
-            </a:pPr>
-            <a:r>
-              <a:rPr lang="en-US" sz="4000" b="1" dirty="0">
-                <a:solidFill>
-                  <a:srgbClr val="990011"/>
-                </a:solidFill>
-                <a:latin typeface="Times New Roman" pitchFamily="34" charset="0"/>
-                <a:ea typeface="Times New Roman" pitchFamily="34" charset="-122"/>
-                <a:cs typeface="Times New Roman" pitchFamily="34" charset="-120"/>
-              </a:rPr>
-              <a:t>Lesson 27: Semi-Arid and Desert Landscapes</a:t>
+              <a:t>Name the largest hot desert of Africa.</a:t>
             </a:r>
             <a:endParaRPr lang="en-US" sz="4000" dirty="0"/>
           </a:p>
@@ -17771,6 +17840,464 @@
                 <a:ea typeface="Calibri" pitchFamily="34" charset="-122"/>
                 <a:cs typeface="Calibri" pitchFamily="34" charset="-120"/>
               </a:rPr>
+              <a:t>NEXT LESSON</a:t>
+            </a:r>
+            <a:endParaRPr lang="en-US" sz="1400" dirty="0"/>
+          </a:p>
+        </p:txBody>
+      </p:sp>
+      <p:pic>
+        <p:nvPicPr>
+          <p:cNvPr id="3" name="Image 0" descr="/home/claude/f4/img/minesec_sheet.png">    </p:cNvPr>
+          <p:cNvPicPr>
+            <a:picLocks noChangeAspect="1"/>
+          </p:cNvPicPr>
+          <p:nvPr/>
+        </p:nvPicPr>
+        <p:blipFill>
+          <a:blip r:embed="rId1"/>
+          <a:stretch>
+            <a:fillRect/>
+          </a:stretch>
+        </p:blipFill>
+        <p:spPr>
+          <a:xfrm>
+            <a:off x="0" y="658368"/>
+            <a:ext cx="5120640" cy="5833872"/>
+          </a:xfrm>
+          <a:prstGeom prst="rect">
+            <a:avLst/>
+          </a:prstGeom>
+        </p:spPr>
+      </p:pic>
+      <p:sp>
+        <p:nvSpPr>
+          <p:cNvPr id="4" name="Text 1"/>
+          <p:cNvSpPr/>
+          <p:nvPr/>
+        </p:nvSpPr>
+        <p:spPr>
+          <a:xfrm>
+            <a:off x="5349240" y="1005840"/>
+            <a:ext cx="6522415" cy="731520"/>
+          </a:xfrm>
+          <a:prstGeom prst="rect">
+            <a:avLst/>
+          </a:prstGeom>
+          <a:noFill/>
+          <a:ln/>
+        </p:spPr>
+        <p:txBody>
+          <a:bodyPr wrap="square" lIns="0" tIns="0" rIns="0" bIns="0" rtlCol="0" anchor="ctr">
+            <a:normAutofit/>
+          </a:bodyPr>
+          <a:lstStyle/>
+          <a:p>
+            <a:pPr algn="ctr" indent="0" marL="0">
+              <a:buNone/>
+            </a:pPr>
+            <a:r>
+              <a:rPr lang="en-US" sz="3600" b="1" dirty="0">
+                <a:solidFill>
+                  <a:srgbClr val="990011"/>
+                </a:solidFill>
+                <a:latin typeface="Times New Roman" pitchFamily="34" charset="0"/>
+                <a:ea typeface="Times New Roman" pitchFamily="34" charset="-122"/>
+                <a:cs typeface="Times New Roman" pitchFamily="34" charset="-120"/>
+              </a:rPr>
+              <a:t>Next Lesson</a:t>
+            </a:r>
+            <a:endParaRPr lang="en-US" sz="3600" dirty="0"/>
+          </a:p>
+        </p:txBody>
+      </p:sp>
+      <p:sp>
+        <p:nvSpPr>
+          <p:cNvPr id="5" name="Text 2"/>
+          <p:cNvSpPr/>
+          <p:nvPr/>
+        </p:nvSpPr>
+        <p:spPr>
+          <a:xfrm>
+            <a:off x="5349240" y="1783080"/>
+            <a:ext cx="6522415" cy="4663440"/>
+          </a:xfrm>
+          <a:prstGeom prst="rect">
+            <a:avLst/>
+          </a:prstGeom>
+          <a:noFill/>
+          <a:ln/>
+        </p:spPr>
+        <p:txBody>
+          <a:bodyPr wrap="square" lIns="0" tIns="0" rIns="0" bIns="0" rtlCol="0" anchor="ctr"/>
+          <a:lstStyle/>
+          <a:p>
+            <a:pPr algn="ctr" indent="0" marL="0">
+              <a:spcAft>
+                <a:spcPts val="800"/>
+              </a:spcAft>
+              <a:buNone/>
+            </a:pPr>
+            <a:r>
+              <a:rPr lang="en-US" sz="4000" b="1" dirty="0">
+                <a:solidFill>
+                  <a:srgbClr val="111111"/>
+                </a:solidFill>
+                <a:latin typeface="Times New Roman" pitchFamily="34" charset="0"/>
+                <a:ea typeface="Times New Roman" pitchFamily="34" charset="-122"/>
+                <a:cs typeface="Times New Roman" pitchFamily="34" charset="-120"/>
+              </a:rPr>
+              <a:t>Our next lesson will be on:</a:t>
+            </a:r>
+            <a:endParaRPr lang="en-US" sz="4000" dirty="0"/>
+          </a:p>
+          <a:p>
+            <a:pPr algn="ctr" indent="0" marL="0">
+              <a:spcAft>
+                <a:spcPts val="800"/>
+              </a:spcAft>
+              <a:buNone/>
+            </a:pPr>
+            <a:r>
+              <a:rPr lang="en-US" sz="4000" b="1" dirty="0">
+                <a:solidFill>
+                  <a:srgbClr val="990011"/>
+                </a:solidFill>
+                <a:latin typeface="Times New Roman" pitchFamily="34" charset="0"/>
+                <a:ea typeface="Times New Roman" pitchFamily="34" charset="-122"/>
+                <a:cs typeface="Times New Roman" pitchFamily="34" charset="-120"/>
+              </a:rPr>
+              <a:t>Lesson 27: Semi-Arid and Desert Landscapes</a:t>
+            </a:r>
+            <a:endParaRPr lang="en-US" sz="4000" dirty="0"/>
+          </a:p>
+        </p:txBody>
+      </p:sp>
+      <p:sp>
+        <p:nvSpPr>
+          <p:cNvPr id="25" name="Slide Number Placeholder 0"/>
+          <p:cNvSpPr>
+            <a:spLocks noGrp="1"/>
+          </p:cNvSpPr>
+          <p:nvPr>
+            <p:ph type="sldNum" sz="quarter" idx="4294967295"/>
+          </p:nvPr>
+        </p:nvSpPr>
+        <p:spPr>
+          <a:xfrm>
+            <a:off x="27432" y="91440"/>
+            <a:ext cx="585216" cy="475488"/>
+          </a:xfrm>
+          <a:prstGeom prst="rect">
+            <a:avLst/>
+          </a:prstGeom>
+          <a:extLst>
+            <a:ext uri="{C572A759-6A51-4108-AA02-DFA0A04FC94B}">
+              <ma14:wrappingTextBoxFlag xmlns:ma14="http://schemas.microsoft.com/office/mac/drawingml/2011/main" val="0"/>
+            </a:ext>
+          </a:extLst>
+        </p:spPr>
+        <p:txBody>
+          <a:bodyPr/>
+          <a:lstStyle>
+            <a:lvl1pPr>
+              <a:defRPr sz="2000">
+                <a:solidFill>
+                  <a:srgbClr val="FFFFFF"/>
+                </a:solidFill>
+                <a:latin typeface="Calibri"/>
+                <a:ea typeface="Calibri"/>
+                <a:cs typeface="Calibri"/>
+              </a:defRPr>
+            </a:lvl1pPr>
+          </a:lstStyle>
+          <a:p>
+            <a:pPr algn="ctr"/>
+            <a:fld id="{F7021451-1387-4CA6-816F-3879F97B5CBC}" type="slidenum">
+              <a:rPr b="1" lang="en-US"/>
+              <a:t>49</a:t>
+            </a:fld>
+            <a:endParaRPr lang="en-US"/>
+          </a:p>
+        </p:txBody>
+      </p:sp>
+    </p:spTree>
+  </p:cSld>
+  <p:clrMapOvr>
+    <a:masterClrMapping/>
+  </p:clrMapOvr>
+</p:sld>
+</file>
+
+<file path=ppt/slides/slide5.xml><?xml version="1.0" encoding="utf-8"?>
+<p:sld xmlns:a="http://schemas.openxmlformats.org/drawingml/2006/main" xmlns:r="http://schemas.openxmlformats.org/officeDocument/2006/relationships" xmlns:p="http://schemas.openxmlformats.org/presentationml/2006/main">
+  <p:cSld name="Slide 5">
+    <p:spTree>
+      <p:nvGrpSpPr>
+        <p:cNvPr id="1" name=""/>
+        <p:cNvGrpSpPr/>
+        <p:nvPr/>
+      </p:nvGrpSpPr>
+      <p:grpSpPr>
+        <a:xfrm>
+          <a:off x="0" y="0"/>
+          <a:ext cx="0" cy="0"/>
+          <a:chOff x="0" y="0"/>
+          <a:chExt cx="0" cy="0"/>
+        </a:xfrm>
+      </p:grpSpPr>
+      <p:sp>
+        <p:nvSpPr>
+          <p:cNvPr id="2" name="Text 0"/>
+          <p:cNvSpPr/>
+          <p:nvPr/>
+        </p:nvSpPr>
+        <p:spPr>
+          <a:xfrm>
+            <a:off x="457200" y="713232"/>
+            <a:ext cx="11368735" cy="274320"/>
+          </a:xfrm>
+          <a:prstGeom prst="rect">
+            <a:avLst/>
+          </a:prstGeom>
+          <a:noFill/>
+          <a:ln/>
+        </p:spPr>
+        <p:txBody>
+          <a:bodyPr wrap="square" lIns="0" tIns="0" rIns="0" bIns="0" rtlCol="0" anchor="ctr"/>
+          <a:lstStyle/>
+          <a:p>
+            <a:pPr algn="r" indent="0" marL="0">
+              <a:buNone/>
+            </a:pPr>
+            <a:r>
+              <a:rPr lang="en-US" sz="1400" b="1" dirty="0">
+                <a:solidFill>
+                  <a:srgbClr val="1C3F6E"/>
+                </a:solidFill>
+                <a:latin typeface="Calibri" pitchFamily="34" charset="0"/>
+                <a:ea typeface="Calibri" pitchFamily="34" charset="-122"/>
+                <a:cs typeface="Calibri" pitchFamily="34" charset="-120"/>
+              </a:rPr>
+              <a:t>HOMEWORK CORRECTION</a:t>
+            </a:r>
+            <a:endParaRPr lang="en-US" sz="1400" dirty="0"/>
+          </a:p>
+        </p:txBody>
+      </p:sp>
+      <p:pic>
+        <p:nvPicPr>
+          <p:cNvPr id="3" name="Image 0" descr="/home/claude/f4/img/minesec_sheet.png">    </p:cNvPr>
+          <p:cNvPicPr>
+            <a:picLocks noChangeAspect="1"/>
+          </p:cNvPicPr>
+          <p:nvPr/>
+        </p:nvPicPr>
+        <p:blipFill>
+          <a:blip r:embed="rId1"/>
+          <a:stretch>
+            <a:fillRect/>
+          </a:stretch>
+        </p:blipFill>
+        <p:spPr>
+          <a:xfrm>
+            <a:off x="0" y="658368"/>
+            <a:ext cx="5120640" cy="5833872"/>
+          </a:xfrm>
+          <a:prstGeom prst="rect">
+            <a:avLst/>
+          </a:prstGeom>
+        </p:spPr>
+      </p:pic>
+      <p:sp>
+        <p:nvSpPr>
+          <p:cNvPr id="4" name="Text 1"/>
+          <p:cNvSpPr/>
+          <p:nvPr/>
+        </p:nvSpPr>
+        <p:spPr>
+          <a:xfrm>
+            <a:off x="5349240" y="1005840"/>
+            <a:ext cx="6522415" cy="731520"/>
+          </a:xfrm>
+          <a:prstGeom prst="rect">
+            <a:avLst/>
+          </a:prstGeom>
+          <a:noFill/>
+          <a:ln/>
+        </p:spPr>
+        <p:txBody>
+          <a:bodyPr wrap="square" lIns="0" tIns="0" rIns="0" bIns="0" rtlCol="0" anchor="ctr">
+            <a:normAutofit/>
+          </a:bodyPr>
+          <a:lstStyle/>
+          <a:p>
+            <a:pPr algn="ctr" indent="0" marL="0">
+              <a:buNone/>
+            </a:pPr>
+            <a:r>
+              <a:rPr lang="en-US" sz="3600" b="1" dirty="0">
+                <a:solidFill>
+                  <a:srgbClr val="990011"/>
+                </a:solidFill>
+                <a:latin typeface="Times New Roman" pitchFamily="34" charset="0"/>
+                <a:ea typeface="Times New Roman" pitchFamily="34" charset="-122"/>
+                <a:cs typeface="Times New Roman" pitchFamily="34" charset="-120"/>
+              </a:rPr>
+              <a:t>Correction: Possible Answer</a:t>
+            </a:r>
+            <a:endParaRPr lang="en-US" sz="3600" dirty="0"/>
+          </a:p>
+        </p:txBody>
+      </p:sp>
+      <p:sp>
+        <p:nvSpPr>
+          <p:cNvPr id="5" name="Text 2"/>
+          <p:cNvSpPr/>
+          <p:nvPr/>
+        </p:nvSpPr>
+        <p:spPr>
+          <a:xfrm>
+            <a:off x="5349240" y="1783080"/>
+            <a:ext cx="6522415" cy="4663440"/>
+          </a:xfrm>
+          <a:prstGeom prst="rect">
+            <a:avLst/>
+          </a:prstGeom>
+          <a:noFill/>
+          <a:ln/>
+        </p:spPr>
+        <p:txBody>
+          <a:bodyPr wrap="square" lIns="0" tIns="0" rIns="0" bIns="0" rtlCol="0" anchor="t"/>
+          <a:lstStyle/>
+          <a:p>
+            <a:pPr algn="l" indent="0" marL="0">
+              <a:spcAft>
+                <a:spcPts val="800"/>
+              </a:spcAft>
+              <a:buNone/>
+            </a:pPr>
+            <a:r>
+              <a:rPr lang="en-US" sz="4000" dirty="0">
+                <a:solidFill>
+                  <a:srgbClr val="111111"/>
+                </a:solidFill>
+                <a:latin typeface="Times New Roman" pitchFamily="34" charset="0"/>
+                <a:ea typeface="Times New Roman" pitchFamily="34" charset="-122"/>
+                <a:cs typeface="Times New Roman" pitchFamily="34" charset="-120"/>
+              </a:rPr>
+              <a:t>Douala and Kribi.</a:t>
+            </a:r>
+            <a:endParaRPr lang="en-US" sz="4000" dirty="0"/>
+          </a:p>
+        </p:txBody>
+      </p:sp>
+      <p:sp>
+        <p:nvSpPr>
+          <p:cNvPr id="25" name="Slide Number Placeholder 0"/>
+          <p:cNvSpPr>
+            <a:spLocks noGrp="1"/>
+          </p:cNvSpPr>
+          <p:nvPr>
+            <p:ph type="sldNum" sz="quarter" idx="4294967295"/>
+          </p:nvPr>
+        </p:nvSpPr>
+        <p:spPr>
+          <a:xfrm>
+            <a:off x="27432" y="91440"/>
+            <a:ext cx="585216" cy="475488"/>
+          </a:xfrm>
+          <a:prstGeom prst="rect">
+            <a:avLst/>
+          </a:prstGeom>
+          <a:extLst>
+            <a:ext uri="{C572A759-6A51-4108-AA02-DFA0A04FC94B}">
+              <ma14:wrappingTextBoxFlag xmlns:ma14="http://schemas.microsoft.com/office/mac/drawingml/2011/main" val="0"/>
+            </a:ext>
+          </a:extLst>
+        </p:spPr>
+        <p:txBody>
+          <a:bodyPr/>
+          <a:lstStyle>
+            <a:lvl1pPr>
+              <a:defRPr sz="2000">
+                <a:solidFill>
+                  <a:srgbClr val="FFFFFF"/>
+                </a:solidFill>
+                <a:latin typeface="Calibri"/>
+                <a:ea typeface="Calibri"/>
+                <a:cs typeface="Calibri"/>
+              </a:defRPr>
+            </a:lvl1pPr>
+          </a:lstStyle>
+          <a:p>
+            <a:pPr algn="ctr"/>
+            <a:fld id="{F7021451-1387-4CA6-816F-3879F97B5CBC}" type="slidenum">
+              <a:rPr b="1" lang="en-US"/>
+              <a:t>5</a:t>
+            </a:fld>
+            <a:endParaRPr lang="en-US"/>
+          </a:p>
+        </p:txBody>
+      </p:sp>
+    </p:spTree>
+  </p:cSld>
+  <p:clrMapOvr>
+    <a:masterClrMapping/>
+  </p:clrMapOvr>
+</p:sld>
+</file>
+
+<file path=ppt/slides/slide50.xml><?xml version="1.0" encoding="utf-8"?>
+<p:sld xmlns:a="http://schemas.openxmlformats.org/drawingml/2006/main" xmlns:r="http://schemas.openxmlformats.org/officeDocument/2006/relationships" xmlns:p="http://schemas.openxmlformats.org/presentationml/2006/main">
+  <p:cSld name="Slide 50">
+    <p:spTree>
+      <p:nvGrpSpPr>
+        <p:cNvPr id="1" name=""/>
+        <p:cNvGrpSpPr/>
+        <p:nvPr/>
+      </p:nvGrpSpPr>
+      <p:grpSpPr>
+        <a:xfrm>
+          <a:off x="0" y="0"/>
+          <a:ext cx="0" cy="0"/>
+          <a:chOff x="0" y="0"/>
+          <a:chExt cx="0" cy="0"/>
+        </a:xfrm>
+      </p:grpSpPr>
+      <p:sp>
+        <p:nvSpPr>
+          <p:cNvPr id="2" name="Text 0"/>
+          <p:cNvSpPr/>
+          <p:nvPr/>
+        </p:nvSpPr>
+        <p:spPr>
+          <a:xfrm>
+            <a:off x="457200" y="713232"/>
+            <a:ext cx="11368735" cy="274320"/>
+          </a:xfrm>
+          <a:prstGeom prst="rect">
+            <a:avLst/>
+          </a:prstGeom>
+          <a:noFill/>
+          <a:ln/>
+        </p:spPr>
+        <p:txBody>
+          <a:bodyPr wrap="square" lIns="0" tIns="0" rIns="0" bIns="0" rtlCol="0" anchor="ctr"/>
+          <a:lstStyle/>
+          <a:p>
+            <a:pPr algn="r" indent="0" marL="0">
+              <a:buNone/>
+            </a:pPr>
+            <a:r>
+              <a:rPr lang="en-US" sz="1400" b="1" dirty="0">
+                <a:solidFill>
+                  <a:srgbClr val="1C3F6E"/>
+                </a:solidFill>
+                <a:latin typeface="Calibri" pitchFamily="34" charset="0"/>
+                <a:ea typeface="Calibri" pitchFamily="34" charset="-122"/>
+                <a:cs typeface="Calibri" pitchFamily="34" charset="-120"/>
+              </a:rPr>
               <a:t>BILINGUAL GAME</a:t>
             </a:r>
             <a:endParaRPr lang="en-US" sz="1400" dirty="0"/>
@@ -17818,7 +18345,7 @@
       </p:sp>
       <p:graphicFrame>
         <p:nvGraphicFramePr>
-          <p:cNvPr id="50" name="Table 0"/>
+          <p:cNvPr id="51" name="Table 0"/>
           <p:cNvGraphicFramePr>
             <a:graphicFrameLocks noGrp="1"/>
           </p:cNvGraphicFramePr>
@@ -19130,7 +19657,7 @@
             <a:pPr algn="ctr"/>
             <a:fld id="{F7021451-1387-4CA6-816F-3879F97B5CBC}" type="slidenum">
               <a:rPr b="1" lang="en-US"/>
-              <a:t>49</a:t>
+              <a:t>50</a:t>
             </a:fld>
             <a:endParaRPr lang="en-US"/>
           </a:p>
@@ -19144,9 +19671,9 @@
 </p:sld>
 </file>
 
-<file path=ppt/slides/slide5.xml><?xml version="1.0" encoding="utf-8"?>
+<file path=ppt/slides/slide51.xml><?xml version="1.0" encoding="utf-8"?>
 <p:sld xmlns:a="http://schemas.openxmlformats.org/drawingml/2006/main" xmlns:r="http://schemas.openxmlformats.org/officeDocument/2006/relationships" xmlns:p="http://schemas.openxmlformats.org/presentationml/2006/main">
-  <p:cSld name="Slide 5">
+  <p:cSld name="Slide 51">
     <p:spTree>
       <p:nvGrpSpPr>
         <p:cNvPr id="1" name=""/>
@@ -19194,225 +19721,6 @@
                 <a:ea typeface="Calibri" pitchFamily="34" charset="-122"/>
                 <a:cs typeface="Calibri" pitchFamily="34" charset="-120"/>
               </a:rPr>
-              <a:t>HOMEWORK CORRECTION</a:t>
-            </a:r>
-            <a:endParaRPr lang="en-US" sz="1400" dirty="0"/>
-          </a:p>
-        </p:txBody>
-      </p:sp>
-      <p:pic>
-        <p:nvPicPr>
-          <p:cNvPr id="3" name="Image 0" descr="/home/claude/f4/img/minesec_sheet.png">    </p:cNvPr>
-          <p:cNvPicPr>
-            <a:picLocks noChangeAspect="1"/>
-          </p:cNvPicPr>
-          <p:nvPr/>
-        </p:nvPicPr>
-        <p:blipFill>
-          <a:blip r:embed="rId1"/>
-          <a:stretch>
-            <a:fillRect/>
-          </a:stretch>
-        </p:blipFill>
-        <p:spPr>
-          <a:xfrm>
-            <a:off x="0" y="658368"/>
-            <a:ext cx="5120640" cy="5833872"/>
-          </a:xfrm>
-          <a:prstGeom prst="rect">
-            <a:avLst/>
-          </a:prstGeom>
-        </p:spPr>
-      </p:pic>
-      <p:sp>
-        <p:nvSpPr>
-          <p:cNvPr id="4" name="Text 1"/>
-          <p:cNvSpPr/>
-          <p:nvPr/>
-        </p:nvSpPr>
-        <p:spPr>
-          <a:xfrm>
-            <a:off x="5349240" y="1005840"/>
-            <a:ext cx="6522415" cy="731520"/>
-          </a:xfrm>
-          <a:prstGeom prst="rect">
-            <a:avLst/>
-          </a:prstGeom>
-          <a:noFill/>
-          <a:ln/>
-        </p:spPr>
-        <p:txBody>
-          <a:bodyPr wrap="square" lIns="0" tIns="0" rIns="0" bIns="0" rtlCol="0" anchor="ctr">
-            <a:normAutofit/>
-          </a:bodyPr>
-          <a:lstStyle/>
-          <a:p>
-            <a:pPr algn="ctr" indent="0" marL="0">
-              <a:buNone/>
-            </a:pPr>
-            <a:r>
-              <a:rPr lang="en-US" sz="3600" b="1" dirty="0">
-                <a:solidFill>
-                  <a:srgbClr val="990011"/>
-                </a:solidFill>
-                <a:latin typeface="Times New Roman" pitchFamily="34" charset="0"/>
-                <a:ea typeface="Times New Roman" pitchFamily="34" charset="-122"/>
-                <a:cs typeface="Times New Roman" pitchFamily="34" charset="-120"/>
-              </a:rPr>
-              <a:t>Correction: Possible Answer</a:t>
-            </a:r>
-            <a:endParaRPr lang="en-US" sz="3600" dirty="0"/>
-          </a:p>
-        </p:txBody>
-      </p:sp>
-      <p:sp>
-        <p:nvSpPr>
-          <p:cNvPr id="5" name="Text 2"/>
-          <p:cNvSpPr/>
-          <p:nvPr/>
-        </p:nvSpPr>
-        <p:spPr>
-          <a:xfrm>
-            <a:off x="5349240" y="1783080"/>
-            <a:ext cx="6522415" cy="4663440"/>
-          </a:xfrm>
-          <a:prstGeom prst="rect">
-            <a:avLst/>
-          </a:prstGeom>
-          <a:noFill/>
-          <a:ln/>
-        </p:spPr>
-        <p:txBody>
-          <a:bodyPr wrap="square" lIns="0" tIns="0" rIns="0" bIns="0" rtlCol="0" anchor="t"/>
-          <a:lstStyle/>
-          <a:p>
-            <a:pPr algn="l" indent="0" marL="0">
-              <a:spcAft>
-                <a:spcPts val="800"/>
-              </a:spcAft>
-              <a:buNone/>
-            </a:pPr>
-            <a:r>
-              <a:rPr lang="en-US" sz="4000" dirty="0">
-                <a:solidFill>
-                  <a:srgbClr val="111111"/>
-                </a:solidFill>
-                <a:latin typeface="Times New Roman" pitchFamily="34" charset="0"/>
-                <a:ea typeface="Times New Roman" pitchFamily="34" charset="-122"/>
-                <a:cs typeface="Times New Roman" pitchFamily="34" charset="-120"/>
-              </a:rPr>
-              <a:t>Douala and Kribi.</a:t>
-            </a:r>
-            <a:endParaRPr lang="en-US" sz="4000" dirty="0"/>
-          </a:p>
-        </p:txBody>
-      </p:sp>
-      <p:sp>
-        <p:nvSpPr>
-          <p:cNvPr id="25" name="Slide Number Placeholder 0"/>
-          <p:cNvSpPr>
-            <a:spLocks noGrp="1"/>
-          </p:cNvSpPr>
-          <p:nvPr>
-            <p:ph type="sldNum" sz="quarter" idx="4294967295"/>
-          </p:nvPr>
-        </p:nvSpPr>
-        <p:spPr>
-          <a:xfrm>
-            <a:off x="27432" y="91440"/>
-            <a:ext cx="585216" cy="475488"/>
-          </a:xfrm>
-          <a:prstGeom prst="rect">
-            <a:avLst/>
-          </a:prstGeom>
-          <a:extLst>
-            <a:ext uri="{C572A759-6A51-4108-AA02-DFA0A04FC94B}">
-              <ma14:wrappingTextBoxFlag xmlns:ma14="http://schemas.microsoft.com/office/mac/drawingml/2011/main" val="0"/>
-            </a:ext>
-          </a:extLst>
-        </p:spPr>
-        <p:txBody>
-          <a:bodyPr/>
-          <a:lstStyle>
-            <a:lvl1pPr>
-              <a:defRPr sz="2000">
-                <a:solidFill>
-                  <a:srgbClr val="FFFFFF"/>
-                </a:solidFill>
-                <a:latin typeface="Calibri"/>
-                <a:ea typeface="Calibri"/>
-                <a:cs typeface="Calibri"/>
-              </a:defRPr>
-            </a:lvl1pPr>
-          </a:lstStyle>
-          <a:p>
-            <a:pPr algn="ctr"/>
-            <a:fld id="{F7021451-1387-4CA6-816F-3879F97B5CBC}" type="slidenum">
-              <a:rPr b="1" lang="en-US"/>
-              <a:t>5</a:t>
-            </a:fld>
-            <a:endParaRPr lang="en-US"/>
-          </a:p>
-        </p:txBody>
-      </p:sp>
-    </p:spTree>
-  </p:cSld>
-  <p:clrMapOvr>
-    <a:masterClrMapping/>
-  </p:clrMapOvr>
-</p:sld>
-</file>
-
-<file path=ppt/slides/slide50.xml><?xml version="1.0" encoding="utf-8"?>
-<p:sld xmlns:a="http://schemas.openxmlformats.org/drawingml/2006/main" xmlns:r="http://schemas.openxmlformats.org/officeDocument/2006/relationships" xmlns:p="http://schemas.openxmlformats.org/presentationml/2006/main">
-  <p:cSld name="Slide 50">
-    <p:spTree>
-      <p:nvGrpSpPr>
-        <p:cNvPr id="1" name=""/>
-        <p:cNvGrpSpPr/>
-        <p:nvPr/>
-      </p:nvGrpSpPr>
-      <p:grpSpPr>
-        <a:xfrm>
-          <a:off x="0" y="0"/>
-          <a:ext cx="0" cy="0"/>
-          <a:chOff x="0" y="0"/>
-          <a:chExt cx="0" cy="0"/>
-        </a:xfrm>
-      </p:grpSpPr>
-      <p:sp>
-        <p:nvSpPr>
-          <p:cNvPr id="2" name="Text 0"/>
-          <p:cNvSpPr/>
-          <p:nvPr/>
-        </p:nvSpPr>
-        <p:spPr>
-          <a:xfrm>
-            <a:off x="457200" y="713232"/>
-            <a:ext cx="11368735" cy="274320"/>
-          </a:xfrm>
-          <a:prstGeom prst="rect">
-            <a:avLst/>
-          </a:prstGeom>
-          <a:noFill/>
-          <a:ln/>
-        </p:spPr>
-        <p:txBody>
-          <a:bodyPr wrap="square" lIns="0" tIns="0" rIns="0" bIns="0" rtlCol="0" anchor="ctr"/>
-          <a:lstStyle/>
-          <a:p>
-            <a:pPr algn="r" indent="0" marL="0">
-              <a:buNone/>
-            </a:pPr>
-            <a:r>
-              <a:rPr lang="en-US" sz="1400" b="1" dirty="0">
-                <a:solidFill>
-                  <a:srgbClr val="1C3F6E"/>
-                </a:solidFill>
-                <a:latin typeface="Calibri" pitchFamily="34" charset="0"/>
-                <a:ea typeface="Calibri" pitchFamily="34" charset="-122"/>
-                <a:cs typeface="Calibri" pitchFamily="34" charset="-120"/>
-              </a:rPr>
               <a:t>LOGBOOK</a:t>
             </a:r>
             <a:endParaRPr lang="en-US" sz="1400" dirty="0"/>
@@ -19460,7 +19768,7 @@
       </p:sp>
       <p:graphicFrame>
         <p:nvGraphicFramePr>
-          <p:cNvPr id="51" name="Table 0"/>
+          <p:cNvPr id="52" name="Table 0"/>
           <p:cNvGraphicFramePr>
             <a:graphicFrameLocks noGrp="1"/>
           </p:cNvGraphicFramePr>
@@ -20082,7 +20390,7 @@
             <a:pPr algn="ctr"/>
             <a:fld id="{F7021451-1387-4CA6-816F-3879F97B5CBC}" type="slidenum">
               <a:rPr b="1" lang="en-US"/>
-              <a:t>50</a:t>
+              <a:t>51</a:t>
             </a:fld>
             <a:endParaRPr lang="en-US"/>
           </a:p>
@@ -20096,9 +20404,9 @@
 </p:sld>
 </file>
 
-<file path=ppt/slides/slide51.xml><?xml version="1.0" encoding="utf-8"?>
+<file path=ppt/slides/slide52.xml><?xml version="1.0" encoding="utf-8"?>
 <p:sld xmlns:a="http://schemas.openxmlformats.org/drawingml/2006/main" xmlns:r="http://schemas.openxmlformats.org/officeDocument/2006/relationships" xmlns:p="http://schemas.openxmlformats.org/presentationml/2006/main">
-  <p:cSld name="Slide 51">
+  <p:cSld name="Slide 52">
     <p:spTree>
       <p:nvGrpSpPr>
         <p:cNvPr id="1" name=""/>
@@ -20193,7 +20501,7 @@
       </p:sp>
       <p:graphicFrame>
         <p:nvGraphicFramePr>
-          <p:cNvPr id="52" name="Table 0"/>
+          <p:cNvPr id="53" name="Table 0"/>
           <p:cNvGraphicFramePr>
             <a:graphicFrameLocks noGrp="1"/>
           </p:cNvGraphicFramePr>
@@ -20953,289 +21261,6 @@
             <a:pPr algn="ctr"/>
             <a:fld id="{F7021451-1387-4CA6-816F-3879F97B5CBC}" type="slidenum">
               <a:rPr b="1" lang="en-US"/>
-              <a:t>51</a:t>
-            </a:fld>
-            <a:endParaRPr lang="en-US"/>
-          </a:p>
-        </p:txBody>
-      </p:sp>
-    </p:spTree>
-  </p:cSld>
-  <p:clrMapOvr>
-    <a:masterClrMapping/>
-  </p:clrMapOvr>
-</p:sld>
-</file>
-
-<file path=ppt/slides/slide52.xml><?xml version="1.0" encoding="utf-8"?>
-<p:sld xmlns:a="http://schemas.openxmlformats.org/drawingml/2006/main" xmlns:r="http://schemas.openxmlformats.org/officeDocument/2006/relationships" xmlns:p="http://schemas.openxmlformats.org/presentationml/2006/main">
-  <p:cSld name="Slide 52">
-    <p:spTree>
-      <p:nvGrpSpPr>
-        <p:cNvPr id="1" name=""/>
-        <p:cNvGrpSpPr/>
-        <p:nvPr/>
-      </p:nvGrpSpPr>
-      <p:grpSpPr>
-        <a:xfrm>
-          <a:off x="0" y="0"/>
-          <a:ext cx="0" cy="0"/>
-          <a:chOff x="0" y="0"/>
-          <a:chExt cx="0" cy="0"/>
-        </a:xfrm>
-      </p:grpSpPr>
-      <p:sp>
-        <p:nvSpPr>
-          <p:cNvPr id="2" name="Text 0"/>
-          <p:cNvSpPr/>
-          <p:nvPr/>
-        </p:nvSpPr>
-        <p:spPr>
-          <a:xfrm>
-            <a:off x="457200" y="713232"/>
-            <a:ext cx="11368735" cy="274320"/>
-          </a:xfrm>
-          <a:prstGeom prst="rect">
-            <a:avLst/>
-          </a:prstGeom>
-          <a:noFill/>
-          <a:ln/>
-        </p:spPr>
-        <p:txBody>
-          <a:bodyPr wrap="square" lIns="0" tIns="0" rIns="0" bIns="0" rtlCol="0" anchor="ctr"/>
-          <a:lstStyle/>
-          <a:p>
-            <a:pPr algn="r" indent="0" marL="0">
-              <a:buNone/>
-            </a:pPr>
-            <a:r>
-              <a:rPr lang="en-US" sz="1400" b="1" dirty="0">
-                <a:solidFill>
-                  <a:srgbClr val="1C3F6E"/>
-                </a:solidFill>
-                <a:latin typeface="Calibri" pitchFamily="34" charset="0"/>
-                <a:ea typeface="Calibri" pitchFamily="34" charset="-122"/>
-                <a:cs typeface="Calibri" pitchFamily="34" charset="-120"/>
-              </a:rPr>
-              <a:t>TEACHER'S NOTE</a:t>
-            </a:r>
-            <a:endParaRPr lang="en-US" sz="1400" dirty="0"/>
-          </a:p>
-        </p:txBody>
-      </p:sp>
-      <p:pic>
-        <p:nvPicPr>
-          <p:cNvPr id="3" name="Image 0" descr="/home/claude/f4/img/minesec_sheet.png">    </p:cNvPr>
-          <p:cNvPicPr>
-            <a:picLocks noChangeAspect="1"/>
-          </p:cNvPicPr>
-          <p:nvPr/>
-        </p:nvPicPr>
-        <p:blipFill>
-          <a:blip r:embed="rId1"/>
-          <a:stretch>
-            <a:fillRect/>
-          </a:stretch>
-        </p:blipFill>
-        <p:spPr>
-          <a:xfrm>
-            <a:off x="0" y="658368"/>
-            <a:ext cx="5120640" cy="5833872"/>
-          </a:xfrm>
-          <a:prstGeom prst="rect">
-            <a:avLst/>
-          </a:prstGeom>
-        </p:spPr>
-      </p:pic>
-      <p:sp>
-        <p:nvSpPr>
-          <p:cNvPr id="4" name="Text 1"/>
-          <p:cNvSpPr/>
-          <p:nvPr/>
-        </p:nvSpPr>
-        <p:spPr>
-          <a:xfrm>
-            <a:off x="5349240" y="1005840"/>
-            <a:ext cx="6522415" cy="731520"/>
-          </a:xfrm>
-          <a:prstGeom prst="rect">
-            <a:avLst/>
-          </a:prstGeom>
-          <a:noFill/>
-          <a:ln/>
-        </p:spPr>
-        <p:txBody>
-          <a:bodyPr wrap="square" lIns="0" tIns="0" rIns="0" bIns="0" rtlCol="0" anchor="ctr">
-            <a:normAutofit/>
-          </a:bodyPr>
-          <a:lstStyle/>
-          <a:p>
-            <a:pPr algn="ctr" indent="0" marL="0">
-              <a:buNone/>
-            </a:pPr>
-            <a:r>
-              <a:rPr lang="en-US" sz="3600" b="1" dirty="0">
-                <a:solidFill>
-                  <a:srgbClr val="990011"/>
-                </a:solidFill>
-                <a:latin typeface="Times New Roman" pitchFamily="34" charset="0"/>
-                <a:ea typeface="Times New Roman" pitchFamily="34" charset="-122"/>
-                <a:cs typeface="Times New Roman" pitchFamily="34" charset="-120"/>
-              </a:rPr>
-              <a:t>Teacher's Note</a:t>
-            </a:r>
-            <a:endParaRPr lang="en-US" sz="3600" dirty="0"/>
-          </a:p>
-        </p:txBody>
-      </p:sp>
-      <p:sp>
-        <p:nvSpPr>
-          <p:cNvPr id="5" name="Text 2"/>
-          <p:cNvSpPr/>
-          <p:nvPr/>
-        </p:nvSpPr>
-        <p:spPr>
-          <a:xfrm>
-            <a:off x="5349240" y="1783080"/>
-            <a:ext cx="6522415" cy="4663440"/>
-          </a:xfrm>
-          <a:prstGeom prst="rect">
-            <a:avLst/>
-          </a:prstGeom>
-          <a:noFill/>
-          <a:ln/>
-        </p:spPr>
-        <p:txBody>
-          <a:bodyPr wrap="square" lIns="0" tIns="0" rIns="0" bIns="0" rtlCol="0" anchor="t"/>
-          <a:lstStyle/>
-          <a:p>
-            <a:pPr algn="l" marL="342900" indent="-342900">
-              <a:spcAft>
-                <a:spcPts val="800"/>
-              </a:spcAft>
-              <a:buSzPct val="100000"/>
-              <a:buChar char="•"/>
-            </a:pPr>
-            <a:r>
-              <a:rPr lang="en-US" sz="2000" dirty="0">
-                <a:solidFill>
-                  <a:srgbClr val="111111"/>
-                </a:solidFill>
-                <a:latin typeface="Calibri" pitchFamily="34" charset="0"/>
-                <a:ea typeface="Calibri" pitchFamily="34" charset="-122"/>
-                <a:cs typeface="Calibri" pitchFamily="34" charset="-120"/>
-              </a:rPr>
-              <a:t>Timing: Homework correction, plan, objectives 4 min | Recall, situation, action 6 min | 3 activities 12 min | Board summary (copying) 15 min | Evaluation, remediation 5 min | Homework, next lesson 3 min | Logbook 5 min</a:t>
-            </a:r>
-            <a:endParaRPr lang="en-US" sz="2000" dirty="0"/>
-          </a:p>
-          <a:p>
-            <a:pPr algn="l" marL="342900" indent="-342900">
-              <a:spcAft>
-                <a:spcPts val="800"/>
-              </a:spcAft>
-              <a:buSzPct val="100000"/>
-              <a:buChar char="•"/>
-            </a:pPr>
-            <a:r>
-              <a:rPr lang="en-US" sz="2000" dirty="0">
-                <a:solidFill>
-                  <a:srgbClr val="111111"/>
-                </a:solidFill>
-                <a:latin typeface="Calibri" pitchFamily="34" charset="0"/>
-                <a:ea typeface="Calibri" pitchFamily="34" charset="-122"/>
-                <a:cs typeface="Calibri" pitchFamily="34" charset="-120"/>
-              </a:rPr>
-              <a:t>Without the projector (Activity 1): name goods that come through Douala.</a:t>
-            </a:r>
-            <a:endParaRPr lang="en-US" sz="2000" dirty="0"/>
-          </a:p>
-          <a:p>
-            <a:pPr algn="l" marL="342900" indent="-342900">
-              <a:spcAft>
-                <a:spcPts val="800"/>
-              </a:spcAft>
-              <a:buSzPct val="100000"/>
-              <a:buChar char="•"/>
-            </a:pPr>
-            <a:r>
-              <a:rPr lang="en-US" sz="2000" dirty="0">
-                <a:solidFill>
-                  <a:srgbClr val="111111"/>
-                </a:solidFill>
-                <a:latin typeface="Calibri" pitchFamily="34" charset="0"/>
-                <a:ea typeface="Calibri" pitchFamily="34" charset="-122"/>
-                <a:cs typeface="Calibri" pitchFamily="34" charset="-120"/>
-              </a:rPr>
-              <a:t>Without the projector (Activity 2): describe coastal erosion at Kribi.</a:t>
-            </a:r>
-            <a:endParaRPr lang="en-US" sz="2000" dirty="0"/>
-          </a:p>
-          <a:p>
-            <a:pPr algn="l" marL="342900" indent="-342900">
-              <a:spcAft>
-                <a:spcPts val="800"/>
-              </a:spcAft>
-              <a:buSzPct val="100000"/>
-              <a:buChar char="•"/>
-            </a:pPr>
-            <a:r>
-              <a:rPr lang="en-US" sz="2000" dirty="0">
-                <a:solidFill>
-                  <a:srgbClr val="111111"/>
-                </a:solidFill>
-                <a:latin typeface="Calibri" pitchFamily="34" charset="0"/>
-                <a:ea typeface="Calibri" pitchFamily="34" charset="-122"/>
-                <a:cs typeface="Calibri" pitchFamily="34" charset="-120"/>
-              </a:rPr>
-              <a:t>Without the projector (Activity 3): draw a beach with groynes.</a:t>
-            </a:r>
-            <a:endParaRPr lang="en-US" sz="2000" dirty="0"/>
-          </a:p>
-        </p:txBody>
-      </p:sp>
-      <p:sp>
-        <p:nvSpPr>
-          <p:cNvPr id="25" name="Slide Number Placeholder 0"/>
-          <p:cNvSpPr>
-            <a:spLocks noGrp="1"/>
-          </p:cNvSpPr>
-          <p:nvPr>
-            <p:ph type="sldNum" sz="quarter" idx="4294967295"/>
-          </p:nvPr>
-        </p:nvSpPr>
-        <p:spPr>
-          <a:xfrm>
-            <a:off x="27432" y="91440"/>
-            <a:ext cx="585216" cy="475488"/>
-          </a:xfrm>
-          <a:prstGeom prst="rect">
-            <a:avLst/>
-          </a:prstGeom>
-          <a:extLst>
-            <a:ext uri="{C572A759-6A51-4108-AA02-DFA0A04FC94B}">
-              <ma14:wrappingTextBoxFlag xmlns:ma14="http://schemas.microsoft.com/office/mac/drawingml/2011/main" val="0"/>
-            </a:ext>
-          </a:extLst>
-        </p:spPr>
-        <p:txBody>
-          <a:bodyPr/>
-          <a:lstStyle>
-            <a:lvl1pPr>
-              <a:defRPr sz="2000">
-                <a:solidFill>
-                  <a:srgbClr val="FFFFFF"/>
-                </a:solidFill>
-                <a:latin typeface="Calibri"/>
-                <a:ea typeface="Calibri"/>
-                <a:cs typeface="Calibri"/>
-              </a:defRPr>
-            </a:lvl1pPr>
-          </a:lstStyle>
-          <a:p>
-            <a:pPr algn="ctr"/>
-            <a:fld id="{F7021451-1387-4CA6-816F-3879F97B5CBC}" type="slidenum">
-              <a:rPr b="1" lang="en-US"/>
               <a:t>52</a:t>
             </a:fld>
             <a:endParaRPr lang="en-US"/>
@@ -21300,7 +21325,7 @@
                 <a:ea typeface="Calibri" pitchFamily="34" charset="-122"/>
                 <a:cs typeface="Calibri" pitchFamily="34" charset="-120"/>
               </a:rPr>
-              <a:t>REFERENCES</a:t>
+              <a:t>TEACHER'S NOTE</a:t>
             </a:r>
             <a:endParaRPr lang="en-US" sz="1400" dirty="0"/>
           </a:p>
@@ -21323,7 +21348,7 @@
         <p:spPr>
           <a:xfrm>
             <a:off x="0" y="658368"/>
-            <a:ext cx="1463040" cy="5833872"/>
+            <a:ext cx="5120640" cy="5833872"/>
           </a:xfrm>
           <a:prstGeom prst="rect">
             <a:avLst/>
@@ -21338,8 +21363,8 @@
         </p:nvSpPr>
         <p:spPr>
           <a:xfrm>
-            <a:off x="1691640" y="1005840"/>
-            <a:ext cx="10180015" cy="731520"/>
+            <a:off x="5349240" y="1005840"/>
+            <a:ext cx="6522415" cy="731520"/>
           </a:xfrm>
           <a:prstGeom prst="rect">
             <a:avLst/>
@@ -21365,7 +21390,7 @@
                 <a:ea typeface="Times New Roman" pitchFamily="34" charset="-122"/>
                 <a:cs typeface="Times New Roman" pitchFamily="34" charset="-120"/>
               </a:rPr>
-              <a:t>References</a:t>
+              <a:t>Teacher's Note</a:t>
             </a:r>
             <a:endParaRPr lang="en-US" sz="3600" dirty="0"/>
           </a:p>
@@ -21379,8 +21404,8 @@
         </p:nvSpPr>
         <p:spPr>
           <a:xfrm>
-            <a:off x="1691640" y="1783080"/>
-            <a:ext cx="10180015" cy="4663440"/>
+            <a:off x="5349240" y="1783080"/>
+            <a:ext cx="6522415" cy="4663440"/>
           </a:xfrm>
           <a:prstGeom prst="rect">
             <a:avLst/>
@@ -21400,7 +21425,7 @@
               <a:buChar char="•"/>
             </a:pPr>
             <a:r>
-              <a:rPr lang="en-US" sz="1800" dirty="0">
+              <a:rPr lang="en-US" sz="2000" dirty="0">
                 <a:solidFill>
                   <a:srgbClr val="111111"/>
                 </a:solidFill>
@@ -21408,9 +21433,9 @@
                 <a:ea typeface="Calibri" pitchFamily="34" charset="-122"/>
                 <a:cs typeface="Calibri" pitchFamily="34" charset="-120"/>
               </a:rPr>
-              <a:t>National Geography Syllabus (MINESEC), Form 4 — Denudation Processes, Landforms and Impacts on Man.</a:t>
-            </a:r>
-            <a:endParaRPr lang="en-US" sz="1800" dirty="0"/>
+              <a:t>Timing: Homework correction, plan, objectives 4 min | Recall, situation, action 6 min | 3 activities 12 min | Board summary (copying) 15 min | Evaluation, remediation 5 min | Homework, next lesson 3 min | Logbook 5 min</a:t>
+            </a:r>
+            <a:endParaRPr lang="en-US" sz="2000" dirty="0"/>
           </a:p>
           <a:p>
             <a:pPr algn="l" marL="342900" indent="-342900">
@@ -21421,7 +21446,7 @@
               <a:buChar char="•"/>
             </a:pPr>
             <a:r>
-              <a:rPr lang="en-US" sz="1800" dirty="0">
+              <a:rPr lang="en-US" sz="2000" dirty="0">
                 <a:solidFill>
                   <a:srgbClr val="111111"/>
                 </a:solidFill>
@@ -21429,9 +21454,9 @@
                 <a:ea typeface="Calibri" pitchFamily="34" charset="-122"/>
                 <a:cs typeface="Calibri" pitchFamily="34" charset="-120"/>
               </a:rPr>
-              <a:t>Teacher's lesson notes (Form 4), checked and corrected where necessary.</a:t>
-            </a:r>
-            <a:endParaRPr lang="en-US" sz="1800" dirty="0"/>
+              <a:t>Without the projector (Activity 1): name goods that come through Douala.</a:t>
+            </a:r>
+            <a:endParaRPr lang="en-US" sz="2000" dirty="0"/>
           </a:p>
           <a:p>
             <a:pPr algn="l" marL="342900" indent="-342900">
@@ -21442,7 +21467,7 @@
               <a:buChar char="•"/>
             </a:pPr>
             <a:r>
-              <a:rPr lang="en-US" sz="1800" dirty="0">
+              <a:rPr lang="en-US" sz="2000" dirty="0">
                 <a:solidFill>
                   <a:srgbClr val="111111"/>
                 </a:solidFill>
@@ -21450,9 +21475,9 @@
                 <a:ea typeface="Calibri" pitchFamily="34" charset="-122"/>
                 <a:cs typeface="Calibri" pitchFamily="34" charset="-120"/>
               </a:rPr>
-              <a:t>Photo, Activity 1: “JAXPORT Welcomes Largest Container Ship To Date” by JAXPORT, CC BY-NC 2.0, via Flickr (https://www.flickr.com/photos/24847875@N05/17069054628)</a:t>
-            </a:r>
-            <a:endParaRPr lang="en-US" sz="1800" dirty="0"/>
+              <a:t>Without the projector (Activity 2): describe coastal erosion at Kribi.</a:t>
+            </a:r>
+            <a:endParaRPr lang="en-US" sz="2000" dirty="0"/>
           </a:p>
           <a:p>
             <a:pPr algn="l" marL="342900" indent="-342900">
@@ -21463,7 +21488,7 @@
               <a:buChar char="•"/>
             </a:pPr>
             <a:r>
-              <a:rPr lang="en-US" sz="1800" dirty="0">
+              <a:rPr lang="en-US" sz="2000" dirty="0">
                 <a:solidFill>
                   <a:srgbClr val="111111"/>
                 </a:solidFill>
@@ -21471,72 +21496,9 @@
                 <a:ea typeface="Calibri" pitchFamily="34" charset="-122"/>
                 <a:cs typeface="Calibri" pitchFamily="34" charset="-120"/>
               </a:rPr>
-              <a:t>Photo, Activity 2: “Wave Explosion, Monterey Bay, California” by John William Hammond, CC BY-NC-SA 2.0, via Flickr (https://www.flickr.com/photos/8398907@N02/16328053911)</a:t>
-            </a:r>
-            <a:endParaRPr lang="en-US" sz="1800" dirty="0"/>
-          </a:p>
-          <a:p>
-            <a:pPr algn="l" marL="342900" indent="-342900">
-              <a:spcAft>
-                <a:spcPts val="800"/>
-              </a:spcAft>
-              <a:buSzPct val="100000"/>
-              <a:buChar char="•"/>
-            </a:pPr>
-            <a:r>
-              <a:rPr lang="en-US" sz="1800" dirty="0">
-                <a:solidFill>
-                  <a:srgbClr val="111111"/>
-                </a:solidFill>
-                <a:latin typeface="Calibri" pitchFamily="34" charset="0"/>
-                <a:ea typeface="Calibri" pitchFamily="34" charset="-122"/>
-                <a:cs typeface="Calibri" pitchFamily="34" charset="-120"/>
-              </a:rPr>
-              <a:t>Photo, Activity 3: “Wooden groynes” by aevarg, CC BY 2.0, via Flickr (https://www.flickr.com/photos/25999920@N00/17139000460)</a:t>
-            </a:r>
-            <a:endParaRPr lang="en-US" sz="1800" dirty="0"/>
-          </a:p>
-          <a:p>
-            <a:pPr algn="l" marL="342900" indent="-342900">
-              <a:spcAft>
-                <a:spcPts val="800"/>
-              </a:spcAft>
-              <a:buSzPct val="100000"/>
-              <a:buChar char="•"/>
-            </a:pPr>
-            <a:r>
-              <a:rPr lang="en-US" sz="1800" dirty="0">
-                <a:solidFill>
-                  <a:srgbClr val="111111"/>
-                </a:solidFill>
-                <a:latin typeface="Calibri" pitchFamily="34" charset="0"/>
-                <a:ea typeface="Calibri" pitchFamily="34" charset="-122"/>
-                <a:cs typeface="Calibri" pitchFamily="34" charset="-120"/>
-              </a:rPr>
-              <a:t>Photo, board summary (Tourism): “Sunset in Limbe” by visulogik, CC BY 2.0, via Flickr (https://www.flickr.com/photos/55671677@N00/2202334428)</a:t>
-            </a:r>
-            <a:endParaRPr lang="en-US" sz="1800" dirty="0"/>
-          </a:p>
-          <a:p>
-            <a:pPr algn="l" marL="342900" indent="-342900">
-              <a:spcAft>
-                <a:spcPts val="800"/>
-              </a:spcAft>
-              <a:buSzPct val="100000"/>
-              <a:buChar char="•"/>
-            </a:pPr>
-            <a:r>
-              <a:rPr lang="en-US" sz="1800" dirty="0">
-                <a:solidFill>
-                  <a:srgbClr val="111111"/>
-                </a:solidFill>
-                <a:latin typeface="Calibri" pitchFamily="34" charset="0"/>
-                <a:ea typeface="Calibri" pitchFamily="34" charset="-122"/>
-                <a:cs typeface="Calibri" pitchFamily="34" charset="-120"/>
-              </a:rPr>
-              <a:t>Photo, board summary (Mangroves and trees): “Pitchavaram waterway - Mangrove forest” by Balaji.B Photography, CC BY 2.0, via Flickr (https://www.flickr.com/photos/81073027@N00/1745978833)</a:t>
-            </a:r>
-            <a:endParaRPr lang="en-US" sz="1800" dirty="0"/>
+              <a:t>Without the projector (Activity 3): draw a beach with groynes.</a:t>
+            </a:r>
+            <a:endParaRPr lang="en-US" sz="2000" dirty="0"/>
           </a:p>
         </p:txBody>
       </p:sp>
@@ -21669,7 +21631,7 @@
         <p:spPr>
           <a:xfrm>
             <a:off x="0" y="658368"/>
-            <a:ext cx="5120640" cy="5833872"/>
+            <a:ext cx="1463040" cy="5833872"/>
           </a:xfrm>
           <a:prstGeom prst="rect">
             <a:avLst/>
@@ -21684,8 +21646,8 @@
         </p:nvSpPr>
         <p:spPr>
           <a:xfrm>
-            <a:off x="5349240" y="1005840"/>
-            <a:ext cx="6522415" cy="731520"/>
+            <a:off x="1691640" y="1005840"/>
+            <a:ext cx="10180015" cy="731520"/>
           </a:xfrm>
           <a:prstGeom prst="rect">
             <a:avLst/>
@@ -21711,7 +21673,7 @@
                 <a:ea typeface="Times New Roman" pitchFamily="34" charset="-122"/>
                 <a:cs typeface="Times New Roman" pitchFamily="34" charset="-120"/>
               </a:rPr>
-              <a:t>References (continued)</a:t>
+              <a:t>References</a:t>
             </a:r>
             <a:endParaRPr lang="en-US" sz="3600" dirty="0"/>
           </a:p>
@@ -21725,8 +21687,8 @@
         </p:nvSpPr>
         <p:spPr>
           <a:xfrm>
-            <a:off x="5349240" y="1783080"/>
-            <a:ext cx="6522415" cy="4663440"/>
+            <a:off x="1691640" y="1783080"/>
+            <a:ext cx="10180015" cy="4663440"/>
           </a:xfrm>
           <a:prstGeom prst="rect">
             <a:avLst/>
@@ -21754,7 +21716,133 @@
                 <a:ea typeface="Calibri" pitchFamily="34" charset="-122"/>
                 <a:cs typeface="Calibri" pitchFamily="34" charset="-120"/>
               </a:rPr>
-              <a:t>Diagrams and animations: drawn for this lesson (Geography Department).</a:t>
+              <a:t>National Geography Syllabus (MINESEC), Form 4 — Denudation Processes, Landforms and Impacts on Man.</a:t>
+            </a:r>
+            <a:endParaRPr lang="en-US" sz="1800" dirty="0"/>
+          </a:p>
+          <a:p>
+            <a:pPr algn="l" marL="342900" indent="-342900">
+              <a:spcAft>
+                <a:spcPts val="800"/>
+              </a:spcAft>
+              <a:buSzPct val="100000"/>
+              <a:buChar char="•"/>
+            </a:pPr>
+            <a:r>
+              <a:rPr lang="en-US" sz="1800" dirty="0">
+                <a:solidFill>
+                  <a:srgbClr val="111111"/>
+                </a:solidFill>
+                <a:latin typeface="Calibri" pitchFamily="34" charset="0"/>
+                <a:ea typeface="Calibri" pitchFamily="34" charset="-122"/>
+                <a:cs typeface="Calibri" pitchFamily="34" charset="-120"/>
+              </a:rPr>
+              <a:t>Teacher's lesson notes (Form 4), checked and corrected where necessary.</a:t>
+            </a:r>
+            <a:endParaRPr lang="en-US" sz="1800" dirty="0"/>
+          </a:p>
+          <a:p>
+            <a:pPr algn="l" marL="342900" indent="-342900">
+              <a:spcAft>
+                <a:spcPts val="800"/>
+              </a:spcAft>
+              <a:buSzPct val="100000"/>
+              <a:buChar char="•"/>
+            </a:pPr>
+            <a:r>
+              <a:rPr lang="en-US" sz="1800" dirty="0">
+                <a:solidFill>
+                  <a:srgbClr val="111111"/>
+                </a:solidFill>
+                <a:latin typeface="Calibri" pitchFamily="34" charset="0"/>
+                <a:ea typeface="Calibri" pitchFamily="34" charset="-122"/>
+                <a:cs typeface="Calibri" pitchFamily="34" charset="-120"/>
+              </a:rPr>
+              <a:t>Photo, Activity 1: “JAXPORT Welcomes Largest Container Ship To Date” by JAXPORT, CC BY-NC 2.0, via Flickr (https://www.flickr.com/photos/24847875@N05/17069054628)</a:t>
+            </a:r>
+            <a:endParaRPr lang="en-US" sz="1800" dirty="0"/>
+          </a:p>
+          <a:p>
+            <a:pPr algn="l" marL="342900" indent="-342900">
+              <a:spcAft>
+                <a:spcPts val="800"/>
+              </a:spcAft>
+              <a:buSzPct val="100000"/>
+              <a:buChar char="•"/>
+            </a:pPr>
+            <a:r>
+              <a:rPr lang="en-US" sz="1800" dirty="0">
+                <a:solidFill>
+                  <a:srgbClr val="111111"/>
+                </a:solidFill>
+                <a:latin typeface="Calibri" pitchFamily="34" charset="0"/>
+                <a:ea typeface="Calibri" pitchFamily="34" charset="-122"/>
+                <a:cs typeface="Calibri" pitchFamily="34" charset="-120"/>
+              </a:rPr>
+              <a:t>Photo, Activity 2: “Wave Explosion, Monterey Bay, California” by John William Hammond, CC BY-NC-SA 2.0, via Flickr (https://www.flickr.com/photos/8398907@N02/16328053911)</a:t>
+            </a:r>
+            <a:endParaRPr lang="en-US" sz="1800" dirty="0"/>
+          </a:p>
+          <a:p>
+            <a:pPr algn="l" marL="342900" indent="-342900">
+              <a:spcAft>
+                <a:spcPts val="800"/>
+              </a:spcAft>
+              <a:buSzPct val="100000"/>
+              <a:buChar char="•"/>
+            </a:pPr>
+            <a:r>
+              <a:rPr lang="en-US" sz="1800" dirty="0">
+                <a:solidFill>
+                  <a:srgbClr val="111111"/>
+                </a:solidFill>
+                <a:latin typeface="Calibri" pitchFamily="34" charset="0"/>
+                <a:ea typeface="Calibri" pitchFamily="34" charset="-122"/>
+                <a:cs typeface="Calibri" pitchFamily="34" charset="-120"/>
+              </a:rPr>
+              <a:t>Photo, Activity 3: “Wooden groynes” by aevarg, CC BY 2.0, via Flickr (https://www.flickr.com/photos/25999920@N00/17139000460)</a:t>
+            </a:r>
+            <a:endParaRPr lang="en-US" sz="1800" dirty="0"/>
+          </a:p>
+          <a:p>
+            <a:pPr algn="l" marL="342900" indent="-342900">
+              <a:spcAft>
+                <a:spcPts val="800"/>
+              </a:spcAft>
+              <a:buSzPct val="100000"/>
+              <a:buChar char="•"/>
+            </a:pPr>
+            <a:r>
+              <a:rPr lang="en-US" sz="1800" dirty="0">
+                <a:solidFill>
+                  <a:srgbClr val="111111"/>
+                </a:solidFill>
+                <a:latin typeface="Calibri" pitchFamily="34" charset="0"/>
+                <a:ea typeface="Calibri" pitchFamily="34" charset="-122"/>
+                <a:cs typeface="Calibri" pitchFamily="34" charset="-120"/>
+              </a:rPr>
+              <a:t>Photo, board summary (Tourism): “Sunset in Limbe” by visulogik, CC BY 2.0, via Flickr (https://www.flickr.com/photos/55671677@N00/2202334428)</a:t>
+            </a:r>
+            <a:endParaRPr lang="en-US" sz="1800" dirty="0"/>
+          </a:p>
+          <a:p>
+            <a:pPr algn="l" marL="342900" indent="-342900">
+              <a:spcAft>
+                <a:spcPts val="800"/>
+              </a:spcAft>
+              <a:buSzPct val="100000"/>
+              <a:buChar char="•"/>
+            </a:pPr>
+            <a:r>
+              <a:rPr lang="en-US" sz="1800" dirty="0">
+                <a:solidFill>
+                  <a:srgbClr val="111111"/>
+                </a:solidFill>
+                <a:latin typeface="Calibri" pitchFamily="34" charset="0"/>
+                <a:ea typeface="Calibri" pitchFamily="34" charset="-122"/>
+                <a:cs typeface="Calibri" pitchFamily="34" charset="-120"/>
+              </a:rPr>
+              <a:t>Photo, board summary (Mangroves and trees): “Pitchavaram waterway - Mangrove forest” by Balaji.B Photography, CC BY 2.0, via Flickr (https://www.flickr.com/photos/81073027@N00/1745978833)</a:t>
             </a:r>
             <a:endParaRPr lang="en-US" sz="1800" dirty="0"/>
           </a:p>
@@ -21803,6 +21891,226 @@
             <a:fld id="{F7021451-1387-4CA6-816F-3879F97B5CBC}" type="slidenum">
               <a:rPr b="1" lang="en-US"/>
               <a:t>54</a:t>
+            </a:fld>
+            <a:endParaRPr lang="en-US"/>
+          </a:p>
+        </p:txBody>
+      </p:sp>
+    </p:spTree>
+  </p:cSld>
+  <p:clrMapOvr>
+    <a:masterClrMapping/>
+  </p:clrMapOvr>
+</p:sld>
+</file>
+
+<file path=ppt/slides/slide55.xml><?xml version="1.0" encoding="utf-8"?>
+<p:sld xmlns:a="http://schemas.openxmlformats.org/drawingml/2006/main" xmlns:r="http://schemas.openxmlformats.org/officeDocument/2006/relationships" xmlns:p="http://schemas.openxmlformats.org/presentationml/2006/main">
+  <p:cSld name="Slide 55">
+    <p:spTree>
+      <p:nvGrpSpPr>
+        <p:cNvPr id="1" name=""/>
+        <p:cNvGrpSpPr/>
+        <p:nvPr/>
+      </p:nvGrpSpPr>
+      <p:grpSpPr>
+        <a:xfrm>
+          <a:off x="0" y="0"/>
+          <a:ext cx="0" cy="0"/>
+          <a:chOff x="0" y="0"/>
+          <a:chExt cx="0" cy="0"/>
+        </a:xfrm>
+      </p:grpSpPr>
+      <p:sp>
+        <p:nvSpPr>
+          <p:cNvPr id="2" name="Text 0"/>
+          <p:cNvSpPr/>
+          <p:nvPr/>
+        </p:nvSpPr>
+        <p:spPr>
+          <a:xfrm>
+            <a:off x="457200" y="713232"/>
+            <a:ext cx="11368735" cy="274320"/>
+          </a:xfrm>
+          <a:prstGeom prst="rect">
+            <a:avLst/>
+          </a:prstGeom>
+          <a:noFill/>
+          <a:ln/>
+        </p:spPr>
+        <p:txBody>
+          <a:bodyPr wrap="square" lIns="0" tIns="0" rIns="0" bIns="0" rtlCol="0" anchor="ctr"/>
+          <a:lstStyle/>
+          <a:p>
+            <a:pPr algn="r" indent="0" marL="0">
+              <a:buNone/>
+            </a:pPr>
+            <a:r>
+              <a:rPr lang="en-US" sz="1400" b="1" dirty="0">
+                <a:solidFill>
+                  <a:srgbClr val="1C3F6E"/>
+                </a:solidFill>
+                <a:latin typeface="Calibri" pitchFamily="34" charset="0"/>
+                <a:ea typeface="Calibri" pitchFamily="34" charset="-122"/>
+                <a:cs typeface="Calibri" pitchFamily="34" charset="-120"/>
+              </a:rPr>
+              <a:t>REFERENCES</a:t>
+            </a:r>
+            <a:endParaRPr lang="en-US" sz="1400" dirty="0"/>
+          </a:p>
+        </p:txBody>
+      </p:sp>
+      <p:pic>
+        <p:nvPicPr>
+          <p:cNvPr id="3" name="Image 0" descr="/home/claude/f4/img/minesec_sheet.png">    </p:cNvPr>
+          <p:cNvPicPr>
+            <a:picLocks noChangeAspect="1"/>
+          </p:cNvPicPr>
+          <p:nvPr/>
+        </p:nvPicPr>
+        <p:blipFill>
+          <a:blip r:embed="rId1"/>
+          <a:stretch>
+            <a:fillRect/>
+          </a:stretch>
+        </p:blipFill>
+        <p:spPr>
+          <a:xfrm>
+            <a:off x="0" y="658368"/>
+            <a:ext cx="5120640" cy="5833872"/>
+          </a:xfrm>
+          <a:prstGeom prst="rect">
+            <a:avLst/>
+          </a:prstGeom>
+        </p:spPr>
+      </p:pic>
+      <p:sp>
+        <p:nvSpPr>
+          <p:cNvPr id="4" name="Text 1"/>
+          <p:cNvSpPr/>
+          <p:nvPr/>
+        </p:nvSpPr>
+        <p:spPr>
+          <a:xfrm>
+            <a:off x="5349240" y="1005840"/>
+            <a:ext cx="6522415" cy="731520"/>
+          </a:xfrm>
+          <a:prstGeom prst="rect">
+            <a:avLst/>
+          </a:prstGeom>
+          <a:noFill/>
+          <a:ln/>
+        </p:spPr>
+        <p:txBody>
+          <a:bodyPr wrap="square" lIns="0" tIns="0" rIns="0" bIns="0" rtlCol="0" anchor="ctr">
+            <a:normAutofit/>
+          </a:bodyPr>
+          <a:lstStyle/>
+          <a:p>
+            <a:pPr algn="ctr" indent="0" marL="0">
+              <a:buNone/>
+            </a:pPr>
+            <a:r>
+              <a:rPr lang="en-US" sz="3600" b="1" dirty="0">
+                <a:solidFill>
+                  <a:srgbClr val="990011"/>
+                </a:solidFill>
+                <a:latin typeface="Times New Roman" pitchFamily="34" charset="0"/>
+                <a:ea typeface="Times New Roman" pitchFamily="34" charset="-122"/>
+                <a:cs typeface="Times New Roman" pitchFamily="34" charset="-120"/>
+              </a:rPr>
+              <a:t>References (continued)</a:t>
+            </a:r>
+            <a:endParaRPr lang="en-US" sz="3600" dirty="0"/>
+          </a:p>
+        </p:txBody>
+      </p:sp>
+      <p:sp>
+        <p:nvSpPr>
+          <p:cNvPr id="5" name="Text 2"/>
+          <p:cNvSpPr/>
+          <p:nvPr/>
+        </p:nvSpPr>
+        <p:spPr>
+          <a:xfrm>
+            <a:off x="5349240" y="1783080"/>
+            <a:ext cx="6522415" cy="4663440"/>
+          </a:xfrm>
+          <a:prstGeom prst="rect">
+            <a:avLst/>
+          </a:prstGeom>
+          <a:noFill/>
+          <a:ln/>
+        </p:spPr>
+        <p:txBody>
+          <a:bodyPr wrap="square" lIns="0" tIns="0" rIns="0" bIns="0" rtlCol="0" anchor="t"/>
+          <a:lstStyle/>
+          <a:p>
+            <a:pPr algn="l" marL="342900" indent="-342900">
+              <a:spcAft>
+                <a:spcPts val="800"/>
+              </a:spcAft>
+              <a:buSzPct val="100000"/>
+              <a:buChar char="•"/>
+            </a:pPr>
+            <a:r>
+              <a:rPr lang="en-US" sz="1800" dirty="0">
+                <a:solidFill>
+                  <a:srgbClr val="111111"/>
+                </a:solidFill>
+                <a:latin typeface="Calibri" pitchFamily="34" charset="0"/>
+                <a:ea typeface="Calibri" pitchFamily="34" charset="-122"/>
+                <a:cs typeface="Calibri" pitchFamily="34" charset="-120"/>
+              </a:rPr>
+              <a:t>Diagrams and animations: drawn for this lesson (Geography Department).</a:t>
+            </a:r>
+            <a:endParaRPr lang="en-US" sz="1800" dirty="0"/>
+          </a:p>
+        </p:txBody>
+      </p:sp>
+      <p:sp>
+        <p:nvSpPr>
+          <p:cNvPr id="25" name="Slide Number Placeholder 0"/>
+          <p:cNvSpPr>
+            <a:spLocks noGrp="1"/>
+          </p:cNvSpPr>
+          <p:nvPr>
+            <p:ph type="sldNum" sz="quarter" idx="4294967295"/>
+          </p:nvPr>
+        </p:nvSpPr>
+        <p:spPr>
+          <a:xfrm>
+            <a:off x="27432" y="91440"/>
+            <a:ext cx="585216" cy="475488"/>
+          </a:xfrm>
+          <a:prstGeom prst="rect">
+            <a:avLst/>
+          </a:prstGeom>
+          <a:extLst>
+            <a:ext uri="{C572A759-6A51-4108-AA02-DFA0A04FC94B}">
+              <ma14:wrappingTextBoxFlag xmlns:ma14="http://schemas.microsoft.com/office/mac/drawingml/2011/main" val="0"/>
+            </a:ext>
+          </a:extLst>
+        </p:spPr>
+        <p:txBody>
+          <a:bodyPr/>
+          <a:lstStyle>
+            <a:lvl1pPr>
+              <a:defRPr sz="2000">
+                <a:solidFill>
+                  <a:srgbClr val="FFFFFF"/>
+                </a:solidFill>
+                <a:latin typeface="Calibri"/>
+                <a:ea typeface="Calibri"/>
+                <a:cs typeface="Calibri"/>
+              </a:defRPr>
+            </a:lvl1pPr>
+          </a:lstStyle>
+          <a:p>
+            <a:pPr algn="ctr"/>
+            <a:fld id="{F7021451-1387-4CA6-816F-3879F97B5CBC}" type="slidenum">
+              <a:rPr b="1" lang="en-US"/>
+              <a:t>55</a:t>
             </a:fld>
             <a:endParaRPr lang="en-US"/>
           </a:p>
@@ -22767,7 +23075,7 @@
         <p:spPr>
           <a:xfrm>
             <a:off x="0" y="658368"/>
-            <a:ext cx="2468880" cy="5833872"/>
+            <a:ext cx="3840480" cy="5833872"/>
           </a:xfrm>
           <a:prstGeom prst="rect">
             <a:avLst/>
@@ -22782,8 +23090,8 @@
         </p:nvSpPr>
         <p:spPr>
           <a:xfrm>
-            <a:off x="2697480" y="1005840"/>
-            <a:ext cx="9174175" cy="731520"/>
+            <a:off x="4069080" y="1005840"/>
+            <a:ext cx="7802575" cy="731520"/>
           </a:xfrm>
           <a:prstGeom prst="rect">
             <a:avLst/>
@@ -22823,8 +23131,8 @@
         </p:nvSpPr>
         <p:spPr>
           <a:xfrm>
-            <a:off x="2697480" y="1783080"/>
-            <a:ext cx="9174175" cy="4663440"/>
+            <a:off x="4069080" y="1783080"/>
+            <a:ext cx="7802575" cy="4663440"/>
           </a:xfrm>
           <a:prstGeom prst="rect">
             <a:avLst/>
@@ -22872,26 +23180,6 @@
                 <a:cs typeface="Times New Roman" pitchFamily="34" charset="-120"/>
               </a:rPr>
               <a:t>His uncle in Douala says that the sea brings trade and fish, but that strong waves also destroy beaches and houses.</a:t>
-            </a:r>
-            <a:endParaRPr lang="en-US" sz="4000" dirty="0"/>
-          </a:p>
-          <a:p>
-            <a:pPr algn="l" indent="0" marL="0">
-              <a:spcAft>
-                <a:spcPts val="800"/>
-              </a:spcAft>
-              <a:buNone/>
-            </a:pPr>
-            <a:r>
-              <a:rPr lang="en-US" sz="4000" dirty="0">
-                <a:solidFill>
-                  <a:srgbClr val="111111"/>
-                </a:solidFill>
-                <a:latin typeface="Times New Roman" pitchFamily="34" charset="0"/>
-                <a:ea typeface="Times New Roman" pitchFamily="34" charset="-122"/>
-                <a:cs typeface="Times New Roman" pitchFamily="34" charset="-120"/>
-              </a:rPr>
-              <a:t>"</a:t>
             </a:r>
             <a:endParaRPr lang="en-US" sz="4000" dirty="0"/>
           </a:p>
